--- a/slides.pptx
+++ b/slides.pptx
@@ -3325,6 +3325,41 @@
           </a:p>
         </p:txBody>
       </p:sp>
+      <p:sp>
+        <p:nvSpPr>
+          <p:cNvPr id="8" name="TextBox 7"/>
+          <p:cNvSpPr txBox="1"/>
+          <p:nvPr/>
+        </p:nvSpPr>
+        <p:spPr>
+          <a:xfrm>
+            <a:off x="457200" y="6309360"/>
+            <a:ext cx="10972800" cy="411480"/>
+          </a:xfrm>
+          <a:prstGeom prst="rect">
+            <a:avLst/>
+          </a:prstGeom>
+          <a:noFill/>
+        </p:spPr>
+        <p:txBody>
+          <a:bodyPr wrap="square">
+            <a:spAutoFit/>
+          </a:bodyPr>
+          <a:lstStyle/>
+          <a:p>
+            <a:pPr algn="ctr"/>
+            <a:r>
+              <a:rPr sz="1000" b="0" i="0">
+                <a:solidFill>
+                  <a:srgbClr val="C8912B"/>
+                </a:solidFill>
+                <a:latin typeface="Calibri"/>
+              </a:rPr>
+              <a:t>DRAFT — nnInteractive results pending 3-run variance confirmation</a:t>
+            </a:r>
+          </a:p>
+        </p:txBody>
+      </p:sp>
     </p:spTree>
   </p:cSld>
   <p:clrMapOvr>
@@ -5292,7 +5327,7 @@
                         <a:rPr sz="1000" b="0">
                           <a:latin typeface="Calibri"/>
                         </a:rPr>
-                        <a:t>FP16 GPU placement</a:t>
+                        <a:t>BUG FIX: FP16 GPU placement</a:t>
                       </a:r>
                     </a:p>
                   </a:txBody>
@@ -5440,7 +5475,7 @@
                           </a:solidFill>
                           <a:latin typeface="Calibri"/>
                         </a:rPr>
-                        <a:t>3.6×</a:t>
+                        <a:t>3.6× window</a:t>
                       </a:r>
                     </a:p>
                   </a:txBody>
@@ -5650,7 +5685,7 @@
                           </a:solidFill>
                           <a:latin typeface="Calibri"/>
                         </a:rPr>
-                        <a:t>1.4×</a:t>
+                        <a:t>1.4× preprocess</a:t>
                       </a:r>
                     </a:p>
                   </a:txBody>
@@ -5755,7 +5790,7 @@
                           </a:solidFill>
                           <a:latin typeface="Calibri"/>
                         </a:rPr>
-                        <a:t>1.34× / object</a:t>
+                        <a:t>1.34× / object *</a:t>
                       </a:r>
                     </a:p>
                   </a:txBody>
@@ -5799,7 +5834,7 @@
         <p:spPr>
           <a:xfrm>
             <a:off x="457200" y="3977639"/>
-            <a:ext cx="3657600" cy="320040"/>
+            <a:ext cx="6400800" cy="292608"/>
           </a:xfrm>
           <a:prstGeom prst="rect">
             <a:avLst/>
@@ -5816,11 +5851,11 @@
             <a:r>
               <a:rPr sz="1000" b="1" i="0">
                 <a:solidFill>
-                  <a:srgbClr val="0F1C2E"/>
+                  <a:srgbClr val="C8912B"/>
                 </a:solidFill>
                 <a:latin typeface="Calibri"/>
               </a:rPr>
-              <a:t>Key results</a:t>
+              <a:t>VoxTell (RTX 4070 SUPER, experiment_log.md)</a:t>
             </a:r>
           </a:p>
         </p:txBody>
@@ -5833,8 +5868,8 @@
         </p:nvSpPr>
         <p:spPr>
           <a:xfrm>
-            <a:off x="457200" y="4343400"/>
-            <a:ext cx="10972800" cy="822960"/>
+            <a:off x="457200" y="4297680"/>
+            <a:ext cx="10972800" cy="502920"/>
           </a:xfrm>
           <a:prstGeom prst="rect">
             <a:avLst/>
@@ -5855,9 +5890,7 @@
                 </a:solidFill>
                 <a:latin typeface="Calibri"/>
               </a:rPr>
-              <a:t>VoxTell: 2.27s → 0.55s overall (4.1×). Accuracy maintained (&lt; 0.001 DSC change).
-nnInteractive: 0.288s → 0.215s per object (1.34×). DSC 0.7914 → 0.7916 (+0.0002).
-Both measured on H100 MIG 3g.40gb · fold='all' checkpoint · Fir cluster (rrg-jma)</a:t>
+              <a:t>Fair GPU-vs-GPU: 3.10s → 2.38s (1.3× algorithmic gain). Bug fix excluded from fair comparison — it was a latent defect, not an optimization. Accuracy maintained (&lt; 0.001 DSC change across all four changes).</a:t>
             </a:r>
           </a:p>
         </p:txBody>
@@ -5870,8 +5903,8 @@
         </p:nvSpPr>
         <p:spPr>
           <a:xfrm>
-            <a:off x="457200" y="5303520"/>
-            <a:ext cx="10972800" cy="365760"/>
+            <a:off x="457200" y="4892040"/>
+            <a:ext cx="7315200" cy="292608"/>
           </a:xfrm>
           <a:prstGeom prst="rect">
             <a:avLst/>
@@ -5886,13 +5919,83 @@
           <a:p>
             <a:pPr algn="l"/>
             <a:r>
-              <a:rPr sz="1000" b="0" i="0">
-                <a:solidFill>
-                  <a:srgbClr val="C8912B"/>
+              <a:rPr sz="1000" b="1" i="0">
+                <a:solidFill>
+                  <a:srgbClr val="1D7A72"/>
                 </a:solidFill>
                 <a:latin typeface="Calibri"/>
               </a:rPr>
-              <a:t>⚠  nnInteractive 1.34× is a single-job result. Three serialized repeat jobs pending for variance confirmation.</a:t>
+              <a:t>nnInteractive (H100 MIG 3g.40gb, Fir cluster, job 56908464)</a:t>
+            </a:r>
+          </a:p>
+        </p:txBody>
+      </p:sp>
+      <p:sp>
+        <p:nvSpPr>
+          <p:cNvPr id="9" name="TextBox 8"/>
+          <p:cNvSpPr txBox="1"/>
+          <p:nvPr/>
+        </p:nvSpPr>
+        <p:spPr>
+          <a:xfrm>
+            <a:off x="457200" y="5212080"/>
+            <a:ext cx="10972800" cy="411480"/>
+          </a:xfrm>
+          <a:prstGeom prst="rect">
+            <a:avLst/>
+          </a:prstGeom>
+          <a:noFill/>
+        </p:spPr>
+        <p:txBody>
+          <a:bodyPr wrap="square">
+            <a:spAutoFit/>
+          </a:bodyPr>
+          <a:lstStyle/>
+          <a:p>
+            <a:pPr algn="l"/>
+            <a:r>
+              <a:rPr sz="1100" b="0" i="0">
+                <a:solidFill>
+                  <a:srgbClr val="0F1C2E"/>
+                </a:solidFill>
+                <a:latin typeface="Calibri"/>
+              </a:rPr>
+              <a:t>0.288s → 0.215s per object. DSC 0.7914 → 0.7916 (+0.0002). Speed and accuracy from the same job, same config.</a:t>
+            </a:r>
+          </a:p>
+        </p:txBody>
+      </p:sp>
+      <p:sp>
+        <p:nvSpPr>
+          <p:cNvPr id="10" name="TextBox 9"/>
+          <p:cNvSpPr txBox="1"/>
+          <p:nvPr/>
+        </p:nvSpPr>
+        <p:spPr>
+          <a:xfrm>
+            <a:off x="457200" y="5715000"/>
+            <a:ext cx="10972800" cy="365760"/>
+          </a:xfrm>
+          <a:prstGeom prst="rect">
+            <a:avLst/>
+          </a:prstGeom>
+          <a:noFill/>
+        </p:spPr>
+        <p:txBody>
+          <a:bodyPr wrap="square">
+            <a:spAutoFit/>
+          </a:bodyPr>
+          <a:lstStyle/>
+          <a:p>
+            <a:pPr algn="l"/>
+            <a:r>
+              <a:rPr sz="1000" b="0" i="0">
+                <a:solidFill>
+                  <a:srgbClr val="C8912B"/>
+                </a:solidFill>
+                <a:latin typeface="Calibri"/>
+              </a:rPr>
+              <a:t>* nnInteractive 1.34× is n=1. Three serialized repeat jobs (nni_rep, singleton) pending — update before presentation.</a:t>
             </a:r>
           </a:p>
         </p:txBody>
@@ -6681,7 +6784,7 @@
                 </a:solidFill>
                 <a:latin typeface="Calibri"/>
               </a:rPr>
-              <a:t>VoxTell — Baseline Profiling (H100 MIG 3g.40gb)</a:t>
+              <a:t>VoxTell — Baseline &amp; The Bug</a:t>
             </a:r>
           </a:p>
         </p:txBody>
@@ -6730,7 +6833,7 @@
         <p:spPr>
           <a:xfrm>
             <a:off x="457200" y="822960"/>
-            <a:ext cx="10972800" cy="365760"/>
+            <a:ext cx="10972800" cy="320040"/>
           </a:xfrm>
           <a:prstGeom prst="rect">
             <a:avLst/>
@@ -6745,13 +6848,13 @@
           <a:p>
             <a:pPr algn="l"/>
             <a:r>
-              <a:rPr sz="1200" b="0" i="0">
+              <a:rPr sz="1000" b="0" i="0">
                 <a:solidFill>
                   <a:srgbClr val="5A6478"/>
                 </a:solidFill>
                 <a:latin typeface="Calibri"/>
               </a:rPr>
-              <a:t>v0_gpu configuration: Qwen3 4B text encoder + nnUNet 3D segmentation head</a:t>
+              <a:t>Hardware: NVIDIA GeForce RTX 4070 SUPER (12 GB GDDR6X)  ·  v0_gpu: Qwen3-4B + nnUNet 3D</a:t>
             </a:r>
           </a:p>
         </p:txBody>
@@ -6765,8 +6868,8 @@
           <p:nvPr/>
         </p:nvGraphicFramePr>
         <p:xfrm>
-          <a:off x="457200" y="1280160"/>
-          <a:ext cx="6858000" cy="2011680"/>
+          <a:off x="457200" y="1188720"/>
+          <a:ext cx="7772400" cy="1828800"/>
         </p:xfrm>
         <a:graphic>
           <a:graphicData uri="http://schemas.openxmlformats.org/drawingml/2006/table">
@@ -6775,19 +6878,19 @@
                 <a:tableStyleId>{5C22544A-7EE6-4342-B048-85BDC9FD1C3A}</a:tableStyleId>
               </a:tblPr>
               <a:tblGrid>
-                <a:gridCol w="2286000"/>
-                <a:gridCol w="2286000"/>
-                <a:gridCol w="2286000"/>
+                <a:gridCol w="2590800"/>
+                <a:gridCol w="2590800"/>
+                <a:gridCol w="2590800"/>
               </a:tblGrid>
-              <a:tr h="502920">
-                <a:tc>
-                  <a:txBody>
-                    <a:bodyPr wrap="square"/>
-                    <a:lstStyle/>
-                    <a:p>
-                      <a:pPr algn="l"/>
-                      <a:r>
-                        <a:rPr sz="1200" b="1">
+              <a:tr h="457200">
+                <a:tc>
+                  <a:txBody>
+                    <a:bodyPr wrap="square"/>
+                    <a:lstStyle/>
+                    <a:p>
+                      <a:pPr algn="l"/>
+                      <a:r>
+                        <a:rPr sz="1100" b="1">
                           <a:solidFill>
                             <a:srgbClr val="FFFFFF"/>
                           </a:solidFill>
@@ -6810,13 +6913,13 @@
                     <a:p>
                       <a:pPr algn="l"/>
                       <a:r>
-                        <a:rPr sz="1200" b="1">
+                        <a:rPr sz="1100" b="1">
                           <a:solidFill>
                             <a:srgbClr val="FFFFFF"/>
                           </a:solidFill>
                           <a:latin typeface="Calibri"/>
                         </a:rPr>
-                        <a:t>Latency</a:t>
+                        <a:t>Latency (v0_gpu, RTX 4070 SUPER)</a:t>
                       </a:r>
                     </a:p>
                   </a:txBody>
@@ -6833,7 +6936,7 @@
                     <a:p>
                       <a:pPr algn="l"/>
                       <a:r>
-                        <a:rPr sz="1200" b="1">
+                        <a:rPr sz="1100" b="1">
                           <a:solidFill>
                             <a:srgbClr val="FFFFFF"/>
                           </a:solidFill>
@@ -6850,18 +6953,21 @@
                   </a:tcPr>
                 </a:tc>
               </a:tr>
-              <a:tr h="502920">
-                <a:tc>
-                  <a:txBody>
-                    <a:bodyPr wrap="square"/>
-                    <a:lstStyle/>
-                    <a:p>
-                      <a:pPr algn="l"/>
-                      <a:r>
-                        <a:rPr sz="1100" b="0">
-                          <a:latin typeface="Calibri"/>
-                        </a:rPr>
-                        <a:t>Text encoding (Qwen3 CPU)</a:t>
+              <a:tr h="457200">
+                <a:tc>
+                  <a:txBody>
+                    <a:bodyPr wrap="square"/>
+                    <a:lstStyle/>
+                    <a:p>
+                      <a:pPr algn="l"/>
+                      <a:r>
+                        <a:rPr sz="1000" b="0">
+                          <a:solidFill>
+                            <a:srgbClr val="C8912B"/>
+                          </a:solidFill>
+                          <a:latin typeface="Calibri"/>
+                        </a:rPr>
+                        <a:t>Text encoding — BUG: Qwen3-4B silently on CPU</a:t>
                       </a:r>
                     </a:p>
                   </a:txBody>
@@ -6878,10 +6984,10 @@
                     <a:p>
                       <a:pPr algn="ctr"/>
                       <a:r>
-                        <a:rPr sz="1100" b="0">
-                          <a:latin typeface="Calibri"/>
-                        </a:rPr>
-                        <a:t>~2.1s</a:t>
+                        <a:rPr sz="1000" b="0">
+                          <a:latin typeface="Calibri"/>
+                        </a:rPr>
+                        <a:t>~2.7s</a:t>
                       </a:r>
                     </a:p>
                   </a:txBody>
@@ -6898,13 +7004,13 @@
                     <a:p>
                       <a:pPr algn="l"/>
                       <a:r>
-                        <a:rPr sz="1100" b="0">
+                        <a:rPr sz="1000" b="0">
                           <a:solidFill>
                             <a:srgbClr val="5A6478"/>
                           </a:solidFill>
                           <a:latin typeface="Calibri"/>
                         </a:rPr>
-                        <a:t>Dominates — runs on CPU by default</a:t>
+                        <a:t>FP32 overflows 12 GB VRAM → CPU fallback</a:t>
                       </a:r>
                     </a:p>
                   </a:txBody>
@@ -6915,18 +7021,18 @@
                   </a:tcPr>
                 </a:tc>
               </a:tr>
-              <a:tr h="502920">
-                <a:tc>
-                  <a:txBody>
-                    <a:bodyPr wrap="square"/>
-                    <a:lstStyle/>
-                    <a:p>
-                      <a:pPr algn="l"/>
-                      <a:r>
-                        <a:rPr sz="1100" b="0">
-                          <a:latin typeface="Calibri"/>
-                        </a:rPr>
-                        <a:t>Image preprocessing</a:t>
+              <a:tr h="457200">
+                <a:tc>
+                  <a:txBody>
+                    <a:bodyPr wrap="square"/>
+                    <a:lstStyle/>
+                    <a:p>
+                      <a:pPr algn="l"/>
+                      <a:r>
+                        <a:rPr sz="1000" b="0">
+                          <a:latin typeface="Calibri"/>
+                        </a:rPr>
+                        <a:t>Image preprocessing (numpy)</a:t>
                       </a:r>
                     </a:p>
                   </a:txBody>
@@ -6943,10 +7049,10 @@
                     <a:p>
                       <a:pPr algn="ctr"/>
                       <a:r>
-                        <a:rPr sz="1100" b="0">
-                          <a:latin typeface="Calibri"/>
-                        </a:rPr>
-                        <a:t>0.23s</a:t>
+                        <a:rPr sz="1000" b="0">
+                          <a:latin typeface="Calibri"/>
+                        </a:rPr>
+                        <a:t>~0.23s</a:t>
                       </a:r>
                     </a:p>
                   </a:txBody>
@@ -6963,13 +7069,13 @@
                     <a:p>
                       <a:pPr algn="l"/>
                       <a:r>
-                        <a:rPr sz="1100" b="0">
+                        <a:rPr sz="1000" b="0">
                           <a:solidFill>
                             <a:srgbClr val="5A6478"/>
                           </a:solidFill>
                           <a:latin typeface="Calibri"/>
                         </a:rPr>
-                        <a:t>Crop, normalize, patch</a:t>
+                        <a:t>Crop, z-score normalize, patch</a:t>
                       </a:r>
                     </a:p>
                   </a:txBody>
@@ -6980,18 +7086,18 @@
                   </a:tcPr>
                 </a:tc>
               </a:tr>
-              <a:tr h="502920">
-                <a:tc>
-                  <a:txBody>
-                    <a:bodyPr wrap="square"/>
-                    <a:lstStyle/>
-                    <a:p>
-                      <a:pPr algn="l"/>
-                      <a:r>
-                        <a:rPr sz="1100" b="0">
-                          <a:latin typeface="Calibri"/>
-                        </a:rPr>
-                        <a:t>nnUNet inference (GPU, warm)</a:t>
+              <a:tr h="457200">
+                <a:tc>
+                  <a:txBody>
+                    <a:bodyPr wrap="square"/>
+                    <a:lstStyle/>
+                    <a:p>
+                      <a:pPr algn="l"/>
+                      <a:r>
+                        <a:rPr sz="1000" b="0">
+                          <a:latin typeface="Calibri"/>
+                        </a:rPr>
+                        <a:t>Sliding window inference (GPU, warm)</a:t>
                       </a:r>
                     </a:p>
                   </a:txBody>
@@ -7008,10 +7114,10 @@
                     <a:p>
                       <a:pPr algn="ctr"/>
                       <a:r>
-                        <a:rPr sz="1100" b="0">
-                          <a:latin typeface="Calibri"/>
-                        </a:rPr>
-                        <a:t>0.04s</a:t>
+                        <a:rPr sz="1000" b="0">
+                          <a:latin typeface="Calibri"/>
+                        </a:rPr>
+                        <a:t>~0.17s</a:t>
                       </a:r>
                     </a:p>
                   </a:txBody>
@@ -7028,13 +7134,13 @@
                     <a:p>
                       <a:pPr algn="l"/>
                       <a:r>
-                        <a:rPr sz="1100" b="0">
+                        <a:rPr sz="1000" b="0">
                           <a:solidFill>
                             <a:srgbClr val="5A6478"/>
                           </a:solidFill>
                           <a:latin typeface="Calibri"/>
                         </a:rPr>
-                        <a:t>Fast once on GPU</a:t>
+                        <a:t>tile_step=0.5, ~343 patches, FP16</a:t>
                       </a:r>
                     </a:p>
                   </a:txBody>
@@ -7057,8 +7163,8 @@
         </p:nvSpPr>
         <p:spPr>
           <a:xfrm>
-            <a:off x="457200" y="3429000"/>
-            <a:ext cx="8229600" cy="365760"/>
+            <a:off x="457200" y="3154680"/>
+            <a:ext cx="9144000" cy="365760"/>
           </a:xfrm>
           <a:prstGeom prst="rect">
             <a:avLst/>
@@ -7079,7 +7185,7 @@
                 </a:solidFill>
                 <a:latin typeface="Calibri"/>
               </a:rPr>
-              <a:t>Total per prompt: 2.27s  —  bottleneck is the text encoder on CPU</a:t>
+              <a:t>Total: ~3.10s per prompt  —  dominated by text encoder running on CPU (silent bug)</a:t>
             </a:r>
           </a:p>
         </p:txBody>
@@ -7092,8 +7198,8 @@
         </p:nvSpPr>
         <p:spPr>
           <a:xfrm>
-            <a:off x="457200" y="3931920"/>
-            <a:ext cx="4572000" cy="320040"/>
+            <a:off x="457200" y="3611880"/>
+            <a:ext cx="4572000" cy="292608"/>
           </a:xfrm>
           <a:prstGeom prst="rect">
             <a:avLst/>
@@ -7110,11 +7216,11 @@
             <a:r>
               <a:rPr sz="1000" b="1" i="0">
                 <a:solidFill>
-                  <a:srgbClr val="1D7A72"/>
+                  <a:srgbClr val="C8912B"/>
                 </a:solidFill>
                 <a:latin typeface="Calibri"/>
               </a:rPr>
-              <a:t>Optimization Opportunity</a:t>
+              <a:t>Root cause</a:t>
             </a:r>
           </a:p>
         </p:txBody>
@@ -7127,8 +7233,8 @@
         </p:nvSpPr>
         <p:spPr>
           <a:xfrm>
-            <a:off x="457200" y="4297680"/>
-            <a:ext cx="5029200" cy="1371600"/>
+            <a:off x="457200" y="3931920"/>
+            <a:ext cx="5943600" cy="914400"/>
           </a:xfrm>
           <a:prstGeom prst="rect">
             <a:avLst/>
@@ -7143,16 +7249,13 @@
           <a:p>
             <a:pPr algn="l"/>
             <a:r>
-              <a:rPr sz="1200" b="0" i="0">
+              <a:rPr sz="1100" b="0" i="0">
                 <a:solidFill>
                   <a:srgbClr val="0F1C2E"/>
                 </a:solidFill>
                 <a:latin typeface="Calibri"/>
               </a:rPr>
-              <a:t>①  Move text encoder to GPU with FP16
-②  Cache embeddings for repeated prompts
-③  Reduce sliding window patch count
-④  Numba-accelerate preprocessing</a:t>
+              <a:t>Qwen3-4B in FP32 requires ~16 GB VRAM. RTX 4070 SUPER has 12 GB. PyTorch silently falls back to CPU when VRAM is insufficient. Fix: load with dtype=torch.float16 → 8 GB VRAM, stays on GPU.</a:t>
             </a:r>
           </a:p>
         </p:txBody>
@@ -7165,8 +7268,8 @@
         </p:nvSpPr>
         <p:spPr>
           <a:xfrm>
-            <a:off x="7589520" y="3840480"/>
-            <a:ext cx="2286000" cy="731520"/>
+            <a:off x="457200" y="4937760"/>
+            <a:ext cx="1828800" cy="292608"/>
           </a:xfrm>
           <a:prstGeom prst="rect">
             <a:avLst/>
@@ -7179,15 +7282,15 @@
           </a:bodyPr>
           <a:lstStyle/>
           <a:p>
-            <a:pPr algn="ctr"/>
-            <a:r>
-              <a:rPr sz="4400" b="1" i="0">
-                <a:solidFill>
-                  <a:srgbClr val="C8912B"/>
+            <a:pPr algn="l"/>
+            <a:r>
+              <a:rPr sz="1000" b="1" i="0">
+                <a:solidFill>
+                  <a:srgbClr val="1D7A72"/>
                 </a:solidFill>
                 <a:latin typeface="Calibri"/>
               </a:rPr>
-              <a:t>2.27s</a:t>
+              <a:t>After fix</a:t>
             </a:r>
           </a:p>
         </p:txBody>
@@ -7200,8 +7303,8 @@
         </p:nvSpPr>
         <p:spPr>
           <a:xfrm>
-            <a:off x="7315200" y="4572000"/>
-            <a:ext cx="2743200" cy="365760"/>
+            <a:off x="457200" y="5257800"/>
+            <a:ext cx="9144000" cy="320040"/>
           </a:xfrm>
           <a:prstGeom prst="rect">
             <a:avLst/>
@@ -7214,15 +7317,85 @@
           </a:bodyPr>
           <a:lstStyle/>
           <a:p>
-            <a:pPr algn="ctr"/>
+            <a:pPr algn="l"/>
             <a:r>
               <a:rPr sz="1100" b="0" i="0">
                 <a:solidFill>
-                  <a:srgbClr val="5A6478"/>
+                  <a:srgbClr val="0F1C2E"/>
                 </a:solidFill>
                 <a:latin typeface="Calibri"/>
               </a:rPr>
-              <a:t>baseline per prompt</a:t>
+              <a:t>Text: 2.7s → 0.02s warm cache  |  Total (no cache): 3.10s → 2.38s on same hardware</a:t>
+            </a:r>
+          </a:p>
+        </p:txBody>
+      </p:sp>
+      <p:sp>
+        <p:nvSpPr>
+          <p:cNvPr id="12" name="TextBox 11"/>
+          <p:cNvSpPr txBox="1"/>
+          <p:nvPr/>
+        </p:nvSpPr>
+        <p:spPr>
+          <a:xfrm>
+            <a:off x="8961120" y="3566160"/>
+            <a:ext cx="2743200" cy="777240"/>
+          </a:xfrm>
+          <a:prstGeom prst="rect">
+            <a:avLst/>
+          </a:prstGeom>
+          <a:noFill/>
+        </p:spPr>
+        <p:txBody>
+          <a:bodyPr wrap="square">
+            <a:spAutoFit/>
+          </a:bodyPr>
+          <a:lstStyle/>
+          <a:p>
+            <a:pPr algn="ctr"/>
+            <a:r>
+              <a:rPr sz="4000" b="1" i="0">
+                <a:solidFill>
+                  <a:srgbClr val="C8912B"/>
+                </a:solidFill>
+                <a:latin typeface="Calibri"/>
+              </a:rPr>
+              <a:t>3.10s</a:t>
+            </a:r>
+          </a:p>
+        </p:txBody>
+      </p:sp>
+      <p:sp>
+        <p:nvSpPr>
+          <p:cNvPr id="13" name="TextBox 12"/>
+          <p:cNvSpPr txBox="1"/>
+          <p:nvPr/>
+        </p:nvSpPr>
+        <p:spPr>
+          <a:xfrm>
+            <a:off x="8686800" y="4343400"/>
+            <a:ext cx="3200400" cy="320040"/>
+          </a:xfrm>
+          <a:prstGeom prst="rect">
+            <a:avLst/>
+          </a:prstGeom>
+          <a:noFill/>
+        </p:spPr>
+        <p:txBody>
+          <a:bodyPr wrap="square">
+            <a:spAutoFit/>
+          </a:bodyPr>
+          <a:lstStyle/>
+          <a:p>
+            <a:pPr algn="ctr"/>
+            <a:r>
+              <a:rPr sz="1000" b="0" i="0">
+                <a:solidFill>
+                  <a:srgbClr val="5A6478"/>
+                </a:solidFill>
+                <a:latin typeface="Calibri"/>
+              </a:rPr>
+              <a:t>RTX 4070 SUPER baseline</a:t>
             </a:r>
           </a:p>
         </p:txBody>
@@ -7326,7 +7499,7 @@
                 </a:solidFill>
                 <a:latin typeface="Calibri"/>
               </a:rPr>
-              <a:t>VoxTell — Four Optimizations</a:t>
+              <a:t>VoxTell — Bug Fix + Three Algorithmic Optimizations</a:t>
             </a:r>
           </a:p>
         </p:txBody>
@@ -7366,17 +7539,52 @@
           </a:p>
         </p:txBody>
       </p:sp>
+      <p:sp>
+        <p:nvSpPr>
+          <p:cNvPr id="5" name="TextBox 4"/>
+          <p:cNvSpPr txBox="1"/>
+          <p:nvPr/>
+        </p:nvSpPr>
+        <p:spPr>
+          <a:xfrm>
+            <a:off x="457200" y="749808"/>
+            <a:ext cx="10972800" cy="292608"/>
+          </a:xfrm>
+          <a:prstGeom prst="rect">
+            <a:avLst/>
+          </a:prstGeom>
+          <a:noFill/>
+        </p:spPr>
+        <p:txBody>
+          <a:bodyPr wrap="square">
+            <a:spAutoFit/>
+          </a:bodyPr>
+          <a:lstStyle/>
+          <a:p>
+            <a:pPr algn="l"/>
+            <a:r>
+              <a:rPr sz="1000" b="0" i="0">
+                <a:solidFill>
+                  <a:srgbClr val="5A6478"/>
+                </a:solidFill>
+                <a:latin typeface="Calibri"/>
+              </a:rPr>
+              <a:t>All measurements on NVIDIA GeForce RTX 4070 SUPER (12 GB)  ·  DSC from experiment_log.md</a:t>
+            </a:r>
+          </a:p>
+        </p:txBody>
+      </p:sp>
       <p:graphicFrame>
         <p:nvGraphicFramePr>
-          <p:cNvPr id="5" name="Table 4"/>
+          <p:cNvPr id="6" name="Table 5"/>
           <p:cNvGraphicFramePr>
             <a:graphicFrameLocks noGrp="1"/>
           </p:cNvGraphicFramePr>
           <p:nvPr/>
         </p:nvGraphicFramePr>
         <p:xfrm>
-          <a:off x="457200" y="777240"/>
-          <a:ext cx="11247120" cy="2926080"/>
+          <a:off x="457200" y="1097280"/>
+          <a:ext cx="11247120" cy="2743200"/>
         </p:xfrm>
         <a:graphic>
           <a:graphicData uri="http://schemas.openxmlformats.org/drawingml/2006/table">
@@ -7390,21 +7598,21 @@
                 <a:gridCol w="2811780"/>
                 <a:gridCol w="2811780"/>
               </a:tblGrid>
-              <a:tr h="585216">
-                <a:tc>
-                  <a:txBody>
-                    <a:bodyPr wrap="square"/>
-                    <a:lstStyle/>
-                    <a:p>
-                      <a:pPr algn="l"/>
-                      <a:r>
-                        <a:rPr sz="1200" b="1">
+              <a:tr h="548640">
+                <a:tc>
+                  <a:txBody>
+                    <a:bodyPr wrap="square"/>
+                    <a:lstStyle/>
+                    <a:p>
+                      <a:pPr algn="l"/>
+                      <a:r>
+                        <a:rPr sz="1100" b="1">
                           <a:solidFill>
                             <a:srgbClr val="FFFFFF"/>
                           </a:solidFill>
                           <a:latin typeface="Calibri"/>
                         </a:rPr>
-                        <a:t>Optimization</a:t>
+                        <a:t>Change</a:t>
                       </a:r>
                     </a:p>
                   </a:txBody>
@@ -7421,7 +7629,7 @@
                     <a:p>
                       <a:pPr algn="l"/>
                       <a:r>
-                        <a:rPr sz="1200" b="1">
+                        <a:rPr sz="1100" b="1">
                           <a:solidFill>
                             <a:srgbClr val="FFFFFF"/>
                           </a:solidFill>
@@ -7444,7 +7652,7 @@
                     <a:p>
                       <a:pPr algn="l"/>
                       <a:r>
-                        <a:rPr sz="1200" b="1">
+                        <a:rPr sz="1100" b="1">
                           <a:solidFill>
                             <a:srgbClr val="FFFFFF"/>
                           </a:solidFill>
@@ -7467,7 +7675,7 @@
                     <a:p>
                       <a:pPr algn="l"/>
                       <a:r>
-                        <a:rPr sz="1200" b="1">
+                        <a:rPr sz="1100" b="1">
                           <a:solidFill>
                             <a:srgbClr val="FFFFFF"/>
                           </a:solidFill>
@@ -7484,18 +7692,106 @@
                   </a:tcPr>
                 </a:tc>
               </a:tr>
-              <a:tr h="585216">
-                <a:tc>
-                  <a:txBody>
-                    <a:bodyPr wrap="square"/>
-                    <a:lstStyle/>
-                    <a:p>
-                      <a:pPr algn="l"/>
-                      <a:r>
-                        <a:rPr sz="1100" b="0">
-                          <a:latin typeface="Calibri"/>
-                        </a:rPr>
-                        <a:t>FP16 GPU placement</a:t>
+              <a:tr h="548640">
+                <a:tc>
+                  <a:txBody>
+                    <a:bodyPr wrap="square"/>
+                    <a:lstStyle/>
+                    <a:p>
+                      <a:pPr algn="l"/>
+                      <a:r>
+                        <a:rPr sz="1000" b="0">
+                          <a:latin typeface="Calibri"/>
+                        </a:rPr>
+                        <a:t>BUG FIX: FP16 GPU placement</a:t>
+                      </a:r>
+                    </a:p>
+                  </a:txBody>
+                  <a:tcPr>
+                    <a:solidFill>
+                      <a:srgbClr val="FFF3E0"/>
+                    </a:solidFill>
+                  </a:tcPr>
+                </a:tc>
+                <a:tc>
+                  <a:txBody>
+                    <a:bodyPr wrap="square"/>
+                    <a:lstStyle/>
+                    <a:p>
+                      <a:pPr algn="l"/>
+                      <a:r>
+                        <a:rPr sz="1000" b="0">
+                          <a:latin typeface="Calibri"/>
+                        </a:rPr>
+                        <a:t>dtype=torch.float16 on Qwen3 → keeps encoder on GPU</a:t>
+                      </a:r>
+                    </a:p>
+                  </a:txBody>
+                  <a:tcPr>
+                    <a:solidFill>
+                      <a:srgbClr val="FFF3E0"/>
+                    </a:solidFill>
+                  </a:tcPr>
+                </a:tc>
+                <a:tc>
+                  <a:txBody>
+                    <a:bodyPr wrap="square"/>
+                    <a:lstStyle/>
+                    <a:p>
+                      <a:pPr algn="l"/>
+                      <a:r>
+                        <a:rPr sz="1000" b="1">
+                          <a:solidFill>
+                            <a:srgbClr val="C8912B"/>
+                          </a:solidFill>
+                          <a:latin typeface="Calibri"/>
+                        </a:rPr>
+                        <a:t>46.7× text encoding</a:t>
+                      </a:r>
+                    </a:p>
+                  </a:txBody>
+                  <a:tcPr>
+                    <a:solidFill>
+                      <a:srgbClr val="FFF3E0"/>
+                    </a:solidFill>
+                  </a:tcPr>
+                </a:tc>
+                <a:tc>
+                  <a:txBody>
+                    <a:bodyPr wrap="square"/>
+                    <a:lstStyle/>
+                    <a:p>
+                      <a:pPr algn="l"/>
+                      <a:r>
+                        <a:rPr sz="1000" b="0">
+                          <a:solidFill>
+                            <a:srgbClr val="1A6A30"/>
+                          </a:solidFill>
+                          <a:latin typeface="Calibri"/>
+                        </a:rPr>
+                        <a:t>&lt; 0.001</a:t>
+                      </a:r>
+                    </a:p>
+                  </a:txBody>
+                  <a:tcPr>
+                    <a:solidFill>
+                      <a:srgbClr val="FFF3E0"/>
+                    </a:solidFill>
+                  </a:tcPr>
+                </a:tc>
+              </a:tr>
+              <a:tr h="548640">
+                <a:tc>
+                  <a:txBody>
+                    <a:bodyPr wrap="square"/>
+                    <a:lstStyle/>
+                    <a:p>
+                      <a:pPr algn="l"/>
+                      <a:r>
+                        <a:rPr sz="1000" b="0">
+                          <a:latin typeface="Calibri"/>
+                        </a:rPr>
+                        <a:t>Sliding window overlap</a:t>
                       </a:r>
                     </a:p>
                   </a:txBody>
@@ -7512,10 +7808,10 @@
                     <a:p>
                       <a:pPr algn="l"/>
                       <a:r>
-                        <a:rPr sz="1100" b="0">
-                          <a:latin typeface="Calibri"/>
-                        </a:rPr>
-                        <a:t>dtype=torch.float16 on Qwen3 → GPU</a:t>
+                        <a:rPr sz="1000" b="0">
+                          <a:latin typeface="Calibri"/>
+                        </a:rPr>
+                        <a:t>tile_step 0.5 → 0.75  (343 → 125 patches)</a:t>
                       </a:r>
                     </a:p>
                   </a:txBody>
@@ -7532,13 +7828,13 @@
                     <a:p>
                       <a:pPr algn="l"/>
                       <a:r>
-                        <a:rPr sz="1100" b="1">
+                        <a:rPr sz="1000" b="1">
                           <a:solidFill>
                             <a:srgbClr val="1D7A72"/>
                           </a:solidFill>
                           <a:latin typeface="Calibri"/>
                         </a:rPr>
-                        <a:t>46.7× text encoding</a:t>
+                        <a:t>3.6× sliding window</a:t>
                       </a:r>
                     </a:p>
                   </a:txBody>
@@ -7555,13 +7851,13 @@
                     <a:p>
                       <a:pPr algn="l"/>
                       <a:r>
-                        <a:rPr sz="1100" b="0">
+                        <a:rPr sz="1000" b="0">
                           <a:solidFill>
                             <a:srgbClr val="1A6A30"/>
                           </a:solidFill>
                           <a:latin typeface="Calibri"/>
                         </a:rPr>
-                        <a:t>&lt; 0.001</a:t>
+                        <a:t>+0.0006</a:t>
                       </a:r>
                     </a:p>
                   </a:txBody>
@@ -7572,18 +7868,18 @@
                   </a:tcPr>
                 </a:tc>
               </a:tr>
-              <a:tr h="585216">
-                <a:tc>
-                  <a:txBody>
-                    <a:bodyPr wrap="square"/>
-                    <a:lstStyle/>
-                    <a:p>
-                      <a:pPr algn="l"/>
-                      <a:r>
-                        <a:rPr sz="1100" b="0">
-                          <a:latin typeface="Calibri"/>
-                        </a:rPr>
-                        <a:t>Sliding window overlap</a:t>
+              <a:tr h="548640">
+                <a:tc>
+                  <a:txBody>
+                    <a:bodyPr wrap="square"/>
+                    <a:lstStyle/>
+                    <a:p>
+                      <a:pPr algn="l"/>
+                      <a:r>
+                        <a:rPr sz="1000" b="0">
+                          <a:latin typeface="Calibri"/>
+                        </a:rPr>
+                        <a:t>Embedding cache</a:t>
                       </a:r>
                     </a:p>
                   </a:txBody>
@@ -7600,10 +7896,10 @@
                     <a:p>
                       <a:pPr algn="l"/>
                       <a:r>
-                        <a:rPr sz="1100" b="0">
-                          <a:latin typeface="Calibri"/>
-                        </a:rPr>
-                        <a:t>tile_step 0.5 → 0.75  (343 → 125 patches)</a:t>
+                        <a:rPr sz="1000" b="0">
+                          <a:latin typeface="Calibri"/>
+                        </a:rPr>
+                        <a:t>LRU memory + SHA-256 disk cache</a:t>
                       </a:r>
                     </a:p>
                   </a:txBody>
@@ -7620,13 +7916,13 @@
                     <a:p>
                       <a:pPr algn="l"/>
                       <a:r>
-                        <a:rPr sz="1100" b="1">
+                        <a:rPr sz="1000" b="1">
                           <a:solidFill>
                             <a:srgbClr val="1D7A72"/>
                           </a:solidFill>
                           <a:latin typeface="Calibri"/>
                         </a:rPr>
-                        <a:t>3.6×</a:t>
+                        <a:t>18.7× warm re-query</a:t>
                       </a:r>
                     </a:p>
                   </a:txBody>
@@ -7643,13 +7939,13 @@
                     <a:p>
                       <a:pPr algn="l"/>
                       <a:r>
-                        <a:rPr sz="1100" b="0">
+                        <a:rPr sz="1000" b="0">
                           <a:solidFill>
                             <a:srgbClr val="1A6A30"/>
                           </a:solidFill>
                           <a:latin typeface="Calibri"/>
                         </a:rPr>
-                        <a:t>+0.0006</a:t>
+                        <a:t>Identical</a:t>
                       </a:r>
                     </a:p>
                   </a:txBody>
@@ -7660,18 +7956,18 @@
                   </a:tcPr>
                 </a:tc>
               </a:tr>
-              <a:tr h="585216">
-                <a:tc>
-                  <a:txBody>
-                    <a:bodyPr wrap="square"/>
-                    <a:lstStyle/>
-                    <a:p>
-                      <a:pPr algn="l"/>
-                      <a:r>
-                        <a:rPr sz="1100" b="0">
-                          <a:latin typeface="Calibri"/>
-                        </a:rPr>
-                        <a:t>Embedding cache</a:t>
+              <a:tr h="548640">
+                <a:tc>
+                  <a:txBody>
+                    <a:bodyPr wrap="square"/>
+                    <a:lstStyle/>
+                    <a:p>
+                      <a:pPr algn="l"/>
+                      <a:r>
+                        <a:rPr sz="1000" b="0">
+                          <a:latin typeface="Calibri"/>
+                        </a:rPr>
+                        <a:t>Numba preprocessing</a:t>
                       </a:r>
                     </a:p>
                   </a:txBody>
@@ -7688,10 +7984,10 @@
                     <a:p>
                       <a:pPr algn="l"/>
                       <a:r>
-                        <a:rPr sz="1100" b="0">
-                          <a:latin typeface="Calibri"/>
-                        </a:rPr>
-                        <a:t>LRU memory + SHA-256 disk cache</a:t>
+                        <a:rPr sz="1000" b="0">
+                          <a:latin typeface="Calibri"/>
+                        </a:rPr>
+                        <a:t>@njit(parallel=True) crop + z-score normalize</a:t>
                       </a:r>
                     </a:p>
                   </a:txBody>
@@ -7708,13 +8004,13 @@
                     <a:p>
                       <a:pPr algn="l"/>
                       <a:r>
-                        <a:rPr sz="1100" b="1">
+                        <a:rPr sz="1000" b="1">
                           <a:solidFill>
                             <a:srgbClr val="1D7A72"/>
                           </a:solidFill>
                           <a:latin typeface="Calibri"/>
                         </a:rPr>
-                        <a:t>18.7× warm</a:t>
+                        <a:t>1.4× preprocessing</a:t>
                       </a:r>
                     </a:p>
                   </a:txBody>
@@ -7731,107 +8027,19 @@
                     <a:p>
                       <a:pPr algn="l"/>
                       <a:r>
-                        <a:rPr sz="1100" b="0">
+                        <a:rPr sz="1000" b="0">
                           <a:solidFill>
                             <a:srgbClr val="1A6A30"/>
                           </a:solidFill>
                           <a:latin typeface="Calibri"/>
                         </a:rPr>
-                        <a:t>Identical</a:t>
+                        <a:t>Unchanged</a:t>
                       </a:r>
                     </a:p>
                   </a:txBody>
                   <a:tcPr>
                     <a:solidFill>
                       <a:srgbClr val="F5F2EB"/>
-                    </a:solidFill>
-                  </a:tcPr>
-                </a:tc>
-              </a:tr>
-              <a:tr h="585216">
-                <a:tc>
-                  <a:txBody>
-                    <a:bodyPr wrap="square"/>
-                    <a:lstStyle/>
-                    <a:p>
-                      <a:pPr algn="l"/>
-                      <a:r>
-                        <a:rPr sz="1100" b="0">
-                          <a:latin typeface="Calibri"/>
-                        </a:rPr>
-                        <a:t>Numba preprocessing</a:t>
-                      </a:r>
-                    </a:p>
-                  </a:txBody>
-                  <a:tcPr>
-                    <a:solidFill>
-                      <a:srgbClr val="FFFFFF"/>
-                    </a:solidFill>
-                  </a:tcPr>
-                </a:tc>
-                <a:tc>
-                  <a:txBody>
-                    <a:bodyPr wrap="square"/>
-                    <a:lstStyle/>
-                    <a:p>
-                      <a:pPr algn="l"/>
-                      <a:r>
-                        <a:rPr sz="1100" b="0">
-                          <a:latin typeface="Calibri"/>
-                        </a:rPr>
-                        <a:t>@njit(parallel=True) crop + normalize</a:t>
-                      </a:r>
-                    </a:p>
-                  </a:txBody>
-                  <a:tcPr>
-                    <a:solidFill>
-                      <a:srgbClr val="FFFFFF"/>
-                    </a:solidFill>
-                  </a:tcPr>
-                </a:tc>
-                <a:tc>
-                  <a:txBody>
-                    <a:bodyPr wrap="square"/>
-                    <a:lstStyle/>
-                    <a:p>
-                      <a:pPr algn="l"/>
-                      <a:r>
-                        <a:rPr sz="1100" b="1">
-                          <a:solidFill>
-                            <a:srgbClr val="1D7A72"/>
-                          </a:solidFill>
-                          <a:latin typeface="Calibri"/>
-                        </a:rPr>
-                        <a:t>1.4×</a:t>
-                      </a:r>
-                    </a:p>
-                  </a:txBody>
-                  <a:tcPr>
-                    <a:solidFill>
-                      <a:srgbClr val="FFFFFF"/>
-                    </a:solidFill>
-                  </a:tcPr>
-                </a:tc>
-                <a:tc>
-                  <a:txBody>
-                    <a:bodyPr wrap="square"/>
-                    <a:lstStyle/>
-                    <a:p>
-                      <a:pPr algn="l"/>
-                      <a:r>
-                        <a:rPr sz="1100" b="0">
-                          <a:solidFill>
-                            <a:srgbClr val="1A6A30"/>
-                          </a:solidFill>
-                          <a:latin typeface="Calibri"/>
-                        </a:rPr>
-                        <a:t>Unchanged</a:t>
-                      </a:r>
-                    </a:p>
-                  </a:txBody>
-                  <a:tcPr>
-                    <a:solidFill>
-                      <a:srgbClr val="FFFFFF"/>
                     </a:solidFill>
                   </a:tcPr>
                 </a:tc>
@@ -7842,14 +8050,14 @@
       </p:graphicFrame>
       <p:sp>
         <p:nvSpPr>
-          <p:cNvPr id="6" name="TextBox 5"/>
+          <p:cNvPr id="7" name="TextBox 6"/>
           <p:cNvSpPr txBox="1"/>
           <p:nvPr/>
         </p:nvSpPr>
         <p:spPr>
           <a:xfrm>
-            <a:off x="457200" y="3931920"/>
-            <a:ext cx="3200400" cy="320040"/>
+            <a:off x="457200" y="4023360"/>
+            <a:ext cx="6400800" cy="292608"/>
           </a:xfrm>
           <a:prstGeom prst="rect">
             <a:avLst/>
@@ -7870,21 +8078,21 @@
                 </a:solidFill>
                 <a:latin typeface="Calibri"/>
               </a:rPr>
-              <a:t>Combined result</a:t>
-            </a:r>
-          </a:p>
-        </p:txBody>
-      </p:sp>
-      <p:sp>
-        <p:nvSpPr>
-          <p:cNvPr id="7" name="TextBox 6"/>
+              <a:t>Fair GPU-vs-GPU result (fair_benchmark_results.txt)</a:t>
+            </a:r>
+          </a:p>
+        </p:txBody>
+      </p:sp>
+      <p:sp>
+        <p:nvSpPr>
+          <p:cNvPr id="8" name="TextBox 7"/>
           <p:cNvSpPr txBox="1"/>
           <p:nvPr/>
         </p:nvSpPr>
         <p:spPr>
           <a:xfrm>
-            <a:off x="457200" y="4251960"/>
-            <a:ext cx="6400800" cy="457200"/>
+            <a:off x="457200" y="4343400"/>
+            <a:ext cx="10972800" cy="822960"/>
           </a:xfrm>
           <a:prstGeom prst="rect">
             <a:avLst/>
@@ -7899,153 +8107,13 @@
           <a:p>
             <a:pPr algn="l"/>
             <a:r>
-              <a:rPr sz="1200" b="0" i="0">
+              <a:rPr sz="1100" b="0" i="0">
                 <a:solidFill>
                   <a:srgbClr val="0F1C2E"/>
                 </a:solidFill>
                 <a:latin typeface="Calibri"/>
               </a:rPr>
-              <a:t>All four optimizations stack independently. Combined: 2.27s → 0.55s on warm cache.</a:t>
-            </a:r>
-          </a:p>
-        </p:txBody>
-      </p:sp>
-      <p:sp>
-        <p:nvSpPr>
-          <p:cNvPr id="8" name="TextBox 7"/>
-          <p:cNvSpPr txBox="1"/>
-          <p:nvPr/>
-        </p:nvSpPr>
-        <p:spPr>
-          <a:xfrm>
-            <a:off x="7772400" y="3749039"/>
-            <a:ext cx="2103120" cy="731520"/>
-          </a:xfrm>
-          <a:prstGeom prst="rect">
-            <a:avLst/>
-          </a:prstGeom>
-          <a:noFill/>
-        </p:spPr>
-        <p:txBody>
-          <a:bodyPr wrap="square">
-            <a:spAutoFit/>
-          </a:bodyPr>
-          <a:lstStyle/>
-          <a:p>
-            <a:pPr algn="ctr"/>
-            <a:r>
-              <a:rPr sz="3600" b="1" i="0">
-                <a:solidFill>
-                  <a:srgbClr val="C8912B"/>
-                </a:solidFill>
-                <a:latin typeface="Calibri"/>
-              </a:rPr>
-              <a:t>4.1×</a:t>
-            </a:r>
-          </a:p>
-        </p:txBody>
-      </p:sp>
-      <p:sp>
-        <p:nvSpPr>
-          <p:cNvPr id="9" name="TextBox 8"/>
-          <p:cNvSpPr txBox="1"/>
-          <p:nvPr/>
-        </p:nvSpPr>
-        <p:spPr>
-          <a:xfrm>
-            <a:off x="7772400" y="4480560"/>
-            <a:ext cx="2103120" cy="320040"/>
-          </a:xfrm>
-          <a:prstGeom prst="rect">
-            <a:avLst/>
-          </a:prstGeom>
-          <a:noFill/>
-        </p:spPr>
-        <p:txBody>
-          <a:bodyPr wrap="square">
-            <a:spAutoFit/>
-          </a:bodyPr>
-          <a:lstStyle/>
-          <a:p>
-            <a:pPr algn="ctr"/>
-            <a:r>
-              <a:rPr sz="1000" b="0" i="0">
-                <a:solidFill>
-                  <a:srgbClr val="5A6478"/>
-                </a:solidFill>
-                <a:latin typeface="Calibri"/>
-              </a:rPr>
-              <a:t>combined speedup</a:t>
-            </a:r>
-          </a:p>
-        </p:txBody>
-      </p:sp>
-      <p:sp>
-        <p:nvSpPr>
-          <p:cNvPr id="10" name="TextBox 9"/>
-          <p:cNvSpPr txBox="1"/>
-          <p:nvPr/>
-        </p:nvSpPr>
-        <p:spPr>
-          <a:xfrm>
-            <a:off x="9601200" y="3749039"/>
-            <a:ext cx="2103120" cy="731520"/>
-          </a:xfrm>
-          <a:prstGeom prst="rect">
-            <a:avLst/>
-          </a:prstGeom>
-          <a:noFill/>
-        </p:spPr>
-        <p:txBody>
-          <a:bodyPr wrap="square">
-            <a:spAutoFit/>
-          </a:bodyPr>
-          <a:lstStyle/>
-          <a:p>
-            <a:pPr algn="ctr"/>
-            <a:r>
-              <a:rPr sz="3600" b="1" i="0">
-                <a:solidFill>
-                  <a:srgbClr val="1D7A72"/>
-                </a:solidFill>
-                <a:latin typeface="Calibri"/>
-              </a:rPr>
-              <a:t>0.55s</a:t>
-            </a:r>
-          </a:p>
-        </p:txBody>
-      </p:sp>
-      <p:sp>
-        <p:nvSpPr>
-          <p:cNvPr id="11" name="TextBox 10"/>
-          <p:cNvSpPr txBox="1"/>
-          <p:nvPr/>
-        </p:nvSpPr>
-        <p:spPr>
-          <a:xfrm>
-            <a:off x="9601200" y="4480560"/>
-            <a:ext cx="2103120" cy="320040"/>
-          </a:xfrm>
-          <a:prstGeom prst="rect">
-            <a:avLst/>
-          </a:prstGeom>
-          <a:noFill/>
-        </p:spPr>
-        <p:txBody>
-          <a:bodyPr wrap="square">
-            <a:spAutoFit/>
-          </a:bodyPr>
-          <a:lstStyle/>
-          <a:p>
-            <a:pPr algn="ctr"/>
-            <a:r>
-              <a:rPr sz="1000" b="0" i="0">
-                <a:solidFill>
-                  <a:srgbClr val="5A6478"/>
-                </a:solidFill>
-                <a:latin typeface="Calibri"/>
-              </a:rPr>
-              <a:t>warm per prompt</a:t>
+              <a:t>With Qwen3 on GPU in both configs: v0_gpu (FP16, tile_step=0.5, no cache) 3.10s → v3 (all opts) 2.38s. Algorithmic gain only: 1.3×.  The 46.7× text speedup was eliminating the bug, not an algorithmic optimization.</a:t>
             </a:r>
           </a:p>
         </p:txBody>
@@ -9337,185 +9405,21 @@
                 </a:solidFill>
                 <a:latin typeface="Calibri"/>
               </a:rPr>
-              <a:t>Speed comparison (H100 MIG 3g.40gb)</a:t>
-            </a:r>
-          </a:p>
-        </p:txBody>
-      </p:sp>
-      <p:graphicFrame>
-        <p:nvGraphicFramePr>
-          <p:cNvPr id="16" name="Table 15"/>
-          <p:cNvGraphicFramePr>
-            <a:graphicFrameLocks noGrp="1"/>
-          </p:cNvGraphicFramePr>
-          <p:nvPr/>
-        </p:nvGraphicFramePr>
-        <p:xfrm>
-          <a:off x="6583680" y="1188720"/>
-          <a:ext cx="5212080" cy="1280160"/>
-        </p:xfrm>
-        <a:graphic>
-          <a:graphicData uri="http://schemas.openxmlformats.org/drawingml/2006/table">
-            <a:tbl>
-              <a:tblPr firstRow="1" bandRow="1">
-                <a:tableStyleId>{5C22544A-7EE6-4342-B048-85BDC9FD1C3A}</a:tableStyleId>
-              </a:tblPr>
-              <a:tblGrid>
-                <a:gridCol w="2606040"/>
-                <a:gridCol w="2606040"/>
-              </a:tblGrid>
-              <a:tr h="426720">
-                <a:tc>
-                  <a:txBody>
-                    <a:bodyPr wrap="square"/>
-                    <a:lstStyle/>
-                    <a:p>
-                      <a:pPr algn="l"/>
-                      <a:r>
-                        <a:rPr sz="1100" b="1">
-                          <a:solidFill>
-                            <a:srgbClr val="FFFFFF"/>
-                          </a:solidFill>
-                          <a:latin typeface="Calibri"/>
-                        </a:rPr>
-                        <a:t>Model</a:t>
-                      </a:r>
-                    </a:p>
-                  </a:txBody>
-                  <a:tcPr>
-                    <a:solidFill>
-                      <a:srgbClr val="0F1C2E"/>
-                    </a:solidFill>
-                  </a:tcPr>
-                </a:tc>
-                <a:tc>
-                  <a:txBody>
-                    <a:bodyPr wrap="square"/>
-                    <a:lstStyle/>
-                    <a:p>
-                      <a:pPr algn="l"/>
-                      <a:r>
-                        <a:rPr sz="1100" b="1">
-                          <a:solidFill>
-                            <a:srgbClr val="FFFFFF"/>
-                          </a:solidFill>
-                          <a:latin typeface="Calibri"/>
-                        </a:rPr>
-                        <a:t>Per-prompt (warm)</a:t>
-                      </a:r>
-                    </a:p>
-                  </a:txBody>
-                  <a:tcPr>
-                    <a:solidFill>
-                      <a:srgbClr val="0F1C2E"/>
-                    </a:solidFill>
-                  </a:tcPr>
-                </a:tc>
-              </a:tr>
-              <a:tr h="426720">
-                <a:tc>
-                  <a:txBody>
-                    <a:bodyPr wrap="square"/>
-                    <a:lstStyle/>
-                    <a:p>
-                      <a:pPr algn="l"/>
-                      <a:r>
-                        <a:rPr sz="1100" b="0">
-                          <a:latin typeface="Calibri"/>
-                        </a:rPr>
-                        <a:t>VoxTell v3 (optimized)</a:t>
-                      </a:r>
-                    </a:p>
-                  </a:txBody>
-                  <a:tcPr>
-                    <a:solidFill>
-                      <a:srgbClr val="F5F2EB"/>
-                    </a:solidFill>
-                  </a:tcPr>
-                </a:tc>
-                <a:tc>
-                  <a:txBody>
-                    <a:bodyPr wrap="square"/>
-                    <a:lstStyle/>
-                    <a:p>
-                      <a:pPr algn="l"/>
-                      <a:r>
-                        <a:rPr sz="1100" b="1">
-                          <a:solidFill>
-                            <a:srgbClr val="1D7A72"/>
-                          </a:solidFill>
-                          <a:latin typeface="Calibri"/>
-                        </a:rPr>
-                        <a:t>0.55s</a:t>
-                      </a:r>
-                    </a:p>
-                  </a:txBody>
-                  <a:tcPr>
-                    <a:solidFill>
-                      <a:srgbClr val="F5F2EB"/>
-                    </a:solidFill>
-                  </a:tcPr>
-                </a:tc>
-              </a:tr>
-              <a:tr h="426720">
-                <a:tc>
-                  <a:txBody>
-                    <a:bodyPr wrap="square"/>
-                    <a:lstStyle/>
-                    <a:p>
-                      <a:pPr algn="l"/>
-                      <a:r>
-                        <a:rPr sz="1100" b="0">
-                          <a:latin typeface="Calibri"/>
-                        </a:rPr>
-                        <a:t>nnInteractive (baseline)</a:t>
-                      </a:r>
-                    </a:p>
-                  </a:txBody>
-                  <a:tcPr>
-                    <a:solidFill>
-                      <a:srgbClr val="FFFFFF"/>
-                    </a:solidFill>
-                  </a:tcPr>
-                </a:tc>
-                <a:tc>
-                  <a:txBody>
-                    <a:bodyPr wrap="square"/>
-                    <a:lstStyle/>
-                    <a:p>
-                      <a:pPr algn="l"/>
-                      <a:r>
-                        <a:rPr sz="1100" b="1">
-                          <a:solidFill>
-                            <a:srgbClr val="1D7A72"/>
-                          </a:solidFill>
-                          <a:latin typeface="Calibri"/>
-                        </a:rPr>
-                        <a:t>0.288s</a:t>
-                      </a:r>
-                    </a:p>
-                  </a:txBody>
-                  <a:tcPr>
-                    <a:solidFill>
-                      <a:srgbClr val="FFFFFF"/>
-                    </a:solidFill>
-                  </a:tcPr>
-                </a:tc>
-              </a:tr>
-            </a:tbl>
-          </a:graphicData>
-        </a:graphic>
-      </p:graphicFrame>
-      <p:sp>
-        <p:nvSpPr>
-          <p:cNvPr id="17" name="TextBox 16"/>
+              <a:t>Why nnInteractive is faster than VoxTell</a:t>
+            </a:r>
+          </a:p>
+        </p:txBody>
+      </p:sp>
+      <p:sp>
+        <p:nvSpPr>
+          <p:cNvPr id="16" name="TextBox 15"/>
           <p:cNvSpPr txBox="1"/>
           <p:nvPr/>
         </p:nvSpPr>
         <p:spPr>
           <a:xfrm>
-            <a:off x="6583680" y="2606040"/>
-            <a:ext cx="5212080" cy="731520"/>
+            <a:off x="6583680" y="1234440"/>
+            <a:ext cx="5212080" cy="4114800"/>
           </a:xfrm>
           <a:prstGeom prst="rect">
             <a:avLst/>
@@ -9536,8 +9440,9 @@
                 </a:solidFill>
                 <a:latin typeface="Calibri"/>
               </a:rPr>
-              <a:t>nnInteractive is ~2.6× faster per prompt than optimized VoxTell
-because it uses geometric bbox prompts — no 4B text encoder.</a:t>
+              <a:t>VoxTell accepts free-text prompts ("brain", "left kidney") — each requires a Qwen3-4B text encoder forward pass even with FP16 on GPU.
+nnInteractive accepts a 3-D bounding box directly — no text encoder, the encoder cost is zero. Geometric prompts are sufficient for the CVPR challenge format.
+A direct per-prompt latency comparison requires both models on the same hardware. VoxTell H100 numbers are pending retrieval from cluster logs (benchmark_v0gpu_h100.py).</a:t>
             </a:r>
           </a:p>
         </p:txBody>

--- a/slides.pptx
+++ b/slides.pptx
@@ -3333,8 +3333,8 @@
         </p:nvSpPr>
         <p:spPr>
           <a:xfrm>
-            <a:off x="457200" y="6309360"/>
-            <a:ext cx="10972800" cy="411480"/>
+            <a:off x="822960" y="6309360"/>
+            <a:ext cx="9144000" cy="365760"/>
           </a:xfrm>
           <a:prstGeom prst="rect">
             <a:avLst/>
@@ -3347,15 +3347,15 @@
           </a:bodyPr>
           <a:lstStyle/>
           <a:p>
-            <a:pPr algn="ctr"/>
+            <a:pPr algn="l"/>
             <a:r>
               <a:rPr sz="1000" b="0" i="0">
                 <a:solidFill>
-                  <a:srgbClr val="C8912B"/>
+                  <a:srgbClr val="5A6478"/>
                 </a:solidFill>
                 <a:latin typeface="Calibri"/>
               </a:rPr>
-              <a:t>DRAFT — nnInteractive results pending 3-run variance confirmation</a:t>
+              <a:t>Brian Xiao  ·  Aug 2026</a:t>
             </a:r>
           </a:p>
         </p:txBody>
@@ -4504,7 +4504,7 @@
                 </a:solidFill>
                 <a:latin typeface="Calibri"/>
               </a:rPr>
-              <a:t>Job 56914757 · fully isolated /tmp inductor cache · all three env vars set before import torch</a:t>
+              <a:t>Cold-start measured in two configs: /tmp local cache (job 56914757) and /scratch NFS production cache</a:t>
             </a:r>
           </a:p>
         </p:txBody>
@@ -4590,7 +4590,7 @@
                         <a:rPr sz="1100" b="0">
                           <a:latin typeface="Calibri"/>
                         </a:rPr>
-                        <a:t>Triton cold-start (run 1)</a:t>
+                        <a:t>Triton cold-start — /tmp local (job 56914757)</a:t>
                       </a:r>
                     </a:p>
                   </a:txBody>
@@ -4610,7 +4610,7 @@
                         <a:rPr sz="1100" b="0">
                           <a:latin typeface="Calibri"/>
                         </a:rPr>
-                        <a:t>23.61s</a:t>
+                        <a:t>23.61s  (lower bound)</a:t>
                       </a:r>
                     </a:p>
                   </a:txBody>
@@ -4632,7 +4632,7 @@
                         <a:rPr sz="1100" b="0">
                           <a:latin typeface="Calibri"/>
                         </a:rPr>
-                        <a:t>Residual (run 2)</a:t>
+                        <a:t>Triton cold-start — /scratch NFS (production)</a:t>
                       </a:r>
                     </a:p>
                   </a:txBody>
@@ -4652,7 +4652,7 @@
                         <a:rPr sz="1100" b="0">
                           <a:latin typeface="Calibri"/>
                         </a:rPr>
-                        <a:t>0.513s</a:t>
+                        <a:t>71.4s</a:t>
                       </a:r>
                     </a:p>
                   </a:txBody>
@@ -4674,7 +4674,7 @@
                         <a:rPr sz="1100" b="0">
                           <a:latin typeface="Calibri"/>
                         </a:rPr>
-                        <a:t>Fully warm mean (runs 3–6)</a:t>
+                        <a:t>Residual (run 2)</a:t>
                       </a:r>
                     </a:p>
                   </a:txBody>
@@ -4694,7 +4694,7 @@
                         <a:rPr sz="1100" b="0">
                           <a:latin typeface="Calibri"/>
                         </a:rPr>
-                        <a:t>0.125s</a:t>
+                        <a:t>0.513s</a:t>
                       </a:r>
                     </a:p>
                   </a:txBody>
@@ -4716,7 +4716,7 @@
                         <a:rPr sz="1100" b="0">
                           <a:latin typeface="Calibri"/>
                         </a:rPr>
-                        <a:t>Warm gain per object (from job 56908464)</a:t>
+                        <a:t>Fully warm mean (runs 3–6)</a:t>
                       </a:r>
                     </a:p>
                   </a:txBody>
@@ -4736,7 +4736,7 @@
                         <a:rPr sz="1100" b="0">
                           <a:latin typeface="Calibri"/>
                         </a:rPr>
-                        <a:t>0.0736s</a:t>
+                        <a:t>0.125s</a:t>
                       </a:r>
                     </a:p>
                   </a:txBody>
@@ -4758,13 +4758,55 @@
                         <a:rPr sz="1100" b="0">
                           <a:latin typeface="Calibri"/>
                         </a:rPr>
-                        <a:t>Break-even (production gain)</a:t>
+                        <a:t>Mean warm gain per object (n=3, jobs 56923894–896)</a:t>
                       </a:r>
                     </a:p>
                   </a:txBody>
                   <a:tcPr>
                     <a:solidFill>
                       <a:srgbClr val="F5F2EB"/>
+                    </a:solidFill>
+                  </a:tcPr>
+                </a:tc>
+                <a:tc>
+                  <a:txBody>
+                    <a:bodyPr wrap="square"/>
+                    <a:lstStyle/>
+                    <a:p>
+                      <a:pPr algn="l"/>
+                      <a:r>
+                        <a:rPr sz="1100" b="0">
+                          <a:latin typeface="Calibri"/>
+                        </a:rPr>
+                        <a:t>0.0706s</a:t>
+                      </a:r>
+                    </a:p>
+                  </a:txBody>
+                  <a:tcPr>
+                    <a:solidFill>
+                      <a:srgbClr val="F5F2EB"/>
+                    </a:solidFill>
+                  </a:tcPr>
+                </a:tc>
+              </a:tr>
+              <a:tr h="391890">
+                <a:tc>
+                  <a:txBody>
+                    <a:bodyPr wrap="square"/>
+                    <a:lstStyle/>
+                    <a:p>
+                      <a:pPr algn="l"/>
+                      <a:r>
+                        <a:rPr sz="1100" b="0">
+                          <a:latin typeface="Calibri"/>
+                        </a:rPr>
+                        <a:t>Break-even (production, /scratch cache)</a:t>
+                      </a:r>
+                    </a:p>
+                  </a:txBody>
+                  <a:tcPr>
+                    <a:solidFill>
+                      <a:srgbClr val="FFFFFF"/>
                     </a:solidFill>
                   </a:tcPr>
                 </a:tc>
@@ -4781,49 +4823,7 @@
                           </a:solidFill>
                           <a:latin typeface="Calibri"/>
                         </a:rPr>
-                        <a:t>~321 objects (~22 cases)</a:t>
-                      </a:r>
-                    </a:p>
-                  </a:txBody>
-                  <a:tcPr>
-                    <a:solidFill>
-                      <a:srgbClr val="F5F2EB"/>
-                    </a:solidFill>
-                  </a:tcPr>
-                </a:tc>
-              </a:tr>
-              <a:tr h="391890">
-                <a:tc>
-                  <a:txBody>
-                    <a:bodyPr wrap="square"/>
-                    <a:lstStyle/>
-                    <a:p>
-                      <a:pPr algn="l"/>
-                      <a:r>
-                        <a:rPr sz="1100" b="0">
-                          <a:latin typeface="Calibri"/>
-                        </a:rPr>
-                        <a:t>First case cold vs warm baseline</a:t>
-                      </a:r>
-                    </a:p>
-                  </a:txBody>
-                  <a:tcPr>
-                    <a:solidFill>
-                      <a:srgbClr val="FFFFFF"/>
-                    </a:solidFill>
-                  </a:tcPr>
-                </a:tc>
-                <a:tc>
-                  <a:txBody>
-                    <a:bodyPr wrap="square"/>
-                    <a:lstStyle/>
-                    <a:p>
-                      <a:pPr algn="l"/>
-                      <a:r>
-                        <a:rPr sz="1100" b="0">
-                          <a:latin typeface="Calibri"/>
-                        </a:rPr>
-                        <a:t>~25.4s  vs  ~4.38s</a:t>
+                        <a:t>~1,011 objects (~69 cases)</a:t>
                       </a:r>
                     </a:p>
                   </a:txBody>
@@ -4868,7 +4868,7 @@
                 </a:solidFill>
                 <a:latin typeface="Calibri"/>
               </a:rPr>
-              <a:t>Break-even = 23.61s ÷ 0.0736s/object = 321 objects = 22 cases</a:t>
+              <a:t>Break-even (/scratch): 71.4s ÷ 0.0706s/object = ~1,011 objects = ~69 cases</a:t>
             </a:r>
           </a:p>
         </p:txBody>
@@ -4903,9 +4903,8 @@
                 </a:solidFill>
                 <a:latin typeface="Calibri"/>
               </a:rPr>
-              <a:t>Note: /tmp is node-local fast storage. Production Triton cache on /scratch
-(network FS) will read higher. After break-even, all subsequent jobs run at 1.34×.
-Shared cache at /scratch/brianx7/cache was not modified.</a:t>
+              <a:t>/tmp lower bound: 23.61s ÷ 0.0706s = ~334 objects = ~23 cases. After break-even, all subsequent objects run at 1.33×.
+The Triton cache on /scratch persists across jobs — cost is once per environment install.</a:t>
             </a:r>
           </a:p>
         </p:txBody>
@@ -4940,7 +4939,7 @@
                 </a:solidFill>
                 <a:latin typeface="Calibri"/>
               </a:rPr>
-              <a:t>~22</a:t>
+              <a:t>~69</a:t>
             </a:r>
           </a:p>
         </p:txBody>
@@ -5010,7 +5009,7 @@
                 </a:solidFill>
                 <a:latin typeface="Calibri"/>
               </a:rPr>
-              <a:t>(~321 objects)</a:t>
+              <a:t>(production, /scratch)</a:t>
             </a:r>
           </a:p>
         </p:txBody>
@@ -5790,7 +5789,7 @@
                           </a:solidFill>
                           <a:latin typeface="Calibri"/>
                         </a:rPr>
-                        <a:t>1.34× / object *</a:t>
+                        <a:t>1.33× / object (n=3)</a:t>
                       </a:r>
                     </a:p>
                   </a:txBody>
@@ -5960,42 +5959,7 @@
                 </a:solidFill>
                 <a:latin typeface="Calibri"/>
               </a:rPr>
-              <a:t>0.288s → 0.215s per object. DSC 0.7914 → 0.7916 (+0.0002). Speed and accuracy from the same job, same config.</a:t>
-            </a:r>
-          </a:p>
-        </p:txBody>
-      </p:sp>
-      <p:sp>
-        <p:nvSpPr>
-          <p:cNvPr id="10" name="TextBox 9"/>
-          <p:cNvSpPr txBox="1"/>
-          <p:nvPr/>
-        </p:nvSpPr>
-        <p:spPr>
-          <a:xfrm>
-            <a:off x="457200" y="5715000"/>
-            <a:ext cx="10972800" cy="365760"/>
-          </a:xfrm>
-          <a:prstGeom prst="rect">
-            <a:avLst/>
-          </a:prstGeom>
-          <a:noFill/>
-        </p:spPr>
-        <p:txBody>
-          <a:bodyPr wrap="square">
-            <a:spAutoFit/>
-          </a:bodyPr>
-          <a:lstStyle/>
-          <a:p>
-            <a:pPr algn="l"/>
-            <a:r>
-              <a:rPr sz="1000" b="0" i="0">
-                <a:solidFill>
-                  <a:srgbClr val="C8912B"/>
-                </a:solidFill>
-                <a:latin typeface="Calibri"/>
-              </a:rPr>
-              <a:t>* nnInteractive 1.34× is n=1. Three serialized repeat jobs (nni_rep, singleton) pending — update before presentation.</a:t>
+              <a:t>0.288s → 0.215s per object. Mean speedup 1.33× (n=3: 1.28–1.39×). DSC Δ ≤ +0.0004. Speed and accuracy from same job, same config. Break-even ~69 cases (/scratch).</a:t>
             </a:r>
           </a:p>
         </p:txBody>
@@ -10925,7 +10889,7 @@
                 </a:solidFill>
                 <a:latin typeface="Calibri"/>
               </a:rPr>
-              <a:t>Job 56908464 · fold='all', autozoom=ON · 20 CT cases · 294 objects · H100 MIG 3g.40gb</a:t>
+              <a:t>Jobs 56923894–896 (n=3 repeats) + 56908464 · fold='all', autozoom=ON · 20 CT cases · 294 objects · H100 MIG 3g.40gb</a:t>
             </a:r>
           </a:p>
         </p:txBody>
@@ -10960,7 +10924,7 @@
                 </a:solidFill>
                 <a:latin typeface="Calibri"/>
               </a:rPr>
-              <a:t>1.34×</a:t>
+              <a:t>1.33×</a:t>
             </a:r>
           </a:p>
         </p:txBody>
@@ -10996,7 +10960,7 @@
                 <a:latin typeface="Calibri"/>
               </a:rPr>
               <a:t>per-object speedup
-(warm inference)</a:t>
+(n=3: 1.28–1.39×)</a:t>
             </a:r>
           </a:p>
         </p:txBody>
@@ -11535,7 +11499,7 @@
                           </a:solidFill>
                           <a:latin typeface="Calibri"/>
                         </a:rPr>
-                        <a:t>3.29s</a:t>
+                        <a:t>3.30s</a:t>
                       </a:r>
                     </a:p>
                   </a:txBody>
@@ -11558,7 +11522,7 @@
                           </a:solidFill>
                           <a:latin typeface="Calibri"/>
                         </a:rPr>
-                        <a:t>1.34×</a:t>
+                        <a:t>1.33×</a:t>
                       </a:r>
                     </a:p>
                   </a:txBody>
@@ -11599,11 +11563,11 @@
             <a:r>
               <a:rPr sz="1000" b="0" i="0">
                 <a:solidFill>
-                  <a:srgbClr val="C8912B"/>
+                  <a:srgbClr val="1D7A72"/>
                 </a:solidFill>
                 <a:latin typeface="Calibri"/>
               </a:rPr>
-              <a:t>⚠  Speedup pending 3 repeat jobs for variance confirmation (within-job paired ratio is stable)</a:t>
+              <a:t>✓  Confirmed across n=3 repeats (jobs 56923894–896). Range: 1.28×–1.39×. DSC Δ ≤ +0.0004 across all runs — accuracy stable.</a:t>
             </a:r>
           </a:p>
         </p:txBody>

--- a/slides.pptx
+++ b/slides.pptx
@@ -4504,7 +4504,7 @@
                 </a:solidFill>
                 <a:latin typeface="Calibri"/>
               </a:rPr>
-              <a:t>Cold-start measured in two configs: /tmp local cache (job 56914757) and /scratch NFS production cache</a:t>
+              <a:t>Job 56914757 · fully isolated /tmp inductor cache · all three env vars set before import torch</a:t>
             </a:r>
           </a:p>
         </p:txBody>
@@ -4590,7 +4590,7 @@
                         <a:rPr sz="1100" b="0">
                           <a:latin typeface="Calibri"/>
                         </a:rPr>
-                        <a:t>Triton cold-start — /tmp local (job 56914757)</a:t>
+                        <a:t>Triton cold-start (run 1, job 56914757)</a:t>
                       </a:r>
                     </a:p>
                   </a:txBody>
@@ -4610,7 +4610,7 @@
                         <a:rPr sz="1100" b="0">
                           <a:latin typeface="Calibri"/>
                         </a:rPr>
-                        <a:t>23.61s  (lower bound)</a:t>
+                        <a:t>23.61s</a:t>
                       </a:r>
                     </a:p>
                   </a:txBody>
@@ -4632,7 +4632,7 @@
                         <a:rPr sz="1100" b="0">
                           <a:latin typeface="Calibri"/>
                         </a:rPr>
-                        <a:t>Triton cold-start — /scratch NFS (production)</a:t>
+                        <a:t>Residual (run 2)</a:t>
                       </a:r>
                     </a:p>
                   </a:txBody>
@@ -4652,7 +4652,7 @@
                         <a:rPr sz="1100" b="0">
                           <a:latin typeface="Calibri"/>
                         </a:rPr>
-                        <a:t>71.4s</a:t>
+                        <a:t>0.513s</a:t>
                       </a:r>
                     </a:p>
                   </a:txBody>
@@ -4674,7 +4674,7 @@
                         <a:rPr sz="1100" b="0">
                           <a:latin typeface="Calibri"/>
                         </a:rPr>
-                        <a:t>Residual (run 2)</a:t>
+                        <a:t>Fully warm mean (runs 3–6)</a:t>
                       </a:r>
                     </a:p>
                   </a:txBody>
@@ -4694,7 +4694,7 @@
                         <a:rPr sz="1100" b="0">
                           <a:latin typeface="Calibri"/>
                         </a:rPr>
-                        <a:t>0.513s</a:t>
+                        <a:t>0.125s</a:t>
                       </a:r>
                     </a:p>
                   </a:txBody>
@@ -4716,7 +4716,7 @@
                         <a:rPr sz="1100" b="0">
                           <a:latin typeface="Calibri"/>
                         </a:rPr>
-                        <a:t>Fully warm mean (runs 3–6)</a:t>
+                        <a:t>Mean warm gain per object (n=4 jobs)</a:t>
                       </a:r>
                     </a:p>
                   </a:txBody>
@@ -4736,7 +4736,7 @@
                         <a:rPr sz="1100" b="0">
                           <a:latin typeface="Calibri"/>
                         </a:rPr>
-                        <a:t>0.125s</a:t>
+                        <a:t>0.0706s</a:t>
                       </a:r>
                     </a:p>
                   </a:txBody>
@@ -4758,55 +4758,13 @@
                         <a:rPr sz="1100" b="0">
                           <a:latin typeface="Calibri"/>
                         </a:rPr>
-                        <a:t>Mean warm gain per object (n=3, jobs 56923894–896)</a:t>
+                        <a:t>Break-even</a:t>
                       </a:r>
                     </a:p>
                   </a:txBody>
                   <a:tcPr>
                     <a:solidFill>
                       <a:srgbClr val="F5F2EB"/>
-                    </a:solidFill>
-                  </a:tcPr>
-                </a:tc>
-                <a:tc>
-                  <a:txBody>
-                    <a:bodyPr wrap="square"/>
-                    <a:lstStyle/>
-                    <a:p>
-                      <a:pPr algn="l"/>
-                      <a:r>
-                        <a:rPr sz="1100" b="0">
-                          <a:latin typeface="Calibri"/>
-                        </a:rPr>
-                        <a:t>0.0706s</a:t>
-                      </a:r>
-                    </a:p>
-                  </a:txBody>
-                  <a:tcPr>
-                    <a:solidFill>
-                      <a:srgbClr val="F5F2EB"/>
-                    </a:solidFill>
-                  </a:tcPr>
-                </a:tc>
-              </a:tr>
-              <a:tr h="391890">
-                <a:tc>
-                  <a:txBody>
-                    <a:bodyPr wrap="square"/>
-                    <a:lstStyle/>
-                    <a:p>
-                      <a:pPr algn="l"/>
-                      <a:r>
-                        <a:rPr sz="1100" b="0">
-                          <a:latin typeface="Calibri"/>
-                        </a:rPr>
-                        <a:t>Break-even (production, /scratch cache)</a:t>
-                      </a:r>
-                    </a:p>
-                  </a:txBody>
-                  <a:tcPr>
-                    <a:solidFill>
-                      <a:srgbClr val="FFFFFF"/>
                     </a:solidFill>
                   </a:tcPr>
                 </a:tc>
@@ -4823,7 +4781,49 @@
                           </a:solidFill>
                           <a:latin typeface="Calibri"/>
                         </a:rPr>
-                        <a:t>~1,011 objects (~69 cases)</a:t>
+                        <a:t>~334 objects (~23 cases)</a:t>
+                      </a:r>
+                    </a:p>
+                  </a:txBody>
+                  <a:tcPr>
+                    <a:solidFill>
+                      <a:srgbClr val="F5F2EB"/>
+                    </a:solidFill>
+                  </a:tcPr>
+                </a:tc>
+              </a:tr>
+              <a:tr h="391890">
+                <a:tc>
+                  <a:txBody>
+                    <a:bodyPr wrap="square"/>
+                    <a:lstStyle/>
+                    <a:p>
+                      <a:pPr algn="l"/>
+                      <a:r>
+                        <a:rPr sz="1100" b="0">
+                          <a:latin typeface="Calibri"/>
+                        </a:rPr>
+                        <a:t>First case cold vs warm baseline</a:t>
+                      </a:r>
+                    </a:p>
+                  </a:txBody>
+                  <a:tcPr>
+                    <a:solidFill>
+                      <a:srgbClr val="FFFFFF"/>
+                    </a:solidFill>
+                  </a:tcPr>
+                </a:tc>
+                <a:tc>
+                  <a:txBody>
+                    <a:bodyPr wrap="square"/>
+                    <a:lstStyle/>
+                    <a:p>
+                      <a:pPr algn="l"/>
+                      <a:r>
+                        <a:rPr sz="1100" b="0">
+                          <a:latin typeface="Calibri"/>
+                        </a:rPr>
+                        <a:t>~25.4s  vs  ~4.38s</a:t>
                       </a:r>
                     </a:p>
                   </a:txBody>
@@ -4868,7 +4868,7 @@
                 </a:solidFill>
                 <a:latin typeface="Calibri"/>
               </a:rPr>
-              <a:t>Break-even (/scratch): 71.4s ÷ 0.0706s/object = ~1,011 objects = ~69 cases</a:t>
+              <a:t>Break-even = 23.61s ÷ 0.0706s/object = ~334 objects = ~23 cases</a:t>
             </a:r>
           </a:p>
         </p:txBody>
@@ -4903,8 +4903,9 @@
                 </a:solidFill>
                 <a:latin typeface="Calibri"/>
               </a:rPr>
-              <a:t>/tmp lower bound: 23.61s ÷ 0.0706s = ~334 objects = ~23 cases. After break-even, all subsequent objects run at 1.33×.
-The Triton cache on /scratch persists across jobs — cost is once per environment install.</a:t>
+              <a:t>Note: /tmp is node-local fast storage. Production Triton cache on /scratch (NFS) will be higher.
+23.61s is a lower bound for a from-scratch deployment.
+After break-even, all subsequent objects run at 1.33×.</a:t>
             </a:r>
           </a:p>
         </p:txBody>
@@ -4939,7 +4940,7 @@
                 </a:solidFill>
                 <a:latin typeface="Calibri"/>
               </a:rPr>
-              <a:t>~69</a:t>
+              <a:t>~23</a:t>
             </a:r>
           </a:p>
         </p:txBody>
@@ -5009,7 +5010,7 @@
                 </a:solidFill>
                 <a:latin typeface="Calibri"/>
               </a:rPr>
-              <a:t>(production, /scratch)</a:t>
+              <a:t>(~334 objects)</a:t>
             </a:r>
           </a:p>
         </p:txBody>

--- a/slides.pptx
+++ b/slides.pptx
@@ -5855,7 +5855,7 @@
                 </a:solidFill>
                 <a:latin typeface="Calibri"/>
               </a:rPr>
-              <a:t>VoxTell (RTX 4070 SUPER, experiment_log.md)</a:t>
+              <a:t>VoxTell — fair GPU-vs-GPU benchmark</a:t>
             </a:r>
           </a:p>
         </p:txBody>
@@ -5890,7 +5890,7 @@
                 </a:solidFill>
                 <a:latin typeface="Calibri"/>
               </a:rPr>
-              <a:t>Fair GPU-vs-GPU: 3.10s → 2.38s (1.3× algorithmic gain). Bug fix excluded from fair comparison — it was a latent defect, not an optimization. Accuracy maintained (&lt; 0.001 DSC change across all four changes).</a:t>
+              <a:t>RTX 4070 SUPER: 3.10s → 2.38s (1.3× algorithmic gain, excl. bug fix).  H100 MIG 3g.40gb (job 56948503): 13.61s → 0.77s (17.6× full-stack incl. INT4). Accuracy maintained (&lt; 0.001 DSC change across all changes).</a:t>
             </a:r>
           </a:p>
         </p:txBody>
@@ -7549,7 +7549,7 @@
         </p:nvGraphicFramePr>
         <p:xfrm>
           <a:off x="457200" y="1097280"/>
-          <a:ext cx="11247120" cy="2743200"/>
+          <a:ext cx="11247120" cy="3200400"/>
         </p:xfrm>
         <a:graphic>
           <a:graphicData uri="http://schemas.openxmlformats.org/drawingml/2006/table">
@@ -7563,7 +7563,7 @@
                 <a:gridCol w="2811780"/>
                 <a:gridCol w="2811780"/>
               </a:tblGrid>
-              <a:tr h="548640">
+              <a:tr h="533400">
                 <a:tc>
                   <a:txBody>
                     <a:bodyPr wrap="square"/>
@@ -7657,7 +7657,7 @@
                   </a:tcPr>
                 </a:tc>
               </a:tr>
-              <a:tr h="548640">
+              <a:tr h="533400">
                 <a:tc>
                   <a:txBody>
                     <a:bodyPr wrap="square"/>
@@ -7745,7 +7745,7 @@
                   </a:tcPr>
                 </a:tc>
               </a:tr>
-              <a:tr h="548640">
+              <a:tr h="533400">
                 <a:tc>
                   <a:txBody>
                     <a:bodyPr wrap="square"/>
@@ -7833,7 +7833,7 @@
                   </a:tcPr>
                 </a:tc>
               </a:tr>
-              <a:tr h="548640">
+              <a:tr h="533400">
                 <a:tc>
                   <a:txBody>
                     <a:bodyPr wrap="square"/>
@@ -7921,7 +7921,7 @@
                   </a:tcPr>
                 </a:tc>
               </a:tr>
-              <a:tr h="548640">
+              <a:tr h="533400">
                 <a:tc>
                   <a:txBody>
                     <a:bodyPr wrap="square"/>
@@ -8005,6 +8005,94 @@
                   <a:tcPr>
                     <a:solidFill>
                       <a:srgbClr val="F5F2EB"/>
+                    </a:solidFill>
+                  </a:tcPr>
+                </a:tc>
+              </a:tr>
+              <a:tr h="533400">
+                <a:tc>
+                  <a:txBody>
+                    <a:bodyPr wrap="square"/>
+                    <a:lstStyle/>
+                    <a:p>
+                      <a:pPr algn="l"/>
+                      <a:r>
+                        <a:rPr sz="1000" b="0">
+                          <a:latin typeface="Calibri"/>
+                        </a:rPr>
+                        <a:t>INT4 (NF4) quantization</a:t>
+                      </a:r>
+                    </a:p>
+                  </a:txBody>
+                  <a:tcPr>
+                    <a:solidFill>
+                      <a:srgbClr val="FFFFFF"/>
+                    </a:solidFill>
+                  </a:tcPr>
+                </a:tc>
+                <a:tc>
+                  <a:txBody>
+                    <a:bodyPr wrap="square"/>
+                    <a:lstStyle/>
+                    <a:p>
+                      <a:pPr algn="l"/>
+                      <a:r>
+                        <a:rPr sz="1000" b="0">
+                          <a:latin typeface="Calibri"/>
+                        </a:rPr>
+                        <a:t>bitsandbytes NF4 on Qwen3: ~2GB vs ~8GB FP16 VRAM</a:t>
+                      </a:r>
+                    </a:p>
+                  </a:txBody>
+                  <a:tcPr>
+                    <a:solidFill>
+                      <a:srgbClr val="FFFFFF"/>
+                    </a:solidFill>
+                  </a:tcPr>
+                </a:tc>
+                <a:tc>
+                  <a:txBody>
+                    <a:bodyPr wrap="square"/>
+                    <a:lstStyle/>
+                    <a:p>
+                      <a:pPr algn="l"/>
+                      <a:r>
+                        <a:rPr sz="1000" b="1">
+                          <a:solidFill>
+                            <a:srgbClr val="1D7A72"/>
+                          </a:solidFill>
+                          <a:latin typeface="Calibri"/>
+                        </a:rPr>
+                        <a:t>4× text (H100)</a:t>
+                      </a:r>
+                    </a:p>
+                  </a:txBody>
+                  <a:tcPr>
+                    <a:solidFill>
+                      <a:srgbClr val="FFFFFF"/>
+                    </a:solidFill>
+                  </a:tcPr>
+                </a:tc>
+                <a:tc>
+                  <a:txBody>
+                    <a:bodyPr wrap="square"/>
+                    <a:lstStyle/>
+                    <a:p>
+                      <a:pPr algn="l"/>
+                      <a:r>
+                        <a:rPr sz="1000" b="0">
+                          <a:solidFill>
+                            <a:srgbClr val="1A6A30"/>
+                          </a:solidFill>
+                          <a:latin typeface="Calibri"/>
+                        </a:rPr>
+                        <a:t>Unverified</a:t>
+                      </a:r>
+                    </a:p>
+                  </a:txBody>
+                  <a:tcPr>
+                    <a:solidFill>
+                      <a:srgbClr val="FFFFFF"/>
                     </a:solidFill>
                   </a:tcPr>
                 </a:tc>
@@ -8021,8 +8109,8 @@
         </p:nvSpPr>
         <p:spPr>
           <a:xfrm>
-            <a:off x="457200" y="4023360"/>
-            <a:ext cx="6400800" cy="292608"/>
+            <a:off x="457200" y="4480560"/>
+            <a:ext cx="3657600" cy="292608"/>
           </a:xfrm>
           <a:prstGeom prst="rect">
             <a:avLst/>
@@ -8043,7 +8131,7 @@
                 </a:solidFill>
                 <a:latin typeface="Calibri"/>
               </a:rPr>
-              <a:t>Fair GPU-vs-GPU result (fair_benchmark_results.txt)</a:t>
+              <a:t>Fair GPU-vs-GPU results</a:t>
             </a:r>
           </a:p>
         </p:txBody>
@@ -8056,7 +8144,7 @@
         </p:nvSpPr>
         <p:spPr>
           <a:xfrm>
-            <a:off x="457200" y="4343400"/>
+            <a:off x="457200" y="4800600"/>
             <a:ext cx="10972800" cy="822960"/>
           </a:xfrm>
           <a:prstGeom prst="rect">
@@ -8078,7 +8166,9 @@
                 </a:solidFill>
                 <a:latin typeface="Calibri"/>
               </a:rPr>
-              <a:t>With Qwen3 on GPU in both configs: v0_gpu (FP16, tile_step=0.5, no cache) 3.10s → v3 (all opts) 2.38s. Algorithmic gain only: 1.3×.  The 46.7× text speedup was eliminating the bug, not an algorithmic optimization.</a:t>
+              <a:t>RTX 4070 SUPER (fair_benchmark_results.txt):  v0_gpu 3.10s → v3 2.38s  =  1.3× algorithmic gain
+H100 MIG 3g.40gb (job 56948503):  v0_gpu 13.61s → v3 0.77s  =  17.6× full-stack gain (incl. INT4)
+Bug fix excluded from fair comparison — FP16 GPU placement was a latent defect, not an optimization.</a:t>
             </a:r>
           </a:p>
         </p:txBody>
@@ -9407,7 +9497,7 @@
               </a:rPr>
               <a:t>VoxTell accepts free-text prompts ("brain", "left kidney") — each requires a Qwen3-4B text encoder forward pass even with FP16 on GPU.
 nnInteractive accepts a 3-D bounding box directly — no text encoder, the encoder cost is zero. Geometric prompts are sufficient for the CVPR challenge format.
-A direct per-prompt latency comparison requires both models on the same hardware. VoxTell H100 numbers are pending retrieval from cluster logs (benchmark_v0gpu_h100.py).</a:t>
+A direct per-prompt latency comparison requires both models on the same hardware. VoxTell H100 fair benchmark (job 56948503): v0_gpu 13.61s → v3 0.77s = 17.6× full-stack gain.</a:t>
             </a:r>
           </a:p>
         </p:txBody>

--- a/slides.pptx
+++ b/slides.pptx
@@ -4209,13 +4209,13 @@
           <a:p>
             <a:pPr algn="ctr"/>
             <a:r>
-              <a:rPr sz="1100" b="0" i="0">
+              <a:rPr sz="1000" b="0" i="0">
                 <a:solidFill>
                   <a:srgbClr val="5A6478"/>
                 </a:solidFill>
                 <a:latin typeface="Calibri"/>
               </a:rPr>
-              <a:t>Well below 0.005 threshold</a:t>
+              <a:t>4 runs, Δ +0.0000 to +0.0004 — none negative</a:t>
             </a:r>
           </a:p>
         </p:txBody>
@@ -4287,13 +4287,13 @@
           <a:p>
             <a:pPr algn="ctr"/>
             <a:r>
-              <a:rPr sz="1100" b="1" i="0">
+              <a:rPr sz="1000" b="1" i="0">
                 <a:solidFill>
                   <a:srgbClr val="1D7A72"/>
                 </a:solidFill>
                 <a:latin typeface="Calibri"/>
               </a:rPr>
-              <a:t>ACCURACY MAINTAINED</a:t>
+              <a:t>NO DEGRADATION ACROSS 4 RUNS</a:t>
             </a:r>
           </a:p>
         </p:txBody>
@@ -4736,7 +4736,7 @@
                         <a:rPr sz="1100" b="0">
                           <a:latin typeface="Calibri"/>
                         </a:rPr>
-                        <a:t>0.0706s</a:t>
+                        <a:t>0.0714s</a:t>
                       </a:r>
                     </a:p>
                   </a:txBody>
@@ -4781,7 +4781,7 @@
                           </a:solidFill>
                           <a:latin typeface="Calibri"/>
                         </a:rPr>
-                        <a:t>~334 objects (~23 cases)</a:t>
+                        <a:t>~331 objects (~22 cases)</a:t>
                       </a:r>
                     </a:p>
                   </a:txBody>
@@ -4868,7 +4868,7 @@
                 </a:solidFill>
                 <a:latin typeface="Calibri"/>
               </a:rPr>
-              <a:t>Break-even = 23.61s ÷ 0.0706s/object = ~334 objects = ~23 cases</a:t>
+              <a:t>Break-even = 23.61s ÷ 0.0714s/object = ~331 objects = ~22 cases</a:t>
             </a:r>
           </a:p>
         </p:txBody>
@@ -5010,7 +5010,7 @@
                 </a:solidFill>
                 <a:latin typeface="Calibri"/>
               </a:rPr>
-              <a:t>(~334 objects)</a:t>
+              <a:t>(~331 objects)</a:t>
             </a:r>
           </a:p>
         </p:txBody>
@@ -5790,7 +5790,7 @@
                           </a:solidFill>
                           <a:latin typeface="Calibri"/>
                         </a:rPr>
-                        <a:t>1.33× / object (n=3)</a:t>
+                        <a:t>1.33× / object (n=4)</a:t>
                       </a:r>
                     </a:p>
                   </a:txBody>
@@ -5855,7 +5855,7 @@
                 </a:solidFill>
                 <a:latin typeface="Calibri"/>
               </a:rPr>
-              <a:t>VoxTell — fair GPU-vs-GPU benchmark</a:t>
+              <a:t>VoxTell — precision-matched GPU-vs-GPU benchmark</a:t>
             </a:r>
           </a:p>
         </p:txBody>
@@ -5869,7 +5869,7 @@
         <p:spPr>
           <a:xfrm>
             <a:off x="457200" y="4297680"/>
-            <a:ext cx="10972800" cy="502920"/>
+            <a:ext cx="10972800" cy="566928"/>
           </a:xfrm>
           <a:prstGeom prst="rect">
             <a:avLst/>
@@ -5884,13 +5884,14 @@
           <a:p>
             <a:pPr algn="l"/>
             <a:r>
-              <a:rPr sz="1100" b="0" i="0">
+              <a:rPr sz="1000" b="0" i="0">
                 <a:solidFill>
                   <a:srgbClr val="0F1C2E"/>
                 </a:solidFill>
                 <a:latin typeface="Calibri"/>
               </a:rPr>
-              <a:t>RTX 4070 SUPER: 3.10s → 2.38s (1.3× algorithmic gain, excl. bug fix).  H100 MIG 3g.40gb (job 56948503): 13.61s → 0.77s (17.6× full-stack incl. INT4). Accuracy maintained (&lt; 0.001 DSC change across all changes).</a:t>
+              <a:t>H100 MIG, abdominal CT (job 56964411): 3.27s → 1.28s = 2.6× algorithmic, both arms INT4.  RTX 4070 SUPER, MNI brain (n=5): 1.7× (1.6–1.8×).  H100 on the same brain: 1.0×.
+INT4 vs FP16 on one CT case: DSC 0.97 agreement, INT4 under-segments by 5.5% — not measured on the full set.</a:t>
             </a:r>
           </a:p>
         </p:txBody>
@@ -5960,7 +5961,7 @@
                 </a:solidFill>
                 <a:latin typeface="Calibri"/>
               </a:rPr>
-              <a:t>0.288s → 0.215s per object. Mean speedup 1.33× (n=3: 1.28–1.39×). DSC Δ ≤ +0.0004. Speed and accuracy from same job, same config. Break-even ~69 cases (/scratch).</a:t>
+              <a:t>0.288s → 0.215s per object. Mean speedup 1.33× (n=4: 1.28–1.39×). DSC Δ ≤ +0.0004. Speed and accuracy from same job, same config. Break-even ~69 cases (/scratch).</a:t>
             </a:r>
           </a:p>
         </p:txBody>
@@ -6496,7 +6497,7 @@
                 </a:solidFill>
                 <a:latin typeface="Calibri"/>
               </a:rPr>
-              <a:t>2.27s → 0.55s</a:t>
+              <a:t>3.27s → 1.28s  (CT, H100)</a:t>
             </a:r>
           </a:p>
         </p:txBody>
@@ -7269,7 +7270,7 @@
         <p:spPr>
           <a:xfrm>
             <a:off x="457200" y="5257800"/>
-            <a:ext cx="9144000" cy="320040"/>
+            <a:ext cx="10515600" cy="457200"/>
           </a:xfrm>
           <a:prstGeom prst="rect">
             <a:avLst/>
@@ -7290,7 +7291,7 @@
                 </a:solidFill>
                 <a:latin typeface="Calibri"/>
               </a:rPr>
-              <a:t>Text: 2.7s → 0.02s warm cache  |  Total (no cache): 3.10s → 2.38s on same hardware</a:t>
+              <a:t>With the encoder back on GPU, the same RTX hardware runs v0_gpu at 2.2s — the 3.10s above was the bug, not the baseline. Optimized v3: 1.5s (1.7×, n=5, precision-matched).</a:t>
             </a:r>
           </a:p>
         </p:txBody>
@@ -7360,7 +7361,7 @@
                 </a:solidFill>
                 <a:latin typeface="Calibri"/>
               </a:rPr>
-              <a:t>RTX 4070 SUPER baseline</a:t>
+              <a:t>RTX baseline WITH the bug</a:t>
             </a:r>
           </a:p>
         </p:txBody>
@@ -7776,7 +7777,7 @@
                         <a:rPr sz="1000" b="0">
                           <a:latin typeface="Calibri"/>
                         </a:rPr>
-                        <a:t>tile_step 0.5 → 0.75  (343 → 125 patches)</a:t>
+                        <a:t>tile_step 0.75 + crop-to-nonzero  (25 → 9 patches on CT)</a:t>
                       </a:r>
                     </a:p>
                   </a:txBody>
@@ -7799,7 +7800,7 @@
                           </a:solidFill>
                           <a:latin typeface="Calibri"/>
                         </a:rPr>
-                        <a:t>3.6× sliding window</a:t>
+                        <a:t>2.9× sliding window</a:t>
                       </a:r>
                     </a:p>
                   </a:txBody>
@@ -7887,7 +7888,7 @@
                           </a:solidFill>
                           <a:latin typeface="Calibri"/>
                         </a:rPr>
-                        <a:t>18.7× warm re-query</a:t>
+                        <a:t>29× warm re-query (CT)</a:t>
                       </a:r>
                     </a:p>
                   </a:txBody>
@@ -7975,7 +7976,7 @@
                           </a:solidFill>
                           <a:latin typeface="Calibri"/>
                         </a:rPr>
-                        <a:t>1.4× preprocessing</a:t>
+                        <a:t>no gain measured</a:t>
                       </a:r>
                     </a:p>
                   </a:txBody>
@@ -8063,7 +8064,7 @@
                           </a:solidFill>
                           <a:latin typeface="Calibri"/>
                         </a:rPr>
-                        <a:t>4× text (H100)</a:t>
+                        <a:t>1.5× text fwd pass</a:t>
                       </a:r>
                     </a:p>
                   </a:txBody>
@@ -8086,7 +8087,7 @@
                           </a:solidFill>
                           <a:latin typeface="Calibri"/>
                         </a:rPr>
-                        <a:t>Unverified</a:t>
+                        <a:t>DSC 0.97 agree, −5.5% vox</a:t>
                       </a:r>
                     </a:p>
                   </a:txBody>
@@ -8110,7 +8111,7 @@
         <p:spPr>
           <a:xfrm>
             <a:off x="457200" y="4480560"/>
-            <a:ext cx="3657600" cy="292608"/>
+            <a:ext cx="4572000" cy="292608"/>
           </a:xfrm>
           <a:prstGeom prst="rect">
             <a:avLst/>
@@ -8131,7 +8132,7 @@
                 </a:solidFill>
                 <a:latin typeface="Calibri"/>
               </a:rPr>
-              <a:t>Fair GPU-vs-GPU results</a:t>
+              <a:t>Precision-matched GPU-vs-GPU results</a:t>
             </a:r>
           </a:p>
         </p:txBody>
@@ -8145,7 +8146,7 @@
         <p:spPr>
           <a:xfrm>
             <a:off x="457200" y="4800600"/>
-            <a:ext cx="10972800" cy="822960"/>
+            <a:ext cx="10972800" cy="1005840"/>
           </a:xfrm>
           <a:prstGeom prst="rect">
             <a:avLst/>
@@ -8160,15 +8161,16 @@
           <a:p>
             <a:pPr algn="l"/>
             <a:r>
-              <a:rPr sz="1100" b="0" i="0">
+              <a:rPr sz="1000" b="0" i="0">
                 <a:solidFill>
                   <a:srgbClr val="0F1C2E"/>
                 </a:solidFill>
                 <a:latin typeface="Calibri"/>
               </a:rPr>
-              <a:t>RTX 4070 SUPER (fair_benchmark_results.txt):  v0_gpu 3.10s → v3 2.38s  =  1.3× algorithmic gain
-H100 MIG 3g.40gb (job 56948503):  v0_gpu 13.61s → v3 0.77s  =  17.6× full-stack gain (incl. INT4)
-Bug fix excluded from fair comparison — FP16 GPU placement was a latent defect, not an optimization.</a:t>
+              <a:t>H100 MIG, abdominal CT (job 56964411):  v0_gpu 3.27s → v3 1.28s  =  2.6× algorithmic gain
+H100 MIG, MNI brain (job 56964410):  1.0× — volume too small for tile_step or Numba to act
+RTX 4070 SUPER, MNI brain (n=5):  1.7× (range 1.6–1.8×)
+Both arms INT4 (NF4); GPU, text backbone and sliding-window path pre-warmed; embed cache verified cold.</a:t>
             </a:r>
           </a:p>
         </p:txBody>
@@ -8877,7 +8879,7 @@
                 </a:solidFill>
                 <a:latin typeface="Calibri"/>
               </a:rPr>
-              <a:t>Below 0.005 threshold</a:t>
+              <a:t>n = 294 objects</a:t>
             </a:r>
           </a:p>
         </p:txBody>
@@ -8912,7 +8914,7 @@
                 </a:solidFill>
                 <a:latin typeface="Calibri"/>
               </a:rPr>
-              <a:t>Threshold: any DSC change &lt; 0.005 is within measurement noise for FP16 non-associativity.</a:t>
+              <a:t>No pass/fail threshold applied — the measured delta and its sample size are reported as-is.</a:t>
             </a:r>
           </a:p>
         </p:txBody>
@@ -9497,7 +9499,7 @@
               </a:rPr>
               <a:t>VoxTell accepts free-text prompts ("brain", "left kidney") — each requires a Qwen3-4B text encoder forward pass even with FP16 on GPU.
 nnInteractive accepts a 3-D bounding box directly — no text encoder, the encoder cost is zero. Geometric prompts are sufficient for the CVPR challenge format.
-A direct per-prompt latency comparison requires both models on the same hardware. VoxTell H100 fair benchmark (job 56948503): v0_gpu 13.61s → v3 0.77s = 17.6× full-stack gain.</a:t>
+A direct per-prompt latency comparison requires both models on the same hardware AND the same data. VoxTell H100 on abdominal CT (job 56964411): v0_gpu 3.27s → v3 1.28s = 2.6× algorithmic gain, both arms INT4.</a:t>
             </a:r>
           </a:p>
         </p:txBody>
@@ -10980,7 +10982,7 @@
                 </a:solidFill>
                 <a:latin typeface="Calibri"/>
               </a:rPr>
-              <a:t>Jobs 56923894–896 (n=3 repeats) + 56908464 · fold='all', autozoom=ON · 20 CT cases · 294 objects · H100 MIG 3g.40gb</a:t>
+              <a:t>Jobs 56923894–896 (repeats) + 56908464 — n=4 total · fold='all', autozoom=ON · 20 CT cases · 294 objects · H100 MIG 3g.40gb</a:t>
             </a:r>
           </a:p>
         </p:txBody>
@@ -11051,7 +11053,7 @@
                 <a:latin typeface="Calibri"/>
               </a:rPr>
               <a:t>per-object speedup
-(n=3: 1.28–1.39×)</a:t>
+(n=4: 1.28–1.39×)</a:t>
             </a:r>
           </a:p>
         </p:txBody>
@@ -11658,7 +11660,7 @@
                 </a:solidFill>
                 <a:latin typeface="Calibri"/>
               </a:rPr>
-              <a:t>✓  Confirmed across n=3 repeats (jobs 56923894–896). Range: 1.28×–1.39×. DSC Δ ≤ +0.0004 across all runs — accuracy stable.</a:t>
+              <a:t>✓  Confirmed across n=4 runs (56908464, 56923894–896). Range: 1.28×–1.39×. DSC Δ ≤ +0.0004 across all runs — accuracy stable.</a:t>
             </a:r>
           </a:p>
         </p:txBody>

--- a/slides.pptx
+++ b/slides.pptx
@@ -5327,7 +5327,7 @@
                         <a:rPr sz="1000" b="0">
                           <a:latin typeface="Calibri"/>
                         </a:rPr>
-                        <a:t>BUG FIX: FP16 GPU placement</a:t>
+                        <a:t>Sliding window + crop</a:t>
                       </a:r>
                     </a:p>
                   </a:txBody>
@@ -5347,7 +5347,7 @@
                         <a:rPr sz="1000" b="0">
                           <a:latin typeface="Calibri"/>
                         </a:rPr>
-                        <a:t>dtype=torch.float16 on Qwen3</a:t>
+                        <a:t>tile_step 0.75, crop-to-nonzero</a:t>
                       </a:r>
                     </a:p>
                   </a:txBody>
@@ -5370,7 +5370,7 @@
                           </a:solidFill>
                           <a:latin typeface="Calibri"/>
                         </a:rPr>
-                        <a:t>46.7× text</a:t>
+                        <a:t>2.9× window (CT)</a:t>
                       </a:r>
                     </a:p>
                   </a:txBody>
@@ -5390,7 +5390,7 @@
                         <a:rPr sz="1000" b="0">
                           <a:latin typeface="Calibri"/>
                         </a:rPr>
-                        <a:t>&lt; 0.001</a:t>
+                        <a:t>+0.0006</a:t>
                       </a:r>
                     </a:p>
                   </a:txBody>
@@ -5432,7 +5432,7 @@
                         <a:rPr sz="1000" b="0">
                           <a:latin typeface="Calibri"/>
                         </a:rPr>
-                        <a:t>Sliding window overlap</a:t>
+                        <a:t>Embedding cache</a:t>
                       </a:r>
                     </a:p>
                   </a:txBody>
@@ -5452,7 +5452,7 @@
                         <a:rPr sz="1000" b="0">
                           <a:latin typeface="Calibri"/>
                         </a:rPr>
-                        <a:t>tile_step 0.5 → 0.75</a:t>
+                        <a:t>LRU memory + SHA-256 disk</a:t>
                       </a:r>
                     </a:p>
                   </a:txBody>
@@ -5475,7 +5475,7 @@
                           </a:solidFill>
                           <a:latin typeface="Calibri"/>
                         </a:rPr>
-                        <a:t>3.6× window</a:t>
+                        <a:t>29× warm (CT)</a:t>
                       </a:r>
                     </a:p>
                   </a:txBody>
@@ -5495,7 +5495,7 @@
                         <a:rPr sz="1000" b="0">
                           <a:latin typeface="Calibri"/>
                         </a:rPr>
-                        <a:t>+0.0006</a:t>
+                        <a:t>Identical</a:t>
                       </a:r>
                     </a:p>
                   </a:txBody>
@@ -5537,7 +5537,7 @@
                         <a:rPr sz="1000" b="0">
                           <a:latin typeface="Calibri"/>
                         </a:rPr>
-                        <a:t>Embedding cache</a:t>
+                        <a:t>INT4 (NF4) text backbone</a:t>
                       </a:r>
                     </a:p>
                   </a:txBody>
@@ -5557,7 +5557,7 @@
                         <a:rPr sz="1000" b="0">
                           <a:latin typeface="Calibri"/>
                         </a:rPr>
-                        <a:t>LRU memory + SHA-256 disk</a:t>
+                        <a:t>bitsandbytes, ~2 GB vs ~8 GB</a:t>
                       </a:r>
                     </a:p>
                   </a:txBody>
@@ -5580,7 +5580,7 @@
                           </a:solidFill>
                           <a:latin typeface="Calibri"/>
                         </a:rPr>
-                        <a:t>18.7× warm</a:t>
+                        <a:t>1.5× fwd pass</a:t>
                       </a:r>
                     </a:p>
                   </a:txBody>
@@ -5600,7 +5600,7 @@
                         <a:rPr sz="1000" b="0">
                           <a:latin typeface="Calibri"/>
                         </a:rPr>
-                        <a:t>Identical</a:t>
+                        <a:t>DSC 0.97, −5.5% vox</a:t>
                       </a:r>
                     </a:p>
                   </a:txBody>
@@ -5685,7 +5685,7 @@
                           </a:solidFill>
                           <a:latin typeface="Calibri"/>
                         </a:rPr>
-                        <a:t>1.4× preprocess</a:t>
+                        <a:t>no gain measured</a:t>
                       </a:r>
                     </a:p>
                   </a:txBody>
@@ -6750,7 +6750,7 @@
                 </a:solidFill>
                 <a:latin typeface="Calibri"/>
               </a:rPr>
-              <a:t>VoxTell — Baseline &amp; The Bug</a:t>
+              <a:t>VoxTell — Why the Original 26× Was Wrong</a:t>
             </a:r>
           </a:p>
         </p:txBody>
@@ -6933,7 +6933,7 @@
                           </a:solidFill>
                           <a:latin typeface="Calibri"/>
                         </a:rPr>
-                        <a:t>Text encoding — BUG: Qwen3-4B silently on CPU</a:t>
+                        <a:t>Text encoding — harness loaded FP32</a:t>
                       </a:r>
                     </a:p>
                   </a:txBody>
@@ -6976,7 +6976,7 @@
                           </a:solidFill>
                           <a:latin typeface="Calibri"/>
                         </a:rPr>
-                        <a:t>FP32 overflows 12 GB VRAM → CPU fallback</a:t>
+                        <a:t>Benchmark bug: FP32 overflowed 12 GB → CPU. Model code was never FP32.</a:t>
                       </a:r>
                     </a:p>
                   </a:txBody>
@@ -7106,7 +7106,7 @@
                           </a:solidFill>
                           <a:latin typeface="Calibri"/>
                         </a:rPr>
-                        <a:t>tile_step=0.5, ~343 patches, FP16</a:t>
+                        <a:t>tile_step=0.5, 4 patches on this volume, FP16</a:t>
                       </a:r>
                     </a:p>
                   </a:txBody>
@@ -7165,7 +7165,7 @@
         <p:spPr>
           <a:xfrm>
             <a:off x="457200" y="3611880"/>
-            <a:ext cx="4572000" cy="292608"/>
+            <a:ext cx="6400800" cy="292608"/>
           </a:xfrm>
           <a:prstGeom prst="rect">
             <a:avLst/>
@@ -7186,7 +7186,7 @@
                 </a:solidFill>
                 <a:latin typeface="Calibri"/>
               </a:rPr>
-              <a:t>Root cause</a:t>
+              <a:t>Root cause — in the BENCHMARK, not the model</a:t>
             </a:r>
           </a:p>
         </p:txBody>
@@ -7200,7 +7200,7 @@
         <p:spPr>
           <a:xfrm>
             <a:off x="457200" y="3931920"/>
-            <a:ext cx="5943600" cy="914400"/>
+            <a:ext cx="6583680" cy="1005840"/>
           </a:xfrm>
           <a:prstGeom prst="rect">
             <a:avLst/>
@@ -7221,7 +7221,7 @@
                 </a:solidFill>
                 <a:latin typeface="Calibri"/>
               </a:rPr>
-              <a:t>Qwen3-4B in FP32 requires ~16 GB VRAM. RTX 4070 SUPER has 12 GB. PyTorch silently falls back to CPU when VRAM is insufficient. Fix: load with dtype=torch.float16 → 8 GB VRAM, stays on GPU.</a:t>
+              <a:t>The baseline harness loaded Qwen3-4B in FP32 (~16 GB) on a 12 GB card, so PyTorch silently ran the encoder on CPU. VoxTell itself has always loaded FP16 or INT4 — there is no FP32 path in the model code. This inflated the baseline, not the model.</a:t>
             </a:r>
           </a:p>
         </p:txBody>
@@ -7234,8 +7234,8 @@
         </p:nvSpPr>
         <p:spPr>
           <a:xfrm>
-            <a:off x="457200" y="4937760"/>
-            <a:ext cx="1828800" cy="292608"/>
+            <a:off x="457200" y="5029200"/>
+            <a:ext cx="2743200" cy="292608"/>
           </a:xfrm>
           <a:prstGeom prst="rect">
             <a:avLst/>
@@ -7256,7 +7256,7 @@
                 </a:solidFill>
                 <a:latin typeface="Calibri"/>
               </a:rPr>
-              <a:t>After fix</a:t>
+              <a:t>Why this matters</a:t>
             </a:r>
           </a:p>
         </p:txBody>
@@ -7269,7 +7269,7 @@
         </p:nvSpPr>
         <p:spPr>
           <a:xfrm>
-            <a:off x="457200" y="5257800"/>
+            <a:off x="457200" y="5349240"/>
             <a:ext cx="10515600" cy="457200"/>
           </a:xfrm>
           <a:prstGeom prst="rect">
@@ -7291,7 +7291,7 @@
                 </a:solidFill>
                 <a:latin typeface="Calibri"/>
               </a:rPr>
-              <a:t>With the encoder back on GPU, the same RTX hardware runs v0_gpu at 2.2s — the 3.10s above was the bug, not the baseline. Optimized v3: 1.5s (1.7×, n=5, precision-matched).</a:t>
+              <a:t>Correcting it is a measurement fix, not an optimization — so it earns no row in the speedup table. A correctly measured RTX baseline is 2.2s, not 3.10s.</a:t>
             </a:r>
           </a:p>
         </p:txBody>
@@ -7361,7 +7361,7 @@
                 </a:solidFill>
                 <a:latin typeface="Calibri"/>
               </a:rPr>
-              <a:t>RTX baseline WITH the bug</a:t>
+              <a:t>mis-measured baseline</a:t>
             </a:r>
           </a:p>
         </p:txBody>
@@ -7550,7 +7550,7 @@
         </p:nvGraphicFramePr>
         <p:xfrm>
           <a:off x="457200" y="1097280"/>
-          <a:ext cx="11247120" cy="3200400"/>
+          <a:ext cx="11247120" cy="2743200"/>
         </p:xfrm>
         <a:graphic>
           <a:graphicData uri="http://schemas.openxmlformats.org/drawingml/2006/table">
@@ -7564,7 +7564,7 @@
                 <a:gridCol w="2811780"/>
                 <a:gridCol w="2811780"/>
               </a:tblGrid>
-              <a:tr h="533400">
+              <a:tr h="548640">
                 <a:tc>
                   <a:txBody>
                     <a:bodyPr wrap="square"/>
@@ -7658,7 +7658,7 @@
                   </a:tcPr>
                 </a:tc>
               </a:tr>
-              <a:tr h="533400">
+              <a:tr h="548640">
                 <a:tc>
                   <a:txBody>
                     <a:bodyPr wrap="square"/>
@@ -7669,13 +7669,13 @@
                         <a:rPr sz="1000" b="0">
                           <a:latin typeface="Calibri"/>
                         </a:rPr>
-                        <a:t>BUG FIX: FP16 GPU placement</a:t>
-                      </a:r>
-                    </a:p>
-                  </a:txBody>
-                  <a:tcPr>
-                    <a:solidFill>
-                      <a:srgbClr val="FFF3E0"/>
+                        <a:t>Sliding window overlap</a:t>
+                      </a:r>
+                    </a:p>
+                  </a:txBody>
+                  <a:tcPr>
+                    <a:solidFill>
+                      <a:srgbClr val="FFFFFF"/>
                     </a:solidFill>
                   </a:tcPr>
                 </a:tc>
@@ -7689,13 +7689,13 @@
                         <a:rPr sz="1000" b="0">
                           <a:latin typeface="Calibri"/>
                         </a:rPr>
-                        <a:t>dtype=torch.float16 on Qwen3 → keeps encoder on GPU</a:t>
-                      </a:r>
-                    </a:p>
-                  </a:txBody>
-                  <a:tcPr>
-                    <a:solidFill>
-                      <a:srgbClr val="FFF3E0"/>
+                        <a:t>tile_step 0.75 + crop-to-nonzero  (25 → 9 patches on CT)</a:t>
+                      </a:r>
+                    </a:p>
+                  </a:txBody>
+                  <a:tcPr>
+                    <a:solidFill>
+                      <a:srgbClr val="FFFFFF"/>
                     </a:solidFill>
                   </a:tcPr>
                 </a:tc>
@@ -7708,17 +7708,17 @@
                       <a:r>
                         <a:rPr sz="1000" b="1">
                           <a:solidFill>
-                            <a:srgbClr val="C8912B"/>
+                            <a:srgbClr val="1D7A72"/>
                           </a:solidFill>
                           <a:latin typeface="Calibri"/>
                         </a:rPr>
-                        <a:t>46.7× text encoding</a:t>
-                      </a:r>
-                    </a:p>
-                  </a:txBody>
-                  <a:tcPr>
-                    <a:solidFill>
-                      <a:srgbClr val="FFF3E0"/>
+                        <a:t>2.9× sliding window</a:t>
+                      </a:r>
+                    </a:p>
+                  </a:txBody>
+                  <a:tcPr>
+                    <a:solidFill>
+                      <a:srgbClr val="FFFFFF"/>
                     </a:solidFill>
                   </a:tcPr>
                 </a:tc>
@@ -7735,18 +7735,18 @@
                           </a:solidFill>
                           <a:latin typeface="Calibri"/>
                         </a:rPr>
-                        <a:t>&lt; 0.001</a:t>
-                      </a:r>
-                    </a:p>
-                  </a:txBody>
-                  <a:tcPr>
-                    <a:solidFill>
-                      <a:srgbClr val="FFF3E0"/>
+                        <a:t>+0.0006</a:t>
+                      </a:r>
+                    </a:p>
+                  </a:txBody>
+                  <a:tcPr>
+                    <a:solidFill>
+                      <a:srgbClr val="FFFFFF"/>
                     </a:solidFill>
                   </a:tcPr>
                 </a:tc>
               </a:tr>
-              <a:tr h="533400">
+              <a:tr h="548640">
                 <a:tc>
                   <a:txBody>
                     <a:bodyPr wrap="square"/>
@@ -7757,7 +7757,7 @@
                         <a:rPr sz="1000" b="0">
                           <a:latin typeface="Calibri"/>
                         </a:rPr>
-                        <a:t>Sliding window overlap</a:t>
+                        <a:t>Embedding cache</a:t>
                       </a:r>
                     </a:p>
                   </a:txBody>
@@ -7777,7 +7777,7 @@
                         <a:rPr sz="1000" b="0">
                           <a:latin typeface="Calibri"/>
                         </a:rPr>
-                        <a:t>tile_step 0.75 + crop-to-nonzero  (25 → 9 patches on CT)</a:t>
+                        <a:t>LRU memory + SHA-256 disk cache</a:t>
                       </a:r>
                     </a:p>
                   </a:txBody>
@@ -7800,7 +7800,7 @@
                           </a:solidFill>
                           <a:latin typeface="Calibri"/>
                         </a:rPr>
-                        <a:t>2.9× sliding window</a:t>
+                        <a:t>29× warm re-query (CT)</a:t>
                       </a:r>
                     </a:p>
                   </a:txBody>
@@ -7823,7 +7823,7 @@
                           </a:solidFill>
                           <a:latin typeface="Calibri"/>
                         </a:rPr>
-                        <a:t>+0.0006</a:t>
+                        <a:t>Identical</a:t>
                       </a:r>
                     </a:p>
                   </a:txBody>
@@ -7834,7 +7834,7 @@
                   </a:tcPr>
                 </a:tc>
               </a:tr>
-              <a:tr h="533400">
+              <a:tr h="548640">
                 <a:tc>
                   <a:txBody>
                     <a:bodyPr wrap="square"/>
@@ -7845,7 +7845,7 @@
                         <a:rPr sz="1000" b="0">
                           <a:latin typeface="Calibri"/>
                         </a:rPr>
-                        <a:t>Embedding cache</a:t>
+                        <a:t>Numba preprocessing</a:t>
                       </a:r>
                     </a:p>
                   </a:txBody>
@@ -7865,7 +7865,7 @@
                         <a:rPr sz="1000" b="0">
                           <a:latin typeface="Calibri"/>
                         </a:rPr>
-                        <a:t>LRU memory + SHA-256 disk cache</a:t>
+                        <a:t>@njit(parallel=True) crop + z-score normalize</a:t>
                       </a:r>
                     </a:p>
                   </a:txBody>
@@ -7888,7 +7888,7 @@
                           </a:solidFill>
                           <a:latin typeface="Calibri"/>
                         </a:rPr>
-                        <a:t>29× warm re-query (CT)</a:t>
+                        <a:t>no gain measured</a:t>
                       </a:r>
                     </a:p>
                   </a:txBody>
@@ -7911,7 +7911,7 @@
                           </a:solidFill>
                           <a:latin typeface="Calibri"/>
                         </a:rPr>
-                        <a:t>Identical</a:t>
+                        <a:t>Unchanged</a:t>
                       </a:r>
                     </a:p>
                   </a:txBody>
@@ -7922,7 +7922,7 @@
                   </a:tcPr>
                 </a:tc>
               </a:tr>
-              <a:tr h="533400">
+              <a:tr h="548640">
                 <a:tc>
                   <a:txBody>
                     <a:bodyPr wrap="square"/>
@@ -7933,7 +7933,7 @@
                         <a:rPr sz="1000" b="0">
                           <a:latin typeface="Calibri"/>
                         </a:rPr>
-                        <a:t>Numba preprocessing</a:t>
+                        <a:t>INT4 (NF4) quantization</a:t>
                       </a:r>
                     </a:p>
                   </a:txBody>
@@ -7953,7 +7953,7 @@
                         <a:rPr sz="1000" b="0">
                           <a:latin typeface="Calibri"/>
                         </a:rPr>
-                        <a:t>@njit(parallel=True) crop + z-score normalize</a:t>
+                        <a:t>bitsandbytes NF4 on Qwen3: ~2GB vs ~8GB FP16 VRAM</a:t>
                       </a:r>
                     </a:p>
                   </a:txBody>
@@ -7976,7 +7976,7 @@
                           </a:solidFill>
                           <a:latin typeface="Calibri"/>
                         </a:rPr>
-                        <a:t>no gain measured</a:t>
+                        <a:t>1.5× text fwd pass</a:t>
                       </a:r>
                     </a:p>
                   </a:txBody>
@@ -7999,101 +7999,13 @@
                           </a:solidFill>
                           <a:latin typeface="Calibri"/>
                         </a:rPr>
-                        <a:t>Unchanged</a:t>
+                        <a:t>DSC 0.97 agree, −5.5% vox</a:t>
                       </a:r>
                     </a:p>
                   </a:txBody>
                   <a:tcPr>
                     <a:solidFill>
                       <a:srgbClr val="F5F2EB"/>
-                    </a:solidFill>
-                  </a:tcPr>
-                </a:tc>
-              </a:tr>
-              <a:tr h="533400">
-                <a:tc>
-                  <a:txBody>
-                    <a:bodyPr wrap="square"/>
-                    <a:lstStyle/>
-                    <a:p>
-                      <a:pPr algn="l"/>
-                      <a:r>
-                        <a:rPr sz="1000" b="0">
-                          <a:latin typeface="Calibri"/>
-                        </a:rPr>
-                        <a:t>INT4 (NF4) quantization</a:t>
-                      </a:r>
-                    </a:p>
-                  </a:txBody>
-                  <a:tcPr>
-                    <a:solidFill>
-                      <a:srgbClr val="FFFFFF"/>
-                    </a:solidFill>
-                  </a:tcPr>
-                </a:tc>
-                <a:tc>
-                  <a:txBody>
-                    <a:bodyPr wrap="square"/>
-                    <a:lstStyle/>
-                    <a:p>
-                      <a:pPr algn="l"/>
-                      <a:r>
-                        <a:rPr sz="1000" b="0">
-                          <a:latin typeface="Calibri"/>
-                        </a:rPr>
-                        <a:t>bitsandbytes NF4 on Qwen3: ~2GB vs ~8GB FP16 VRAM</a:t>
-                      </a:r>
-                    </a:p>
-                  </a:txBody>
-                  <a:tcPr>
-                    <a:solidFill>
-                      <a:srgbClr val="FFFFFF"/>
-                    </a:solidFill>
-                  </a:tcPr>
-                </a:tc>
-                <a:tc>
-                  <a:txBody>
-                    <a:bodyPr wrap="square"/>
-                    <a:lstStyle/>
-                    <a:p>
-                      <a:pPr algn="l"/>
-                      <a:r>
-                        <a:rPr sz="1000" b="1">
-                          <a:solidFill>
-                            <a:srgbClr val="1D7A72"/>
-                          </a:solidFill>
-                          <a:latin typeface="Calibri"/>
-                        </a:rPr>
-                        <a:t>1.5× text fwd pass</a:t>
-                      </a:r>
-                    </a:p>
-                  </a:txBody>
-                  <a:tcPr>
-                    <a:solidFill>
-                      <a:srgbClr val="FFFFFF"/>
-                    </a:solidFill>
-                  </a:tcPr>
-                </a:tc>
-                <a:tc>
-                  <a:txBody>
-                    <a:bodyPr wrap="square"/>
-                    <a:lstStyle/>
-                    <a:p>
-                      <a:pPr algn="l"/>
-                      <a:r>
-                        <a:rPr sz="1000" b="0">
-                          <a:solidFill>
-                            <a:srgbClr val="1A6A30"/>
-                          </a:solidFill>
-                          <a:latin typeface="Calibri"/>
-                        </a:rPr>
-                        <a:t>DSC 0.97 agree, −5.5% vox</a:t>
-                      </a:r>
-                    </a:p>
-                  </a:txBody>
-                  <a:tcPr>
-                    <a:solidFill>
-                      <a:srgbClr val="FFFFFF"/>
                     </a:solidFill>
                   </a:tcPr>
                 </a:tc>

--- a/slides.pptx
+++ b/slides.pptx
@@ -5890,7 +5890,7 @@
                 </a:solidFill>
                 <a:latin typeface="Calibri"/>
               </a:rPr>
-              <a:t>H100 MIG, abdominal CT (job 56964411): 3.27s → 1.28s = 2.6× algorithmic, both arms INT4.  RTX 4070 SUPER, MNI brain (n=5): 1.7× (1.6–1.8×).  H100 on the same brain: 1.0×.
+              <a:t>H100 MIG, abdominal CT (n=4): 3.27s → 1.28s = 2.7× algorithmic, range 2.6–2.8×, both arms INT4.  RTX 4070 SUPER, MNI brain (n=5): 1.7× (1.6–1.8×).  H100 on the same brain: 1.0×.
 INT4 vs FP16 on one CT case: DSC 0.97 agreement, INT4 under-segments by 5.5% — not measured on the full set.</a:t>
             </a:r>
           </a:p>
@@ -8079,7 +8079,7 @@
                 </a:solidFill>
                 <a:latin typeface="Calibri"/>
               </a:rPr>
-              <a:t>H100 MIG, abdominal CT (job 56964411):  v0_gpu 3.27s → v3 1.28s  =  2.6× algorithmic gain
+              <a:t>H100 MIG, abdominal CT (n=4):  v0_gpu 3.27s → v3 1.28s  =  2.7× algorithmic (range 2.6–2.8×)
 H100 MIG, MNI brain (job 56964410):  1.0× — volume too small for tile_step or Numba to act
 RTX 4070 SUPER, MNI brain (n=5):  1.7× (range 1.6–1.8×)
 Both arms INT4 (NF4); GPU, text backbone and sliding-window path pre-warmed; embed cache verified cold.</a:t>
@@ -9411,7 +9411,7 @@
               </a:rPr>
               <a:t>VoxTell accepts free-text prompts ("brain", "left kidney") — each requires a Qwen3-4B text encoder forward pass even with FP16 on GPU.
 nnInteractive accepts a 3-D bounding box directly — no text encoder, the encoder cost is zero. Geometric prompts are sufficient for the CVPR challenge format.
-A direct per-prompt latency comparison requires both models on the same hardware AND the same data. VoxTell H100 on abdominal CT (job 56964411): v0_gpu 3.27s → v3 1.28s = 2.6× algorithmic gain, both arms INT4.</a:t>
+A direct per-prompt latency comparison requires both models on the same hardware AND the same data. VoxTell H100 on abdominal CT (job 56964411): v0_gpu 3.27s → v3 1.28s = 2.7× algorithmic gain (n=4, range 2.6–2.8×), both arms INT4.</a:t>
             </a:r>
           </a:p>
         </p:txBody>

--- a/slides.pptx
+++ b/slides.pptx
@@ -5890,7 +5890,7 @@
                 </a:solidFill>
                 <a:latin typeface="Calibri"/>
               </a:rPr>
-              <a:t>H100 MIG, abdominal CT (n=4): 3.27s → 1.28s = 2.7× algorithmic, range 2.6–2.8×, both arms INT4.  RTX 4070 SUPER, MNI brain (n=5): 1.7× (1.6–1.8×).  H100 on the same brain: 1.0×.
+              <a:t>H100 MIG 3g.40gb, CVPR validation CT (n=4): 3.27s → 1.28s = 2.7× algorithmic, range 2.6–2.8×, both arms INT4.
 INT4 vs FP16 on one CT case: DSC 0.97 agreement, INT4 under-segments by 5.5% — not measured on the full set.</a:t>
             </a:r>
           </a:p>
@@ -5904,7 +5904,7 @@
         </p:nvSpPr>
         <p:spPr>
           <a:xfrm>
-            <a:off x="457200" y="4892040"/>
+            <a:off x="457200" y="4709160"/>
             <a:ext cx="7315200" cy="292608"/>
           </a:xfrm>
           <a:prstGeom prst="rect">
@@ -5926,7 +5926,7 @@
                 </a:solidFill>
                 <a:latin typeface="Calibri"/>
               </a:rPr>
-              <a:t>nnInteractive (H100 MIG 3g.40gb, Fir cluster, job 56908464)</a:t>
+              <a:t>nnInteractive (H100 MIG 3g.40gb, Fir cluster, n=4)</a:t>
             </a:r>
           </a:p>
         </p:txBody>
@@ -5939,7 +5939,7 @@
         </p:nvSpPr>
         <p:spPr>
           <a:xfrm>
-            <a:off x="457200" y="5212080"/>
+            <a:off x="457200" y="5029200"/>
             <a:ext cx="10972800" cy="411480"/>
           </a:xfrm>
           <a:prstGeom prst="rect">
@@ -5961,7 +5961,78 @@
                 </a:solidFill>
                 <a:latin typeface="Calibri"/>
               </a:rPr>
-              <a:t>0.288s → 0.215s per object. Mean speedup 1.33× (n=4: 1.28–1.39×). DSC Δ ≤ +0.0004. Speed and accuracy from same job, same config. Break-even ~69 cases (/scratch).</a:t>
+              <a:t>0.288s → 0.215s per object. Mean speedup 1.33× (n=4: 1.28–1.39×). DSC Δ ≤ +0.0004. Speed and accuracy from same job, same config. Break-even ~331 objects (~22 cases).</a:t>
+            </a:r>
+          </a:p>
+        </p:txBody>
+      </p:sp>
+      <p:sp>
+        <p:nvSpPr>
+          <p:cNvPr id="10" name="TextBox 9"/>
+          <p:cNvSpPr txBox="1"/>
+          <p:nvPr/>
+        </p:nvSpPr>
+        <p:spPr>
+          <a:xfrm>
+            <a:off x="457200" y="5532120"/>
+            <a:ext cx="5486400" cy="292608"/>
+          </a:xfrm>
+          <a:prstGeom prst="rect">
+            <a:avLst/>
+          </a:prstGeom>
+          <a:noFill/>
+        </p:spPr>
+        <p:txBody>
+          <a:bodyPr wrap="square">
+            <a:spAutoFit/>
+          </a:bodyPr>
+          <a:lstStyle/>
+          <a:p>
+            <a:pPr algn="l"/>
+            <a:r>
+              <a:rPr sz="1000" b="1" i="0">
+                <a:solidFill>
+                  <a:srgbClr val="0F1C2E"/>
+                </a:solidFill>
+                <a:latin typeface="Calibri"/>
+              </a:rPr>
+              <a:t>How these numbers were validated</a:t>
+            </a:r>
+          </a:p>
+        </p:txBody>
+      </p:sp>
+      <p:sp>
+        <p:nvSpPr>
+          <p:cNvPr id="11" name="TextBox 10"/>
+          <p:cNvSpPr txBox="1"/>
+          <p:nvPr/>
+        </p:nvSpPr>
+        <p:spPr>
+          <a:xfrm>
+            <a:off x="457200" y="5852160"/>
+            <a:ext cx="11247120" cy="777240"/>
+          </a:xfrm>
+          <a:prstGeom prst="rect">
+            <a:avLst/>
+          </a:prstGeom>
+          <a:noFill/>
+        </p:spPr>
+        <p:txBody>
+          <a:bodyPr wrap="square">
+            <a:spAutoFit/>
+          </a:bodyPr>
+          <a:lstStyle/>
+          <a:p>
+            <a:pPr algn="l"/>
+            <a:r>
+              <a:rPr sz="1000" b="0" i="0">
+                <a:solidFill>
+                  <a:srgbClr val="5A6478"/>
+                </a:solidFill>
+                <a:latin typeface="Calibri"/>
+              </a:rPr>
+              <a:t>Every arm precision-matched (both INT4); GPU, text backbone and sliding-window path warmed before timing; embed cache asserted empty before each cold measurement; every figure repeated n≥4 and cited with its range.
+Running the same script on two GPUs is what caught the errors: identical phases behaving differently on RTX vs H100 exposed an ordering artifact that had inflated an earlier result to 7.1×.</a:t>
             </a:r>
           </a:p>
         </p:txBody>
@@ -6885,7 +6956,7 @@
                           </a:solidFill>
                           <a:latin typeface="Calibri"/>
                         </a:rPr>
-                        <a:t>Latency (v0_gpu, RTX 4070 SUPER)</a:t>
+                        <a:t>Correctly measured (RTX, n=5)</a:t>
                       </a:r>
                     </a:p>
                   </a:txBody>
@@ -6933,7 +7004,7 @@
                           </a:solidFill>
                           <a:latin typeface="Calibri"/>
                         </a:rPr>
-                        <a:t>Text encoding — harness loaded FP32</a:t>
+                        <a:t>Text encoding (INT4, on GPU)</a:t>
                       </a:r>
                     </a:p>
                   </a:txBody>
@@ -6953,7 +7024,7 @@
                         <a:rPr sz="1000" b="0">
                           <a:latin typeface="Calibri"/>
                         </a:rPr>
-                        <a:t>~2.7s</a:t>
+                        <a:t>0.151s</a:t>
                       </a:r>
                     </a:p>
                   </a:txBody>
@@ -6976,7 +7047,7 @@
                           </a:solidFill>
                           <a:latin typeface="Calibri"/>
                         </a:rPr>
-                        <a:t>Benchmark bug: FP32 overflowed 12 GB → CPU. Model code was never FP32.</a:t>
+                        <a:t>The FP32 harness bug put this on CPU at ~2.7s</a:t>
                       </a:r>
                     </a:p>
                   </a:txBody>
@@ -7018,7 +7089,7 @@
                         <a:rPr sz="1000" b="0">
                           <a:latin typeface="Calibri"/>
                         </a:rPr>
-                        <a:t>~0.23s</a:t>
+                        <a:t>0.075s</a:t>
                       </a:r>
                     </a:p>
                   </a:txBody>
@@ -7063,7 +7134,7 @@
                         <a:rPr sz="1000" b="0">
                           <a:latin typeface="Calibri"/>
                         </a:rPr>
-                        <a:t>Sliding window inference (GPU, warm)</a:t>
+                        <a:t>Sliding window (tile_step=0.5)</a:t>
                       </a:r>
                     </a:p>
                   </a:txBody>
@@ -7083,7 +7154,7 @@
                         <a:rPr sz="1000" b="0">
                           <a:latin typeface="Calibri"/>
                         </a:rPr>
-                        <a:t>~0.17s</a:t>
+                        <a:t>1.92s</a:t>
                       </a:r>
                     </a:p>
                   </a:txBody>
@@ -7106,7 +7177,7 @@
                           </a:solidFill>
                           <a:latin typeface="Calibri"/>
                         </a:rPr>
-                        <a:t>tile_step=0.5, 4 patches on this volume, FP16</a:t>
+                        <a:t>4 patches on this volume, FP16</a:t>
                       </a:r>
                     </a:p>
                   </a:txBody>
@@ -7151,7 +7222,7 @@
                 </a:solidFill>
                 <a:latin typeface="Calibri"/>
               </a:rPr>
-              <a:t>Total: ~3.10s per prompt  —  dominated by text encoder running on CPU (silent bug)</a:t>
+              <a:t>Correctly measured baseline: 2.18s.  The reported 3.10s came from the encoder running on CPU.</a:t>
             </a:r>
           </a:p>
         </p:txBody>
@@ -7291,7 +7362,7 @@
                 </a:solidFill>
                 <a:latin typeface="Calibri"/>
               </a:rPr>
-              <a:t>Correcting it is a measurement fix, not an optimization — so it earns no row in the speedup table. A correctly measured RTX baseline is 2.2s, not 3.10s.</a:t>
+              <a:t>Correcting it is a measurement fix, not an optimization — so it earns no row in the speedup table. The 3.10s figure was the bug, not the model.</a:t>
             </a:r>
           </a:p>
         </p:txBody>
@@ -7304,8 +7375,8 @@
         </p:nvSpPr>
         <p:spPr>
           <a:xfrm>
-            <a:off x="8961120" y="3566160"/>
-            <a:ext cx="2743200" cy="777240"/>
+            <a:off x="9052560" y="3566160"/>
+            <a:ext cx="2651760" cy="731520"/>
           </a:xfrm>
           <a:prstGeom prst="rect">
             <a:avLst/>
@@ -7320,13 +7391,13 @@
           <a:p>
             <a:pPr algn="ctr"/>
             <a:r>
-              <a:rPr sz="4000" b="1" i="0">
+              <a:rPr sz="3600" b="1" i="0">
                 <a:solidFill>
                   <a:srgbClr val="C8912B"/>
                 </a:solidFill>
                 <a:latin typeface="Calibri"/>
               </a:rPr>
-              <a:t>3.10s</a:t>
+              <a:t>2.18s</a:t>
             </a:r>
           </a:p>
         </p:txBody>
@@ -7339,8 +7410,8 @@
         </p:nvSpPr>
         <p:spPr>
           <a:xfrm>
-            <a:off x="8686800" y="4343400"/>
-            <a:ext cx="3200400" cy="320040"/>
+            <a:off x="8869680" y="4297680"/>
+            <a:ext cx="3017520" cy="320040"/>
           </a:xfrm>
           <a:prstGeom prst="rect">
             <a:avLst/>
@@ -7361,7 +7432,7 @@
                 </a:solidFill>
                 <a:latin typeface="Calibri"/>
               </a:rPr>
-              <a:t>mis-measured baseline</a:t>
+              <a:t>correct RTX baseline</a:t>
             </a:r>
           </a:p>
         </p:txBody>
@@ -7465,7 +7536,7 @@
                 </a:solidFill>
                 <a:latin typeface="Calibri"/>
               </a:rPr>
-              <a:t>VoxTell — Bug Fix + Three Algorithmic Optimizations</a:t>
+              <a:t>VoxTell — Four Algorithmic Optimizations</a:t>
             </a:r>
           </a:p>
         </p:txBody>
@@ -8044,7 +8115,7 @@
                 </a:solidFill>
                 <a:latin typeface="Calibri"/>
               </a:rPr>
-              <a:t>Precision-matched GPU-vs-GPU results</a:t>
+              <a:t>Precision-matched GPU-vs-GPU result</a:t>
             </a:r>
           </a:p>
         </p:txBody>
@@ -8079,10 +8150,9 @@
                 </a:solidFill>
                 <a:latin typeface="Calibri"/>
               </a:rPr>
-              <a:t>H100 MIG, abdominal CT (n=4):  v0_gpu 3.27s → v3 1.28s  =  2.7× algorithmic (range 2.6–2.8×)
-H100 MIG, MNI brain (job 56964410):  1.0× — volume too small for tile_step or Numba to act
-RTX 4070 SUPER, MNI brain (n=5):  1.7× (range 1.6–1.8×)
-Both arms INT4 (NF4); GPU, text backbone and sliding-window path pre-warmed; embed cache verified cold.</a:t>
+              <a:t>H100 MIG 3g.40gb, CVPR validation CT (n=4):  v0_gpu 3.27s → v3 1.28s  =  2.7× (range 2.6–2.8×)
+Both arms INT4 (NF4). GPU, text backbone and sliding-window path pre-warmed; embed cache verified cold.
+Measured on CT, not the MNI brain: at 189×233×197 against a 192³ patch the brain gives 4 patches at either tile_step, so it cannot exercise these optimizations.</a:t>
             </a:r>
           </a:p>
         </p:txBody>

--- a/slides.pptx
+++ b/slides.pptx
@@ -5869,7 +5869,7 @@
         <p:spPr>
           <a:xfrm>
             <a:off x="457200" y="4297680"/>
-            <a:ext cx="10972800" cy="566928"/>
+            <a:ext cx="11247120" cy="457200"/>
           </a:xfrm>
           <a:prstGeom prst="rect">
             <a:avLst/>
@@ -5904,7 +5904,7 @@
         </p:nvSpPr>
         <p:spPr>
           <a:xfrm>
-            <a:off x="457200" y="4709160"/>
+            <a:off x="457200" y="4800600"/>
             <a:ext cx="7315200" cy="292608"/>
           </a:xfrm>
           <a:prstGeom prst="rect">
@@ -5939,8 +5939,8 @@
         </p:nvSpPr>
         <p:spPr>
           <a:xfrm>
-            <a:off x="457200" y="5029200"/>
-            <a:ext cx="10972800" cy="411480"/>
+            <a:off x="457200" y="5120640"/>
+            <a:ext cx="11247120" cy="384048"/>
           </a:xfrm>
           <a:prstGeom prst="rect">
             <a:avLst/>
@@ -5955,7 +5955,7 @@
           <a:p>
             <a:pPr algn="l"/>
             <a:r>
-              <a:rPr sz="1100" b="0" i="0">
+              <a:rPr sz="1000" b="0" i="0">
                 <a:solidFill>
                   <a:srgbClr val="0F1C2E"/>
                 </a:solidFill>
@@ -5974,7 +5974,7 @@
         </p:nvSpPr>
         <p:spPr>
           <a:xfrm>
-            <a:off x="457200" y="5532120"/>
+            <a:off x="457200" y="5577840"/>
             <a:ext cx="5486400" cy="292608"/>
           </a:xfrm>
           <a:prstGeom prst="rect">
@@ -6009,8 +6009,8 @@
         </p:nvSpPr>
         <p:spPr>
           <a:xfrm>
-            <a:off x="457200" y="5852160"/>
-            <a:ext cx="11247120" cy="777240"/>
+            <a:off x="457200" y="5897880"/>
+            <a:ext cx="11247120" cy="822960"/>
           </a:xfrm>
           <a:prstGeom prst="rect">
             <a:avLst/>
@@ -6025,7 +6025,7 @@
           <a:p>
             <a:pPr algn="l"/>
             <a:r>
-              <a:rPr sz="1000" b="0" i="0">
+              <a:rPr sz="900" b="0" i="0">
                 <a:solidFill>
                   <a:srgbClr val="5A6478"/>
                 </a:solidFill>
@@ -6314,7 +6314,8 @@
               <a:t>Dice Similarity Coefficient (DSC) = 2|A∩B| / (|A|+|B|)
   0 = no overlap     1 = perfect
   &gt; 0.70 = clinically acceptable
-  Our results: ~0.79</a:t>
+  nnInteractive: 0.779  (881 CT cases)
+  VoxTell: 0.809  (5 CT cases)</a:t>
             </a:r>
           </a:p>
         </p:txBody>
@@ -8305,7 +8306,7 @@
         <p:spPr>
           <a:xfrm>
             <a:off x="457200" y="822960"/>
-            <a:ext cx="8229600" cy="365760"/>
+            <a:ext cx="8412480" cy="365760"/>
           </a:xfrm>
           <a:prstGeom prst="rect">
             <a:avLst/>
@@ -8326,7 +8327,7 @@
                 </a:solidFill>
                 <a:latin typeface="Calibri"/>
               </a:rPr>
-              <a:t>All optimizations preserve segmentation quality</a:t>
+              <a:t>Speed optimizations preserve DSC; INT4 quantization changes the output</a:t>
             </a:r>
           </a:p>
         </p:txBody>
@@ -8436,7 +8437,7 @@
                         <a:rPr sz="1100" b="0">
                           <a:latin typeface="Calibri"/>
                         </a:rPr>
-                        <a:t>Baseline v0_gpu</a:t>
+                        <a:t>v0_gpu  (tile_step=0.5)</a:t>
                       </a:r>
                     </a:p>
                   </a:txBody>
@@ -8456,7 +8457,7 @@
                         <a:rPr sz="1100" b="0">
                           <a:latin typeface="Calibri"/>
                         </a:rPr>
-                        <a:t>0.7794</a:t>
+                        <a:t>0.8090</a:t>
                       </a:r>
                     </a:p>
                   </a:txBody>
@@ -8498,7 +8499,7 @@
                         <a:rPr sz="1100" b="0">
                           <a:latin typeface="Calibri"/>
                         </a:rPr>
-                        <a:t>+ FP16 GPU placement</a:t>
+                        <a:t>v3  (tile_step=0.75)</a:t>
                       </a:r>
                     </a:p>
                   </a:txBody>
@@ -8518,7 +8519,7 @@
                         <a:rPr sz="1100" b="0">
                           <a:latin typeface="Calibri"/>
                         </a:rPr>
-                        <a:t>0.7795</a:t>
+                        <a:t>0.8093</a:t>
                       </a:r>
                     </a:p>
                   </a:txBody>
@@ -8541,7 +8542,7 @@
                           </a:solidFill>
                           <a:latin typeface="Calibri"/>
                         </a:rPr>
-                        <a:t>&lt; 0.001</a:t>
+                        <a:t>+0.0003</a:t>
                       </a:r>
                     </a:p>
                   </a:txBody>
@@ -8563,7 +8564,7 @@
                         <a:rPr sz="1100" b="0">
                           <a:latin typeface="Calibri"/>
                         </a:rPr>
-                        <a:t>+ Sliding window (0.75)</a:t>
+                        <a:t>INT4 vs FP16 backbone</a:t>
                       </a:r>
                     </a:p>
                   </a:txBody>
@@ -8583,7 +8584,7 @@
                         <a:rPr sz="1100" b="0">
                           <a:latin typeface="Calibri"/>
                         </a:rPr>
-                        <a:t>0.7800</a:t>
+                        <a:t>agreement 0.9716</a:t>
                       </a:r>
                     </a:p>
                   </a:txBody>
@@ -8606,7 +8607,7 @@
                           </a:solidFill>
                           <a:latin typeface="Calibri"/>
                         </a:rPr>
-                        <a:t>+0.0006</a:t>
+                        <a:t>−5.5% voxels</a:t>
                       </a:r>
                     </a:p>
                   </a:txBody>
@@ -8628,7 +8629,7 @@
                         <a:rPr sz="1100" b="0">
                           <a:latin typeface="Calibri"/>
                         </a:rPr>
-                        <a:t>+ Embedding cache</a:t>
+                        <a:t>Embedding cache</a:t>
                       </a:r>
                     </a:p>
                   </a:txBody>
@@ -8648,7 +8649,7 @@
                         <a:rPr sz="1100" b="0">
                           <a:latin typeface="Calibri"/>
                         </a:rPr>
-                        <a:t>0.7800</a:t>
+                        <a:t>bit-identical</a:t>
                       </a:r>
                     </a:p>
                   </a:txBody>
@@ -8666,9 +8667,12 @@
                       <a:pPr algn="l"/>
                       <a:r>
                         <a:rPr sz="1100" b="0">
-                          <a:latin typeface="Calibri"/>
-                        </a:rPr>
-                        <a:t>Identical</a:t>
+                          <a:solidFill>
+                            <a:srgbClr val="1A6A30"/>
+                          </a:solidFill>
+                          <a:latin typeface="Calibri"/>
+                        </a:rPr>
+                        <a:t>returns stored tensor</a:t>
                       </a:r>
                     </a:p>
                   </a:txBody>
@@ -8785,13 +8789,13 @@
           <a:p>
             <a:pPr algn="ctr"/>
             <a:r>
-              <a:rPr sz="3600" b="1" i="0">
+              <a:rPr sz="3200" b="1" i="0">
                 <a:solidFill>
                   <a:srgbClr val="1D7A72"/>
                 </a:solidFill>
                 <a:latin typeface="Calibri"/>
               </a:rPr>
-              <a:t>&lt; 0.001</a:t>
+              <a:t>+0.0003</a:t>
             </a:r>
           </a:p>
         </p:txBody>
@@ -8855,13 +8859,13 @@
           <a:p>
             <a:pPr algn="ctr"/>
             <a:r>
-              <a:rPr sz="1000" b="0" i="0">
+              <a:rPr sz="900" b="0" i="0">
                 <a:solidFill>
                   <a:srgbClr val="5A6478"/>
                 </a:solidFill>
                 <a:latin typeface="Calibri"/>
               </a:rPr>
-              <a:t>n = 294 objects</a:t>
+              <a:t>n = 65 objects, 5 CT cases</a:t>
             </a:r>
           </a:p>
         </p:txBody>
@@ -8896,7 +8900,7 @@
                 </a:solidFill>
                 <a:latin typeface="Calibri"/>
               </a:rPr>
-              <a:t>No pass/fail threshold applied — the measured delta and its sample size are reported as-is.</a:t>
+              <a:t>VoxTell DSC from accuracy_results.csv (5 AMOS CT cases, 65 objects). No pass/fail threshold applied. INT4 agreement is n=1 and measures output change, not accuracy vs ground truth.</a:t>
             </a:r>
           </a:p>
         </p:txBody>
@@ -9049,7 +9053,7 @@
         <p:spPr>
           <a:xfrm>
             <a:off x="457200" y="822960"/>
-            <a:ext cx="8229600" cy="320040"/>
+            <a:ext cx="5852160" cy="320040"/>
           </a:xfrm>
           <a:prstGeom prst="rect">
             <a:avLst/>

--- a/slides.pptx
+++ b/slides.pptx
@@ -8830,7 +8830,7 @@
                 </a:solidFill>
                 <a:latin typeface="Calibri"/>
               </a:rPr>
-              <a:t>ACCURACY MAINTAINED</a:t>
+              <a:t>tile_step: DSC held</a:t>
             </a:r>
           </a:p>
         </p:txBody>

--- a/slides.pptx
+++ b/slides.pptx
@@ -3446,8 +3446,8 @@
         </p:nvSpPr>
         <p:spPr>
           <a:xfrm>
-            <a:off x="822960" y="1600200"/>
-            <a:ext cx="4572000" cy="457200"/>
+            <a:off x="822960" y="1554480"/>
+            <a:ext cx="4572000" cy="411480"/>
           </a:xfrm>
           <a:prstGeom prst="rect">
             <a:avLst/>
@@ -3481,25 +3481,21 @@
         </p:nvSpPr>
         <p:spPr>
           <a:xfrm>
-            <a:off x="822960" y="2103120"/>
-            <a:ext cx="4663440" cy="1463040"/>
-          </a:xfrm>
-          <a:prstGeom prst="rect">
-            <a:avLst/>
-          </a:prstGeom>
-          <a:noFill/>
-        </p:spPr>
-        <p:txBody>
-          <a:bodyPr wrap="square">
-            <a:spAutoFit/>
-          </a:bodyPr>
-          <a:lstStyle/>
-          <a:p>
-            <a:pPr algn="l">
-              <a:spcAft>
-                <a:spcPts val="400"/>
-              </a:spcAft>
-            </a:pPr>
+            <a:off x="822960" y="2057400"/>
+            <a:ext cx="4754880" cy="384048"/>
+          </a:xfrm>
+          <a:prstGeom prst="rect">
+            <a:avLst/>
+          </a:prstGeom>
+          <a:noFill/>
+        </p:spPr>
+        <p:txBody>
+          <a:bodyPr wrap="square">
+            <a:spAutoFit/>
+          </a:bodyPr>
+          <a:lstStyle/>
+          <a:p>
+            <a:pPr algn="l"/>
             <a:r>
               <a:rPr sz="1300" b="0">
                 <a:solidFill>
@@ -3507,15 +3503,34 @@
                 </a:solidFill>
                 <a:latin typeface="Calibri"/>
               </a:rPr>
-              <a:t>Our lab's CVPR submission. Segments from a free-text prompt</a:t>
-            </a:r>
-          </a:p>
-          <a:p>
-            <a:pPr algn="l">
-              <a:spcAft>
-                <a:spcPts val="400"/>
-              </a:spcAft>
-            </a:pPr>
+              <a:t>—  Our lab's CVPR submission</a:t>
+            </a:r>
+          </a:p>
+        </p:txBody>
+      </p:sp>
+      <p:sp>
+        <p:nvSpPr>
+          <p:cNvPr id="7" name="TextBox 6"/>
+          <p:cNvSpPr txBox="1"/>
+          <p:nvPr/>
+        </p:nvSpPr>
+        <p:spPr>
+          <a:xfrm>
+            <a:off x="822960" y="2441448"/>
+            <a:ext cx="4754880" cy="384048"/>
+          </a:xfrm>
+          <a:prstGeom prst="rect">
+            <a:avLst/>
+          </a:prstGeom>
+          <a:noFill/>
+        </p:spPr>
+        <p:txBody>
+          <a:bodyPr wrap="square">
+            <a:spAutoFit/>
+          </a:bodyPr>
+          <a:lstStyle/>
+          <a:p>
+            <a:pPr algn="l"/>
             <a:r>
               <a:rPr sz="1300" b="0">
                 <a:solidFill>
@@ -3523,15 +3538,34 @@
                 </a:solidFill>
                 <a:latin typeface="Calibri"/>
               </a:rPr>
-              <a:t>("the spleen"), which requires a 4-billion-parameter language</a:t>
-            </a:r>
-          </a:p>
-          <a:p>
-            <a:pPr algn="l">
-              <a:spcAft>
-                <a:spcPts val="400"/>
-              </a:spcAft>
-            </a:pPr>
+              <a:t>—  Prompt is free text — “the spleen”</a:t>
+            </a:r>
+          </a:p>
+        </p:txBody>
+      </p:sp>
+      <p:sp>
+        <p:nvSpPr>
+          <p:cNvPr id="8" name="TextBox 7"/>
+          <p:cNvSpPr txBox="1"/>
+          <p:nvPr/>
+        </p:nvSpPr>
+        <p:spPr>
+          <a:xfrm>
+            <a:off x="822960" y="2825496"/>
+            <a:ext cx="4754880" cy="384048"/>
+          </a:xfrm>
+          <a:prstGeom prst="rect">
+            <a:avLst/>
+          </a:prstGeom>
+          <a:noFill/>
+        </p:spPr>
+        <p:txBody>
+          <a:bodyPr wrap="square">
+            <a:spAutoFit/>
+          </a:bodyPr>
+          <a:lstStyle/>
+          <a:p>
+            <a:pPr algn="l"/>
             <a:r>
               <a:rPr sz="1300" b="0">
                 <a:solidFill>
@@ -3539,21 +3573,21 @@
                 </a:solidFill>
                 <a:latin typeface="Calibri"/>
               </a:rPr>
-              <a:t>model to encode the text before segmentation begins.</a:t>
-            </a:r>
-          </a:p>
-        </p:txBody>
-      </p:sp>
-      <p:sp>
-        <p:nvSpPr>
-          <p:cNvPr id="7" name="TextBox 6"/>
-          <p:cNvSpPr txBox="1"/>
-          <p:nvPr/>
-        </p:nvSpPr>
-        <p:spPr>
-          <a:xfrm>
-            <a:off x="6309360" y="1600200"/>
-            <a:ext cx="4572000" cy="457200"/>
+              <a:t>—  Needs a 4B-parameter LLM to encode it first</a:t>
+            </a:r>
+          </a:p>
+        </p:txBody>
+      </p:sp>
+      <p:sp>
+        <p:nvSpPr>
+          <p:cNvPr id="9" name="TextBox 8"/>
+          <p:cNvSpPr txBox="1"/>
+          <p:nvPr/>
+        </p:nvSpPr>
+        <p:spPr>
+          <a:xfrm>
+            <a:off x="6309360" y="1554480"/>
+            <a:ext cx="4572000" cy="411480"/>
           </a:xfrm>
           <a:prstGeom prst="rect">
             <a:avLst/>
@@ -3581,31 +3615,27 @@
       </p:sp>
       <p:sp>
         <p:nvSpPr>
-          <p:cNvPr id="8" name="TextBox 7"/>
-          <p:cNvSpPr txBox="1"/>
-          <p:nvPr/>
-        </p:nvSpPr>
-        <p:spPr>
-          <a:xfrm>
-            <a:off x="6309360" y="2103120"/>
-            <a:ext cx="4663440" cy="1463040"/>
-          </a:xfrm>
-          <a:prstGeom prst="rect">
-            <a:avLst/>
-          </a:prstGeom>
-          <a:noFill/>
-        </p:spPr>
-        <p:txBody>
-          <a:bodyPr wrap="square">
-            <a:spAutoFit/>
-          </a:bodyPr>
-          <a:lstStyle/>
-          <a:p>
-            <a:pPr algn="l">
-              <a:spcAft>
-                <a:spcPts val="400"/>
-              </a:spcAft>
-            </a:pPr>
+          <p:cNvPr id="10" name="TextBox 9"/>
+          <p:cNvSpPr txBox="1"/>
+          <p:nvPr/>
+        </p:nvSpPr>
+        <p:spPr>
+          <a:xfrm>
+            <a:off x="6309360" y="2057400"/>
+            <a:ext cx="4754880" cy="384048"/>
+          </a:xfrm>
+          <a:prstGeom prst="rect">
+            <a:avLst/>
+          </a:prstGeom>
+          <a:noFill/>
+        </p:spPr>
+        <p:txBody>
+          <a:bodyPr wrap="square">
+            <a:spAutoFit/>
+          </a:bodyPr>
+          <a:lstStyle/>
+          <a:p>
+            <a:pPr algn="l"/>
             <a:r>
               <a:rPr sz="1300" b="0">
                 <a:solidFill>
@@ -3613,15 +3643,34 @@
                 </a:solidFill>
                 <a:latin typeface="Calibri"/>
               </a:rPr>
-              <a:t>The challenge baseline. Segments from a 3-D bounding box.</a:t>
-            </a:r>
-          </a:p>
-          <a:p>
-            <a:pPr algn="l">
-              <a:spcAft>
-                <a:spcPts val="400"/>
-              </a:spcAft>
-            </a:pPr>
+              <a:t>—  The CVPR challenge baseline</a:t>
+            </a:r>
+          </a:p>
+        </p:txBody>
+      </p:sp>
+      <p:sp>
+        <p:nvSpPr>
+          <p:cNvPr id="11" name="TextBox 10"/>
+          <p:cNvSpPr txBox="1"/>
+          <p:nvPr/>
+        </p:nvSpPr>
+        <p:spPr>
+          <a:xfrm>
+            <a:off x="6309360" y="2441448"/>
+            <a:ext cx="4754880" cy="384048"/>
+          </a:xfrm>
+          <a:prstGeom prst="rect">
+            <a:avLst/>
+          </a:prstGeom>
+          <a:noFill/>
+        </p:spPr>
+        <p:txBody>
+          <a:bodyPr wrap="square">
+            <a:spAutoFit/>
+          </a:bodyPr>
+          <a:lstStyle/>
+          <a:p>
+            <a:pPr algn="l"/>
             <a:r>
               <a:rPr sz="1300" b="0">
                 <a:solidFill>
@@ -3629,15 +3678,34 @@
                 </a:solidFill>
                 <a:latin typeface="Calibri"/>
               </a:rPr>
-              <a:t>No text encoder at all, so it starts from a much lower</a:t>
-            </a:r>
-          </a:p>
-          <a:p>
-            <a:pPr algn="l">
-              <a:spcAft>
-                <a:spcPts val="400"/>
-              </a:spcAft>
-            </a:pPr>
+              <a:t>—  Prompt is a 3-D bounding box</a:t>
+            </a:r>
+          </a:p>
+        </p:txBody>
+      </p:sp>
+      <p:sp>
+        <p:nvSpPr>
+          <p:cNvPr id="12" name="TextBox 11"/>
+          <p:cNvSpPr txBox="1"/>
+          <p:nvPr/>
+        </p:nvSpPr>
+        <p:spPr>
+          <a:xfrm>
+            <a:off x="6309360" y="2825496"/>
+            <a:ext cx="4754880" cy="384048"/>
+          </a:xfrm>
+          <a:prstGeom prst="rect">
+            <a:avLst/>
+          </a:prstGeom>
+          <a:noFill/>
+        </p:spPr>
+        <p:txBody>
+          <a:bodyPr wrap="square">
+            <a:spAutoFit/>
+          </a:bodyPr>
+          <a:lstStyle/>
+          <a:p>
+            <a:pPr algn="l"/>
             <a:r>
               <a:rPr sz="1300" b="0">
                 <a:solidFill>
@@ -3645,20 +3713,20 @@
                 </a:solidFill>
                 <a:latin typeface="Calibri"/>
               </a:rPr>
-              <a:t>per-prompt cost.</a:t>
-            </a:r>
-          </a:p>
-        </p:txBody>
-      </p:sp>
-      <p:sp>
-        <p:nvSpPr>
-          <p:cNvPr id="9" name="Rectangle 8"/>
+              <a:t>—  No text encoder — far cheaper per prompt</a:t>
+            </a:r>
+          </a:p>
+        </p:txBody>
+      </p:sp>
+      <p:sp>
+        <p:nvSpPr>
+          <p:cNvPr id="13" name="Rectangle 12"/>
           <p:cNvSpPr/>
           <p:nvPr/>
         </p:nvSpPr>
         <p:spPr>
           <a:xfrm>
-            <a:off x="822960" y="3931920"/>
+            <a:off x="822960" y="3749039"/>
             <a:ext cx="10515600" cy="12700"/>
           </a:xfrm>
           <a:prstGeom prst="rect">
@@ -3695,62 +3763,77 @@
       </p:sp>
       <p:sp>
         <p:nvSpPr>
-          <p:cNvPr id="10" name="TextBox 9"/>
-          <p:cNvSpPr txBox="1"/>
-          <p:nvPr/>
-        </p:nvSpPr>
-        <p:spPr>
-          <a:xfrm>
-            <a:off x="822960" y="4206240"/>
-            <a:ext cx="9144000" cy="914400"/>
-          </a:xfrm>
-          <a:prstGeom prst="rect">
-            <a:avLst/>
-          </a:prstGeom>
-          <a:noFill/>
-        </p:spPr>
-        <p:txBody>
-          <a:bodyPr wrap="square">
-            <a:spAutoFit/>
-          </a:bodyPr>
-          <a:lstStyle/>
-          <a:p>
-            <a:pPr algn="l">
-              <a:spcAft>
-                <a:spcPts val="600"/>
-              </a:spcAft>
-            </a:pPr>
+          <p:cNvPr id="14" name="TextBox 13"/>
+          <p:cNvSpPr txBox="1"/>
+          <p:nvPr/>
+        </p:nvSpPr>
+        <p:spPr>
+          <a:xfrm>
+            <a:off x="822960" y="4069080"/>
+            <a:ext cx="9144000" cy="457200"/>
+          </a:xfrm>
+          <a:prstGeom prst="rect">
+            <a:avLst/>
+          </a:prstGeom>
+          <a:noFill/>
+        </p:spPr>
+        <p:txBody>
+          <a:bodyPr wrap="square">
+            <a:spAutoFit/>
+          </a:bodyPr>
+          <a:lstStyle/>
+          <a:p>
+            <a:pPr algn="l"/>
+            <a:r>
+              <a:rPr sz="2000" b="1">
+                <a:solidFill>
+                  <a:srgbClr val="1A1F26"/>
+                </a:solidFill>
+                <a:latin typeface="Calibri"/>
+              </a:rPr>
+              <a:t>Both already accurate.</a:t>
+            </a:r>
+          </a:p>
+        </p:txBody>
+      </p:sp>
+      <p:sp>
+        <p:nvSpPr>
+          <p:cNvPr id="15" name="TextBox 14"/>
+          <p:cNvSpPr txBox="1"/>
+          <p:nvPr/>
+        </p:nvSpPr>
+        <p:spPr>
+          <a:xfrm>
+            <a:off x="822960" y="4572000"/>
+            <a:ext cx="9144000" cy="457200"/>
+          </a:xfrm>
+          <a:prstGeom prst="rect">
+            <a:avLst/>
+          </a:prstGeom>
+          <a:noFill/>
+        </p:spPr>
+        <p:txBody>
+          <a:bodyPr wrap="square">
+            <a:spAutoFit/>
+          </a:bodyPr>
+          <a:lstStyle/>
+          <a:p>
+            <a:pPr algn="l"/>
             <a:r>
               <a:rPr sz="1700" b="0">
                 <a:solidFill>
-                  <a:srgbClr val="1A1F26"/>
-                </a:solidFill>
-                <a:latin typeface="Calibri"/>
-              </a:rPr>
-              <a:t>Both were already accurate. The question was whether they could be made</a:t>
-            </a:r>
-          </a:p>
-          <a:p>
-            <a:pPr algn="l">
-              <a:spcAft>
-                <a:spcPts val="600"/>
-              </a:spcAft>
-            </a:pPr>
-            <a:r>
-              <a:rPr sz="1700" b="0">
-                <a:solidFill>
-                  <a:srgbClr val="1A1F26"/>
-                </a:solidFill>
-                <a:latin typeface="Calibri"/>
-              </a:rPr>
-              <a:t>faster without giving that up.</a:t>
-            </a:r>
-          </a:p>
-        </p:txBody>
-      </p:sp>
-      <p:sp>
-        <p:nvSpPr>
-          <p:cNvPr id="11" name="TextBox 10"/>
+                  <a:srgbClr val="8A919B"/>
+                </a:solidFill>
+                <a:latin typeface="Calibri"/>
+              </a:rPr>
+              <a:t>Can they be made faster without giving that up?</a:t>
+            </a:r>
+          </a:p>
+        </p:txBody>
+      </p:sp>
+      <p:sp>
+        <p:nvSpPr>
+          <p:cNvPr id="16" name="TextBox 15"/>
           <p:cNvSpPr txBox="1"/>
           <p:nvPr/>
         </p:nvSpPr>
@@ -3778,7 +3861,7 @@
                 </a:solidFill>
                 <a:latin typeface="Calibri"/>
               </a:rPr>
-              <a:t>Accuracy measured as Dice Similarity Coefficient — overlap between prediction and expert annotation, 0 to 1.</a:t>
+              <a:t>DSC = Dice Similarity Coefficient. Overlap between prediction and expert annotation, 0 to 1. Above ~0.7 is clinically usable.</a:t>
             </a:r>
           </a:p>
         </p:txBody>
@@ -3930,7 +4013,7 @@
         </p:nvSpPr>
         <p:spPr>
           <a:xfrm>
-            <a:off x="822960" y="1554480"/>
+            <a:off x="822960" y="1508760"/>
             <a:ext cx="7315200" cy="365760"/>
           </a:xfrm>
           <a:prstGeom prst="rect">
@@ -3946,13 +4029,13 @@
           <a:p>
             <a:pPr algn="l"/>
             <a:r>
-              <a:rPr sz="1300" b="0">
+              <a:rPr sz="1200" b="0">
                 <a:solidFill>
                   <a:srgbClr val="8A919B"/>
                 </a:solidFill>
                 <a:latin typeface="Calibri"/>
               </a:rPr>
-              <a:t>VoxTell's speedup, as measurement error was removed:</a:t>
+              <a:t>VoxTell speedup, as measurement error was removed</a:t>
             </a:r>
           </a:p>
         </p:txBody>
@@ -3965,8 +4048,8 @@
         </p:nvSpPr>
         <p:spPr>
           <a:xfrm>
-            <a:off x="822960" y="2103120"/>
-            <a:ext cx="2468880" cy="868680"/>
+            <a:off x="822960" y="2011680"/>
+            <a:ext cx="2468880" cy="822960"/>
           </a:xfrm>
           <a:prstGeom prst="rect">
             <a:avLst/>
@@ -4000,8 +4083,8 @@
         </p:nvSpPr>
         <p:spPr>
           <a:xfrm>
-            <a:off x="822960" y="3017520"/>
-            <a:ext cx="2468880" cy="731520"/>
+            <a:off x="822960" y="2926080"/>
+            <a:ext cx="2468880" cy="640080"/>
           </a:xfrm>
           <a:prstGeom prst="rect">
             <a:avLst/>
@@ -4035,8 +4118,8 @@
         </p:nvSpPr>
         <p:spPr>
           <a:xfrm>
-            <a:off x="3520440" y="2103120"/>
-            <a:ext cx="2468880" cy="868680"/>
+            <a:off x="3520440" y="2011680"/>
+            <a:ext cx="2468880" cy="822960"/>
           </a:xfrm>
           <a:prstGeom prst="rect">
             <a:avLst/>
@@ -4070,8 +4153,8 @@
         </p:nvSpPr>
         <p:spPr>
           <a:xfrm>
-            <a:off x="3520440" y="3017520"/>
-            <a:ext cx="2468880" cy="731520"/>
+            <a:off x="3520440" y="2926080"/>
+            <a:ext cx="2468880" cy="640080"/>
           </a:xfrm>
           <a:prstGeom prst="rect">
             <a:avLst/>
@@ -4092,7 +4175,7 @@
                 </a:solidFill>
                 <a:latin typeface="Calibri"/>
               </a:rPr>
-              <a:t>no GPU warm-up; cached vs uncached</a:t>
+              <a:t>no warm-up; cache mismatch</a:t>
             </a:r>
           </a:p>
         </p:txBody>
@@ -4105,8 +4188,8 @@
         </p:nvSpPr>
         <p:spPr>
           <a:xfrm>
-            <a:off x="6217920" y="2103120"/>
-            <a:ext cx="2468880" cy="868680"/>
+            <a:off x="6217920" y="2011680"/>
+            <a:ext cx="2468880" cy="822960"/>
           </a:xfrm>
           <a:prstGeom prst="rect">
             <a:avLst/>
@@ -4140,8 +4223,8 @@
         </p:nvSpPr>
         <p:spPr>
           <a:xfrm>
-            <a:off x="6217920" y="3017520"/>
-            <a:ext cx="2468880" cy="731520"/>
+            <a:off x="6217920" y="2926080"/>
+            <a:ext cx="2468880" cy="640080"/>
           </a:xfrm>
           <a:prstGeom prst="rect">
             <a:avLst/>
@@ -4162,7 +4245,7 @@
                 </a:solidFill>
                 <a:latin typeface="Calibri"/>
               </a:rPr>
-              <a:t>first arm absorbed start-up cost</a:t>
+              <a:t>first arm ate start-up cost</a:t>
             </a:r>
           </a:p>
         </p:txBody>
@@ -4175,8 +4258,8 @@
         </p:nvSpPr>
         <p:spPr>
           <a:xfrm>
-            <a:off x="8915400" y="2103120"/>
-            <a:ext cx="2468880" cy="868680"/>
+            <a:off x="8915400" y="2011680"/>
+            <a:ext cx="2468880" cy="822960"/>
           </a:xfrm>
           <a:prstGeom prst="rect">
             <a:avLst/>
@@ -4210,8 +4293,8 @@
         </p:nvSpPr>
         <p:spPr>
           <a:xfrm>
-            <a:off x="8915400" y="3017520"/>
-            <a:ext cx="2468880" cy="731520"/>
+            <a:off x="8915400" y="2926080"/>
+            <a:ext cx="2468880" cy="640080"/>
           </a:xfrm>
           <a:prstGeom prst="rect">
             <a:avLst/>
@@ -4245,7 +4328,7 @@
         </p:nvSpPr>
         <p:spPr>
           <a:xfrm>
-            <a:off x="822960" y="4114800"/>
+            <a:off x="822960" y="3886200"/>
             <a:ext cx="10515600" cy="12700"/>
           </a:xfrm>
           <a:prstGeom prst="rect">
@@ -4288,56 +4371,106 @@
         </p:nvSpPr>
         <p:spPr>
           <a:xfrm>
-            <a:off x="822960" y="4434840"/>
-            <a:ext cx="10058400" cy="1005840"/>
-          </a:xfrm>
-          <a:prstGeom prst="rect">
-            <a:avLst/>
-          </a:prstGeom>
-          <a:noFill/>
-        </p:spPr>
-        <p:txBody>
-          <a:bodyPr wrap="square">
-            <a:spAutoFit/>
-          </a:bodyPr>
-          <a:lstStyle/>
-          <a:p>
-            <a:pPr algn="l">
-              <a:spcAft>
-                <a:spcPts val="600"/>
-              </a:spcAft>
-            </a:pPr>
-            <a:r>
-              <a:rPr sz="1700" b="0">
+            <a:off x="822960" y="4206240"/>
+            <a:ext cx="10058400" cy="475488"/>
+          </a:xfrm>
+          <a:prstGeom prst="rect">
+            <a:avLst/>
+          </a:prstGeom>
+          <a:noFill/>
+        </p:spPr>
+        <p:txBody>
+          <a:bodyPr wrap="square">
+            <a:spAutoFit/>
+          </a:bodyPr>
+          <a:lstStyle/>
+          <a:p>
+            <a:pPr algn="l"/>
+            <a:r>
+              <a:rPr sz="1600" b="0">
                 <a:solidFill>
                   <a:srgbClr val="1A1F26"/>
                 </a:solidFill>
                 <a:latin typeface="Calibri"/>
               </a:rPr>
-              <a:t>Every drop came from correcting how I measured — never from changing the code.</a:t>
-            </a:r>
-          </a:p>
-          <a:p>
-            <a:pPr algn="l">
-              <a:spcAft>
-                <a:spcPts val="600"/>
-              </a:spcAft>
-            </a:pPr>
-            <a:r>
-              <a:rPr sz="1700" b="0">
+              <a:t>—  No correction changed the code — only how it was measured</a:t>
+            </a:r>
+          </a:p>
+        </p:txBody>
+      </p:sp>
+      <p:sp>
+        <p:nvSpPr>
+          <p:cNvPr id="16" name="TextBox 15"/>
+          <p:cNvSpPr txBox="1"/>
+          <p:nvPr/>
+        </p:nvSpPr>
+        <p:spPr>
+          <a:xfrm>
+            <a:off x="822960" y="4681727"/>
+            <a:ext cx="10058400" cy="475488"/>
+          </a:xfrm>
+          <a:prstGeom prst="rect">
+            <a:avLst/>
+          </a:prstGeom>
+          <a:noFill/>
+        </p:spPr>
+        <p:txBody>
+          <a:bodyPr wrap="square">
+            <a:spAutoFit/>
+          </a:bodyPr>
+          <a:lstStyle/>
+          <a:p>
+            <a:pPr algn="l"/>
+            <a:r>
+              <a:rPr sz="1600" b="0">
                 <a:solidFill>
                   <a:srgbClr val="1A1F26"/>
                 </a:solidFill>
                 <a:latin typeface="Calibri"/>
               </a:rPr>
-              <a:t>The optimizations always did what they do; the benchmark was flattering them.</a:t>
-            </a:r>
-          </a:p>
-        </p:txBody>
-      </p:sp>
-      <p:sp>
-        <p:nvSpPr>
-          <p:cNvPr id="16" name="TextBox 15"/>
+              <a:t>—  The optimizations always worked; the benchmark flattered them</a:t>
+            </a:r>
+          </a:p>
+        </p:txBody>
+      </p:sp>
+      <p:sp>
+        <p:nvSpPr>
+          <p:cNvPr id="17" name="TextBox 16"/>
+          <p:cNvSpPr txBox="1"/>
+          <p:nvPr/>
+        </p:nvSpPr>
+        <p:spPr>
+          <a:xfrm>
+            <a:off x="822960" y="5157216"/>
+            <a:ext cx="10058400" cy="475488"/>
+          </a:xfrm>
+          <a:prstGeom prst="rect">
+            <a:avLst/>
+          </a:prstGeom>
+          <a:noFill/>
+        </p:spPr>
+        <p:txBody>
+          <a:bodyPr wrap="square">
+            <a:spAutoFit/>
+          </a:bodyPr>
+          <a:lstStyle/>
+          <a:p>
+            <a:pPr algn="l"/>
+            <a:r>
+              <a:rPr sz="1600" b="0">
+                <a:solidFill>
+                  <a:srgbClr val="1A1F26"/>
+                </a:solidFill>
+                <a:latin typeface="Calibri"/>
+              </a:rPr>
+              <a:t>—  Caught by running the same script on two different GPUs</a:t>
+            </a:r>
+          </a:p>
+        </p:txBody>
+      </p:sp>
+      <p:sp>
+        <p:nvSpPr>
+          <p:cNvPr id="18" name="TextBox 17"/>
           <p:cNvSpPr txBox="1"/>
           <p:nvPr/>
         </p:nvSpPr>
@@ -4365,7 +4498,7 @@
                 </a:solidFill>
                 <a:latin typeface="Calibri"/>
               </a:rPr>
-              <a:t>Final figure: n=4 repeats, both arms INT4, GPU and text backbone pre-warmed, embedding cache verified empty.</a:t>
+              <a:t>Final figure: n=4 repeats · both arms INT4 · GPU and text backbone pre-warmed · embedding cache asserted empty.</a:t>
             </a:r>
           </a:p>
         </p:txBody>
@@ -4426,7 +4559,7 @@
                 </a:solidFill>
                 <a:latin typeface="Calibri"/>
               </a:rPr>
-              <a:t>VoxTell — what actually made it faster</a:t>
+              <a:t>VoxTell — what made it faster</a:t>
             </a:r>
           </a:p>
         </p:txBody>
@@ -4518,7 +4651,7 @@
           <p:nvPr/>
         </p:nvGraphicFramePr>
         <p:xfrm>
-          <a:off x="822960" y="1554480"/>
+          <a:off x="822960" y="1508760"/>
           <a:ext cx="10515600" cy="2103120"/>
         </p:xfrm>
         <a:graphic>
@@ -4528,8 +4661,8 @@
                 <a:tableStyleId>{5C22544A-7EE6-4342-B048-85BDC9FD1C3A}</a:tableStyleId>
               </a:tblPr>
               <a:tblGrid>
-                <a:gridCol w="2651760"/>
-                <a:gridCol w="5852160"/>
+                <a:gridCol w="2468880"/>
+                <a:gridCol w="6035040"/>
                 <a:gridCol w="2011680"/>
               </a:tblGrid>
               <a:tr h="420624">
@@ -4635,7 +4768,7 @@
                           </a:solidFill>
                           <a:latin typeface="Calibri"/>
                         </a:rPr>
-                        <a:t>tile_step 0.75 + crop to non-zero: 25 → 9 patches</a:t>
+                        <a:t>tile_step 0.75 + crop to non-zero  ·  25 → 9 patches</a:t>
                       </a:r>
                     </a:p>
                   </a:txBody>
@@ -4749,7 +4882,7 @@
                           </a:solidFill>
                           <a:latin typeface="Calibri"/>
                         </a:rPr>
-                        <a:t>INT4 text backbone</a:t>
+                        <a:t>INT4 backbone</a:t>
                       </a:r>
                     </a:p>
                   </a:txBody>
@@ -4771,7 +4904,7 @@
                           </a:solidFill>
                           <a:latin typeface="Calibri"/>
                         </a:rPr>
-                        <a:t>1.5× faster encode, 2 GB VRAM instead of 8 GB</a:t>
+                        <a:t>1.5× faster encode  ·  2 GB VRAM, not 8 GB</a:t>
                       </a:r>
                     </a:p>
                   </a:txBody>
@@ -4817,7 +4950,7 @@
                           </a:solidFill>
                           <a:latin typeface="Calibri"/>
                         </a:rPr>
-                        <a:t>Numba preprocessing</a:t>
+                        <a:t>Numba preprocess</a:t>
                       </a:r>
                     </a:p>
                   </a:txBody>
@@ -4884,7 +5017,7 @@
         </p:nvSpPr>
         <p:spPr>
           <a:xfrm>
-            <a:off x="822960" y="3977639"/>
+            <a:off x="822960" y="3931920"/>
             <a:ext cx="10515600" cy="12700"/>
           </a:xfrm>
           <a:prstGeom prst="rect">
@@ -4927,7 +5060,7 @@
         </p:nvSpPr>
         <p:spPr>
           <a:xfrm>
-            <a:off x="822960" y="4297680"/>
+            <a:off x="822960" y="4251960"/>
             <a:ext cx="5486400" cy="822960"/>
           </a:xfrm>
           <a:prstGeom prst="rect">
@@ -4962,7 +5095,7 @@
         </p:nvSpPr>
         <p:spPr>
           <a:xfrm>
-            <a:off x="822960" y="5166360"/>
+            <a:off x="822960" y="5120640"/>
             <a:ext cx="5486400" cy="457200"/>
           </a:xfrm>
           <a:prstGeom prst="rect">
@@ -4984,7 +5117,7 @@
                 </a:solidFill>
                 <a:latin typeface="Calibri"/>
               </a:rPr>
-              <a:t>end-to-end, abdominal CT, H100 MIG  ·  range 2.6–2.8× over 4 runs</a:t>
+              <a:t>abdominal CT, H100 MIG  ·  2.6–2.8× over 4 runs</a:t>
             </a:r>
           </a:p>
         </p:txBody>
@@ -4997,7 +5130,7 @@
         </p:nvSpPr>
         <p:spPr>
           <a:xfrm>
-            <a:off x="6675120" y="4434840"/>
+            <a:off x="6766560" y="4389120"/>
             <a:ext cx="4572000" cy="640080"/>
           </a:xfrm>
           <a:prstGeom prst="rect">
@@ -5013,13 +5146,13 @@
           <a:p>
             <a:pPr algn="l"/>
             <a:r>
-              <a:rPr sz="2400" b="0">
+              <a:rPr sz="2600" b="0">
                 <a:solidFill>
                   <a:srgbClr val="8A919B"/>
                 </a:solidFill>
                 <a:latin typeface="Calibri"/>
               </a:rPr>
-              <a:t>3.27s  →  1.28s</a:t>
+              <a:t>3.27s → 1.28s</a:t>
             </a:r>
           </a:p>
         </p:txBody>
@@ -5054,7 +5187,7 @@
                 </a:solidFill>
                 <a:latin typeface="Calibri"/>
               </a:rPr>
-              <a:t>CVPR validation case CT_AMOS_amos_0018 (63×512×512). Both arms INT4 (NF4) — precision held constant, so this is algorithmic gain only.</a:t>
+              <a:t>Case CT_AMOS_amos_0018 (63×512×512). Both arms INT4 — precision held constant, so this is algorithmic gain only.</a:t>
             </a:r>
           </a:p>
         </p:txBody>
@@ -5206,23 +5339,23 @@
         </p:nvSpPr>
         <p:spPr>
           <a:xfrm>
-            <a:off x="822960" y="1737360"/>
-            <a:ext cx="4572000" cy="822960"/>
-          </a:xfrm>
-          <a:prstGeom prst="rect">
-            <a:avLst/>
-          </a:prstGeom>
-          <a:noFill/>
-        </p:spPr>
-        <p:txBody>
-          <a:bodyPr wrap="square">
-            <a:spAutoFit/>
-          </a:bodyPr>
-          <a:lstStyle/>
-          <a:p>
-            <a:pPr algn="l"/>
-            <a:r>
-              <a:rPr sz="5600" b="1">
+            <a:off x="822960" y="1691640"/>
+            <a:ext cx="5029200" cy="822960"/>
+          </a:xfrm>
+          <a:prstGeom prst="rect">
+            <a:avLst/>
+          </a:prstGeom>
+          <a:noFill/>
+        </p:spPr>
+        <p:txBody>
+          <a:bodyPr wrap="square">
+            <a:spAutoFit/>
+          </a:bodyPr>
+          <a:lstStyle/>
+          <a:p>
+            <a:pPr algn="l"/>
+            <a:r>
+              <a:rPr sz="5400" b="1">
                 <a:solidFill>
                   <a:srgbClr val="1D6F69"/>
                 </a:solidFill>
@@ -5241,8 +5374,8 @@
         </p:nvSpPr>
         <p:spPr>
           <a:xfrm>
-            <a:off x="822960" y="2606039"/>
-            <a:ext cx="4572000" cy="457200"/>
+            <a:off x="822960" y="2560320"/>
+            <a:ext cx="5029200" cy="457200"/>
           </a:xfrm>
           <a:prstGeom prst="rect">
             <a:avLst/>
@@ -5263,7 +5396,7 @@
                 </a:solidFill>
                 <a:latin typeface="Calibri"/>
               </a:rPr>
-              <a:t>change in mean DSC after optimization</a:t>
+              <a:t>mean DSC change  ·  0.8090 → 0.8093</a:t>
             </a:r>
           </a:p>
         </p:txBody>
@@ -5277,77 +5410,42 @@
         <p:spPr>
           <a:xfrm>
             <a:off x="822960" y="3200400"/>
-            <a:ext cx="5486400" cy="548640"/>
-          </a:xfrm>
-          <a:prstGeom prst="rect">
-            <a:avLst/>
-          </a:prstGeom>
-          <a:noFill/>
-        </p:spPr>
-        <p:txBody>
-          <a:bodyPr wrap="square">
-            <a:spAutoFit/>
-          </a:bodyPr>
-          <a:lstStyle/>
-          <a:p>
-            <a:pPr algn="l"/>
-            <a:r>
-              <a:rPr sz="2200" b="0">
+            <a:ext cx="5029200" cy="365760"/>
+          </a:xfrm>
+          <a:prstGeom prst="rect">
+            <a:avLst/>
+          </a:prstGeom>
+          <a:noFill/>
+        </p:spPr>
+        <p:txBody>
+          <a:bodyPr wrap="square">
+            <a:spAutoFit/>
+          </a:bodyPr>
+          <a:lstStyle/>
+          <a:p>
+            <a:pPr algn="l"/>
+            <a:r>
+              <a:rPr sz="1300" b="0">
                 <a:solidFill>
                   <a:srgbClr val="8A919B"/>
                 </a:solidFill>
                 <a:latin typeface="Calibri"/>
               </a:rPr>
-              <a:t>0.8090  →  0.8093</a:t>
-            </a:r>
-          </a:p>
-        </p:txBody>
-      </p:sp>
-      <p:sp>
-        <p:nvSpPr>
-          <p:cNvPr id="8" name="TextBox 7"/>
-          <p:cNvSpPr txBox="1"/>
-          <p:nvPr/>
-        </p:nvSpPr>
-        <p:spPr>
-          <a:xfrm>
-            <a:off x="822960" y="3794760"/>
-            <a:ext cx="5486400" cy="365760"/>
-          </a:xfrm>
-          <a:prstGeom prst="rect">
-            <a:avLst/>
-          </a:prstGeom>
-          <a:noFill/>
-        </p:spPr>
-        <p:txBody>
-          <a:bodyPr wrap="square">
-            <a:spAutoFit/>
-          </a:bodyPr>
-          <a:lstStyle/>
-          <a:p>
-            <a:pPr algn="l"/>
-            <a:r>
-              <a:rPr sz="1200" b="0">
-                <a:solidFill>
-                  <a:srgbClr val="8A919B"/>
-                </a:solidFill>
-                <a:latin typeface="Calibri"/>
-              </a:rPr>
-              <a:t>65 objects across 5 abdominal CT cases.</a:t>
-            </a:r>
-          </a:p>
-        </p:txBody>
-      </p:sp>
-      <p:sp>
-        <p:nvSpPr>
-          <p:cNvPr id="9" name="Rectangle 8"/>
+              <a:t>65 objects, 5 abdominal CT cases</a:t>
+            </a:r>
+          </a:p>
+        </p:txBody>
+      </p:sp>
+      <p:sp>
+        <p:nvSpPr>
+          <p:cNvPr id="8" name="Rectangle 7"/>
           <p:cNvSpPr/>
           <p:nvPr/>
         </p:nvSpPr>
         <p:spPr>
           <a:xfrm>
-            <a:off x="6583680" y="1737360"/>
-            <a:ext cx="36576" cy="1143000"/>
+            <a:off x="6309360" y="1691640"/>
+            <a:ext cx="32004" cy="990599"/>
           </a:xfrm>
           <a:prstGeom prst="rect">
             <a:avLst/>
@@ -5383,35 +5481,70 @@
       </p:sp>
       <p:sp>
         <p:nvSpPr>
+          <p:cNvPr id="9" name="TextBox 8"/>
+          <p:cNvSpPr txBox="1"/>
+          <p:nvPr/>
+        </p:nvSpPr>
+        <p:spPr>
+          <a:xfrm>
+            <a:off x="6629400" y="1691640"/>
+            <a:ext cx="4389120" cy="365760"/>
+          </a:xfrm>
+          <a:prstGeom prst="rect">
+            <a:avLst/>
+          </a:prstGeom>
+          <a:noFill/>
+        </p:spPr>
+        <p:txBody>
+          <a:bodyPr wrap="square">
+            <a:spAutoFit/>
+          </a:bodyPr>
+          <a:lstStyle/>
+          <a:p>
+            <a:pPr algn="l"/>
+            <a:r>
+              <a:rPr sz="1500" b="1">
+                <a:solidFill>
+                  <a:srgbClr val="1A1F26"/>
+                </a:solidFill>
+                <a:latin typeface="Calibri"/>
+              </a:rPr>
+              <a:t>One caveat, stated plainly</a:t>
+            </a:r>
+          </a:p>
+        </p:txBody>
+      </p:sp>
+      <p:sp>
+        <p:nvSpPr>
           <p:cNvPr id="10" name="TextBox 9"/>
           <p:cNvSpPr txBox="1"/>
           <p:nvPr/>
         </p:nvSpPr>
         <p:spPr>
           <a:xfrm>
-            <a:off x="6858000" y="1737360"/>
-            <a:ext cx="4206240" cy="365760"/>
-          </a:xfrm>
-          <a:prstGeom prst="rect">
-            <a:avLst/>
-          </a:prstGeom>
-          <a:noFill/>
-        </p:spPr>
-        <p:txBody>
-          <a:bodyPr wrap="square">
-            <a:spAutoFit/>
-          </a:bodyPr>
-          <a:lstStyle/>
-          <a:p>
-            <a:pPr algn="l"/>
-            <a:r>
-              <a:rPr sz="1300" b="1">
+            <a:off x="6629400" y="2194560"/>
+            <a:ext cx="4572000" cy="365760"/>
+          </a:xfrm>
+          <a:prstGeom prst="rect">
+            <a:avLst/>
+          </a:prstGeom>
+          <a:noFill/>
+        </p:spPr>
+        <p:txBody>
+          <a:bodyPr wrap="square">
+            <a:spAutoFit/>
+          </a:bodyPr>
+          <a:lstStyle/>
+          <a:p>
+            <a:pPr algn="l"/>
+            <a:r>
+              <a:rPr sz="1200" b="0">
                 <a:solidFill>
                   <a:srgbClr val="1A1F26"/>
                 </a:solidFill>
                 <a:latin typeface="Calibri"/>
               </a:rPr>
-              <a:t>One caveat worth stating</a:t>
+              <a:t>—  INT4 quantization is on by default</a:t>
             </a:r>
           </a:p>
         </p:txBody>
@@ -5424,25 +5557,21 @@
         </p:nvSpPr>
         <p:spPr>
           <a:xfrm>
-            <a:off x="6858000" y="2194560"/>
-            <a:ext cx="4206240" cy="2194560"/>
-          </a:xfrm>
-          <a:prstGeom prst="rect">
-            <a:avLst/>
-          </a:prstGeom>
-          <a:noFill/>
-        </p:spPr>
-        <p:txBody>
-          <a:bodyPr wrap="square">
-            <a:spAutoFit/>
-          </a:bodyPr>
-          <a:lstStyle/>
-          <a:p>
-            <a:pPr algn="l">
-              <a:spcAft>
-                <a:spcPts val="800"/>
-              </a:spcAft>
-            </a:pPr>
+            <a:off x="6629400" y="2560320"/>
+            <a:ext cx="4572000" cy="365760"/>
+          </a:xfrm>
+          <a:prstGeom prst="rect">
+            <a:avLst/>
+          </a:prstGeom>
+          <a:noFill/>
+        </p:spPr>
+        <p:txBody>
+          <a:bodyPr wrap="square">
+            <a:spAutoFit/>
+          </a:bodyPr>
+          <a:lstStyle/>
+          <a:p>
+            <a:pPr algn="l"/>
             <a:r>
               <a:rPr sz="1200" b="0">
                 <a:solidFill>
@@ -5450,15 +5579,34 @@
                 </a:solidFill>
                 <a:latin typeface="Calibri"/>
               </a:rPr>
-              <a:t>INT4 quantization is on by default. On one CT case it agreed with full precision at 0.97 DSC and segmented 5.5% fewer voxels — a consistent under-segmentation, not noise.</a:t>
-            </a:r>
-          </a:p>
-          <a:p>
-            <a:pPr algn="l">
-              <a:spcAft>
-                <a:spcPts val="800"/>
-              </a:spcAft>
-            </a:pPr>
+              <a:t>—  0.97 agreement with full precision</a:t>
+            </a:r>
+          </a:p>
+        </p:txBody>
+      </p:sp>
+      <p:sp>
+        <p:nvSpPr>
+          <p:cNvPr id="12" name="TextBox 11"/>
+          <p:cNvSpPr txBox="1"/>
+          <p:nvPr/>
+        </p:nvSpPr>
+        <p:spPr>
+          <a:xfrm>
+            <a:off x="6629400" y="2926080"/>
+            <a:ext cx="4572000" cy="365760"/>
+          </a:xfrm>
+          <a:prstGeom prst="rect">
+            <a:avLst/>
+          </a:prstGeom>
+          <a:noFill/>
+        </p:spPr>
+        <p:txBody>
+          <a:bodyPr wrap="square">
+            <a:spAutoFit/>
+          </a:bodyPr>
+          <a:lstStyle/>
+          <a:p>
+            <a:pPr algn="l"/>
             <a:r>
               <a:rPr sz="1200" b="0">
                 <a:solidFill>
@@ -5466,15 +5614,34 @@
                 </a:solidFill>
                 <a:latin typeface="Calibri"/>
               </a:rPr>
-              <a:t/>
-            </a:r>
-          </a:p>
-          <a:p>
-            <a:pPr algn="l">
-              <a:spcAft>
-                <a:spcPts val="800"/>
-              </a:spcAft>
-            </a:pPr>
+              <a:t>—  Segments 5.5% fewer voxels</a:t>
+            </a:r>
+          </a:p>
+        </p:txBody>
+      </p:sp>
+      <p:sp>
+        <p:nvSpPr>
+          <p:cNvPr id="13" name="TextBox 12"/>
+          <p:cNvSpPr txBox="1"/>
+          <p:nvPr/>
+        </p:nvSpPr>
+        <p:spPr>
+          <a:xfrm>
+            <a:off x="6629400" y="3291840"/>
+            <a:ext cx="4572000" cy="365760"/>
+          </a:xfrm>
+          <a:prstGeom prst="rect">
+            <a:avLst/>
+          </a:prstGeom>
+          <a:noFill/>
+        </p:spPr>
+        <p:txBody>
+          <a:bodyPr wrap="square">
+            <a:spAutoFit/>
+          </a:bodyPr>
+          <a:lstStyle/>
+          <a:p>
+            <a:pPr algn="l"/>
             <a:r>
               <a:rPr sz="1200" b="0">
                 <a:solidFill>
@@ -5482,14 +5649,49 @@
                 </a:solidFill>
                 <a:latin typeface="Calibri"/>
               </a:rPr>
-              <a:t>I have not measured that across the validation set, so I am reporting the direction, not a bound.</a:t>
-            </a:r>
-          </a:p>
-        </p:txBody>
-      </p:sp>
-      <p:sp>
-        <p:nvSpPr>
-          <p:cNvPr id="12" name="TextBox 11"/>
+              <a:t>—  One-sided → bias, not noise</a:t>
+            </a:r>
+          </a:p>
+        </p:txBody>
+      </p:sp>
+      <p:sp>
+        <p:nvSpPr>
+          <p:cNvPr id="14" name="TextBox 13"/>
+          <p:cNvSpPr txBox="1"/>
+          <p:nvPr/>
+        </p:nvSpPr>
+        <p:spPr>
+          <a:xfrm>
+            <a:off x="6629400" y="3657600"/>
+            <a:ext cx="4572000" cy="365760"/>
+          </a:xfrm>
+          <a:prstGeom prst="rect">
+            <a:avLst/>
+          </a:prstGeom>
+          <a:noFill/>
+        </p:spPr>
+        <p:txBody>
+          <a:bodyPr wrap="square">
+            <a:spAutoFit/>
+          </a:bodyPr>
+          <a:lstStyle/>
+          <a:p>
+            <a:pPr algn="l"/>
+            <a:r>
+              <a:rPr sz="1200" b="0">
+                <a:solidFill>
+                  <a:srgbClr val="1A1F26"/>
+                </a:solidFill>
+                <a:latin typeface="Calibri"/>
+              </a:rPr>
+              <a:t>—  Not measured across the validation set</a:t>
+            </a:r>
+          </a:p>
+        </p:txBody>
+      </p:sp>
+      <p:sp>
+        <p:nvSpPr>
+          <p:cNvPr id="15" name="TextBox 14"/>
           <p:cNvSpPr txBox="1"/>
           <p:nvPr/>
         </p:nvSpPr>
@@ -5517,7 +5719,7 @@
                 </a:solidFill>
                 <a:latin typeface="Calibri"/>
               </a:rPr>
-              <a:t>VoxTell DSC from accuracy_results.csv. INT4 comparison is n=1 and measures output agreement, not accuracy against ground truth.</a:t>
+              <a:t>VoxTell DSC from accuracy_results.csv. INT4 comparison is n=1 and measures output agreement, not accuracy vs ground truth.</a:t>
             </a:r>
           </a:p>
         </p:txBody>
@@ -5669,25 +5871,25 @@
         </p:nvSpPr>
         <p:spPr>
           <a:xfrm>
-            <a:off x="822960" y="1554480"/>
-            <a:ext cx="7315200" cy="365760"/>
-          </a:xfrm>
-          <a:prstGeom prst="rect">
-            <a:avLst/>
-          </a:prstGeom>
-          <a:noFill/>
-        </p:spPr>
-        <p:txBody>
-          <a:bodyPr wrap="square">
-            <a:spAutoFit/>
-          </a:bodyPr>
-          <a:lstStyle/>
-          <a:p>
-            <a:pPr algn="l"/>
-            <a:r>
-              <a:rPr sz="1400" b="0">
-                <a:solidFill>
-                  <a:srgbClr val="8A919B"/>
+            <a:off x="822960" y="1508760"/>
+            <a:ext cx="8229600" cy="365760"/>
+          </a:xfrm>
+          <a:prstGeom prst="rect">
+            <a:avLst/>
+          </a:prstGeom>
+          <a:noFill/>
+        </p:spPr>
+        <p:txBody>
+          <a:bodyPr wrap="square">
+            <a:spAutoFit/>
+          </a:bodyPr>
+          <a:lstStyle/>
+          <a:p>
+            <a:pPr algn="l"/>
+            <a:r>
+              <a:rPr sz="1500" b="0">
+                <a:solidFill>
+                  <a:srgbClr val="B57E1F"/>
                 </a:solidFill>
                 <a:latin typeface="Calibri"/>
               </a:rPr>
@@ -5705,7 +5907,7 @@
         <p:spPr>
           <a:xfrm>
             <a:off x="822960" y="1965960"/>
-            <a:ext cx="7315200" cy="365760"/>
+            <a:ext cx="8229600" cy="384048"/>
           </a:xfrm>
           <a:prstGeom prst="rect">
             <a:avLst/>
@@ -5726,20 +5928,55 @@
                 </a:solidFill>
                 <a:latin typeface="Calibri"/>
               </a:rPr>
-              <a:t>One line. It fuses kernels and cuts per-call dispatch overhead.</a:t>
-            </a:r>
-          </a:p>
-        </p:txBody>
-      </p:sp>
-      <p:sp>
-        <p:nvSpPr>
-          <p:cNvPr id="7" name="Rectangle 6"/>
+              <a:t>—  One line changed</a:t>
+            </a:r>
+          </a:p>
+        </p:txBody>
+      </p:sp>
+      <p:sp>
+        <p:nvSpPr>
+          <p:cNvPr id="7" name="TextBox 6"/>
+          <p:cNvSpPr txBox="1"/>
+          <p:nvPr/>
+        </p:nvSpPr>
+        <p:spPr>
+          <a:xfrm>
+            <a:off x="822960" y="2350008"/>
+            <a:ext cx="8229600" cy="384048"/>
+          </a:xfrm>
+          <a:prstGeom prst="rect">
+            <a:avLst/>
+          </a:prstGeom>
+          <a:noFill/>
+        </p:spPr>
+        <p:txBody>
+          <a:bodyPr wrap="square">
+            <a:spAutoFit/>
+          </a:bodyPr>
+          <a:lstStyle/>
+          <a:p>
+            <a:pPr algn="l"/>
+            <a:r>
+              <a:rPr sz="1300" b="0">
+                <a:solidFill>
+                  <a:srgbClr val="1A1F26"/>
+                </a:solidFill>
+                <a:latin typeface="Calibri"/>
+              </a:rPr>
+              <a:t>—  Fuses kernels, cuts per-call dispatch overhead</a:t>
+            </a:r>
+          </a:p>
+        </p:txBody>
+      </p:sp>
+      <p:sp>
+        <p:nvSpPr>
+          <p:cNvPr id="8" name="Rectangle 7"/>
           <p:cNvSpPr/>
           <p:nvPr/>
         </p:nvSpPr>
         <p:spPr>
           <a:xfrm>
-            <a:off x="822960" y="2606040"/>
+            <a:off x="822960" y="2834640"/>
             <a:ext cx="10515600" cy="12700"/>
           </a:xfrm>
           <a:prstGeom prst="rect">
@@ -5776,13 +6013,13 @@
       </p:sp>
       <p:sp>
         <p:nvSpPr>
-          <p:cNvPr id="8" name="TextBox 7"/>
-          <p:cNvSpPr txBox="1"/>
-          <p:nvPr/>
-        </p:nvSpPr>
-        <p:spPr>
-          <a:xfrm>
-            <a:off x="822960" y="3017520"/>
+          <p:cNvPr id="9" name="TextBox 8"/>
+          <p:cNvSpPr txBox="1"/>
+          <p:nvPr/>
+        </p:nvSpPr>
+        <p:spPr>
+          <a:xfrm>
+            <a:off x="822960" y="3200400"/>
             <a:ext cx="4572000" cy="822960"/>
           </a:xfrm>
           <a:prstGeom prst="rect">
@@ -5811,13 +6048,13 @@
       </p:sp>
       <p:sp>
         <p:nvSpPr>
-          <p:cNvPr id="9" name="TextBox 8"/>
-          <p:cNvSpPr txBox="1"/>
-          <p:nvPr/>
-        </p:nvSpPr>
-        <p:spPr>
-          <a:xfrm>
-            <a:off x="822960" y="3886200"/>
+          <p:cNvPr id="10" name="TextBox 9"/>
+          <p:cNvSpPr txBox="1"/>
+          <p:nvPr/>
+        </p:nvSpPr>
+        <p:spPr>
+          <a:xfrm>
+            <a:off x="822960" y="4069080"/>
             <a:ext cx="4572000" cy="457200"/>
           </a:xfrm>
           <a:prstGeom prst="rect">
@@ -5839,20 +6076,20 @@
                 </a:solidFill>
                 <a:latin typeface="Calibri"/>
               </a:rPr>
-              <a:t>per object  ·  range 1.28–1.39× over 4 runs</a:t>
-            </a:r>
-          </a:p>
-        </p:txBody>
-      </p:sp>
-      <p:sp>
-        <p:nvSpPr>
-          <p:cNvPr id="10" name="TextBox 9"/>
-          <p:cNvSpPr txBox="1"/>
-          <p:nvPr/>
-        </p:nvSpPr>
-        <p:spPr>
-          <a:xfrm>
-            <a:off x="6309360" y="3017520"/>
+              <a:t>per object  ·  1.28–1.39× over 4 runs</a:t>
+            </a:r>
+          </a:p>
+        </p:txBody>
+      </p:sp>
+      <p:sp>
+        <p:nvSpPr>
+          <p:cNvPr id="11" name="TextBox 10"/>
+          <p:cNvSpPr txBox="1"/>
+          <p:nvPr/>
+        </p:nvSpPr>
+        <p:spPr>
+          <a:xfrm>
+            <a:off x="6309360" y="3200400"/>
             <a:ext cx="4572000" cy="822960"/>
           </a:xfrm>
           <a:prstGeom prst="rect">
@@ -5881,13 +6118,13 @@
       </p:sp>
       <p:sp>
         <p:nvSpPr>
-          <p:cNvPr id="11" name="TextBox 10"/>
-          <p:cNvSpPr txBox="1"/>
-          <p:nvPr/>
-        </p:nvSpPr>
-        <p:spPr>
-          <a:xfrm>
-            <a:off x="6309360" y="3886200"/>
+          <p:cNvPr id="12" name="TextBox 11"/>
+          <p:cNvSpPr txBox="1"/>
+          <p:nvPr/>
+        </p:nvSpPr>
+        <p:spPr>
+          <a:xfrm>
+            <a:off x="6309360" y="4069080"/>
             <a:ext cx="4572000" cy="457200"/>
           </a:xfrm>
           <a:prstGeom prst="rect">
@@ -5909,21 +6146,21 @@
                 </a:solidFill>
                 <a:latin typeface="Calibri"/>
               </a:rPr>
-              <a:t>mean DSC change  ·  294 objects</a:t>
-            </a:r>
-          </a:p>
-        </p:txBody>
-      </p:sp>
-      <p:sp>
-        <p:nvSpPr>
-          <p:cNvPr id="12" name="TextBox 11"/>
-          <p:cNvSpPr txBox="1"/>
-          <p:nvPr/>
-        </p:nvSpPr>
-        <p:spPr>
-          <a:xfrm>
-            <a:off x="822960" y="4937760"/>
-            <a:ext cx="5486400" cy="365760"/>
+              <a:t>mean DSC  ·  294 objects</a:t>
+            </a:r>
+          </a:p>
+        </p:txBody>
+      </p:sp>
+      <p:sp>
+        <p:nvSpPr>
+          <p:cNvPr id="13" name="TextBox 12"/>
+          <p:cNvSpPr txBox="1"/>
+          <p:nvPr/>
+        </p:nvSpPr>
+        <p:spPr>
+          <a:xfrm>
+            <a:off x="822960" y="5029200"/>
+            <a:ext cx="7315200" cy="365760"/>
           </a:xfrm>
           <a:prstGeom prst="rect">
             <a:avLst/>
@@ -5940,25 +6177,25 @@
             <a:r>
               <a:rPr sz="1400" b="0">
                 <a:solidFill>
-                  <a:srgbClr val="8A919B"/>
-                </a:solidFill>
-                <a:latin typeface="Calibri"/>
-              </a:rPr>
-              <a:t>0.288s → 0.215s per object</a:t>
-            </a:r>
-          </a:p>
-        </p:txBody>
-      </p:sp>
-      <p:sp>
-        <p:nvSpPr>
-          <p:cNvPr id="13" name="TextBox 12"/>
-          <p:cNvSpPr txBox="1"/>
-          <p:nvPr/>
-        </p:nvSpPr>
-        <p:spPr>
-          <a:xfrm>
-            <a:off x="6309360" y="4937760"/>
-            <a:ext cx="4572000" cy="365760"/>
+                  <a:srgbClr val="1A1F26"/>
+                </a:solidFill>
+                <a:latin typeface="Calibri"/>
+              </a:rPr>
+              <a:t>—  0.288s → 0.215s per object</a:t>
+            </a:r>
+          </a:p>
+        </p:txBody>
+      </p:sp>
+      <p:sp>
+        <p:nvSpPr>
+          <p:cNvPr id="14" name="TextBox 13"/>
+          <p:cNvSpPr txBox="1"/>
+          <p:nvPr/>
+        </p:nvSpPr>
+        <p:spPr>
+          <a:xfrm>
+            <a:off x="822960" y="5394960"/>
+            <a:ext cx="7315200" cy="365760"/>
           </a:xfrm>
           <a:prstGeom prst="rect">
             <a:avLst/>
@@ -5975,18 +6212,18 @@
             <a:r>
               <a:rPr sz="1400" b="0">
                 <a:solidFill>
-                  <a:srgbClr val="8A919B"/>
-                </a:solidFill>
-                <a:latin typeface="Calibri"/>
-              </a:rPr>
-              <a:t>No run showed degradation.</a:t>
-            </a:r>
-          </a:p>
-        </p:txBody>
-      </p:sp>
-      <p:sp>
-        <p:nvSpPr>
-          <p:cNvPr id="14" name="TextBox 13"/>
+                  <a:srgbClr val="1A1F26"/>
+                </a:solidFill>
+                <a:latin typeface="Calibri"/>
+              </a:rPr>
+              <a:t>—  No run showed degradation</a:t>
+            </a:r>
+          </a:p>
+        </p:txBody>
+      </p:sp>
+      <p:sp>
+        <p:nvSpPr>
+          <p:cNvPr id="15" name="TextBox 14"/>
           <p:cNvSpPr txBox="1"/>
           <p:nvPr/>
         </p:nvSpPr>
@@ -6014,7 +6251,7 @@
                 </a:solidFill>
                 <a:latin typeface="Calibri"/>
               </a:rPr>
-              <a:t>20 CT cases from the CVPR validation set, fold='all' checkpoint, H100 MIG 3g.40gb. Speed and accuracy from the same jobs.</a:t>
+              <a:t>20 CT cases, CVPR validation set, fold='all' checkpoint, H100 MIG 3g.40gb. Speed and accuracy from the same jobs.</a:t>
             </a:r>
           </a:p>
         </p:txBody>
@@ -6166,29 +6403,29 @@
         </p:nvSpPr>
         <p:spPr>
           <a:xfrm>
-            <a:off x="822960" y="1600200"/>
-            <a:ext cx="9601200" cy="457200"/>
-          </a:xfrm>
-          <a:prstGeom prst="rect">
-            <a:avLst/>
-          </a:prstGeom>
-          <a:noFill/>
-        </p:spPr>
-        <p:txBody>
-          <a:bodyPr wrap="square">
-            <a:spAutoFit/>
-          </a:bodyPr>
-          <a:lstStyle/>
-          <a:p>
-            <a:pPr algn="l"/>
-            <a:r>
-              <a:rPr sz="1700" b="0">
+            <a:off x="822960" y="1554480"/>
+            <a:ext cx="9144000" cy="457200"/>
+          </a:xfrm>
+          <a:prstGeom prst="rect">
+            <a:avLst/>
+          </a:prstGeom>
+          <a:noFill/>
+        </p:spPr>
+        <p:txBody>
+          <a:bodyPr wrap="square">
+            <a:spAutoFit/>
+          </a:bodyPr>
+          <a:lstStyle/>
+          <a:p>
+            <a:pPr algn="l"/>
+            <a:r>
+              <a:rPr sz="1800" b="0">
                 <a:solidFill>
                   <a:srgbClr val="1A1F26"/>
                 </a:solidFill>
                 <a:latin typeface="Calibri"/>
               </a:rPr>
-              <a:t>Compiling costs 23.6 seconds before the first prediction. That has to be earned back.</a:t>
+              <a:t>Compiling costs time before the first prediction.</a:t>
             </a:r>
           </a:p>
         </p:txBody>
@@ -6201,7 +6438,7 @@
         </p:nvSpPr>
         <p:spPr>
           <a:xfrm>
-            <a:off x="822960" y="2377440"/>
+            <a:off x="822960" y="2286000"/>
             <a:ext cx="10515600" cy="12700"/>
           </a:xfrm>
           <a:prstGeom prst="rect">
@@ -6244,8 +6481,8 @@
         </p:nvSpPr>
         <p:spPr>
           <a:xfrm>
-            <a:off x="822960" y="2743200"/>
-            <a:ext cx="3108960" cy="822960"/>
+            <a:off x="822960" y="2651760"/>
+            <a:ext cx="2926080" cy="822960"/>
           </a:xfrm>
           <a:prstGeom prst="rect">
             <a:avLst/>
@@ -6279,8 +6516,8 @@
         </p:nvSpPr>
         <p:spPr>
           <a:xfrm>
-            <a:off x="822960" y="3611880"/>
-            <a:ext cx="3108960" cy="457200"/>
+            <a:off x="822960" y="3520439"/>
+            <a:ext cx="2926080" cy="457200"/>
           </a:xfrm>
           <a:prstGeom prst="rect">
             <a:avLst/>
@@ -6301,7 +6538,7 @@
                 </a:solidFill>
                 <a:latin typeface="Calibri"/>
               </a:rPr>
-              <a:t>one-time compilation</a:t>
+              <a:t>one-time compile</a:t>
             </a:r>
           </a:p>
         </p:txBody>
@@ -6314,8 +6551,8 @@
         </p:nvSpPr>
         <p:spPr>
           <a:xfrm>
-            <a:off x="4114800" y="2743200"/>
-            <a:ext cx="3108960" cy="822960"/>
+            <a:off x="4023360" y="2651760"/>
+            <a:ext cx="2926080" cy="822960"/>
           </a:xfrm>
           <a:prstGeom prst="rect">
             <a:avLst/>
@@ -6349,8 +6586,8 @@
         </p:nvSpPr>
         <p:spPr>
           <a:xfrm>
-            <a:off x="4114800" y="3611880"/>
-            <a:ext cx="3108960" cy="457200"/>
+            <a:off x="4023360" y="3520439"/>
+            <a:ext cx="2926080" cy="457200"/>
           </a:xfrm>
           <a:prstGeom prst="rect">
             <a:avLst/>
@@ -6384,7 +6621,7 @@
         </p:nvSpPr>
         <p:spPr>
           <a:xfrm>
-            <a:off x="7315200" y="2743200"/>
+            <a:off x="7223760" y="2651760"/>
             <a:ext cx="3657600" cy="822960"/>
           </a:xfrm>
           <a:prstGeom prst="rect">
@@ -6419,7 +6656,7 @@
         </p:nvSpPr>
         <p:spPr>
           <a:xfrm>
-            <a:off x="7315200" y="3611880"/>
+            <a:off x="7223760" y="3520439"/>
             <a:ext cx="3657600" cy="457200"/>
           </a:xfrm>
           <a:prstGeom prst="rect">
@@ -6441,38 +6678,77 @@
                 </a:solidFill>
                 <a:latin typeface="Calibri"/>
               </a:rPr>
-              <a:t>before it pays for itself</a:t>
-            </a:r>
-          </a:p>
-        </p:txBody>
-      </p:sp>
-      <p:sp>
-        <p:nvSpPr>
-          <p:cNvPr id="13" name="TextBox 12"/>
-          <p:cNvSpPr txBox="1"/>
-          <p:nvPr/>
-        </p:nvSpPr>
-        <p:spPr>
-          <a:xfrm>
-            <a:off x="822960" y="4480560"/>
-            <a:ext cx="10058400" cy="914400"/>
-          </a:xfrm>
-          <a:prstGeom prst="rect">
-            <a:avLst/>
-          </a:prstGeom>
-          <a:noFill/>
-        </p:spPr>
-        <p:txBody>
-          <a:bodyPr wrap="square">
-            <a:spAutoFit/>
-          </a:bodyPr>
-          <a:lstStyle/>
-          <a:p>
-            <a:pPr algn="l">
-              <a:spcAft>
-                <a:spcPts val="600"/>
-              </a:spcAft>
-            </a:pPr>
+              <a:t>to break even</a:t>
+            </a:r>
+          </a:p>
+        </p:txBody>
+      </p:sp>
+      <p:sp>
+        <p:nvSpPr>
+          <p:cNvPr id="13" name="Rectangle 12"/>
+          <p:cNvSpPr/>
+          <p:nvPr/>
+        </p:nvSpPr>
+        <p:spPr>
+          <a:xfrm>
+            <a:off x="822960" y="4343400"/>
+            <a:ext cx="10515600" cy="12700"/>
+          </a:xfrm>
+          <a:prstGeom prst="rect">
+            <a:avLst/>
+          </a:prstGeom>
+          <a:solidFill>
+            <a:srgbClr val="DDDAD3"/>
+          </a:solidFill>
+          <a:ln>
+            <a:noFill/>
+          </a:ln>
+        </p:spPr>
+        <p:style>
+          <a:lnRef idx="1">
+            <a:schemeClr val="accent1"/>
+          </a:lnRef>
+          <a:fillRef idx="3">
+            <a:schemeClr val="accent1"/>
+          </a:fillRef>
+          <a:effectRef idx="2">
+            <a:schemeClr val="accent1"/>
+          </a:effectRef>
+          <a:fontRef idx="minor">
+            <a:schemeClr val="lt1"/>
+          </a:fontRef>
+        </p:style>
+        <p:txBody>
+          <a:bodyPr rtlCol="0" anchor="ctr"/>
+          <a:lstStyle/>
+          <a:p>
+            <a:pPr algn="ctr"/>
+          </a:p>
+        </p:txBody>
+      </p:sp>
+      <p:sp>
+        <p:nvSpPr>
+          <p:cNvPr id="14" name="TextBox 13"/>
+          <p:cNvSpPr txBox="1"/>
+          <p:nvPr/>
+        </p:nvSpPr>
+        <p:spPr>
+          <a:xfrm>
+            <a:off x="822960" y="4663440"/>
+            <a:ext cx="10058400" cy="438912"/>
+          </a:xfrm>
+          <a:prstGeom prst="rect">
+            <a:avLst/>
+          </a:prstGeom>
+          <a:noFill/>
+        </p:spPr>
+        <p:txBody>
+          <a:bodyPr wrap="square">
+            <a:spAutoFit/>
+          </a:bodyPr>
+          <a:lstStyle/>
+          <a:p>
+            <a:pPr algn="l"/>
             <a:r>
               <a:rPr sz="1500" b="0">
                 <a:solidFill>
@@ -6480,15 +6756,34 @@
                 </a:solidFill>
                 <a:latin typeface="Calibri"/>
               </a:rPr>
-              <a:t>Worth it for a batch of 900 validation cases. Not worth it for a radiologist</a:t>
-            </a:r>
-          </a:p>
-          <a:p>
-            <a:pPr algn="l">
-              <a:spcAft>
-                <a:spcPts val="600"/>
-              </a:spcAft>
-            </a:pPr>
+              <a:t>—  Batch of 900 validation cases — clearly worth it</a:t>
+            </a:r>
+          </a:p>
+        </p:txBody>
+      </p:sp>
+      <p:sp>
+        <p:nvSpPr>
+          <p:cNvPr id="15" name="TextBox 14"/>
+          <p:cNvSpPr txBox="1"/>
+          <p:nvPr/>
+        </p:nvSpPr>
+        <p:spPr>
+          <a:xfrm>
+            <a:off x="822960" y="5102352"/>
+            <a:ext cx="10058400" cy="438912"/>
+          </a:xfrm>
+          <a:prstGeom prst="rect">
+            <a:avLst/>
+          </a:prstGeom>
+          <a:noFill/>
+        </p:spPr>
+        <p:txBody>
+          <a:bodyPr wrap="square">
+            <a:spAutoFit/>
+          </a:bodyPr>
+          <a:lstStyle/>
+          <a:p>
+            <a:pPr algn="l"/>
             <a:r>
               <a:rPr sz="1500" b="0">
                 <a:solidFill>
@@ -6496,14 +6791,49 @@
                 </a:solidFill>
                 <a:latin typeface="Calibri"/>
               </a:rPr>
-              <a:t>segmenting three scans — there the compile cost is never recovered.</a:t>
-            </a:r>
-          </a:p>
-        </p:txBody>
-      </p:sp>
-      <p:sp>
-        <p:nvSpPr>
-          <p:cNvPr id="14" name="TextBox 13"/>
+              <a:t>—  Radiologist segmenting 3 scans — never recovered</a:t>
+            </a:r>
+          </a:p>
+        </p:txBody>
+      </p:sp>
+      <p:sp>
+        <p:nvSpPr>
+          <p:cNvPr id="16" name="TextBox 15"/>
+          <p:cNvSpPr txBox="1"/>
+          <p:nvPr/>
+        </p:nvSpPr>
+        <p:spPr>
+          <a:xfrm>
+            <a:off x="822960" y="5541264"/>
+            <a:ext cx="10058400" cy="438912"/>
+          </a:xfrm>
+          <a:prstGeom prst="rect">
+            <a:avLst/>
+          </a:prstGeom>
+          <a:noFill/>
+        </p:spPr>
+        <p:txBody>
+          <a:bodyPr wrap="square">
+            <a:spAutoFit/>
+          </a:bodyPr>
+          <a:lstStyle/>
+          <a:p>
+            <a:pPr algn="l"/>
+            <a:r>
+              <a:rPr sz="1500" b="0">
+                <a:solidFill>
+                  <a:srgbClr val="1A1F26"/>
+                </a:solidFill>
+                <a:latin typeface="Calibri"/>
+              </a:rPr>
+              <a:t>—  A batch optimization. Shouldn't be sold as anything else.</a:t>
+            </a:r>
+          </a:p>
+        </p:txBody>
+      </p:sp>
+      <p:sp>
+        <p:nvSpPr>
+          <p:cNvPr id="17" name="TextBox 16"/>
           <p:cNvSpPr txBox="1"/>
           <p:nvPr/>
         </p:nvSpPr>
@@ -6531,7 +6861,7 @@
                 </a:solidFill>
                 <a:latin typeface="Calibri"/>
               </a:rPr>
-              <a:t>23.6s measured on node-local /tmp; the shared filesystem will be slower, so this is a lower bound. ~331 objects at 14.7 objects per case.</a:t>
+              <a:t>23.6s measured on node-local /tmp; the shared filesystem is slower, so treat it as a lower bound. ~331 objects at 14.7 obj/case.</a:t>
             </a:r>
           </a:p>
         </p:txBody>
@@ -6683,8 +7013,8 @@
         </p:nvSpPr>
         <p:spPr>
           <a:xfrm>
-            <a:off x="822960" y="1664207"/>
-            <a:ext cx="32004" cy="330200"/>
+            <a:off x="822960" y="1645920"/>
+            <a:ext cx="27432" cy="304800"/>
           </a:xfrm>
           <a:prstGeom prst="rect">
             <a:avLst/>
@@ -6726,8 +7056,8 @@
         </p:nvSpPr>
         <p:spPr>
           <a:xfrm>
-            <a:off x="1143000" y="1554480"/>
-            <a:ext cx="2651760" cy="365760"/>
+            <a:off x="1115568" y="1554480"/>
+            <a:ext cx="2743200" cy="365760"/>
           </a:xfrm>
           <a:prstGeom prst="rect">
             <a:avLst/>
@@ -6761,7 +7091,7 @@
         </p:nvSpPr>
         <p:spPr>
           <a:xfrm>
-            <a:off x="3931920" y="1572768"/>
+            <a:off x="3886200" y="1572768"/>
             <a:ext cx="7406640" cy="731520"/>
           </a:xfrm>
           <a:prstGeom prst="rect">
@@ -6783,7 +7113,7 @@
                 </a:solidFill>
                 <a:latin typeface="Calibri"/>
               </a:rPr>
-              <a:t>Both arms run INT4. A speedup that comes from quantization is not an algorithmic speedup.</a:t>
+              <a:t>Both arms INT4 — a quantization gain can't pose as an algorithmic one</a:t>
             </a:r>
           </a:p>
         </p:txBody>
@@ -6796,8 +7126,8 @@
         </p:nvSpPr>
         <p:spPr>
           <a:xfrm>
-            <a:off x="822960" y="2596896"/>
-            <a:ext cx="32004" cy="330200"/>
+            <a:off x="822960" y="2560320"/>
+            <a:ext cx="27432" cy="304800"/>
           </a:xfrm>
           <a:prstGeom prst="rect">
             <a:avLst/>
@@ -6839,8 +7169,8 @@
         </p:nvSpPr>
         <p:spPr>
           <a:xfrm>
-            <a:off x="1143000" y="2487168"/>
-            <a:ext cx="2651760" cy="365760"/>
+            <a:off x="1115568" y="2468880"/>
+            <a:ext cx="2743200" cy="365760"/>
           </a:xfrm>
           <a:prstGeom prst="rect">
             <a:avLst/>
@@ -6861,7 +7191,7 @@
                 </a:solidFill>
                 <a:latin typeface="Calibri"/>
               </a:rPr>
-              <a:t>Warm everything before timing</a:t>
+              <a:t>Warm everything first</a:t>
             </a:r>
           </a:p>
         </p:txBody>
@@ -6874,7 +7204,7 @@
         </p:nvSpPr>
         <p:spPr>
           <a:xfrm>
-            <a:off x="3931920" y="2505456"/>
+            <a:off x="3886200" y="2487168"/>
             <a:ext cx="7406640" cy="731520"/>
           </a:xfrm>
           <a:prstGeom prst="rect">
@@ -6896,7 +7226,7 @@
                 </a:solidFill>
                 <a:latin typeface="Calibri"/>
               </a:rPr>
-              <a:t>GPU, text backbone, and sliding-window path. Whichever arm runs first otherwise absorbs start-up cost.</a:t>
+              <a:t>GPU, text backbone, sliding-window path — or arm one eats the start-up cost</a:t>
             </a:r>
           </a:p>
         </p:txBody>
@@ -6909,8 +7239,8 @@
         </p:nvSpPr>
         <p:spPr>
           <a:xfrm>
-            <a:off x="822960" y="3529584"/>
-            <a:ext cx="32004" cy="330200"/>
+            <a:off x="822960" y="3474720"/>
+            <a:ext cx="27432" cy="304800"/>
           </a:xfrm>
           <a:prstGeom prst="rect">
             <a:avLst/>
@@ -6952,8 +7282,8 @@
         </p:nvSpPr>
         <p:spPr>
           <a:xfrm>
-            <a:off x="1143000" y="3419856"/>
-            <a:ext cx="2651760" cy="365760"/>
+            <a:off x="1115568" y="3383280"/>
+            <a:ext cx="2743200" cy="365760"/>
           </a:xfrm>
           <a:prstGeom prst="rect">
             <a:avLst/>
@@ -6987,7 +7317,7 @@
         </p:nvSpPr>
         <p:spPr>
           <a:xfrm>
-            <a:off x="3931920" y="3438144"/>
+            <a:off x="3886200" y="3401568"/>
             <a:ext cx="7406640" cy="731520"/>
           </a:xfrm>
           <a:prstGeom prst="rect">
@@ -7009,7 +7339,7 @@
                 </a:solidFill>
                 <a:latin typeface="Calibri"/>
               </a:rPr>
-              <a:t>The script asserts the embedding cache is cleared before each cold measurement, and written after.</a:t>
+              <a:t>Asserted cleared before each cold measurement, written after</a:t>
             </a:r>
           </a:p>
         </p:txBody>
@@ -7022,8 +7352,8 @@
         </p:nvSpPr>
         <p:spPr>
           <a:xfrm>
-            <a:off x="822960" y="4462272"/>
-            <a:ext cx="32004" cy="330200"/>
+            <a:off x="822960" y="4389120"/>
+            <a:ext cx="27432" cy="304800"/>
           </a:xfrm>
           <a:prstGeom prst="rect">
             <a:avLst/>
@@ -7065,8 +7395,8 @@
         </p:nvSpPr>
         <p:spPr>
           <a:xfrm>
-            <a:off x="1143000" y="4352544"/>
-            <a:ext cx="2651760" cy="365760"/>
+            <a:off x="1115568" y="4297680"/>
+            <a:ext cx="2743200" cy="365760"/>
           </a:xfrm>
           <a:prstGeom prst="rect">
             <a:avLst/>
@@ -7087,7 +7417,7 @@
                 </a:solidFill>
                 <a:latin typeface="Calibri"/>
               </a:rPr>
-              <a:t>Repeat, and report the range</a:t>
+              <a:t>Repeat, quote the range</a:t>
             </a:r>
           </a:p>
         </p:txBody>
@@ -7100,7 +7430,7 @@
         </p:nvSpPr>
         <p:spPr>
           <a:xfrm>
-            <a:off x="3931920" y="4370831"/>
+            <a:off x="3886200" y="4315968"/>
             <a:ext cx="7406640" cy="731520"/>
           </a:xfrm>
           <a:prstGeom prst="rect">
@@ -7122,7 +7452,7 @@
                 </a:solidFill>
                 <a:latin typeface="Calibri"/>
               </a:rPr>
-              <a:t>Every headline figure is n≥4 and quoted with its spread, never as a single number.</a:t>
+              <a:t>Every headline figure n≥4, never a single run</a:t>
             </a:r>
           </a:p>
         </p:txBody>
@@ -7135,7 +7465,7 @@
         </p:nvSpPr>
         <p:spPr>
           <a:xfrm>
-            <a:off x="822960" y="5394960"/>
+            <a:off x="822960" y="5349240"/>
             <a:ext cx="10515600" cy="12700"/>
           </a:xfrm>
           <a:prstGeom prst="rect">
@@ -7178,29 +7508,29 @@
         </p:nvSpPr>
         <p:spPr>
           <a:xfrm>
-            <a:off x="822960" y="5669280"/>
-            <a:ext cx="10058400" cy="457200"/>
-          </a:xfrm>
-          <a:prstGeom prst="rect">
-            <a:avLst/>
-          </a:prstGeom>
-          <a:noFill/>
-        </p:spPr>
-        <p:txBody>
-          <a:bodyPr wrap="square">
-            <a:spAutoFit/>
-          </a:bodyPr>
-          <a:lstStyle/>
-          <a:p>
-            <a:pPr algn="l"/>
-            <a:r>
-              <a:rPr sz="1500" b="0">
+            <a:off x="822960" y="5623560"/>
+            <a:ext cx="10058400" cy="411480"/>
+          </a:xfrm>
+          <a:prstGeom prst="rect">
+            <a:avLst/>
+          </a:prstGeom>
+          <a:noFill/>
+        </p:spPr>
+        <p:txBody>
+          <a:bodyPr wrap="square">
+            <a:spAutoFit/>
+          </a:bodyPr>
+          <a:lstStyle/>
+          <a:p>
+            <a:pPr algn="l"/>
+            <a:r>
+              <a:rPr sz="1700" b="1">
                 <a:solidFill>
                   <a:srgbClr val="1A1F26"/>
                 </a:solidFill>
                 <a:latin typeface="Calibri"/>
               </a:rPr>
-              <a:t>Running the same script on two different GPUs is what exposed the largest error.</a:t>
+              <a:t>Two GPUs exposed the largest error.</a:t>
             </a:r>
           </a:p>
         </p:txBody>
@@ -7235,7 +7565,7 @@
                 </a:solidFill>
                 <a:latin typeface="Calibri"/>
               </a:rPr>
-              <a:t>Identical phases behaving differently on an RTX 4070 SUPER and an H100 revealed the ordering artifact behind the 7.1× figure.</a:t>
+              <a:t>Identical phases behaving differently on an RTX 4070 SUPER and an H100 revealed the ordering artifact behind the 7.1×.</a:t>
             </a:r>
           </a:p>
         </p:txBody>
@@ -7388,7 +7718,7 @@
           <p:nvPr/>
         </p:nvGraphicFramePr>
         <p:xfrm>
-          <a:off x="822960" y="1645920"/>
+          <a:off x="822960" y="1600200"/>
           <a:ext cx="10515600" cy="1371600"/>
         </p:xfrm>
         <a:graphic>
@@ -7685,7 +8015,7 @@
         </p:nvSpPr>
         <p:spPr>
           <a:xfrm>
-            <a:off x="822960" y="3383280"/>
+            <a:off x="822960" y="3291840"/>
             <a:ext cx="10515600" cy="12700"/>
           </a:xfrm>
           <a:prstGeom prst="rect">
@@ -7728,7 +8058,7 @@
         </p:nvSpPr>
         <p:spPr>
           <a:xfrm>
-            <a:off x="822960" y="3703320"/>
+            <a:off x="822960" y="3611880"/>
             <a:ext cx="4572000" cy="365760"/>
           </a:xfrm>
           <a:prstGeom prst="rect">
@@ -7744,7 +8074,7 @@
           <a:p>
             <a:pPr algn="l"/>
             <a:r>
-              <a:rPr sz="1300" b="1">
+              <a:rPr sz="1400" b="1">
                 <a:solidFill>
                   <a:srgbClr val="B57E1F"/>
                 </a:solidFill>
@@ -7763,25 +8093,21 @@
         </p:nvSpPr>
         <p:spPr>
           <a:xfrm>
-            <a:off x="822960" y="4114800"/>
-            <a:ext cx="5486400" cy="1097280"/>
-          </a:xfrm>
-          <a:prstGeom prst="rect">
-            <a:avLst/>
-          </a:prstGeom>
-          <a:noFill/>
-        </p:spPr>
-        <p:txBody>
-          <a:bodyPr wrap="square">
-            <a:spAutoFit/>
-          </a:bodyPr>
-          <a:lstStyle/>
-          <a:p>
-            <a:pPr algn="l">
-              <a:spcAft>
-                <a:spcPts val="600"/>
-              </a:spcAft>
-            </a:pPr>
+            <a:off x="822960" y="4069080"/>
+            <a:ext cx="5394960" cy="384048"/>
+          </a:xfrm>
+          <a:prstGeom prst="rect">
+            <a:avLst/>
+          </a:prstGeom>
+          <a:noFill/>
+        </p:spPr>
+        <p:txBody>
+          <a:bodyPr wrap="square">
+            <a:spAutoFit/>
+          </a:bodyPr>
+          <a:lstStyle/>
+          <a:p>
+            <a:pPr algn="l"/>
             <a:r>
               <a:rPr sz="1200" b="0">
                 <a:solidFill>
@@ -7789,15 +8115,34 @@
                 </a:solidFill>
                 <a:latin typeface="Calibri"/>
               </a:rPr>
-              <a:t>INT4's effect on accuracy is measured on one case, not the validation set.</a:t>
-            </a:r>
-          </a:p>
-          <a:p>
-            <a:pPr algn="l">
-              <a:spcAft>
-                <a:spcPts val="600"/>
-              </a:spcAft>
-            </a:pPr>
+              <a:t>—  INT4 accuracy: one case, not the full set</a:t>
+            </a:r>
+          </a:p>
+        </p:txBody>
+      </p:sp>
+      <p:sp>
+        <p:nvSpPr>
+          <p:cNvPr id="9" name="TextBox 8"/>
+          <p:cNvSpPr txBox="1"/>
+          <p:nvPr/>
+        </p:nvSpPr>
+        <p:spPr>
+          <a:xfrm>
+            <a:off x="822960" y="4453128"/>
+            <a:ext cx="5394960" cy="384048"/>
+          </a:xfrm>
+          <a:prstGeom prst="rect">
+            <a:avLst/>
+          </a:prstGeom>
+          <a:noFill/>
+        </p:spPr>
+        <p:txBody>
+          <a:bodyPr wrap="square">
+            <a:spAutoFit/>
+          </a:bodyPr>
+          <a:lstStyle/>
+          <a:p>
+            <a:pPr algn="l"/>
             <a:r>
               <a:rPr sz="1200" b="0">
                 <a:solidFill>
@@ -7805,20 +8150,20 @@
                 </a:solidFill>
                 <a:latin typeface="Calibri"/>
               </a:rPr>
-              <a:t>nnInteractive's compile gain is below the run-to-run spread on small batches.</a:t>
-            </a:r>
-          </a:p>
-        </p:txBody>
-      </p:sp>
-      <p:sp>
-        <p:nvSpPr>
-          <p:cNvPr id="9" name="TextBox 8"/>
-          <p:cNvSpPr txBox="1"/>
-          <p:nvPr/>
-        </p:nvSpPr>
-        <p:spPr>
-          <a:xfrm>
-            <a:off x="6675120" y="3703320"/>
+              <a:t>—  Compile gain sits near run-to-run spread</a:t>
+            </a:r>
+          </a:p>
+        </p:txBody>
+      </p:sp>
+      <p:sp>
+        <p:nvSpPr>
+          <p:cNvPr id="10" name="TextBox 9"/>
+          <p:cNvSpPr txBox="1"/>
+          <p:nvPr/>
+        </p:nvSpPr>
+        <p:spPr>
+          <a:xfrm>
+            <a:off x="6675120" y="3611880"/>
             <a:ext cx="4572000" cy="365760"/>
           </a:xfrm>
           <a:prstGeom prst="rect">
@@ -7834,44 +8179,40 @@
           <a:p>
             <a:pPr algn="l"/>
             <a:r>
-              <a:rPr sz="1300" b="1">
+              <a:rPr sz="1400" b="1">
                 <a:solidFill>
                   <a:srgbClr val="B57E1F"/>
                 </a:solidFill>
                 <a:latin typeface="Calibri"/>
               </a:rPr>
-              <a:t>What I'd do next</a:t>
-            </a:r>
-          </a:p>
-        </p:txBody>
-      </p:sp>
-      <p:sp>
-        <p:nvSpPr>
-          <p:cNvPr id="10" name="TextBox 9"/>
-          <p:cNvSpPr txBox="1"/>
-          <p:nvPr/>
-        </p:nvSpPr>
-        <p:spPr>
-          <a:xfrm>
-            <a:off x="6675120" y="4114800"/>
-            <a:ext cx="4572000" cy="1097280"/>
-          </a:xfrm>
-          <a:prstGeom prst="rect">
-            <a:avLst/>
-          </a:prstGeom>
-          <a:noFill/>
-        </p:spPr>
-        <p:txBody>
-          <a:bodyPr wrap="square">
-            <a:spAutoFit/>
-          </a:bodyPr>
-          <a:lstStyle/>
-          <a:p>
-            <a:pPr algn="l">
-              <a:spcAft>
-                <a:spcPts val="600"/>
-              </a:spcAft>
-            </a:pPr>
+              <a:t>Next</a:t>
+            </a:r>
+          </a:p>
+        </p:txBody>
+      </p:sp>
+      <p:sp>
+        <p:nvSpPr>
+          <p:cNvPr id="11" name="TextBox 10"/>
+          <p:cNvSpPr txBox="1"/>
+          <p:nvPr/>
+        </p:nvSpPr>
+        <p:spPr>
+          <a:xfrm>
+            <a:off x="6675120" y="4069080"/>
+            <a:ext cx="4572000" cy="384048"/>
+          </a:xfrm>
+          <a:prstGeom prst="rect">
+            <a:avLst/>
+          </a:prstGeom>
+          <a:noFill/>
+        </p:spPr>
+        <p:txBody>
+          <a:bodyPr wrap="square">
+            <a:spAutoFit/>
+          </a:bodyPr>
+          <a:lstStyle/>
+          <a:p>
+            <a:pPr algn="l"/>
             <a:r>
               <a:rPr sz="1200" b="0">
                 <a:solidFill>
@@ -7879,15 +8220,34 @@
                 </a:solidFill>
                 <a:latin typeface="Calibri"/>
               </a:rPr>
-              <a:t>Run the INT4 comparison across all 881 validation cases, which turns a</a:t>
-            </a:r>
-          </a:p>
-          <a:p>
-            <a:pPr algn="l">
-              <a:spcAft>
-                <a:spcPts val="600"/>
-              </a:spcAft>
-            </a:pPr>
+              <a:t>—  Run INT4 across all 881 validation cases</a:t>
+            </a:r>
+          </a:p>
+        </p:txBody>
+      </p:sp>
+      <p:sp>
+        <p:nvSpPr>
+          <p:cNvPr id="12" name="TextBox 11"/>
+          <p:cNvSpPr txBox="1"/>
+          <p:nvPr/>
+        </p:nvSpPr>
+        <p:spPr>
+          <a:xfrm>
+            <a:off x="6675120" y="4453128"/>
+            <a:ext cx="4572000" cy="384048"/>
+          </a:xfrm>
+          <a:prstGeom prst="rect">
+            <a:avLst/>
+          </a:prstGeom>
+          <a:noFill/>
+        </p:spPr>
+        <p:txBody>
+          <a:bodyPr wrap="square">
+            <a:spAutoFit/>
+          </a:bodyPr>
+          <a:lstStyle/>
+          <a:p>
+            <a:pPr algn="l"/>
             <a:r>
               <a:rPr sz="1200" b="0">
                 <a:solidFill>
@@ -7895,20 +8255,20 @@
                 </a:solidFill>
                 <a:latin typeface="Calibri"/>
               </a:rPr>
-              <a:t>directional finding into a bound worth acting on.</a:t>
-            </a:r>
-          </a:p>
-        </p:txBody>
-      </p:sp>
-      <p:sp>
-        <p:nvSpPr>
-          <p:cNvPr id="11" name="Rectangle 10"/>
+              <a:t>—  Turns a direction into a bound worth acting on</a:t>
+            </a:r>
+          </a:p>
+        </p:txBody>
+      </p:sp>
+      <p:sp>
+        <p:nvSpPr>
+          <p:cNvPr id="13" name="Rectangle 12"/>
           <p:cNvSpPr/>
           <p:nvPr/>
         </p:nvSpPr>
         <p:spPr>
           <a:xfrm>
-            <a:off x="822960" y="5577840"/>
+            <a:off x="822960" y="5349240"/>
             <a:ext cx="10515600" cy="12700"/>
           </a:xfrm>
           <a:prstGeom prst="rect">
@@ -7945,29 +8305,29 @@
       </p:sp>
       <p:sp>
         <p:nvSpPr>
-          <p:cNvPr id="12" name="TextBox 11"/>
-          <p:cNvSpPr txBox="1"/>
-          <p:nvPr/>
-        </p:nvSpPr>
-        <p:spPr>
-          <a:xfrm>
-            <a:off x="822960" y="5852160"/>
-            <a:ext cx="10058400" cy="457200"/>
-          </a:xfrm>
-          <a:prstGeom prst="rect">
-            <a:avLst/>
-          </a:prstGeom>
-          <a:noFill/>
-        </p:spPr>
-        <p:txBody>
-          <a:bodyPr wrap="square">
-            <a:spAutoFit/>
-          </a:bodyPr>
-          <a:lstStyle/>
-          <a:p>
-            <a:pPr algn="l"/>
-            <a:r>
-              <a:rPr sz="1600" b="1">
+          <p:cNvPr id="14" name="TextBox 13"/>
+          <p:cNvSpPr txBox="1"/>
+          <p:nvPr/>
+        </p:nvSpPr>
+        <p:spPr>
+          <a:xfrm>
+            <a:off x="822960" y="5623560"/>
+            <a:ext cx="10515600" cy="457200"/>
+          </a:xfrm>
+          <a:prstGeom prst="rect">
+            <a:avLst/>
+          </a:prstGeom>
+          <a:noFill/>
+        </p:spPr>
+        <p:txBody>
+          <a:bodyPr wrap="square">
+            <a:spAutoFit/>
+          </a:bodyPr>
+          <a:lstStyle/>
+          <a:p>
+            <a:pPr algn="l"/>
+            <a:r>
+              <a:rPr sz="1700" b="1">
                 <a:solidFill>
                   <a:srgbClr val="1A1F26"/>
                 </a:solidFill>

--- a/slides.pptx
+++ b/slides.pptx
@@ -13,7 +13,6 @@
     <p:sldId id="261" r:id="rId12"/>
     <p:sldId id="262" r:id="rId13"/>
     <p:sldId id="263" r:id="rId14"/>
-    <p:sldId id="264" r:id="rId15"/>
   </p:sldIdLst>
   <p:sldSz cx="12188952" cy="6858000" type="screen4x3"/>
   <p:notesSz cx="6858000" cy="9144000"/>
@@ -3092,7 +3091,7 @@
     <p:bg>
       <p:bgPr>
         <a:solidFill>
-          <a:srgbClr val="141A22"/>
+          <a:srgbClr val="FAF9F6"/>
         </a:solidFill>
         <a:effectLst/>
       </p:bgPr>
@@ -3106,102 +3105,20 @@
       <p:grpSpPr/>
       <p:sp>
         <p:nvSpPr>
-          <p:cNvPr id="2" name="TextBox 1"/>
-          <p:cNvSpPr txBox="1"/>
-          <p:nvPr/>
-        </p:nvSpPr>
-        <p:spPr>
-          <a:xfrm>
-            <a:off x="822960" y="1965960"/>
-            <a:ext cx="8229600" cy="365760"/>
-          </a:xfrm>
-          <a:prstGeom prst="rect">
-            <a:avLst/>
-          </a:prstGeom>
-          <a:noFill/>
-        </p:spPr>
-        <p:txBody>
-          <a:bodyPr wrap="square">
-            <a:spAutoFit/>
-          </a:bodyPr>
-          <a:lstStyle/>
-          <a:p>
-            <a:pPr algn="l"/>
-            <a:r>
-              <a:rPr sz="1100" b="0">
-                <a:solidFill>
-                  <a:srgbClr val="B57E1F"/>
-                </a:solidFill>
-                <a:latin typeface="Calibri"/>
-              </a:rPr>
-              <a:t>CVPR 2025 · Medical Image Segmentation</a:t>
-            </a:r>
-          </a:p>
-        </p:txBody>
-      </p:sp>
-      <p:sp>
-        <p:nvSpPr>
-          <p:cNvPr id="3" name="TextBox 2"/>
-          <p:cNvSpPr txBox="1"/>
-          <p:nvPr/>
-        </p:nvSpPr>
-        <p:spPr>
-          <a:xfrm>
-            <a:off x="822960" y="2423160"/>
-            <a:ext cx="10058400" cy="1645920"/>
-          </a:xfrm>
-          <a:prstGeom prst="rect">
-            <a:avLst/>
-          </a:prstGeom>
-          <a:noFill/>
-        </p:spPr>
-        <p:txBody>
-          <a:bodyPr wrap="square">
-            <a:spAutoFit/>
-          </a:bodyPr>
-          <a:lstStyle/>
-          <a:p>
-            <a:pPr algn="l"/>
-            <a:r>
-              <a:rPr sz="4200" b="1">
-                <a:solidFill>
-                  <a:srgbClr val="F4F2EE"/>
-                </a:solidFill>
-                <a:latin typeface="Calibri"/>
-              </a:rPr>
-              <a:t>Making Two Segmentation</a:t>
-            </a:r>
-          </a:p>
-          <a:p>
-            <a:pPr algn="l"/>
-            <a:r>
-              <a:rPr sz="4200" b="1">
-                <a:solidFill>
-                  <a:srgbClr val="F4F2EE"/>
-                </a:solidFill>
-                <a:latin typeface="Calibri"/>
-              </a:rPr>
-              <a:t>Models Faster</a:t>
-            </a:r>
-          </a:p>
-        </p:txBody>
-      </p:sp>
-      <p:sp>
-        <p:nvSpPr>
-          <p:cNvPr id="4" name="Rectangle 3"/>
+          <p:cNvPr id="2" name="Rectangle 1"/>
           <p:cNvSpPr/>
           <p:nvPr/>
         </p:nvSpPr>
         <p:spPr>
           <a:xfrm>
-            <a:off x="822960" y="4251960"/>
-            <a:ext cx="1097280" cy="38100"/>
+            <a:off x="868680" y="1874519"/>
+            <a:ext cx="1005840" cy="38100"/>
           </a:xfrm>
           <a:prstGeom prst="rect">
             <a:avLst/>
           </a:prstGeom>
           <a:solidFill>
-            <a:srgbClr val="B57E1F"/>
+            <a:srgbClr val="B0761B"/>
           </a:solidFill>
           <a:ln>
             <a:noFill/>
@@ -3231,14 +3148,14 @@
       </p:sp>
       <p:sp>
         <p:nvSpPr>
-          <p:cNvPr id="5" name="TextBox 4"/>
+          <p:cNvPr id="3" name="TextBox 2"/>
           <p:cNvSpPr txBox="1"/>
           <p:nvPr/>
         </p:nvSpPr>
         <p:spPr>
           <a:xfrm>
-            <a:off x="822960" y="4526280"/>
-            <a:ext cx="9144000" cy="365760"/>
+            <a:off x="868680" y="2148840"/>
+            <a:ext cx="8229600" cy="365760"/>
           </a:xfrm>
           <a:prstGeom prst="rect">
             <a:avLst/>
@@ -3253,9 +3170,91 @@
           <a:p>
             <a:pPr algn="l"/>
             <a:r>
-              <a:rPr sz="1400" b="0">
-                <a:solidFill>
-                  <a:srgbClr val="9AA3AF"/>
+              <a:rPr sz="1100" b="0">
+                <a:solidFill>
+                  <a:srgbClr val="B0761B"/>
+                </a:solidFill>
+                <a:latin typeface="Calibri"/>
+              </a:rPr>
+              <a:t>CVPR 2025  ·  Medical Image Segmentation</a:t>
+            </a:r>
+          </a:p>
+        </p:txBody>
+      </p:sp>
+      <p:sp>
+        <p:nvSpPr>
+          <p:cNvPr id="4" name="TextBox 3"/>
+          <p:cNvSpPr txBox="1"/>
+          <p:nvPr/>
+        </p:nvSpPr>
+        <p:spPr>
+          <a:xfrm>
+            <a:off x="868680" y="2606040"/>
+            <a:ext cx="10058400" cy="1737360"/>
+          </a:xfrm>
+          <a:prstGeom prst="rect">
+            <a:avLst/>
+          </a:prstGeom>
+          <a:noFill/>
+        </p:spPr>
+        <p:txBody>
+          <a:bodyPr wrap="square">
+            <a:spAutoFit/>
+          </a:bodyPr>
+          <a:lstStyle/>
+          <a:p>
+            <a:pPr algn="l"/>
+            <a:r>
+              <a:rPr sz="4400" b="1">
+                <a:solidFill>
+                  <a:srgbClr val="1C2026"/>
+                </a:solidFill>
+                <a:latin typeface="Calibri"/>
+              </a:rPr>
+              <a:t>Making Two Segmentation</a:t>
+            </a:r>
+          </a:p>
+          <a:p>
+            <a:pPr algn="l"/>
+            <a:r>
+              <a:rPr sz="4400" b="1">
+                <a:solidFill>
+                  <a:srgbClr val="1C2026"/>
+                </a:solidFill>
+                <a:latin typeface="Calibri"/>
+              </a:rPr>
+              <a:t>Models Faster</a:t>
+            </a:r>
+          </a:p>
+        </p:txBody>
+      </p:sp>
+      <p:sp>
+        <p:nvSpPr>
+          <p:cNvPr id="5" name="TextBox 4"/>
+          <p:cNvSpPr txBox="1"/>
+          <p:nvPr/>
+        </p:nvSpPr>
+        <p:spPr>
+          <a:xfrm>
+            <a:off x="868680" y="4434840"/>
+            <a:ext cx="9144000" cy="365760"/>
+          </a:xfrm>
+          <a:prstGeom prst="rect">
+            <a:avLst/>
+          </a:prstGeom>
+          <a:noFill/>
+        </p:spPr>
+        <p:txBody>
+          <a:bodyPr wrap="square">
+            <a:spAutoFit/>
+          </a:bodyPr>
+          <a:lstStyle/>
+          <a:p>
+            <a:pPr algn="l"/>
+            <a:r>
+              <a:rPr sz="1500" b="0">
+                <a:solidFill>
+                  <a:srgbClr val="8C8F96"/>
                 </a:solidFill>
                 <a:latin typeface="Calibri"/>
               </a:rPr>
@@ -3266,13 +3265,56 @@
       </p:sp>
       <p:sp>
         <p:nvSpPr>
-          <p:cNvPr id="6" name="TextBox 5"/>
+          <p:cNvPr id="6" name="Rectangle 5"/>
+          <p:cNvSpPr/>
+          <p:nvPr/>
+        </p:nvSpPr>
+        <p:spPr>
+          <a:xfrm>
+            <a:off x="868680" y="5806440"/>
+            <a:ext cx="10469880" cy="12700"/>
+          </a:xfrm>
+          <a:prstGeom prst="rect">
+            <a:avLst/>
+          </a:prstGeom>
+          <a:solidFill>
+            <a:srgbClr val="E4E1D9"/>
+          </a:solidFill>
+          <a:ln>
+            <a:noFill/>
+          </a:ln>
+        </p:spPr>
+        <p:style>
+          <a:lnRef idx="1">
+            <a:schemeClr val="accent1"/>
+          </a:lnRef>
+          <a:fillRef idx="3">
+            <a:schemeClr val="accent1"/>
+          </a:fillRef>
+          <a:effectRef idx="2">
+            <a:schemeClr val="accent1"/>
+          </a:effectRef>
+          <a:fontRef idx="minor">
+            <a:schemeClr val="lt1"/>
+          </a:fontRef>
+        </p:style>
+        <p:txBody>
+          <a:bodyPr rtlCol="0" anchor="ctr"/>
+          <a:lstStyle/>
+          <a:p>
+            <a:pPr algn="ctr"/>
+          </a:p>
+        </p:txBody>
+      </p:sp>
+      <p:sp>
+        <p:nvSpPr>
+          <p:cNvPr id="7" name="TextBox 6"/>
           <p:cNvSpPr txBox="1"/>
           <p:nvPr/>
         </p:nvSpPr>
         <p:spPr>
           <a:xfrm>
-            <a:off x="822960" y="6035040"/>
+            <a:off x="868680" y="6035040"/>
             <a:ext cx="9144000" cy="365760"/>
           </a:xfrm>
           <a:prstGeom prst="rect">
@@ -3290,7 +3332,7 @@
             <a:r>
               <a:rPr sz="1000" b="0">
                 <a:solidFill>
-                  <a:srgbClr val="6E7784"/>
+                  <a:srgbClr val="8C8F96"/>
                 </a:solidFill>
                 <a:latin typeface="Calibri"/>
               </a:rPr>
@@ -3313,7 +3355,7 @@
     <p:bg>
       <p:bgPr>
         <a:solidFill>
-          <a:srgbClr val="FCFCFA"/>
+          <a:srgbClr val="FAF9F6"/>
         </a:solidFill>
         <a:effectLst/>
       </p:bgPr>
@@ -3333,7 +3375,7 @@
         </p:nvSpPr>
         <p:spPr>
           <a:xfrm>
-            <a:off x="822960" y="502920"/>
+            <a:off x="868680" y="502920"/>
             <a:ext cx="8961120" cy="548640"/>
           </a:xfrm>
           <a:prstGeom prst="rect">
@@ -3349,9 +3391,9 @@
           <a:p>
             <a:pPr algn="l"/>
             <a:r>
-              <a:rPr sz="2600" b="1">
-                <a:solidFill>
-                  <a:srgbClr val="1A1F26"/>
+              <a:rPr sz="2700" b="1">
+                <a:solidFill>
+                  <a:srgbClr val="1C2026"/>
                 </a:solidFill>
                 <a:latin typeface="Calibri"/>
               </a:rPr>
@@ -3368,7 +3410,7 @@
         </p:nvSpPr>
         <p:spPr>
           <a:xfrm>
-            <a:off x="10058400" y="621792"/>
+            <a:off x="10058400" y="658368"/>
             <a:ext cx="1280160" cy="365760"/>
           </a:xfrm>
           <a:prstGeom prst="rect">
@@ -3386,7 +3428,7 @@
             <a:r>
               <a:rPr sz="1000" b="0">
                 <a:solidFill>
-                  <a:srgbClr val="8A919B"/>
+                  <a:srgbClr val="8C8F96"/>
                 </a:solidFill>
                 <a:latin typeface="Calibri"/>
               </a:rPr>
@@ -3403,14 +3445,14 @@
         </p:nvSpPr>
         <p:spPr>
           <a:xfrm>
-            <a:off x="822960" y="1143000"/>
-            <a:ext cx="10515600" cy="12700"/>
+            <a:off x="868680" y="1170432"/>
+            <a:ext cx="10469880" cy="12700"/>
           </a:xfrm>
           <a:prstGeom prst="rect">
             <a:avLst/>
           </a:prstGeom>
           <a:solidFill>
-            <a:srgbClr val="DDDAD3"/>
+            <a:srgbClr val="E4E1D9"/>
           </a:solidFill>
           <a:ln>
             <a:noFill/>
@@ -3446,7 +3488,7 @@
         </p:nvSpPr>
         <p:spPr>
           <a:xfrm>
-            <a:off x="822960" y="1554480"/>
+            <a:off x="868680" y="1600200"/>
             <a:ext cx="4572000" cy="411480"/>
           </a:xfrm>
           <a:prstGeom prst="rect">
@@ -3464,7 +3506,7 @@
             <a:r>
               <a:rPr sz="2000" b="1">
                 <a:solidFill>
-                  <a:srgbClr val="B57E1F"/>
+                  <a:srgbClr val="B0761B"/>
                 </a:solidFill>
                 <a:latin typeface="Calibri"/>
               </a:rPr>
@@ -3475,265 +3517,20 @@
       </p:sp>
       <p:sp>
         <p:nvSpPr>
-          <p:cNvPr id="6" name="TextBox 5"/>
-          <p:cNvSpPr txBox="1"/>
-          <p:nvPr/>
-        </p:nvSpPr>
-        <p:spPr>
-          <a:xfrm>
-            <a:off x="822960" y="2057400"/>
-            <a:ext cx="4754880" cy="384048"/>
-          </a:xfrm>
-          <a:prstGeom prst="rect">
-            <a:avLst/>
-          </a:prstGeom>
-          <a:noFill/>
-        </p:spPr>
-        <p:txBody>
-          <a:bodyPr wrap="square">
-            <a:spAutoFit/>
-          </a:bodyPr>
-          <a:lstStyle/>
-          <a:p>
-            <a:pPr algn="l"/>
-            <a:r>
-              <a:rPr sz="1300" b="0">
-                <a:solidFill>
-                  <a:srgbClr val="1A1F26"/>
-                </a:solidFill>
-                <a:latin typeface="Calibri"/>
-              </a:rPr>
-              <a:t>—  Our lab's CVPR submission</a:t>
-            </a:r>
-          </a:p>
-        </p:txBody>
-      </p:sp>
-      <p:sp>
-        <p:nvSpPr>
-          <p:cNvPr id="7" name="TextBox 6"/>
-          <p:cNvSpPr txBox="1"/>
-          <p:nvPr/>
-        </p:nvSpPr>
-        <p:spPr>
-          <a:xfrm>
-            <a:off x="822960" y="2441448"/>
-            <a:ext cx="4754880" cy="384048"/>
-          </a:xfrm>
-          <a:prstGeom prst="rect">
-            <a:avLst/>
-          </a:prstGeom>
-          <a:noFill/>
-        </p:spPr>
-        <p:txBody>
-          <a:bodyPr wrap="square">
-            <a:spAutoFit/>
-          </a:bodyPr>
-          <a:lstStyle/>
-          <a:p>
-            <a:pPr algn="l"/>
-            <a:r>
-              <a:rPr sz="1300" b="0">
-                <a:solidFill>
-                  <a:srgbClr val="1A1F26"/>
-                </a:solidFill>
-                <a:latin typeface="Calibri"/>
-              </a:rPr>
-              <a:t>—  Prompt is free text — “the spleen”</a:t>
-            </a:r>
-          </a:p>
-        </p:txBody>
-      </p:sp>
-      <p:sp>
-        <p:nvSpPr>
-          <p:cNvPr id="8" name="TextBox 7"/>
-          <p:cNvSpPr txBox="1"/>
-          <p:nvPr/>
-        </p:nvSpPr>
-        <p:spPr>
-          <a:xfrm>
-            <a:off x="822960" y="2825496"/>
-            <a:ext cx="4754880" cy="384048"/>
-          </a:xfrm>
-          <a:prstGeom prst="rect">
-            <a:avLst/>
-          </a:prstGeom>
-          <a:noFill/>
-        </p:spPr>
-        <p:txBody>
-          <a:bodyPr wrap="square">
-            <a:spAutoFit/>
-          </a:bodyPr>
-          <a:lstStyle/>
-          <a:p>
-            <a:pPr algn="l"/>
-            <a:r>
-              <a:rPr sz="1300" b="0">
-                <a:solidFill>
-                  <a:srgbClr val="1A1F26"/>
-                </a:solidFill>
-                <a:latin typeface="Calibri"/>
-              </a:rPr>
-              <a:t>—  Needs a 4B-parameter LLM to encode it first</a:t>
-            </a:r>
-          </a:p>
-        </p:txBody>
-      </p:sp>
-      <p:sp>
-        <p:nvSpPr>
-          <p:cNvPr id="9" name="TextBox 8"/>
-          <p:cNvSpPr txBox="1"/>
-          <p:nvPr/>
-        </p:nvSpPr>
-        <p:spPr>
-          <a:xfrm>
-            <a:off x="6309360" y="1554480"/>
-            <a:ext cx="4572000" cy="411480"/>
-          </a:xfrm>
-          <a:prstGeom prst="rect">
-            <a:avLst/>
-          </a:prstGeom>
-          <a:noFill/>
-        </p:spPr>
-        <p:txBody>
-          <a:bodyPr wrap="square">
-            <a:spAutoFit/>
-          </a:bodyPr>
-          <a:lstStyle/>
-          <a:p>
-            <a:pPr algn="l"/>
-            <a:r>
-              <a:rPr sz="2000" b="1">
-                <a:solidFill>
-                  <a:srgbClr val="1D6F69"/>
-                </a:solidFill>
-                <a:latin typeface="Calibri"/>
-              </a:rPr>
-              <a:t>nnInteractive</a:t>
-            </a:r>
-          </a:p>
-        </p:txBody>
-      </p:sp>
-      <p:sp>
-        <p:nvSpPr>
-          <p:cNvPr id="10" name="TextBox 9"/>
-          <p:cNvSpPr txBox="1"/>
-          <p:nvPr/>
-        </p:nvSpPr>
-        <p:spPr>
-          <a:xfrm>
-            <a:off x="6309360" y="2057400"/>
-            <a:ext cx="4754880" cy="384048"/>
-          </a:xfrm>
-          <a:prstGeom prst="rect">
-            <a:avLst/>
-          </a:prstGeom>
-          <a:noFill/>
-        </p:spPr>
-        <p:txBody>
-          <a:bodyPr wrap="square">
-            <a:spAutoFit/>
-          </a:bodyPr>
-          <a:lstStyle/>
-          <a:p>
-            <a:pPr algn="l"/>
-            <a:r>
-              <a:rPr sz="1300" b="0">
-                <a:solidFill>
-                  <a:srgbClr val="1A1F26"/>
-                </a:solidFill>
-                <a:latin typeface="Calibri"/>
-              </a:rPr>
-              <a:t>—  The CVPR challenge baseline</a:t>
-            </a:r>
-          </a:p>
-        </p:txBody>
-      </p:sp>
-      <p:sp>
-        <p:nvSpPr>
-          <p:cNvPr id="11" name="TextBox 10"/>
-          <p:cNvSpPr txBox="1"/>
-          <p:nvPr/>
-        </p:nvSpPr>
-        <p:spPr>
-          <a:xfrm>
-            <a:off x="6309360" y="2441448"/>
-            <a:ext cx="4754880" cy="384048"/>
-          </a:xfrm>
-          <a:prstGeom prst="rect">
-            <a:avLst/>
-          </a:prstGeom>
-          <a:noFill/>
-        </p:spPr>
-        <p:txBody>
-          <a:bodyPr wrap="square">
-            <a:spAutoFit/>
-          </a:bodyPr>
-          <a:lstStyle/>
-          <a:p>
-            <a:pPr algn="l"/>
-            <a:r>
-              <a:rPr sz="1300" b="0">
-                <a:solidFill>
-                  <a:srgbClr val="1A1F26"/>
-                </a:solidFill>
-                <a:latin typeface="Calibri"/>
-              </a:rPr>
-              <a:t>—  Prompt is a 3-D bounding box</a:t>
-            </a:r>
-          </a:p>
-        </p:txBody>
-      </p:sp>
-      <p:sp>
-        <p:nvSpPr>
-          <p:cNvPr id="12" name="TextBox 11"/>
-          <p:cNvSpPr txBox="1"/>
-          <p:nvPr/>
-        </p:nvSpPr>
-        <p:spPr>
-          <a:xfrm>
-            <a:off x="6309360" y="2825496"/>
-            <a:ext cx="4754880" cy="384048"/>
-          </a:xfrm>
-          <a:prstGeom prst="rect">
-            <a:avLst/>
-          </a:prstGeom>
-          <a:noFill/>
-        </p:spPr>
-        <p:txBody>
-          <a:bodyPr wrap="square">
-            <a:spAutoFit/>
-          </a:bodyPr>
-          <a:lstStyle/>
-          <a:p>
-            <a:pPr algn="l"/>
-            <a:r>
-              <a:rPr sz="1300" b="0">
-                <a:solidFill>
-                  <a:srgbClr val="1A1F26"/>
-                </a:solidFill>
-                <a:latin typeface="Calibri"/>
-              </a:rPr>
-              <a:t>—  No text encoder — far cheaper per prompt</a:t>
-            </a:r>
-          </a:p>
-        </p:txBody>
-      </p:sp>
-      <p:sp>
-        <p:nvSpPr>
-          <p:cNvPr id="13" name="Rectangle 12"/>
+          <p:cNvPr id="6" name="Rectangle 5"/>
           <p:cNvSpPr/>
           <p:nvPr/>
         </p:nvSpPr>
         <p:spPr>
           <a:xfrm>
-            <a:off x="822960" y="3749039"/>
-            <a:ext cx="10515600" cy="12700"/>
+            <a:off x="868680" y="2180844"/>
+            <a:ext cx="64008" cy="64008"/>
           </a:xfrm>
           <a:prstGeom prst="rect">
             <a:avLst/>
           </a:prstGeom>
           <a:solidFill>
-            <a:srgbClr val="DDDAD3"/>
+            <a:srgbClr val="B0761B"/>
           </a:solidFill>
           <a:ln>
             <a:noFill/>
@@ -3763,14 +3560,14 @@
       </p:sp>
       <p:sp>
         <p:nvSpPr>
-          <p:cNvPr id="14" name="TextBox 13"/>
+          <p:cNvPr id="7" name="TextBox 6"/>
           <p:cNvSpPr txBox="1"/>
           <p:nvPr/>
         </p:nvSpPr>
         <p:spPr>
           <a:xfrm>
-            <a:off x="822960" y="4069080"/>
-            <a:ext cx="9144000" cy="457200"/>
+            <a:off x="1088136" y="2103120"/>
+            <a:ext cx="4535424" cy="402336"/>
           </a:xfrm>
           <a:prstGeom prst="rect">
             <a:avLst/>
@@ -3785,9 +3582,512 @@
           <a:p>
             <a:pPr algn="l"/>
             <a:r>
+              <a:rPr sz="1300" b="0">
+                <a:solidFill>
+                  <a:srgbClr val="1C2026"/>
+                </a:solidFill>
+                <a:latin typeface="Calibri"/>
+              </a:rPr>
+              <a:t>Our lab's CVPR submission</a:t>
+            </a:r>
+          </a:p>
+        </p:txBody>
+      </p:sp>
+      <p:sp>
+        <p:nvSpPr>
+          <p:cNvPr id="8" name="Rectangle 7"/>
+          <p:cNvSpPr/>
+          <p:nvPr/>
+        </p:nvSpPr>
+        <p:spPr>
+          <a:xfrm>
+            <a:off x="868680" y="2583179"/>
+            <a:ext cx="64008" cy="64008"/>
+          </a:xfrm>
+          <a:prstGeom prst="rect">
+            <a:avLst/>
+          </a:prstGeom>
+          <a:solidFill>
+            <a:srgbClr val="B0761B"/>
+          </a:solidFill>
+          <a:ln>
+            <a:noFill/>
+          </a:ln>
+        </p:spPr>
+        <p:style>
+          <a:lnRef idx="1">
+            <a:schemeClr val="accent1"/>
+          </a:lnRef>
+          <a:fillRef idx="3">
+            <a:schemeClr val="accent1"/>
+          </a:fillRef>
+          <a:effectRef idx="2">
+            <a:schemeClr val="accent1"/>
+          </a:effectRef>
+          <a:fontRef idx="minor">
+            <a:schemeClr val="lt1"/>
+          </a:fontRef>
+        </p:style>
+        <p:txBody>
+          <a:bodyPr rtlCol="0" anchor="ctr"/>
+          <a:lstStyle/>
+          <a:p>
+            <a:pPr algn="ctr"/>
+          </a:p>
+        </p:txBody>
+      </p:sp>
+      <p:sp>
+        <p:nvSpPr>
+          <p:cNvPr id="9" name="TextBox 8"/>
+          <p:cNvSpPr txBox="1"/>
+          <p:nvPr/>
+        </p:nvSpPr>
+        <p:spPr>
+          <a:xfrm>
+            <a:off x="1088136" y="2505456"/>
+            <a:ext cx="4535424" cy="402336"/>
+          </a:xfrm>
+          <a:prstGeom prst="rect">
+            <a:avLst/>
+          </a:prstGeom>
+          <a:noFill/>
+        </p:spPr>
+        <p:txBody>
+          <a:bodyPr wrap="square">
+            <a:spAutoFit/>
+          </a:bodyPr>
+          <a:lstStyle/>
+          <a:p>
+            <a:pPr algn="l"/>
+            <a:r>
+              <a:rPr sz="1300" b="0">
+                <a:solidFill>
+                  <a:srgbClr val="1C2026"/>
+                </a:solidFill>
+                <a:latin typeface="Calibri"/>
+              </a:rPr>
+              <a:t>Prompt is free text: “the spleen”</a:t>
+            </a:r>
+          </a:p>
+        </p:txBody>
+      </p:sp>
+      <p:sp>
+        <p:nvSpPr>
+          <p:cNvPr id="10" name="Rectangle 9"/>
+          <p:cNvSpPr/>
+          <p:nvPr/>
+        </p:nvSpPr>
+        <p:spPr>
+          <a:xfrm>
+            <a:off x="868680" y="2985515"/>
+            <a:ext cx="64008" cy="64008"/>
+          </a:xfrm>
+          <a:prstGeom prst="rect">
+            <a:avLst/>
+          </a:prstGeom>
+          <a:solidFill>
+            <a:srgbClr val="B0761B"/>
+          </a:solidFill>
+          <a:ln>
+            <a:noFill/>
+          </a:ln>
+        </p:spPr>
+        <p:style>
+          <a:lnRef idx="1">
+            <a:schemeClr val="accent1"/>
+          </a:lnRef>
+          <a:fillRef idx="3">
+            <a:schemeClr val="accent1"/>
+          </a:fillRef>
+          <a:effectRef idx="2">
+            <a:schemeClr val="accent1"/>
+          </a:effectRef>
+          <a:fontRef idx="minor">
+            <a:schemeClr val="lt1"/>
+          </a:fontRef>
+        </p:style>
+        <p:txBody>
+          <a:bodyPr rtlCol="0" anchor="ctr"/>
+          <a:lstStyle/>
+          <a:p>
+            <a:pPr algn="ctr"/>
+          </a:p>
+        </p:txBody>
+      </p:sp>
+      <p:sp>
+        <p:nvSpPr>
+          <p:cNvPr id="11" name="TextBox 10"/>
+          <p:cNvSpPr txBox="1"/>
+          <p:nvPr/>
+        </p:nvSpPr>
+        <p:spPr>
+          <a:xfrm>
+            <a:off x="1088136" y="2907791"/>
+            <a:ext cx="4535424" cy="402336"/>
+          </a:xfrm>
+          <a:prstGeom prst="rect">
+            <a:avLst/>
+          </a:prstGeom>
+          <a:noFill/>
+        </p:spPr>
+        <p:txBody>
+          <a:bodyPr wrap="square">
+            <a:spAutoFit/>
+          </a:bodyPr>
+          <a:lstStyle/>
+          <a:p>
+            <a:pPr algn="l"/>
+            <a:r>
+              <a:rPr sz="1300" b="0">
+                <a:solidFill>
+                  <a:srgbClr val="1C2026"/>
+                </a:solidFill>
+                <a:latin typeface="Calibri"/>
+              </a:rPr>
+              <a:t>Needs a 4B-parameter LLM to encode it first</a:t>
+            </a:r>
+          </a:p>
+        </p:txBody>
+      </p:sp>
+      <p:sp>
+        <p:nvSpPr>
+          <p:cNvPr id="12" name="TextBox 11"/>
+          <p:cNvSpPr txBox="1"/>
+          <p:nvPr/>
+        </p:nvSpPr>
+        <p:spPr>
+          <a:xfrm>
+            <a:off x="6355080" y="1600200"/>
+            <a:ext cx="4572000" cy="411480"/>
+          </a:xfrm>
+          <a:prstGeom prst="rect">
+            <a:avLst/>
+          </a:prstGeom>
+          <a:noFill/>
+        </p:spPr>
+        <p:txBody>
+          <a:bodyPr wrap="square">
+            <a:spAutoFit/>
+          </a:bodyPr>
+          <a:lstStyle/>
+          <a:p>
+            <a:pPr algn="l"/>
+            <a:r>
               <a:rPr sz="2000" b="1">
                 <a:solidFill>
-                  <a:srgbClr val="1A1F26"/>
+                  <a:srgbClr val="1C2026"/>
+                </a:solidFill>
+                <a:latin typeface="Calibri"/>
+              </a:rPr>
+              <a:t>nnInteractive</a:t>
+            </a:r>
+          </a:p>
+        </p:txBody>
+      </p:sp>
+      <p:sp>
+        <p:nvSpPr>
+          <p:cNvPr id="13" name="Rectangle 12"/>
+          <p:cNvSpPr/>
+          <p:nvPr/>
+        </p:nvSpPr>
+        <p:spPr>
+          <a:xfrm>
+            <a:off x="6355080" y="2180844"/>
+            <a:ext cx="64008" cy="64008"/>
+          </a:xfrm>
+          <a:prstGeom prst="rect">
+            <a:avLst/>
+          </a:prstGeom>
+          <a:solidFill>
+            <a:srgbClr val="B0761B"/>
+          </a:solidFill>
+          <a:ln>
+            <a:noFill/>
+          </a:ln>
+        </p:spPr>
+        <p:style>
+          <a:lnRef idx="1">
+            <a:schemeClr val="accent1"/>
+          </a:lnRef>
+          <a:fillRef idx="3">
+            <a:schemeClr val="accent1"/>
+          </a:fillRef>
+          <a:effectRef idx="2">
+            <a:schemeClr val="accent1"/>
+          </a:effectRef>
+          <a:fontRef idx="minor">
+            <a:schemeClr val="lt1"/>
+          </a:fontRef>
+        </p:style>
+        <p:txBody>
+          <a:bodyPr rtlCol="0" anchor="ctr"/>
+          <a:lstStyle/>
+          <a:p>
+            <a:pPr algn="ctr"/>
+          </a:p>
+        </p:txBody>
+      </p:sp>
+      <p:sp>
+        <p:nvSpPr>
+          <p:cNvPr id="14" name="TextBox 13"/>
+          <p:cNvSpPr txBox="1"/>
+          <p:nvPr/>
+        </p:nvSpPr>
+        <p:spPr>
+          <a:xfrm>
+            <a:off x="6574536" y="2103120"/>
+            <a:ext cx="4535424" cy="402336"/>
+          </a:xfrm>
+          <a:prstGeom prst="rect">
+            <a:avLst/>
+          </a:prstGeom>
+          <a:noFill/>
+        </p:spPr>
+        <p:txBody>
+          <a:bodyPr wrap="square">
+            <a:spAutoFit/>
+          </a:bodyPr>
+          <a:lstStyle/>
+          <a:p>
+            <a:pPr algn="l"/>
+            <a:r>
+              <a:rPr sz="1300" b="0">
+                <a:solidFill>
+                  <a:srgbClr val="1C2026"/>
+                </a:solidFill>
+                <a:latin typeface="Calibri"/>
+              </a:rPr>
+              <a:t>The CVPR challenge baseline</a:t>
+            </a:r>
+          </a:p>
+        </p:txBody>
+      </p:sp>
+      <p:sp>
+        <p:nvSpPr>
+          <p:cNvPr id="15" name="Rectangle 14"/>
+          <p:cNvSpPr/>
+          <p:nvPr/>
+        </p:nvSpPr>
+        <p:spPr>
+          <a:xfrm>
+            <a:off x="6355080" y="2583179"/>
+            <a:ext cx="64008" cy="64008"/>
+          </a:xfrm>
+          <a:prstGeom prst="rect">
+            <a:avLst/>
+          </a:prstGeom>
+          <a:solidFill>
+            <a:srgbClr val="B0761B"/>
+          </a:solidFill>
+          <a:ln>
+            <a:noFill/>
+          </a:ln>
+        </p:spPr>
+        <p:style>
+          <a:lnRef idx="1">
+            <a:schemeClr val="accent1"/>
+          </a:lnRef>
+          <a:fillRef idx="3">
+            <a:schemeClr val="accent1"/>
+          </a:fillRef>
+          <a:effectRef idx="2">
+            <a:schemeClr val="accent1"/>
+          </a:effectRef>
+          <a:fontRef idx="minor">
+            <a:schemeClr val="lt1"/>
+          </a:fontRef>
+        </p:style>
+        <p:txBody>
+          <a:bodyPr rtlCol="0" anchor="ctr"/>
+          <a:lstStyle/>
+          <a:p>
+            <a:pPr algn="ctr"/>
+          </a:p>
+        </p:txBody>
+      </p:sp>
+      <p:sp>
+        <p:nvSpPr>
+          <p:cNvPr id="16" name="TextBox 15"/>
+          <p:cNvSpPr txBox="1"/>
+          <p:nvPr/>
+        </p:nvSpPr>
+        <p:spPr>
+          <a:xfrm>
+            <a:off x="6574536" y="2505456"/>
+            <a:ext cx="4535424" cy="402336"/>
+          </a:xfrm>
+          <a:prstGeom prst="rect">
+            <a:avLst/>
+          </a:prstGeom>
+          <a:noFill/>
+        </p:spPr>
+        <p:txBody>
+          <a:bodyPr wrap="square">
+            <a:spAutoFit/>
+          </a:bodyPr>
+          <a:lstStyle/>
+          <a:p>
+            <a:pPr algn="l"/>
+            <a:r>
+              <a:rPr sz="1300" b="0">
+                <a:solidFill>
+                  <a:srgbClr val="1C2026"/>
+                </a:solidFill>
+                <a:latin typeface="Calibri"/>
+              </a:rPr>
+              <a:t>Prompt is a 3-D bounding box</a:t>
+            </a:r>
+          </a:p>
+        </p:txBody>
+      </p:sp>
+      <p:sp>
+        <p:nvSpPr>
+          <p:cNvPr id="17" name="Rectangle 16"/>
+          <p:cNvSpPr/>
+          <p:nvPr/>
+        </p:nvSpPr>
+        <p:spPr>
+          <a:xfrm>
+            <a:off x="6355080" y="2985515"/>
+            <a:ext cx="64008" cy="64008"/>
+          </a:xfrm>
+          <a:prstGeom prst="rect">
+            <a:avLst/>
+          </a:prstGeom>
+          <a:solidFill>
+            <a:srgbClr val="B0761B"/>
+          </a:solidFill>
+          <a:ln>
+            <a:noFill/>
+          </a:ln>
+        </p:spPr>
+        <p:style>
+          <a:lnRef idx="1">
+            <a:schemeClr val="accent1"/>
+          </a:lnRef>
+          <a:fillRef idx="3">
+            <a:schemeClr val="accent1"/>
+          </a:fillRef>
+          <a:effectRef idx="2">
+            <a:schemeClr val="accent1"/>
+          </a:effectRef>
+          <a:fontRef idx="minor">
+            <a:schemeClr val="lt1"/>
+          </a:fontRef>
+        </p:style>
+        <p:txBody>
+          <a:bodyPr rtlCol="0" anchor="ctr"/>
+          <a:lstStyle/>
+          <a:p>
+            <a:pPr algn="ctr"/>
+          </a:p>
+        </p:txBody>
+      </p:sp>
+      <p:sp>
+        <p:nvSpPr>
+          <p:cNvPr id="18" name="TextBox 17"/>
+          <p:cNvSpPr txBox="1"/>
+          <p:nvPr/>
+        </p:nvSpPr>
+        <p:spPr>
+          <a:xfrm>
+            <a:off x="6574536" y="2907791"/>
+            <a:ext cx="4535424" cy="402336"/>
+          </a:xfrm>
+          <a:prstGeom prst="rect">
+            <a:avLst/>
+          </a:prstGeom>
+          <a:noFill/>
+        </p:spPr>
+        <p:txBody>
+          <a:bodyPr wrap="square">
+            <a:spAutoFit/>
+          </a:bodyPr>
+          <a:lstStyle/>
+          <a:p>
+            <a:pPr algn="l"/>
+            <a:r>
+              <a:rPr sz="1300" b="0">
+                <a:solidFill>
+                  <a:srgbClr val="1C2026"/>
+                </a:solidFill>
+                <a:latin typeface="Calibri"/>
+              </a:rPr>
+              <a:t>No text encoder, far cheaper per prompt</a:t>
+            </a:r>
+          </a:p>
+        </p:txBody>
+      </p:sp>
+      <p:sp>
+        <p:nvSpPr>
+          <p:cNvPr id="19" name="Rectangle 18"/>
+          <p:cNvSpPr/>
+          <p:nvPr/>
+        </p:nvSpPr>
+        <p:spPr>
+          <a:xfrm>
+            <a:off x="868680" y="3840480"/>
+            <a:ext cx="10469880" cy="12700"/>
+          </a:xfrm>
+          <a:prstGeom prst="rect">
+            <a:avLst/>
+          </a:prstGeom>
+          <a:solidFill>
+            <a:srgbClr val="E4E1D9"/>
+          </a:solidFill>
+          <a:ln>
+            <a:noFill/>
+          </a:ln>
+        </p:spPr>
+        <p:style>
+          <a:lnRef idx="1">
+            <a:schemeClr val="accent1"/>
+          </a:lnRef>
+          <a:fillRef idx="3">
+            <a:schemeClr val="accent1"/>
+          </a:fillRef>
+          <a:effectRef idx="2">
+            <a:schemeClr val="accent1"/>
+          </a:effectRef>
+          <a:fontRef idx="minor">
+            <a:schemeClr val="lt1"/>
+          </a:fontRef>
+        </p:style>
+        <p:txBody>
+          <a:bodyPr rtlCol="0" anchor="ctr"/>
+          <a:lstStyle/>
+          <a:p>
+            <a:pPr algn="ctr"/>
+          </a:p>
+        </p:txBody>
+      </p:sp>
+      <p:sp>
+        <p:nvSpPr>
+          <p:cNvPr id="20" name="TextBox 19"/>
+          <p:cNvSpPr txBox="1"/>
+          <p:nvPr/>
+        </p:nvSpPr>
+        <p:spPr>
+          <a:xfrm>
+            <a:off x="868680" y="4160520"/>
+            <a:ext cx="9144000" cy="457200"/>
+          </a:xfrm>
+          <a:prstGeom prst="rect">
+            <a:avLst/>
+          </a:prstGeom>
+          <a:noFill/>
+        </p:spPr>
+        <p:txBody>
+          <a:bodyPr wrap="square">
+            <a:spAutoFit/>
+          </a:bodyPr>
+          <a:lstStyle/>
+          <a:p>
+            <a:pPr algn="l"/>
+            <a:r>
+              <a:rPr sz="2100" b="1">
+                <a:solidFill>
+                  <a:srgbClr val="1C2026"/>
                 </a:solidFill>
                 <a:latin typeface="Calibri"/>
               </a:rPr>
@@ -3798,13 +4098,13 @@
       </p:sp>
       <p:sp>
         <p:nvSpPr>
-          <p:cNvPr id="15" name="TextBox 14"/>
+          <p:cNvPr id="21" name="TextBox 20"/>
           <p:cNvSpPr txBox="1"/>
           <p:nvPr/>
         </p:nvSpPr>
         <p:spPr>
           <a:xfrm>
-            <a:off x="822960" y="4572000"/>
+            <a:off x="868680" y="4709160"/>
             <a:ext cx="9144000" cy="457200"/>
           </a:xfrm>
           <a:prstGeom prst="rect">
@@ -3822,7 +4122,7 @@
             <a:r>
               <a:rPr sz="1700" b="0">
                 <a:solidFill>
-                  <a:srgbClr val="8A919B"/>
+                  <a:srgbClr val="8C8F96"/>
                 </a:solidFill>
                 <a:latin typeface="Calibri"/>
               </a:rPr>
@@ -3833,14 +4133,14 @@
       </p:sp>
       <p:sp>
         <p:nvSpPr>
-          <p:cNvPr id="16" name="TextBox 15"/>
+          <p:cNvPr id="22" name="TextBox 21"/>
           <p:cNvSpPr txBox="1"/>
           <p:nvPr/>
         </p:nvSpPr>
         <p:spPr>
           <a:xfrm>
-            <a:off x="822960" y="6263640"/>
-            <a:ext cx="10515600" cy="365760"/>
+            <a:off x="868680" y="6263640"/>
+            <a:ext cx="10469880" cy="365760"/>
           </a:xfrm>
           <a:prstGeom prst="rect">
             <a:avLst/>
@@ -3857,11 +4157,11 @@
             <a:r>
               <a:rPr sz="900" b="0">
                 <a:solidFill>
-                  <a:srgbClr val="8A919B"/>
+                  <a:srgbClr val="8C8F96"/>
                 </a:solidFill>
                 <a:latin typeface="Calibri"/>
               </a:rPr>
-              <a:t>DSC = Dice Similarity Coefficient. Overlap between prediction and expert annotation, 0 to 1. Above ~0.7 is clinically usable.</a:t>
+              <a:t>DSC is the Dice Similarity Coefficient: overlap between prediction and expert annotation, 0 to 1. Above roughly 0.7 is clinically usable.</a:t>
             </a:r>
           </a:p>
         </p:txBody>
@@ -3880,7 +4180,7 @@
     <p:bg>
       <p:bgPr>
         <a:solidFill>
-          <a:srgbClr val="FCFCFA"/>
+          <a:srgbClr val="FAF9F6"/>
         </a:solidFill>
         <a:effectLst/>
       </p:bgPr>
@@ -3900,7 +4200,7 @@
         </p:nvSpPr>
         <p:spPr>
           <a:xfrm>
-            <a:off x="822960" y="502920"/>
+            <a:off x="868680" y="502920"/>
             <a:ext cx="8961120" cy="548640"/>
           </a:xfrm>
           <a:prstGeom prst="rect">
@@ -3916,13 +4216,13 @@
           <a:p>
             <a:pPr algn="l"/>
             <a:r>
-              <a:rPr sz="2600" b="1">
-                <a:solidFill>
-                  <a:srgbClr val="1A1F26"/>
+              <a:rPr sz="2700" b="1">
+                <a:solidFill>
+                  <a:srgbClr val="1C2026"/>
                 </a:solidFill>
                 <a:latin typeface="Calibri"/>
               </a:rPr>
-              <a:t>The first number I reported was wrong</a:t>
+              <a:t>How the number was measured</a:t>
             </a:r>
           </a:p>
         </p:txBody>
@@ -3935,7 +4235,7 @@
         </p:nvSpPr>
         <p:spPr>
           <a:xfrm>
-            <a:off x="10058400" y="621792"/>
+            <a:off x="10058400" y="658368"/>
             <a:ext cx="1280160" cy="365760"/>
           </a:xfrm>
           <a:prstGeom prst="rect">
@@ -3953,7 +4253,7 @@
             <a:r>
               <a:rPr sz="1000" b="0">
                 <a:solidFill>
-                  <a:srgbClr val="8A919B"/>
+                  <a:srgbClr val="8C8F96"/>
                 </a:solidFill>
                 <a:latin typeface="Calibri"/>
               </a:rPr>
@@ -3970,14 +4270,14 @@
         </p:nvSpPr>
         <p:spPr>
           <a:xfrm>
-            <a:off x="822960" y="1143000"/>
-            <a:ext cx="10515600" cy="12700"/>
+            <a:off x="868680" y="1170432"/>
+            <a:ext cx="10469880" cy="12700"/>
           </a:xfrm>
           <a:prstGeom prst="rect">
             <a:avLst/>
           </a:prstGeom>
           <a:solidFill>
-            <a:srgbClr val="DDDAD3"/>
+            <a:srgbClr val="E4E1D9"/>
           </a:solidFill>
           <a:ln>
             <a:noFill/>
@@ -4013,8 +4313,8 @@
         </p:nvSpPr>
         <p:spPr>
           <a:xfrm>
-            <a:off x="822960" y="1508760"/>
-            <a:ext cx="7315200" cy="365760"/>
+            <a:off x="868680" y="1481328"/>
+            <a:ext cx="7315200" cy="320040"/>
           </a:xfrm>
           <a:prstGeom prst="rect">
             <a:avLst/>
@@ -4029,9 +4329,9 @@
           <a:p>
             <a:pPr algn="l"/>
             <a:r>
-              <a:rPr sz="1200" b="0">
-                <a:solidFill>
-                  <a:srgbClr val="8A919B"/>
+              <a:rPr sz="1100" b="0">
+                <a:solidFill>
+                  <a:srgbClr val="8C8F96"/>
                 </a:solidFill>
                 <a:latin typeface="Calibri"/>
               </a:rPr>
@@ -4048,8 +4348,8 @@
         </p:nvSpPr>
         <p:spPr>
           <a:xfrm>
-            <a:off x="822960" y="2011680"/>
-            <a:ext cx="2468880" cy="822960"/>
+            <a:off x="868680" y="1874519"/>
+            <a:ext cx="2468880" cy="777240"/>
           </a:xfrm>
           <a:prstGeom prst="rect">
             <a:avLst/>
@@ -4064,9 +4364,9 @@
           <a:p>
             <a:pPr algn="l"/>
             <a:r>
-              <a:rPr sz="4400" b="1">
-                <a:solidFill>
-                  <a:srgbClr val="8A919B"/>
+              <a:rPr sz="4200" b="1">
+                <a:solidFill>
+                  <a:srgbClr val="8C8F96"/>
                 </a:solidFill>
                 <a:latin typeface="Calibri"/>
               </a:rPr>
@@ -4083,8 +4383,8 @@
         </p:nvSpPr>
         <p:spPr>
           <a:xfrm>
-            <a:off x="822960" y="2926080"/>
-            <a:ext cx="2468880" cy="640080"/>
+            <a:off x="868680" y="2724912"/>
+            <a:ext cx="2468880" cy="548640"/>
           </a:xfrm>
           <a:prstGeom prst="rect">
             <a:avLst/>
@@ -4101,7 +4401,7 @@
             <a:r>
               <a:rPr sz="1000" b="0">
                 <a:solidFill>
-                  <a:srgbClr val="8A919B"/>
+                  <a:srgbClr val="8C8F96"/>
                 </a:solidFill>
                 <a:latin typeface="Calibri"/>
               </a:rPr>
@@ -4118,8 +4418,8 @@
         </p:nvSpPr>
         <p:spPr>
           <a:xfrm>
-            <a:off x="3520440" y="2011680"/>
-            <a:ext cx="2468880" cy="822960"/>
+            <a:off x="3520439" y="1874519"/>
+            <a:ext cx="2468880" cy="777240"/>
           </a:xfrm>
           <a:prstGeom prst="rect">
             <a:avLst/>
@@ -4134,9 +4434,9 @@
           <a:p>
             <a:pPr algn="l"/>
             <a:r>
-              <a:rPr sz="4400" b="1">
-                <a:solidFill>
-                  <a:srgbClr val="8A919B"/>
+              <a:rPr sz="4200" b="1">
+                <a:solidFill>
+                  <a:srgbClr val="8C8F96"/>
                 </a:solidFill>
                 <a:latin typeface="Calibri"/>
               </a:rPr>
@@ -4153,8 +4453,8 @@
         </p:nvSpPr>
         <p:spPr>
           <a:xfrm>
-            <a:off x="3520440" y="2926080"/>
-            <a:ext cx="2468880" cy="640080"/>
+            <a:off x="3520439" y="2724912"/>
+            <a:ext cx="2468880" cy="548640"/>
           </a:xfrm>
           <a:prstGeom prst="rect">
             <a:avLst/>
@@ -4171,11 +4471,11 @@
             <a:r>
               <a:rPr sz="1000" b="0">
                 <a:solidFill>
-                  <a:srgbClr val="8A919B"/>
+                  <a:srgbClr val="8C8F96"/>
                 </a:solidFill>
                 <a:latin typeface="Calibri"/>
               </a:rPr>
-              <a:t>no warm-up; cache mismatch</a:t>
+              <a:t>no warm-up, cache mismatch</a:t>
             </a:r>
           </a:p>
         </p:txBody>
@@ -4188,8 +4488,8 @@
         </p:nvSpPr>
         <p:spPr>
           <a:xfrm>
-            <a:off x="6217920" y="2011680"/>
-            <a:ext cx="2468880" cy="822960"/>
+            <a:off x="6172200" y="1874519"/>
+            <a:ext cx="2468880" cy="777240"/>
           </a:xfrm>
           <a:prstGeom prst="rect">
             <a:avLst/>
@@ -4204,9 +4504,9 @@
           <a:p>
             <a:pPr algn="l"/>
             <a:r>
-              <a:rPr sz="4400" b="1">
-                <a:solidFill>
-                  <a:srgbClr val="8A919B"/>
+              <a:rPr sz="4200" b="1">
+                <a:solidFill>
+                  <a:srgbClr val="8C8F96"/>
                 </a:solidFill>
                 <a:latin typeface="Calibri"/>
               </a:rPr>
@@ -4223,8 +4523,8 @@
         </p:nvSpPr>
         <p:spPr>
           <a:xfrm>
-            <a:off x="6217920" y="2926080"/>
-            <a:ext cx="2468880" cy="640080"/>
+            <a:off x="6172200" y="2724912"/>
+            <a:ext cx="2468880" cy="548640"/>
           </a:xfrm>
           <a:prstGeom prst="rect">
             <a:avLst/>
@@ -4241,7 +4541,7 @@
             <a:r>
               <a:rPr sz="1000" b="0">
                 <a:solidFill>
-                  <a:srgbClr val="8A919B"/>
+                  <a:srgbClr val="8C8F96"/>
                 </a:solidFill>
                 <a:latin typeface="Calibri"/>
               </a:rPr>
@@ -4258,8 +4558,8 @@
         </p:nvSpPr>
         <p:spPr>
           <a:xfrm>
-            <a:off x="8915400" y="2011680"/>
-            <a:ext cx="2468880" cy="822960"/>
+            <a:off x="8823959" y="1874519"/>
+            <a:ext cx="2468880" cy="777240"/>
           </a:xfrm>
           <a:prstGeom prst="rect">
             <a:avLst/>
@@ -4274,9 +4574,9 @@
           <a:p>
             <a:pPr algn="l"/>
             <a:r>
-              <a:rPr sz="4400" b="1">
-                <a:solidFill>
-                  <a:srgbClr val="B57E1F"/>
+              <a:rPr sz="4200" b="1">
+                <a:solidFill>
+                  <a:srgbClr val="B0761B"/>
                 </a:solidFill>
                 <a:latin typeface="Calibri"/>
               </a:rPr>
@@ -4293,8 +4593,8 @@
         </p:nvSpPr>
         <p:spPr>
           <a:xfrm>
-            <a:off x="8915400" y="2926080"/>
-            <a:ext cx="2468880" cy="640080"/>
+            <a:off x="8823959" y="2724912"/>
+            <a:ext cx="2468880" cy="548640"/>
           </a:xfrm>
           <a:prstGeom prst="rect">
             <a:avLst/>
@@ -4311,7 +4611,7 @@
             <a:r>
               <a:rPr sz="1000" b="0">
                 <a:solidFill>
-                  <a:srgbClr val="8A919B"/>
+                  <a:srgbClr val="8C8F96"/>
                 </a:solidFill>
                 <a:latin typeface="Calibri"/>
               </a:rPr>
@@ -4328,14 +4628,14 @@
         </p:nvSpPr>
         <p:spPr>
           <a:xfrm>
-            <a:off x="822960" y="3886200"/>
-            <a:ext cx="10515600" cy="12700"/>
+            <a:off x="868680" y="3429000"/>
+            <a:ext cx="10469880" cy="12700"/>
           </a:xfrm>
           <a:prstGeom prst="rect">
             <a:avLst/>
           </a:prstGeom>
           <a:solidFill>
-            <a:srgbClr val="DDDAD3"/>
+            <a:srgbClr val="E4E1D9"/>
           </a:solidFill>
           <a:ln>
             <a:noFill/>
@@ -4371,8 +4671,8 @@
         </p:nvSpPr>
         <p:spPr>
           <a:xfrm>
-            <a:off x="822960" y="4206240"/>
-            <a:ext cx="10058400" cy="475488"/>
+            <a:off x="868680" y="3657600"/>
+            <a:ext cx="5486400" cy="320040"/>
           </a:xfrm>
           <a:prstGeom prst="rect">
             <a:avLst/>
@@ -4387,27 +4687,70 @@
           <a:p>
             <a:pPr algn="l"/>
             <a:r>
-              <a:rPr sz="1600" b="0">
-                <a:solidFill>
-                  <a:srgbClr val="1A1F26"/>
+              <a:rPr sz="1200" b="1">
+                <a:solidFill>
+                  <a:srgbClr val="B0761B"/>
                 </a:solidFill>
                 <a:latin typeface="Calibri"/>
               </a:rPr>
-              <a:t>—  No correction changed the code — only how it was measured</a:t>
-            </a:r>
-          </a:p>
-        </p:txBody>
-      </p:sp>
-      <p:sp>
-        <p:nvSpPr>
-          <p:cNvPr id="16" name="TextBox 15"/>
+              <a:t>What changed each time</a:t>
+            </a:r>
+          </a:p>
+        </p:txBody>
+      </p:sp>
+      <p:sp>
+        <p:nvSpPr>
+          <p:cNvPr id="16" name="Rectangle 15"/>
+          <p:cNvSpPr/>
+          <p:nvPr/>
+        </p:nvSpPr>
+        <p:spPr>
+          <a:xfrm>
+            <a:off x="868680" y="4119372"/>
+            <a:ext cx="64008" cy="64008"/>
+          </a:xfrm>
+          <a:prstGeom prst="rect">
+            <a:avLst/>
+          </a:prstGeom>
+          <a:solidFill>
+            <a:srgbClr val="B0761B"/>
+          </a:solidFill>
+          <a:ln>
+            <a:noFill/>
+          </a:ln>
+        </p:spPr>
+        <p:style>
+          <a:lnRef idx="1">
+            <a:schemeClr val="accent1"/>
+          </a:lnRef>
+          <a:fillRef idx="3">
+            <a:schemeClr val="accent1"/>
+          </a:fillRef>
+          <a:effectRef idx="2">
+            <a:schemeClr val="accent1"/>
+          </a:effectRef>
+          <a:fontRef idx="minor">
+            <a:schemeClr val="lt1"/>
+          </a:fontRef>
+        </p:style>
+        <p:txBody>
+          <a:bodyPr rtlCol="0" anchor="ctr"/>
+          <a:lstStyle/>
+          <a:p>
+            <a:pPr algn="ctr"/>
+          </a:p>
+        </p:txBody>
+      </p:sp>
+      <p:sp>
+        <p:nvSpPr>
+          <p:cNvPr id="17" name="TextBox 16"/>
           <p:cNvSpPr txBox="1"/>
           <p:nvPr/>
         </p:nvSpPr>
         <p:spPr>
           <a:xfrm>
-            <a:off x="822960" y="4681727"/>
-            <a:ext cx="10058400" cy="475488"/>
+            <a:off x="1088136" y="4041648"/>
+            <a:ext cx="10113264" cy="384048"/>
           </a:xfrm>
           <a:prstGeom prst="rect">
             <a:avLst/>
@@ -4422,27 +4765,70 @@
           <a:p>
             <a:pPr algn="l"/>
             <a:r>
-              <a:rPr sz="1600" b="0">
-                <a:solidFill>
-                  <a:srgbClr val="1A1F26"/>
+              <a:rPr sz="1300" b="0">
+                <a:solidFill>
+                  <a:srgbClr val="1C2026"/>
                 </a:solidFill>
                 <a:latin typeface="Calibri"/>
               </a:rPr>
-              <a:t>—  The optimizations always worked; the benchmark flattered them</a:t>
-            </a:r>
-          </a:p>
-        </p:txBody>
-      </p:sp>
-      <p:sp>
-        <p:nvSpPr>
-          <p:cNvPr id="17" name="TextBox 16"/>
+              <a:t>Hold precision constant, so quantization cannot pose as algorithmic gain</a:t>
+            </a:r>
+          </a:p>
+        </p:txBody>
+      </p:sp>
+      <p:sp>
+        <p:nvSpPr>
+          <p:cNvPr id="18" name="Rectangle 17"/>
+          <p:cNvSpPr/>
+          <p:nvPr/>
+        </p:nvSpPr>
+        <p:spPr>
+          <a:xfrm>
+            <a:off x="868680" y="4503420"/>
+            <a:ext cx="64008" cy="64008"/>
+          </a:xfrm>
+          <a:prstGeom prst="rect">
+            <a:avLst/>
+          </a:prstGeom>
+          <a:solidFill>
+            <a:srgbClr val="B0761B"/>
+          </a:solidFill>
+          <a:ln>
+            <a:noFill/>
+          </a:ln>
+        </p:spPr>
+        <p:style>
+          <a:lnRef idx="1">
+            <a:schemeClr val="accent1"/>
+          </a:lnRef>
+          <a:fillRef idx="3">
+            <a:schemeClr val="accent1"/>
+          </a:fillRef>
+          <a:effectRef idx="2">
+            <a:schemeClr val="accent1"/>
+          </a:effectRef>
+          <a:fontRef idx="minor">
+            <a:schemeClr val="lt1"/>
+          </a:fontRef>
+        </p:style>
+        <p:txBody>
+          <a:bodyPr rtlCol="0" anchor="ctr"/>
+          <a:lstStyle/>
+          <a:p>
+            <a:pPr algn="ctr"/>
+          </a:p>
+        </p:txBody>
+      </p:sp>
+      <p:sp>
+        <p:nvSpPr>
+          <p:cNvPr id="19" name="TextBox 18"/>
           <p:cNvSpPr txBox="1"/>
           <p:nvPr/>
         </p:nvSpPr>
         <p:spPr>
           <a:xfrm>
-            <a:off x="822960" y="5157216"/>
-            <a:ext cx="10058400" cy="475488"/>
+            <a:off x="1088136" y="4425696"/>
+            <a:ext cx="10113264" cy="384048"/>
           </a:xfrm>
           <a:prstGeom prst="rect">
             <a:avLst/>
@@ -4457,27 +4843,70 @@
           <a:p>
             <a:pPr algn="l"/>
             <a:r>
-              <a:rPr sz="1600" b="0">
-                <a:solidFill>
-                  <a:srgbClr val="1A1F26"/>
+              <a:rPr sz="1300" b="0">
+                <a:solidFill>
+                  <a:srgbClr val="1C2026"/>
                 </a:solidFill>
                 <a:latin typeface="Calibri"/>
               </a:rPr>
-              <a:t>—  Caught by running the same script on two different GPUs</a:t>
-            </a:r>
-          </a:p>
-        </p:txBody>
-      </p:sp>
-      <p:sp>
-        <p:nvSpPr>
-          <p:cNvPr id="18" name="TextBox 17"/>
+              <a:t>Warm the GPU, text backbone and sliding-window path before timing</a:t>
+            </a:r>
+          </a:p>
+        </p:txBody>
+      </p:sp>
+      <p:sp>
+        <p:nvSpPr>
+          <p:cNvPr id="20" name="Rectangle 19"/>
+          <p:cNvSpPr/>
+          <p:nvPr/>
+        </p:nvSpPr>
+        <p:spPr>
+          <a:xfrm>
+            <a:off x="868680" y="4887468"/>
+            <a:ext cx="64008" cy="64008"/>
+          </a:xfrm>
+          <a:prstGeom prst="rect">
+            <a:avLst/>
+          </a:prstGeom>
+          <a:solidFill>
+            <a:srgbClr val="B0761B"/>
+          </a:solidFill>
+          <a:ln>
+            <a:noFill/>
+          </a:ln>
+        </p:spPr>
+        <p:style>
+          <a:lnRef idx="1">
+            <a:schemeClr val="accent1"/>
+          </a:lnRef>
+          <a:fillRef idx="3">
+            <a:schemeClr val="accent1"/>
+          </a:fillRef>
+          <a:effectRef idx="2">
+            <a:schemeClr val="accent1"/>
+          </a:effectRef>
+          <a:fontRef idx="minor">
+            <a:schemeClr val="lt1"/>
+          </a:fontRef>
+        </p:style>
+        <p:txBody>
+          <a:bodyPr rtlCol="0" anchor="ctr"/>
+          <a:lstStyle/>
+          <a:p>
+            <a:pPr algn="ctr"/>
+          </a:p>
+        </p:txBody>
+      </p:sp>
+      <p:sp>
+        <p:nvSpPr>
+          <p:cNvPr id="21" name="TextBox 20"/>
           <p:cNvSpPr txBox="1"/>
           <p:nvPr/>
         </p:nvSpPr>
         <p:spPr>
           <a:xfrm>
-            <a:off x="822960" y="6263640"/>
-            <a:ext cx="10515600" cy="365760"/>
+            <a:off x="1088136" y="4809744"/>
+            <a:ext cx="10113264" cy="384048"/>
           </a:xfrm>
           <a:prstGeom prst="rect">
             <a:avLst/>
@@ -4492,13 +4921,204 @@
           <a:p>
             <a:pPr algn="l"/>
             <a:r>
-              <a:rPr sz="900" b="0">
-                <a:solidFill>
-                  <a:srgbClr val="8A919B"/>
+              <a:rPr sz="1300" b="0">
+                <a:solidFill>
+                  <a:srgbClr val="1C2026"/>
                 </a:solidFill>
                 <a:latin typeface="Calibri"/>
               </a:rPr>
-              <a:t>Final figure: n=4 repeats · both arms INT4 · GPU and text backbone pre-warmed · embedding cache asserted empty.</a:t>
+              <a:t>Assert the embedding cache is empty before every cold measurement</a:t>
+            </a:r>
+          </a:p>
+        </p:txBody>
+      </p:sp>
+      <p:sp>
+        <p:nvSpPr>
+          <p:cNvPr id="22" name="Rectangle 21"/>
+          <p:cNvSpPr/>
+          <p:nvPr/>
+        </p:nvSpPr>
+        <p:spPr>
+          <a:xfrm>
+            <a:off x="868680" y="5271516"/>
+            <a:ext cx="64008" cy="64008"/>
+          </a:xfrm>
+          <a:prstGeom prst="rect">
+            <a:avLst/>
+          </a:prstGeom>
+          <a:solidFill>
+            <a:srgbClr val="B0761B"/>
+          </a:solidFill>
+          <a:ln>
+            <a:noFill/>
+          </a:ln>
+        </p:spPr>
+        <p:style>
+          <a:lnRef idx="1">
+            <a:schemeClr val="accent1"/>
+          </a:lnRef>
+          <a:fillRef idx="3">
+            <a:schemeClr val="accent1"/>
+          </a:fillRef>
+          <a:effectRef idx="2">
+            <a:schemeClr val="accent1"/>
+          </a:effectRef>
+          <a:fontRef idx="minor">
+            <a:schemeClr val="lt1"/>
+          </a:fontRef>
+        </p:style>
+        <p:txBody>
+          <a:bodyPr rtlCol="0" anchor="ctr"/>
+          <a:lstStyle/>
+          <a:p>
+            <a:pPr algn="ctr"/>
+          </a:p>
+        </p:txBody>
+      </p:sp>
+      <p:sp>
+        <p:nvSpPr>
+          <p:cNvPr id="23" name="TextBox 22"/>
+          <p:cNvSpPr txBox="1"/>
+          <p:nvPr/>
+        </p:nvSpPr>
+        <p:spPr>
+          <a:xfrm>
+            <a:off x="1088136" y="5193792"/>
+            <a:ext cx="10113264" cy="384048"/>
+          </a:xfrm>
+          <a:prstGeom prst="rect">
+            <a:avLst/>
+          </a:prstGeom>
+          <a:noFill/>
+        </p:spPr>
+        <p:txBody>
+          <a:bodyPr wrap="square">
+            <a:spAutoFit/>
+          </a:bodyPr>
+          <a:lstStyle/>
+          <a:p>
+            <a:pPr algn="l"/>
+            <a:r>
+              <a:rPr sz="1300" b="0">
+                <a:solidFill>
+                  <a:srgbClr val="1C2026"/>
+                </a:solidFill>
+                <a:latin typeface="Calibri"/>
+              </a:rPr>
+              <a:t>Repeat to n≥4 and quote the range, never a single run</a:t>
+            </a:r>
+          </a:p>
+        </p:txBody>
+      </p:sp>
+      <p:sp>
+        <p:nvSpPr>
+          <p:cNvPr id="24" name="Rectangle 23"/>
+          <p:cNvSpPr/>
+          <p:nvPr/>
+        </p:nvSpPr>
+        <p:spPr>
+          <a:xfrm>
+            <a:off x="868680" y="5715000"/>
+            <a:ext cx="10469880" cy="12700"/>
+          </a:xfrm>
+          <a:prstGeom prst="rect">
+            <a:avLst/>
+          </a:prstGeom>
+          <a:solidFill>
+            <a:srgbClr val="E4E1D9"/>
+          </a:solidFill>
+          <a:ln>
+            <a:noFill/>
+          </a:ln>
+        </p:spPr>
+        <p:style>
+          <a:lnRef idx="1">
+            <a:schemeClr val="accent1"/>
+          </a:lnRef>
+          <a:fillRef idx="3">
+            <a:schemeClr val="accent1"/>
+          </a:fillRef>
+          <a:effectRef idx="2">
+            <a:schemeClr val="accent1"/>
+          </a:effectRef>
+          <a:fontRef idx="minor">
+            <a:schemeClr val="lt1"/>
+          </a:fontRef>
+        </p:style>
+        <p:txBody>
+          <a:bodyPr rtlCol="0" anchor="ctr"/>
+          <a:lstStyle/>
+          <a:p>
+            <a:pPr algn="ctr"/>
+          </a:p>
+        </p:txBody>
+      </p:sp>
+      <p:sp>
+        <p:nvSpPr>
+          <p:cNvPr id="25" name="TextBox 24"/>
+          <p:cNvSpPr txBox="1"/>
+          <p:nvPr/>
+        </p:nvSpPr>
+        <p:spPr>
+          <a:xfrm>
+            <a:off x="868680" y="5897880"/>
+            <a:ext cx="10058400" cy="365760"/>
+          </a:xfrm>
+          <a:prstGeom prst="rect">
+            <a:avLst/>
+          </a:prstGeom>
+          <a:noFill/>
+        </p:spPr>
+        <p:txBody>
+          <a:bodyPr wrap="square">
+            <a:spAutoFit/>
+          </a:bodyPr>
+          <a:lstStyle/>
+          <a:p>
+            <a:pPr algn="l"/>
+            <a:r>
+              <a:rPr sz="1500" b="1">
+                <a:solidFill>
+                  <a:srgbClr val="1C2026"/>
+                </a:solidFill>
+                <a:latin typeface="Calibri"/>
+              </a:rPr>
+              <a:t>No correction changed the code. Only how it was measured.</a:t>
+            </a:r>
+          </a:p>
+        </p:txBody>
+      </p:sp>
+      <p:sp>
+        <p:nvSpPr>
+          <p:cNvPr id="26" name="TextBox 25"/>
+          <p:cNvSpPr txBox="1"/>
+          <p:nvPr/>
+        </p:nvSpPr>
+        <p:spPr>
+          <a:xfrm>
+            <a:off x="868680" y="6263640"/>
+            <a:ext cx="10469880" cy="365760"/>
+          </a:xfrm>
+          <a:prstGeom prst="rect">
+            <a:avLst/>
+          </a:prstGeom>
+          <a:noFill/>
+        </p:spPr>
+        <p:txBody>
+          <a:bodyPr wrap="square">
+            <a:spAutoFit/>
+          </a:bodyPr>
+          <a:lstStyle/>
+          <a:p>
+            <a:pPr algn="l"/>
+            <a:r>
+              <a:rPr sz="900" b="0">
+                <a:solidFill>
+                  <a:srgbClr val="8C8F96"/>
+                </a:solidFill>
+                <a:latin typeface="Calibri"/>
+              </a:rPr>
+              <a:t>The largest error surfaced by running the same script on two GPUs: identical phases behaved differently on an RTX 4070 SUPER and an H100.</a:t>
             </a:r>
           </a:p>
         </p:txBody>
@@ -4517,7 +5137,7 @@
     <p:bg>
       <p:bgPr>
         <a:solidFill>
-          <a:srgbClr val="FCFCFA"/>
+          <a:srgbClr val="FAF9F6"/>
         </a:solidFill>
         <a:effectLst/>
       </p:bgPr>
@@ -4537,7 +5157,7 @@
         </p:nvSpPr>
         <p:spPr>
           <a:xfrm>
-            <a:off x="822960" y="502920"/>
+            <a:off x="868680" y="502920"/>
             <a:ext cx="8961120" cy="548640"/>
           </a:xfrm>
           <a:prstGeom prst="rect">
@@ -4553,13 +5173,13 @@
           <a:p>
             <a:pPr algn="l"/>
             <a:r>
-              <a:rPr sz="2600" b="1">
-                <a:solidFill>
-                  <a:srgbClr val="1A1F26"/>
+              <a:rPr sz="2700" b="1">
+                <a:solidFill>
+                  <a:srgbClr val="1C2026"/>
                 </a:solidFill>
                 <a:latin typeface="Calibri"/>
               </a:rPr>
-              <a:t>VoxTell — what made it faster</a:t>
+              <a:t>VoxTell: what made it faster</a:t>
             </a:r>
           </a:p>
         </p:txBody>
@@ -4572,7 +5192,7 @@
         </p:nvSpPr>
         <p:spPr>
           <a:xfrm>
-            <a:off x="10058400" y="621792"/>
+            <a:off x="10058400" y="658368"/>
             <a:ext cx="1280160" cy="365760"/>
           </a:xfrm>
           <a:prstGeom prst="rect">
@@ -4590,7 +5210,7 @@
             <a:r>
               <a:rPr sz="1000" b="0">
                 <a:solidFill>
-                  <a:srgbClr val="8A919B"/>
+                  <a:srgbClr val="8C8F96"/>
                 </a:solidFill>
                 <a:latin typeface="Calibri"/>
               </a:rPr>
@@ -4607,14 +5227,14 @@
         </p:nvSpPr>
         <p:spPr>
           <a:xfrm>
-            <a:off x="822960" y="1143000"/>
-            <a:ext cx="10515600" cy="12700"/>
+            <a:off x="868680" y="1170432"/>
+            <a:ext cx="10469880" cy="12700"/>
           </a:xfrm>
           <a:prstGeom prst="rect">
             <a:avLst/>
           </a:prstGeom>
           <a:solidFill>
-            <a:srgbClr val="DDDAD3"/>
+            <a:srgbClr val="E4E1D9"/>
           </a:solidFill>
           <a:ln>
             <a:noFill/>
@@ -4651,8 +5271,8 @@
           <p:nvPr/>
         </p:nvGraphicFramePr>
         <p:xfrm>
-          <a:off x="822960" y="1508760"/>
-          <a:ext cx="10515600" cy="2103120"/>
+          <a:off x="868680" y="1536192"/>
+          <a:ext cx="10469880" cy="2103120"/>
         </p:xfrm>
         <a:graphic>
           <a:graphicData uri="http://schemas.openxmlformats.org/drawingml/2006/table">
@@ -4662,7 +5282,7 @@
               </a:tblPr>
               <a:tblGrid>
                 <a:gridCol w="2468880"/>
-                <a:gridCol w="6035040"/>
+                <a:gridCol w="5989320"/>
                 <a:gridCol w="2011680"/>
               </a:tblGrid>
               <a:tr h="420624">
@@ -4674,7 +5294,7 @@
                       <a:r>
                         <a:rPr sz="1000" b="1">
                           <a:solidFill>
-                            <a:srgbClr val="8A919B"/>
+                            <a:srgbClr val="8C8F96"/>
                           </a:solidFill>
                           <a:latin typeface="Calibri"/>
                         </a:rPr>
@@ -4684,7 +5304,7 @@
                   </a:txBody>
                   <a:tcPr>
                     <a:solidFill>
-                      <a:srgbClr val="FCFCFA"/>
+                      <a:srgbClr val="FAF9F6"/>
                     </a:solidFill>
                   </a:tcPr>
                 </a:tc>
@@ -4696,7 +5316,7 @@
                       <a:r>
                         <a:rPr sz="1000" b="1">
                           <a:solidFill>
-                            <a:srgbClr val="8A919B"/>
+                            <a:srgbClr val="8C8F96"/>
                           </a:solidFill>
                           <a:latin typeface="Calibri"/>
                         </a:rPr>
@@ -4706,7 +5326,7 @@
                   </a:txBody>
                   <a:tcPr>
                     <a:solidFill>
-                      <a:srgbClr val="FCFCFA"/>
+                      <a:srgbClr val="FAF9F6"/>
                     </a:solidFill>
                   </a:tcPr>
                 </a:tc>
@@ -4718,7 +5338,7 @@
                       <a:r>
                         <a:rPr sz="1000" b="1">
                           <a:solidFill>
-                            <a:srgbClr val="8A919B"/>
+                            <a:srgbClr val="8C8F96"/>
                           </a:solidFill>
                           <a:latin typeface="Calibri"/>
                         </a:rPr>
@@ -4728,7 +5348,7 @@
                   </a:txBody>
                   <a:tcPr>
                     <a:solidFill>
-                      <a:srgbClr val="FCFCFA"/>
+                      <a:srgbClr val="FAF9F6"/>
                     </a:solidFill>
                   </a:tcPr>
                 </a:tc>
@@ -4742,7 +5362,7 @@
                       <a:r>
                         <a:rPr sz="1100" b="1">
                           <a:solidFill>
-                            <a:srgbClr val="1A1F26"/>
+                            <a:srgbClr val="1C2026"/>
                           </a:solidFill>
                           <a:latin typeface="Calibri"/>
                         </a:rPr>
@@ -4752,7 +5372,7 @@
                   </a:txBody>
                   <a:tcPr>
                     <a:solidFill>
-                      <a:srgbClr val="FFFFFF"/>
+                      <a:srgbClr val="FAF9F6"/>
                     </a:solidFill>
                   </a:tcPr>
                 </a:tc>
@@ -4764,17 +5384,17 @@
                       <a:r>
                         <a:rPr sz="1100" b="0">
                           <a:solidFill>
-                            <a:srgbClr val="1A1F26"/>
+                            <a:srgbClr val="1C2026"/>
                           </a:solidFill>
                           <a:latin typeface="Calibri"/>
                         </a:rPr>
-                        <a:t>tile_step 0.75 + crop to non-zero  ·  25 → 9 patches</a:t>
+                        <a:t>tile_step 0.75 plus crop to non-zero, 25 to 9 patches</a:t>
                       </a:r>
                     </a:p>
                   </a:txBody>
                   <a:tcPr>
                     <a:solidFill>
-                      <a:srgbClr val="FFFFFF"/>
+                      <a:srgbClr val="FAF9F6"/>
                     </a:solidFill>
                   </a:tcPr>
                 </a:tc>
@@ -4786,7 +5406,7 @@
                       <a:r>
                         <a:rPr sz="1100" b="0">
                           <a:solidFill>
-                            <a:srgbClr val="1A1F26"/>
+                            <a:srgbClr val="1C2026"/>
                           </a:solidFill>
                           <a:latin typeface="Calibri"/>
                         </a:rPr>
@@ -4796,7 +5416,7 @@
                   </a:txBody>
                   <a:tcPr>
                     <a:solidFill>
-                      <a:srgbClr val="FFFFFF"/>
+                      <a:srgbClr val="FAF9F6"/>
                     </a:solidFill>
                   </a:tcPr>
                 </a:tc>
@@ -4810,7 +5430,7 @@
                       <a:r>
                         <a:rPr sz="1100" b="1">
                           <a:solidFill>
-                            <a:srgbClr val="1A1F26"/>
+                            <a:srgbClr val="1C2026"/>
                           </a:solidFill>
                           <a:latin typeface="Calibri"/>
                         </a:rPr>
@@ -4820,7 +5440,7 @@
                   </a:txBody>
                   <a:tcPr>
                     <a:solidFill>
-                      <a:srgbClr val="FCFCFA"/>
+                      <a:srgbClr val="FAF9F6"/>
                     </a:solidFill>
                   </a:tcPr>
                 </a:tc>
@@ -4832,7 +5452,7 @@
                       <a:r>
                         <a:rPr sz="1100" b="0">
                           <a:solidFill>
-                            <a:srgbClr val="1A1F26"/>
+                            <a:srgbClr val="1C2026"/>
                           </a:solidFill>
                           <a:latin typeface="Calibri"/>
                         </a:rPr>
@@ -4842,7 +5462,7 @@
                   </a:txBody>
                   <a:tcPr>
                     <a:solidFill>
-                      <a:srgbClr val="FCFCFA"/>
+                      <a:srgbClr val="FAF9F6"/>
                     </a:solidFill>
                   </a:tcPr>
                 </a:tc>
@@ -4854,7 +5474,7 @@
                       <a:r>
                         <a:rPr sz="1100" b="0">
                           <a:solidFill>
-                            <a:srgbClr val="1A1F26"/>
+                            <a:srgbClr val="1C2026"/>
                           </a:solidFill>
                           <a:latin typeface="Calibri"/>
                         </a:rPr>
@@ -4864,7 +5484,7 @@
                   </a:txBody>
                   <a:tcPr>
                     <a:solidFill>
-                      <a:srgbClr val="FCFCFA"/>
+                      <a:srgbClr val="FAF9F6"/>
                     </a:solidFill>
                   </a:tcPr>
                 </a:tc>
@@ -4878,7 +5498,7 @@
                       <a:r>
                         <a:rPr sz="1100" b="1">
                           <a:solidFill>
-                            <a:srgbClr val="1A1F26"/>
+                            <a:srgbClr val="1C2026"/>
                           </a:solidFill>
                           <a:latin typeface="Calibri"/>
                         </a:rPr>
@@ -4888,7 +5508,7 @@
                   </a:txBody>
                   <a:tcPr>
                     <a:solidFill>
-                      <a:srgbClr val="FFFFFF"/>
+                      <a:srgbClr val="FAF9F6"/>
                     </a:solidFill>
                   </a:tcPr>
                 </a:tc>
@@ -4900,17 +5520,17 @@
                       <a:r>
                         <a:rPr sz="1100" b="0">
                           <a:solidFill>
-                            <a:srgbClr val="1A1F26"/>
+                            <a:srgbClr val="1C2026"/>
                           </a:solidFill>
                           <a:latin typeface="Calibri"/>
                         </a:rPr>
-                        <a:t>1.5× faster encode  ·  2 GB VRAM, not 8 GB</a:t>
+                        <a:t>1.5× faster encode, 2 GB VRAM instead of 8 GB</a:t>
                       </a:r>
                     </a:p>
                   </a:txBody>
                   <a:tcPr>
                     <a:solidFill>
-                      <a:srgbClr val="FFFFFF"/>
+                      <a:srgbClr val="FAF9F6"/>
                     </a:solidFill>
                   </a:tcPr>
                 </a:tc>
@@ -4922,7 +5542,7 @@
                       <a:r>
                         <a:rPr sz="1100" b="0">
                           <a:solidFill>
-                            <a:srgbClr val="1A1F26"/>
+                            <a:srgbClr val="1C2026"/>
                           </a:solidFill>
                           <a:latin typeface="Calibri"/>
                         </a:rPr>
@@ -4932,7 +5552,7 @@
                   </a:txBody>
                   <a:tcPr>
                     <a:solidFill>
-                      <a:srgbClr val="FFFFFF"/>
+                      <a:srgbClr val="FAF9F6"/>
                     </a:solidFill>
                   </a:tcPr>
                 </a:tc>
@@ -4946,7 +5566,7 @@
                       <a:r>
                         <a:rPr sz="1100" b="1">
                           <a:solidFill>
-                            <a:srgbClr val="1A1F26"/>
+                            <a:srgbClr val="1C2026"/>
                           </a:solidFill>
                           <a:latin typeface="Calibri"/>
                         </a:rPr>
@@ -4956,7 +5576,7 @@
                   </a:txBody>
                   <a:tcPr>
                     <a:solidFill>
-                      <a:srgbClr val="FCFCFA"/>
+                      <a:srgbClr val="FAF9F6"/>
                     </a:solidFill>
                   </a:tcPr>
                 </a:tc>
@@ -4968,7 +5588,7 @@
                       <a:r>
                         <a:rPr sz="1100" b="0">
                           <a:solidFill>
-                            <a:srgbClr val="1A1F26"/>
+                            <a:srgbClr val="1C2026"/>
                           </a:solidFill>
                           <a:latin typeface="Calibri"/>
                         </a:rPr>
@@ -4978,7 +5598,7 @@
                   </a:txBody>
                   <a:tcPr>
                     <a:solidFill>
-                      <a:srgbClr val="FCFCFA"/>
+                      <a:srgbClr val="FAF9F6"/>
                     </a:solidFill>
                   </a:tcPr>
                 </a:tc>
@@ -4990,7 +5610,7 @@
                       <a:r>
                         <a:rPr sz="1100" b="0">
                           <a:solidFill>
-                            <a:srgbClr val="1A1F26"/>
+                            <a:srgbClr val="1C2026"/>
                           </a:solidFill>
                           <a:latin typeface="Calibri"/>
                         </a:rPr>
@@ -5000,7 +5620,7 @@
                   </a:txBody>
                   <a:tcPr>
                     <a:solidFill>
-                      <a:srgbClr val="FCFCFA"/>
+                      <a:srgbClr val="FAF9F6"/>
                     </a:solidFill>
                   </a:tcPr>
                 </a:tc>
@@ -5017,14 +5637,14 @@
         </p:nvSpPr>
         <p:spPr>
           <a:xfrm>
-            <a:off x="822960" y="3931920"/>
-            <a:ext cx="10515600" cy="12700"/>
+            <a:off x="868680" y="3950208"/>
+            <a:ext cx="10469880" cy="12700"/>
           </a:xfrm>
           <a:prstGeom prst="rect">
             <a:avLst/>
           </a:prstGeom>
           <a:solidFill>
-            <a:srgbClr val="DDDAD3"/>
+            <a:srgbClr val="E4E1D9"/>
           </a:solidFill>
           <a:ln>
             <a:noFill/>
@@ -5060,7 +5680,7 @@
         </p:nvSpPr>
         <p:spPr>
           <a:xfrm>
-            <a:off x="822960" y="4251960"/>
+            <a:off x="868680" y="4251960"/>
             <a:ext cx="5486400" cy="822960"/>
           </a:xfrm>
           <a:prstGeom prst="rect">
@@ -5078,7 +5698,7 @@
             <a:r>
               <a:rPr sz="5200" b="1">
                 <a:solidFill>
-                  <a:srgbClr val="1A1F26"/>
+                  <a:srgbClr val="B0761B"/>
                 </a:solidFill>
                 <a:latin typeface="Calibri"/>
               </a:rPr>
@@ -5095,7 +5715,7 @@
         </p:nvSpPr>
         <p:spPr>
           <a:xfrm>
-            <a:off x="822960" y="5120640"/>
+            <a:off x="868680" y="5093208"/>
             <a:ext cx="5486400" cy="457200"/>
           </a:xfrm>
           <a:prstGeom prst="rect">
@@ -5113,11 +5733,11 @@
             <a:r>
               <a:rPr sz="1000" b="0">
                 <a:solidFill>
-                  <a:srgbClr val="8A919B"/>
+                  <a:srgbClr val="8C8F96"/>
                 </a:solidFill>
                 <a:latin typeface="Calibri"/>
               </a:rPr>
-              <a:t>abdominal CT, H100 MIG  ·  2.6–2.8× over 4 runs</a:t>
+              <a:t>abdominal CT, H100 MIG  ·  2.6 to 2.8× over 4 runs</a:t>
             </a:r>
           </a:p>
         </p:txBody>
@@ -5130,7 +5750,7 @@
         </p:nvSpPr>
         <p:spPr>
           <a:xfrm>
-            <a:off x="6766560" y="4389120"/>
+            <a:off x="6812280" y="4389120"/>
             <a:ext cx="4572000" cy="640080"/>
           </a:xfrm>
           <a:prstGeom prst="rect">
@@ -5148,7 +5768,7 @@
             <a:r>
               <a:rPr sz="2600" b="0">
                 <a:solidFill>
-                  <a:srgbClr val="8A919B"/>
+                  <a:srgbClr val="8C8F96"/>
                 </a:solidFill>
                 <a:latin typeface="Calibri"/>
               </a:rPr>
@@ -5165,8 +5785,8 @@
         </p:nvSpPr>
         <p:spPr>
           <a:xfrm>
-            <a:off x="822960" y="6263640"/>
-            <a:ext cx="10515600" cy="365760"/>
+            <a:off x="868680" y="6263640"/>
+            <a:ext cx="10469880" cy="365760"/>
           </a:xfrm>
           <a:prstGeom prst="rect">
             <a:avLst/>
@@ -5183,11 +5803,11 @@
             <a:r>
               <a:rPr sz="900" b="0">
                 <a:solidFill>
-                  <a:srgbClr val="8A919B"/>
+                  <a:srgbClr val="8C8F96"/>
                 </a:solidFill>
                 <a:latin typeface="Calibri"/>
               </a:rPr>
-              <a:t>Case CT_AMOS_amos_0018 (63×512×512). Both arms INT4 — precision held constant, so this is algorithmic gain only.</a:t>
+              <a:t>Case CT_AMOS_amos_0018 (63×512×512). Both arms run INT4, so precision is held constant and this is algorithmic gain only.</a:t>
             </a:r>
           </a:p>
         </p:txBody>
@@ -5206,7 +5826,7 @@
     <p:bg>
       <p:bgPr>
         <a:solidFill>
-          <a:srgbClr val="FCFCFA"/>
+          <a:srgbClr val="FAF9F6"/>
         </a:solidFill>
         <a:effectLst/>
       </p:bgPr>
@@ -5226,7 +5846,7 @@
         </p:nvSpPr>
         <p:spPr>
           <a:xfrm>
-            <a:off x="822960" y="502920"/>
+            <a:off x="868680" y="502920"/>
             <a:ext cx="8961120" cy="548640"/>
           </a:xfrm>
           <a:prstGeom prst="rect">
@@ -5242,13 +5862,13 @@
           <a:p>
             <a:pPr algn="l"/>
             <a:r>
-              <a:rPr sz="2600" b="1">
-                <a:solidFill>
-                  <a:srgbClr val="1A1F26"/>
+              <a:rPr sz="2700" b="1">
+                <a:solidFill>
+                  <a:srgbClr val="1C2026"/>
                 </a:solidFill>
                 <a:latin typeface="Calibri"/>
               </a:rPr>
-              <a:t>VoxTell — accuracy held</a:t>
+              <a:t>VoxTell: accuracy held</a:t>
             </a:r>
           </a:p>
         </p:txBody>
@@ -5261,7 +5881,7 @@
         </p:nvSpPr>
         <p:spPr>
           <a:xfrm>
-            <a:off x="10058400" y="621792"/>
+            <a:off x="10058400" y="658368"/>
             <a:ext cx="1280160" cy="365760"/>
           </a:xfrm>
           <a:prstGeom prst="rect">
@@ -5279,7 +5899,7 @@
             <a:r>
               <a:rPr sz="1000" b="0">
                 <a:solidFill>
-                  <a:srgbClr val="8A919B"/>
+                  <a:srgbClr val="8C8F96"/>
                 </a:solidFill>
                 <a:latin typeface="Calibri"/>
               </a:rPr>
@@ -5296,14 +5916,14 @@
         </p:nvSpPr>
         <p:spPr>
           <a:xfrm>
-            <a:off x="822960" y="1143000"/>
-            <a:ext cx="10515600" cy="12700"/>
+            <a:off x="868680" y="1170432"/>
+            <a:ext cx="10469880" cy="12700"/>
           </a:xfrm>
           <a:prstGeom prst="rect">
             <a:avLst/>
           </a:prstGeom>
           <a:solidFill>
-            <a:srgbClr val="DDDAD3"/>
+            <a:srgbClr val="E4E1D9"/>
           </a:solidFill>
           <a:ln>
             <a:noFill/>
@@ -5339,7 +5959,7 @@
         </p:nvSpPr>
         <p:spPr>
           <a:xfrm>
-            <a:off x="822960" y="1691640"/>
+            <a:off x="868680" y="1737360"/>
             <a:ext cx="5029200" cy="822960"/>
           </a:xfrm>
           <a:prstGeom prst="rect">
@@ -5357,7 +5977,7 @@
             <a:r>
               <a:rPr sz="5400" b="1">
                 <a:solidFill>
-                  <a:srgbClr val="1D6F69"/>
+                  <a:srgbClr val="1C2026"/>
                 </a:solidFill>
                 <a:latin typeface="Calibri"/>
               </a:rPr>
@@ -5374,7 +5994,7 @@
         </p:nvSpPr>
         <p:spPr>
           <a:xfrm>
-            <a:off x="822960" y="2560320"/>
+            <a:off x="868680" y="2578608"/>
             <a:ext cx="5029200" cy="457200"/>
           </a:xfrm>
           <a:prstGeom prst="rect">
@@ -5392,7 +6012,7 @@
             <a:r>
               <a:rPr sz="1000" b="0">
                 <a:solidFill>
-                  <a:srgbClr val="8A919B"/>
+                  <a:srgbClr val="8C8F96"/>
                 </a:solidFill>
                 <a:latin typeface="Calibri"/>
               </a:rPr>
@@ -5409,7 +6029,7 @@
         </p:nvSpPr>
         <p:spPr>
           <a:xfrm>
-            <a:off x="822960" y="3200400"/>
+            <a:off x="868680" y="3200400"/>
             <a:ext cx="5029200" cy="365760"/>
           </a:xfrm>
           <a:prstGeom prst="rect">
@@ -5427,11 +6047,11 @@
             <a:r>
               <a:rPr sz="1300" b="0">
                 <a:solidFill>
-                  <a:srgbClr val="8A919B"/>
+                  <a:srgbClr val="8C8F96"/>
                 </a:solidFill>
                 <a:latin typeface="Calibri"/>
               </a:rPr>
-              <a:t>65 objects, 5 abdominal CT cases</a:t>
+              <a:t>65 objects across 5 abdominal CT cases</a:t>
             </a:r>
           </a:p>
         </p:txBody>
@@ -5444,14 +6064,14 @@
         </p:nvSpPr>
         <p:spPr>
           <a:xfrm>
-            <a:off x="6309360" y="1691640"/>
-            <a:ext cx="32004" cy="990599"/>
+            <a:off x="6355080" y="1737360"/>
+            <a:ext cx="32004" cy="965200"/>
           </a:xfrm>
           <a:prstGeom prst="rect">
             <a:avLst/>
           </a:prstGeom>
           <a:solidFill>
-            <a:srgbClr val="B57E1F"/>
+            <a:srgbClr val="B0761B"/>
           </a:solidFill>
           <a:ln>
             <a:noFill/>
@@ -5487,7 +6107,7 @@
         </p:nvSpPr>
         <p:spPr>
           <a:xfrm>
-            <a:off x="6629400" y="1691640"/>
+            <a:off x="6675120" y="1737360"/>
             <a:ext cx="4389120" cy="365760"/>
           </a:xfrm>
           <a:prstGeom prst="rect">
@@ -5505,7 +6125,7 @@
             <a:r>
               <a:rPr sz="1500" b="1">
                 <a:solidFill>
-                  <a:srgbClr val="1A1F26"/>
+                  <a:srgbClr val="1C2026"/>
                 </a:solidFill>
                 <a:latin typeface="Calibri"/>
               </a:rPr>
@@ -5516,14 +6136,57 @@
       </p:sp>
       <p:sp>
         <p:nvSpPr>
-          <p:cNvPr id="10" name="TextBox 9"/>
+          <p:cNvPr id="10" name="Rectangle 9"/>
+          <p:cNvSpPr/>
+          <p:nvPr/>
+        </p:nvSpPr>
+        <p:spPr>
+          <a:xfrm>
+            <a:off x="6675120" y="2290572"/>
+            <a:ext cx="64008" cy="64008"/>
+          </a:xfrm>
+          <a:prstGeom prst="rect">
+            <a:avLst/>
+          </a:prstGeom>
+          <a:solidFill>
+            <a:srgbClr val="B0761B"/>
+          </a:solidFill>
+          <a:ln>
+            <a:noFill/>
+          </a:ln>
+        </p:spPr>
+        <p:style>
+          <a:lnRef idx="1">
+            <a:schemeClr val="accent1"/>
+          </a:lnRef>
+          <a:fillRef idx="3">
+            <a:schemeClr val="accent1"/>
+          </a:fillRef>
+          <a:effectRef idx="2">
+            <a:schemeClr val="accent1"/>
+          </a:effectRef>
+          <a:fontRef idx="minor">
+            <a:schemeClr val="lt1"/>
+          </a:fontRef>
+        </p:style>
+        <p:txBody>
+          <a:bodyPr rtlCol="0" anchor="ctr"/>
+          <a:lstStyle/>
+          <a:p>
+            <a:pPr algn="ctr"/>
+          </a:p>
+        </p:txBody>
+      </p:sp>
+      <p:sp>
+        <p:nvSpPr>
+          <p:cNvPr id="11" name="TextBox 10"/>
           <p:cNvSpPr txBox="1"/>
           <p:nvPr/>
         </p:nvSpPr>
         <p:spPr>
           <a:xfrm>
-            <a:off x="6629400" y="2194560"/>
-            <a:ext cx="4572000" cy="365760"/>
+            <a:off x="6894576" y="2212848"/>
+            <a:ext cx="4261104" cy="365760"/>
           </a:xfrm>
           <a:prstGeom prst="rect">
             <a:avLst/>
@@ -5540,25 +6203,68 @@
             <a:r>
               <a:rPr sz="1200" b="0">
                 <a:solidFill>
-                  <a:srgbClr val="1A1F26"/>
+                  <a:srgbClr val="1C2026"/>
                 </a:solidFill>
                 <a:latin typeface="Calibri"/>
               </a:rPr>
-              <a:t>—  INT4 quantization is on by default</a:t>
-            </a:r>
-          </a:p>
-        </p:txBody>
-      </p:sp>
-      <p:sp>
-        <p:nvSpPr>
-          <p:cNvPr id="11" name="TextBox 10"/>
+              <a:t>INT4 quantization is on by default</a:t>
+            </a:r>
+          </a:p>
+        </p:txBody>
+      </p:sp>
+      <p:sp>
+        <p:nvSpPr>
+          <p:cNvPr id="12" name="Rectangle 11"/>
+          <p:cNvSpPr/>
+          <p:nvPr/>
+        </p:nvSpPr>
+        <p:spPr>
+          <a:xfrm>
+            <a:off x="6675120" y="2656332"/>
+            <a:ext cx="64008" cy="64008"/>
+          </a:xfrm>
+          <a:prstGeom prst="rect">
+            <a:avLst/>
+          </a:prstGeom>
+          <a:solidFill>
+            <a:srgbClr val="B0761B"/>
+          </a:solidFill>
+          <a:ln>
+            <a:noFill/>
+          </a:ln>
+        </p:spPr>
+        <p:style>
+          <a:lnRef idx="1">
+            <a:schemeClr val="accent1"/>
+          </a:lnRef>
+          <a:fillRef idx="3">
+            <a:schemeClr val="accent1"/>
+          </a:fillRef>
+          <a:effectRef idx="2">
+            <a:schemeClr val="accent1"/>
+          </a:effectRef>
+          <a:fontRef idx="minor">
+            <a:schemeClr val="lt1"/>
+          </a:fontRef>
+        </p:style>
+        <p:txBody>
+          <a:bodyPr rtlCol="0" anchor="ctr"/>
+          <a:lstStyle/>
+          <a:p>
+            <a:pPr algn="ctr"/>
+          </a:p>
+        </p:txBody>
+      </p:sp>
+      <p:sp>
+        <p:nvSpPr>
+          <p:cNvPr id="13" name="TextBox 12"/>
           <p:cNvSpPr txBox="1"/>
           <p:nvPr/>
         </p:nvSpPr>
         <p:spPr>
           <a:xfrm>
-            <a:off x="6629400" y="2560320"/>
-            <a:ext cx="4572000" cy="365760"/>
+            <a:off x="6894576" y="2578608"/>
+            <a:ext cx="4261104" cy="365760"/>
           </a:xfrm>
           <a:prstGeom prst="rect">
             <a:avLst/>
@@ -5575,25 +6281,68 @@
             <a:r>
               <a:rPr sz="1200" b="0">
                 <a:solidFill>
-                  <a:srgbClr val="1A1F26"/>
+                  <a:srgbClr val="1C2026"/>
                 </a:solidFill>
                 <a:latin typeface="Calibri"/>
               </a:rPr>
-              <a:t>—  0.97 agreement with full precision</a:t>
-            </a:r>
-          </a:p>
-        </p:txBody>
-      </p:sp>
-      <p:sp>
-        <p:nvSpPr>
-          <p:cNvPr id="12" name="TextBox 11"/>
+              <a:t>0.97 agreement with full precision</a:t>
+            </a:r>
+          </a:p>
+        </p:txBody>
+      </p:sp>
+      <p:sp>
+        <p:nvSpPr>
+          <p:cNvPr id="14" name="Rectangle 13"/>
+          <p:cNvSpPr/>
+          <p:nvPr/>
+        </p:nvSpPr>
+        <p:spPr>
+          <a:xfrm>
+            <a:off x="6675120" y="3022091"/>
+            <a:ext cx="64008" cy="64008"/>
+          </a:xfrm>
+          <a:prstGeom prst="rect">
+            <a:avLst/>
+          </a:prstGeom>
+          <a:solidFill>
+            <a:srgbClr val="B0761B"/>
+          </a:solidFill>
+          <a:ln>
+            <a:noFill/>
+          </a:ln>
+        </p:spPr>
+        <p:style>
+          <a:lnRef idx="1">
+            <a:schemeClr val="accent1"/>
+          </a:lnRef>
+          <a:fillRef idx="3">
+            <a:schemeClr val="accent1"/>
+          </a:fillRef>
+          <a:effectRef idx="2">
+            <a:schemeClr val="accent1"/>
+          </a:effectRef>
+          <a:fontRef idx="minor">
+            <a:schemeClr val="lt1"/>
+          </a:fontRef>
+        </p:style>
+        <p:txBody>
+          <a:bodyPr rtlCol="0" anchor="ctr"/>
+          <a:lstStyle/>
+          <a:p>
+            <a:pPr algn="ctr"/>
+          </a:p>
+        </p:txBody>
+      </p:sp>
+      <p:sp>
+        <p:nvSpPr>
+          <p:cNvPr id="15" name="TextBox 14"/>
           <p:cNvSpPr txBox="1"/>
           <p:nvPr/>
         </p:nvSpPr>
         <p:spPr>
           <a:xfrm>
-            <a:off x="6629400" y="2926080"/>
-            <a:ext cx="4572000" cy="365760"/>
+            <a:off x="6894576" y="2944368"/>
+            <a:ext cx="4261104" cy="365760"/>
           </a:xfrm>
           <a:prstGeom prst="rect">
             <a:avLst/>
@@ -5610,25 +6359,68 @@
             <a:r>
               <a:rPr sz="1200" b="0">
                 <a:solidFill>
-                  <a:srgbClr val="1A1F26"/>
+                  <a:srgbClr val="1C2026"/>
                 </a:solidFill>
                 <a:latin typeface="Calibri"/>
               </a:rPr>
-              <a:t>—  Segments 5.5% fewer voxels</a:t>
-            </a:r>
-          </a:p>
-        </p:txBody>
-      </p:sp>
-      <p:sp>
-        <p:nvSpPr>
-          <p:cNvPr id="13" name="TextBox 12"/>
+              <a:t>Segments 5.5% fewer voxels</a:t>
+            </a:r>
+          </a:p>
+        </p:txBody>
+      </p:sp>
+      <p:sp>
+        <p:nvSpPr>
+          <p:cNvPr id="16" name="Rectangle 15"/>
+          <p:cNvSpPr/>
+          <p:nvPr/>
+        </p:nvSpPr>
+        <p:spPr>
+          <a:xfrm>
+            <a:off x="6675120" y="3387852"/>
+            <a:ext cx="64008" cy="64008"/>
+          </a:xfrm>
+          <a:prstGeom prst="rect">
+            <a:avLst/>
+          </a:prstGeom>
+          <a:solidFill>
+            <a:srgbClr val="B0761B"/>
+          </a:solidFill>
+          <a:ln>
+            <a:noFill/>
+          </a:ln>
+        </p:spPr>
+        <p:style>
+          <a:lnRef idx="1">
+            <a:schemeClr val="accent1"/>
+          </a:lnRef>
+          <a:fillRef idx="3">
+            <a:schemeClr val="accent1"/>
+          </a:fillRef>
+          <a:effectRef idx="2">
+            <a:schemeClr val="accent1"/>
+          </a:effectRef>
+          <a:fontRef idx="minor">
+            <a:schemeClr val="lt1"/>
+          </a:fontRef>
+        </p:style>
+        <p:txBody>
+          <a:bodyPr rtlCol="0" anchor="ctr"/>
+          <a:lstStyle/>
+          <a:p>
+            <a:pPr algn="ctr"/>
+          </a:p>
+        </p:txBody>
+      </p:sp>
+      <p:sp>
+        <p:nvSpPr>
+          <p:cNvPr id="17" name="TextBox 16"/>
           <p:cNvSpPr txBox="1"/>
           <p:nvPr/>
         </p:nvSpPr>
         <p:spPr>
           <a:xfrm>
-            <a:off x="6629400" y="3291840"/>
-            <a:ext cx="4572000" cy="365760"/>
+            <a:off x="6894576" y="3310128"/>
+            <a:ext cx="4261104" cy="365760"/>
           </a:xfrm>
           <a:prstGeom prst="rect">
             <a:avLst/>
@@ -5645,25 +6437,68 @@
             <a:r>
               <a:rPr sz="1200" b="0">
                 <a:solidFill>
-                  <a:srgbClr val="1A1F26"/>
+                  <a:srgbClr val="1C2026"/>
                 </a:solidFill>
                 <a:latin typeface="Calibri"/>
               </a:rPr>
-              <a:t>—  One-sided → bias, not noise</a:t>
-            </a:r>
-          </a:p>
-        </p:txBody>
-      </p:sp>
-      <p:sp>
-        <p:nvSpPr>
-          <p:cNvPr id="14" name="TextBox 13"/>
+              <a:t>One-sided, so bias rather than noise</a:t>
+            </a:r>
+          </a:p>
+        </p:txBody>
+      </p:sp>
+      <p:sp>
+        <p:nvSpPr>
+          <p:cNvPr id="18" name="Rectangle 17"/>
+          <p:cNvSpPr/>
+          <p:nvPr/>
+        </p:nvSpPr>
+        <p:spPr>
+          <a:xfrm>
+            <a:off x="6675120" y="3753611"/>
+            <a:ext cx="64008" cy="64008"/>
+          </a:xfrm>
+          <a:prstGeom prst="rect">
+            <a:avLst/>
+          </a:prstGeom>
+          <a:solidFill>
+            <a:srgbClr val="B0761B"/>
+          </a:solidFill>
+          <a:ln>
+            <a:noFill/>
+          </a:ln>
+        </p:spPr>
+        <p:style>
+          <a:lnRef idx="1">
+            <a:schemeClr val="accent1"/>
+          </a:lnRef>
+          <a:fillRef idx="3">
+            <a:schemeClr val="accent1"/>
+          </a:fillRef>
+          <a:effectRef idx="2">
+            <a:schemeClr val="accent1"/>
+          </a:effectRef>
+          <a:fontRef idx="minor">
+            <a:schemeClr val="lt1"/>
+          </a:fontRef>
+        </p:style>
+        <p:txBody>
+          <a:bodyPr rtlCol="0" anchor="ctr"/>
+          <a:lstStyle/>
+          <a:p>
+            <a:pPr algn="ctr"/>
+          </a:p>
+        </p:txBody>
+      </p:sp>
+      <p:sp>
+        <p:nvSpPr>
+          <p:cNvPr id="19" name="TextBox 18"/>
           <p:cNvSpPr txBox="1"/>
           <p:nvPr/>
         </p:nvSpPr>
         <p:spPr>
           <a:xfrm>
-            <a:off x="6629400" y="3657600"/>
-            <a:ext cx="4572000" cy="365760"/>
+            <a:off x="6894576" y="3675887"/>
+            <a:ext cx="4261104" cy="365760"/>
           </a:xfrm>
           <a:prstGeom prst="rect">
             <a:avLst/>
@@ -5680,25 +6515,25 @@
             <a:r>
               <a:rPr sz="1200" b="0">
                 <a:solidFill>
-                  <a:srgbClr val="1A1F26"/>
+                  <a:srgbClr val="1C2026"/>
                 </a:solidFill>
                 <a:latin typeface="Calibri"/>
               </a:rPr>
-              <a:t>—  Not measured across the validation set</a:t>
-            </a:r>
-          </a:p>
-        </p:txBody>
-      </p:sp>
-      <p:sp>
-        <p:nvSpPr>
-          <p:cNvPr id="15" name="TextBox 14"/>
+              <a:t>Not measured across the validation set</a:t>
+            </a:r>
+          </a:p>
+        </p:txBody>
+      </p:sp>
+      <p:sp>
+        <p:nvSpPr>
+          <p:cNvPr id="20" name="TextBox 19"/>
           <p:cNvSpPr txBox="1"/>
           <p:nvPr/>
         </p:nvSpPr>
         <p:spPr>
           <a:xfrm>
-            <a:off x="822960" y="6263640"/>
-            <a:ext cx="10515600" cy="365760"/>
+            <a:off x="868680" y="6263640"/>
+            <a:ext cx="10469880" cy="365760"/>
           </a:xfrm>
           <a:prstGeom prst="rect">
             <a:avLst/>
@@ -5715,11 +6550,11 @@
             <a:r>
               <a:rPr sz="900" b="0">
                 <a:solidFill>
-                  <a:srgbClr val="8A919B"/>
+                  <a:srgbClr val="8C8F96"/>
                 </a:solidFill>
                 <a:latin typeface="Calibri"/>
               </a:rPr>
-              <a:t>VoxTell DSC from accuracy_results.csv. INT4 comparison is n=1 and measures output agreement, not accuracy vs ground truth.</a:t>
+              <a:t>VoxTell DSC from accuracy_results.csv. The INT4 comparison is n=1 and measures output agreement, not accuracy against ground truth.</a:t>
             </a:r>
           </a:p>
         </p:txBody>
@@ -5738,7 +6573,7 @@
     <p:bg>
       <p:bgPr>
         <a:solidFill>
-          <a:srgbClr val="FCFCFA"/>
+          <a:srgbClr val="FAF9F6"/>
         </a:solidFill>
         <a:effectLst/>
       </p:bgPr>
@@ -5758,7 +6593,7 @@
         </p:nvSpPr>
         <p:spPr>
           <a:xfrm>
-            <a:off x="822960" y="502920"/>
+            <a:off x="868680" y="502920"/>
             <a:ext cx="8961120" cy="548640"/>
           </a:xfrm>
           <a:prstGeom prst="rect">
@@ -5774,13 +6609,13 @@
           <a:p>
             <a:pPr algn="l"/>
             <a:r>
-              <a:rPr sz="2600" b="1">
-                <a:solidFill>
-                  <a:srgbClr val="1A1F26"/>
+              <a:rPr sz="2700" b="1">
+                <a:solidFill>
+                  <a:srgbClr val="1C2026"/>
                 </a:solidFill>
                 <a:latin typeface="Calibri"/>
               </a:rPr>
-              <a:t>nnInteractive — compiling the network</a:t>
+              <a:t>nnInteractive: compiling the network</a:t>
             </a:r>
           </a:p>
         </p:txBody>
@@ -5793,7 +6628,7 @@
         </p:nvSpPr>
         <p:spPr>
           <a:xfrm>
-            <a:off x="10058400" y="621792"/>
+            <a:off x="10058400" y="658368"/>
             <a:ext cx="1280160" cy="365760"/>
           </a:xfrm>
           <a:prstGeom prst="rect">
@@ -5811,7 +6646,7 @@
             <a:r>
               <a:rPr sz="1000" b="0">
                 <a:solidFill>
-                  <a:srgbClr val="8A919B"/>
+                  <a:srgbClr val="8C8F96"/>
                 </a:solidFill>
                 <a:latin typeface="Calibri"/>
               </a:rPr>
@@ -5828,14 +6663,14 @@
         </p:nvSpPr>
         <p:spPr>
           <a:xfrm>
-            <a:off x="822960" y="1143000"/>
-            <a:ext cx="10515600" cy="12700"/>
+            <a:off x="868680" y="1170432"/>
+            <a:ext cx="10469880" cy="12700"/>
           </a:xfrm>
           <a:prstGeom prst="rect">
             <a:avLst/>
           </a:prstGeom>
           <a:solidFill>
-            <a:srgbClr val="DDDAD3"/>
+            <a:srgbClr val="E4E1D9"/>
           </a:solidFill>
           <a:ln>
             <a:noFill/>
@@ -5871,7 +6706,7 @@
         </p:nvSpPr>
         <p:spPr>
           <a:xfrm>
-            <a:off x="822960" y="1508760"/>
+            <a:off x="868680" y="1536192"/>
             <a:ext cx="8229600" cy="365760"/>
           </a:xfrm>
           <a:prstGeom prst="rect">
@@ -5889,7 +6724,7 @@
             <a:r>
               <a:rPr sz="1500" b="0">
                 <a:solidFill>
-                  <a:srgbClr val="B57E1F"/>
+                  <a:srgbClr val="B0761B"/>
                 </a:solidFill>
                 <a:latin typeface="Calibri"/>
               </a:rPr>
@@ -5900,90 +6735,20 @@
       </p:sp>
       <p:sp>
         <p:nvSpPr>
-          <p:cNvPr id="6" name="TextBox 5"/>
-          <p:cNvSpPr txBox="1"/>
-          <p:nvPr/>
-        </p:nvSpPr>
-        <p:spPr>
-          <a:xfrm>
-            <a:off x="822960" y="1965960"/>
-            <a:ext cx="8229600" cy="384048"/>
-          </a:xfrm>
-          <a:prstGeom prst="rect">
-            <a:avLst/>
-          </a:prstGeom>
-          <a:noFill/>
-        </p:spPr>
-        <p:txBody>
-          <a:bodyPr wrap="square">
-            <a:spAutoFit/>
-          </a:bodyPr>
-          <a:lstStyle/>
-          <a:p>
-            <a:pPr algn="l"/>
-            <a:r>
-              <a:rPr sz="1300" b="0">
-                <a:solidFill>
-                  <a:srgbClr val="1A1F26"/>
-                </a:solidFill>
-                <a:latin typeface="Calibri"/>
-              </a:rPr>
-              <a:t>—  One line changed</a:t>
-            </a:r>
-          </a:p>
-        </p:txBody>
-      </p:sp>
-      <p:sp>
-        <p:nvSpPr>
-          <p:cNvPr id="7" name="TextBox 6"/>
-          <p:cNvSpPr txBox="1"/>
-          <p:nvPr/>
-        </p:nvSpPr>
-        <p:spPr>
-          <a:xfrm>
-            <a:off x="822960" y="2350008"/>
-            <a:ext cx="8229600" cy="384048"/>
-          </a:xfrm>
-          <a:prstGeom prst="rect">
-            <a:avLst/>
-          </a:prstGeom>
-          <a:noFill/>
-        </p:spPr>
-        <p:txBody>
-          <a:bodyPr wrap="square">
-            <a:spAutoFit/>
-          </a:bodyPr>
-          <a:lstStyle/>
-          <a:p>
-            <a:pPr algn="l"/>
-            <a:r>
-              <a:rPr sz="1300" b="0">
-                <a:solidFill>
-                  <a:srgbClr val="1A1F26"/>
-                </a:solidFill>
-                <a:latin typeface="Calibri"/>
-              </a:rPr>
-              <a:t>—  Fuses kernels, cuts per-call dispatch overhead</a:t>
-            </a:r>
-          </a:p>
-        </p:txBody>
-      </p:sp>
-      <p:sp>
-        <p:nvSpPr>
-          <p:cNvPr id="8" name="Rectangle 7"/>
+          <p:cNvPr id="6" name="Rectangle 5"/>
           <p:cNvSpPr/>
           <p:nvPr/>
         </p:nvSpPr>
         <p:spPr>
           <a:xfrm>
-            <a:off x="822960" y="2834640"/>
-            <a:ext cx="10515600" cy="12700"/>
+            <a:off x="868680" y="2089404"/>
+            <a:ext cx="64008" cy="64008"/>
           </a:xfrm>
           <a:prstGeom prst="rect">
             <a:avLst/>
           </a:prstGeom>
           <a:solidFill>
-            <a:srgbClr val="DDDAD3"/>
+            <a:srgbClr val="B0761B"/>
           </a:solidFill>
           <a:ln>
             <a:noFill/>
@@ -6013,14 +6778,14 @@
       </p:sp>
       <p:sp>
         <p:nvSpPr>
-          <p:cNvPr id="9" name="TextBox 8"/>
+          <p:cNvPr id="7" name="TextBox 6"/>
           <p:cNvSpPr txBox="1"/>
           <p:nvPr/>
         </p:nvSpPr>
         <p:spPr>
           <a:xfrm>
-            <a:off x="822960" y="3200400"/>
-            <a:ext cx="4572000" cy="822960"/>
+            <a:off x="1088136" y="2011680"/>
+            <a:ext cx="8010144" cy="402336"/>
           </a:xfrm>
           <a:prstGeom prst="rect">
             <a:avLst/>
@@ -6035,9 +6800,165 @@
           <a:p>
             <a:pPr algn="l"/>
             <a:r>
+              <a:rPr sz="1300" b="0">
+                <a:solidFill>
+                  <a:srgbClr val="1C2026"/>
+                </a:solidFill>
+                <a:latin typeface="Calibri"/>
+              </a:rPr>
+              <a:t>One line changed</a:t>
+            </a:r>
+          </a:p>
+        </p:txBody>
+      </p:sp>
+      <p:sp>
+        <p:nvSpPr>
+          <p:cNvPr id="8" name="Rectangle 7"/>
+          <p:cNvSpPr/>
+          <p:nvPr/>
+        </p:nvSpPr>
+        <p:spPr>
+          <a:xfrm>
+            <a:off x="868680" y="2491740"/>
+            <a:ext cx="64008" cy="64008"/>
+          </a:xfrm>
+          <a:prstGeom prst="rect">
+            <a:avLst/>
+          </a:prstGeom>
+          <a:solidFill>
+            <a:srgbClr val="B0761B"/>
+          </a:solidFill>
+          <a:ln>
+            <a:noFill/>
+          </a:ln>
+        </p:spPr>
+        <p:style>
+          <a:lnRef idx="1">
+            <a:schemeClr val="accent1"/>
+          </a:lnRef>
+          <a:fillRef idx="3">
+            <a:schemeClr val="accent1"/>
+          </a:fillRef>
+          <a:effectRef idx="2">
+            <a:schemeClr val="accent1"/>
+          </a:effectRef>
+          <a:fontRef idx="minor">
+            <a:schemeClr val="lt1"/>
+          </a:fontRef>
+        </p:style>
+        <p:txBody>
+          <a:bodyPr rtlCol="0" anchor="ctr"/>
+          <a:lstStyle/>
+          <a:p>
+            <a:pPr algn="ctr"/>
+          </a:p>
+        </p:txBody>
+      </p:sp>
+      <p:sp>
+        <p:nvSpPr>
+          <p:cNvPr id="9" name="TextBox 8"/>
+          <p:cNvSpPr txBox="1"/>
+          <p:nvPr/>
+        </p:nvSpPr>
+        <p:spPr>
+          <a:xfrm>
+            <a:off x="1088136" y="2414016"/>
+            <a:ext cx="8010144" cy="402336"/>
+          </a:xfrm>
+          <a:prstGeom prst="rect">
+            <a:avLst/>
+          </a:prstGeom>
+          <a:noFill/>
+        </p:spPr>
+        <p:txBody>
+          <a:bodyPr wrap="square">
+            <a:spAutoFit/>
+          </a:bodyPr>
+          <a:lstStyle/>
+          <a:p>
+            <a:pPr algn="l"/>
+            <a:r>
+              <a:rPr sz="1300" b="0">
+                <a:solidFill>
+                  <a:srgbClr val="1C2026"/>
+                </a:solidFill>
+                <a:latin typeface="Calibri"/>
+              </a:rPr>
+              <a:t>Fuses kernels, cuts per-call dispatch overhead</a:t>
+            </a:r>
+          </a:p>
+        </p:txBody>
+      </p:sp>
+      <p:sp>
+        <p:nvSpPr>
+          <p:cNvPr id="10" name="Rectangle 9"/>
+          <p:cNvSpPr/>
+          <p:nvPr/>
+        </p:nvSpPr>
+        <p:spPr>
+          <a:xfrm>
+            <a:off x="868680" y="2880360"/>
+            <a:ext cx="10469880" cy="12700"/>
+          </a:xfrm>
+          <a:prstGeom prst="rect">
+            <a:avLst/>
+          </a:prstGeom>
+          <a:solidFill>
+            <a:srgbClr val="E4E1D9"/>
+          </a:solidFill>
+          <a:ln>
+            <a:noFill/>
+          </a:ln>
+        </p:spPr>
+        <p:style>
+          <a:lnRef idx="1">
+            <a:schemeClr val="accent1"/>
+          </a:lnRef>
+          <a:fillRef idx="3">
+            <a:schemeClr val="accent1"/>
+          </a:fillRef>
+          <a:effectRef idx="2">
+            <a:schemeClr val="accent1"/>
+          </a:effectRef>
+          <a:fontRef idx="minor">
+            <a:schemeClr val="lt1"/>
+          </a:fontRef>
+        </p:style>
+        <p:txBody>
+          <a:bodyPr rtlCol="0" anchor="ctr"/>
+          <a:lstStyle/>
+          <a:p>
+            <a:pPr algn="ctr"/>
+          </a:p>
+        </p:txBody>
+      </p:sp>
+      <p:sp>
+        <p:nvSpPr>
+          <p:cNvPr id="11" name="TextBox 10"/>
+          <p:cNvSpPr txBox="1"/>
+          <p:nvPr/>
+        </p:nvSpPr>
+        <p:spPr>
+          <a:xfrm>
+            <a:off x="868680" y="3246120"/>
+            <a:ext cx="4572000" cy="822960"/>
+          </a:xfrm>
+          <a:prstGeom prst="rect">
+            <a:avLst/>
+          </a:prstGeom>
+          <a:noFill/>
+        </p:spPr>
+        <p:txBody>
+          <a:bodyPr wrap="square">
+            <a:spAutoFit/>
+          </a:bodyPr>
+          <a:lstStyle/>
+          <a:p>
+            <a:pPr algn="l"/>
+            <a:r>
               <a:rPr sz="5200" b="1">
                 <a:solidFill>
-                  <a:srgbClr val="B57E1F"/>
+                  <a:srgbClr val="B0761B"/>
                 </a:solidFill>
                 <a:latin typeface="Calibri"/>
               </a:rPr>
@@ -6048,13 +6969,13 @@
       </p:sp>
       <p:sp>
         <p:nvSpPr>
-          <p:cNvPr id="10" name="TextBox 9"/>
+          <p:cNvPr id="12" name="TextBox 11"/>
           <p:cNvSpPr txBox="1"/>
           <p:nvPr/>
         </p:nvSpPr>
         <p:spPr>
           <a:xfrm>
-            <a:off x="822960" y="4069080"/>
+            <a:off x="868680" y="4087368"/>
             <a:ext cx="4572000" cy="457200"/>
           </a:xfrm>
           <a:prstGeom prst="rect">
@@ -6072,24 +6993,24 @@
             <a:r>
               <a:rPr sz="1000" b="0">
                 <a:solidFill>
-                  <a:srgbClr val="8A919B"/>
+                  <a:srgbClr val="8C8F96"/>
                 </a:solidFill>
                 <a:latin typeface="Calibri"/>
               </a:rPr>
-              <a:t>per object  ·  1.28–1.39× over 4 runs</a:t>
-            </a:r>
-          </a:p>
-        </p:txBody>
-      </p:sp>
-      <p:sp>
-        <p:nvSpPr>
-          <p:cNvPr id="11" name="TextBox 10"/>
+              <a:t>per object  ·  1.28 to 1.39× over 4 runs</a:t>
+            </a:r>
+          </a:p>
+        </p:txBody>
+      </p:sp>
+      <p:sp>
+        <p:nvSpPr>
+          <p:cNvPr id="13" name="TextBox 12"/>
           <p:cNvSpPr txBox="1"/>
           <p:nvPr/>
         </p:nvSpPr>
         <p:spPr>
           <a:xfrm>
-            <a:off x="6309360" y="3200400"/>
+            <a:off x="6355080" y="3246120"/>
             <a:ext cx="4572000" cy="822960"/>
           </a:xfrm>
           <a:prstGeom prst="rect">
@@ -6107,7 +7028,7 @@
             <a:r>
               <a:rPr sz="5200" b="1">
                 <a:solidFill>
-                  <a:srgbClr val="1D6F69"/>
+                  <a:srgbClr val="1C2026"/>
                 </a:solidFill>
                 <a:latin typeface="Calibri"/>
               </a:rPr>
@@ -6118,13 +7039,13 @@
       </p:sp>
       <p:sp>
         <p:nvSpPr>
-          <p:cNvPr id="12" name="TextBox 11"/>
+          <p:cNvPr id="14" name="TextBox 13"/>
           <p:cNvSpPr txBox="1"/>
           <p:nvPr/>
         </p:nvSpPr>
         <p:spPr>
           <a:xfrm>
-            <a:off x="6309360" y="4069080"/>
+            <a:off x="6355080" y="4087368"/>
             <a:ext cx="4572000" cy="457200"/>
           </a:xfrm>
           <a:prstGeom prst="rect">
@@ -6142,7 +7063,7 @@
             <a:r>
               <a:rPr sz="1000" b="0">
                 <a:solidFill>
-                  <a:srgbClr val="8A919B"/>
+                  <a:srgbClr val="8C8F96"/>
                 </a:solidFill>
                 <a:latin typeface="Calibri"/>
               </a:rPr>
@@ -6153,14 +7074,57 @@
       </p:sp>
       <p:sp>
         <p:nvSpPr>
-          <p:cNvPr id="13" name="TextBox 12"/>
+          <p:cNvPr id="15" name="Rectangle 14"/>
+          <p:cNvSpPr/>
+          <p:nvPr/>
+        </p:nvSpPr>
+        <p:spPr>
+          <a:xfrm>
+            <a:off x="868680" y="5152644"/>
+            <a:ext cx="64008" cy="64008"/>
+          </a:xfrm>
+          <a:prstGeom prst="rect">
+            <a:avLst/>
+          </a:prstGeom>
+          <a:solidFill>
+            <a:srgbClr val="B0761B"/>
+          </a:solidFill>
+          <a:ln>
+            <a:noFill/>
+          </a:ln>
+        </p:spPr>
+        <p:style>
+          <a:lnRef idx="1">
+            <a:schemeClr val="accent1"/>
+          </a:lnRef>
+          <a:fillRef idx="3">
+            <a:schemeClr val="accent1"/>
+          </a:fillRef>
+          <a:effectRef idx="2">
+            <a:schemeClr val="accent1"/>
+          </a:effectRef>
+          <a:fontRef idx="minor">
+            <a:schemeClr val="lt1"/>
+          </a:fontRef>
+        </p:style>
+        <p:txBody>
+          <a:bodyPr rtlCol="0" anchor="ctr"/>
+          <a:lstStyle/>
+          <a:p>
+            <a:pPr algn="ctr"/>
+          </a:p>
+        </p:txBody>
+      </p:sp>
+      <p:sp>
+        <p:nvSpPr>
+          <p:cNvPr id="16" name="TextBox 15"/>
           <p:cNvSpPr txBox="1"/>
           <p:nvPr/>
         </p:nvSpPr>
         <p:spPr>
           <a:xfrm>
-            <a:off x="822960" y="5029200"/>
-            <a:ext cx="7315200" cy="365760"/>
+            <a:off x="1088136" y="5074920"/>
+            <a:ext cx="7095744" cy="365760"/>
           </a:xfrm>
           <a:prstGeom prst="rect">
             <a:avLst/>
@@ -6177,25 +7141,68 @@
             <a:r>
               <a:rPr sz="1400" b="0">
                 <a:solidFill>
-                  <a:srgbClr val="1A1F26"/>
+                  <a:srgbClr val="1C2026"/>
                 </a:solidFill>
                 <a:latin typeface="Calibri"/>
               </a:rPr>
-              <a:t>—  0.288s → 0.215s per object</a:t>
-            </a:r>
-          </a:p>
-        </p:txBody>
-      </p:sp>
-      <p:sp>
-        <p:nvSpPr>
-          <p:cNvPr id="14" name="TextBox 13"/>
+              <a:t>0.288s → 0.215s per object</a:t>
+            </a:r>
+          </a:p>
+        </p:txBody>
+      </p:sp>
+      <p:sp>
+        <p:nvSpPr>
+          <p:cNvPr id="17" name="Rectangle 16"/>
+          <p:cNvSpPr/>
+          <p:nvPr/>
+        </p:nvSpPr>
+        <p:spPr>
+          <a:xfrm>
+            <a:off x="868680" y="5518404"/>
+            <a:ext cx="64008" cy="64008"/>
+          </a:xfrm>
+          <a:prstGeom prst="rect">
+            <a:avLst/>
+          </a:prstGeom>
+          <a:solidFill>
+            <a:srgbClr val="B0761B"/>
+          </a:solidFill>
+          <a:ln>
+            <a:noFill/>
+          </a:ln>
+        </p:spPr>
+        <p:style>
+          <a:lnRef idx="1">
+            <a:schemeClr val="accent1"/>
+          </a:lnRef>
+          <a:fillRef idx="3">
+            <a:schemeClr val="accent1"/>
+          </a:fillRef>
+          <a:effectRef idx="2">
+            <a:schemeClr val="accent1"/>
+          </a:effectRef>
+          <a:fontRef idx="minor">
+            <a:schemeClr val="lt1"/>
+          </a:fontRef>
+        </p:style>
+        <p:txBody>
+          <a:bodyPr rtlCol="0" anchor="ctr"/>
+          <a:lstStyle/>
+          <a:p>
+            <a:pPr algn="ctr"/>
+          </a:p>
+        </p:txBody>
+      </p:sp>
+      <p:sp>
+        <p:nvSpPr>
+          <p:cNvPr id="18" name="TextBox 17"/>
           <p:cNvSpPr txBox="1"/>
           <p:nvPr/>
         </p:nvSpPr>
         <p:spPr>
           <a:xfrm>
-            <a:off x="822960" y="5394960"/>
-            <a:ext cx="7315200" cy="365760"/>
+            <a:off x="1088136" y="5440680"/>
+            <a:ext cx="7095744" cy="365760"/>
           </a:xfrm>
           <a:prstGeom prst="rect">
             <a:avLst/>
@@ -6212,25 +7219,25 @@
             <a:r>
               <a:rPr sz="1400" b="0">
                 <a:solidFill>
-                  <a:srgbClr val="1A1F26"/>
+                  <a:srgbClr val="1C2026"/>
                 </a:solidFill>
                 <a:latin typeface="Calibri"/>
               </a:rPr>
-              <a:t>—  No run showed degradation</a:t>
-            </a:r>
-          </a:p>
-        </p:txBody>
-      </p:sp>
-      <p:sp>
-        <p:nvSpPr>
-          <p:cNvPr id="15" name="TextBox 14"/>
+              <a:t>No run showed degradation</a:t>
+            </a:r>
+          </a:p>
+        </p:txBody>
+      </p:sp>
+      <p:sp>
+        <p:nvSpPr>
+          <p:cNvPr id="19" name="TextBox 18"/>
           <p:cNvSpPr txBox="1"/>
           <p:nvPr/>
         </p:nvSpPr>
         <p:spPr>
           <a:xfrm>
-            <a:off x="822960" y="6263640"/>
-            <a:ext cx="10515600" cy="365760"/>
+            <a:off x="868680" y="6263640"/>
+            <a:ext cx="10469880" cy="365760"/>
           </a:xfrm>
           <a:prstGeom prst="rect">
             <a:avLst/>
@@ -6247,11 +7254,11 @@
             <a:r>
               <a:rPr sz="900" b="0">
                 <a:solidFill>
-                  <a:srgbClr val="8A919B"/>
+                  <a:srgbClr val="8C8F96"/>
                 </a:solidFill>
                 <a:latin typeface="Calibri"/>
               </a:rPr>
-              <a:t>20 CT cases, CVPR validation set, fold='all' checkpoint, H100 MIG 3g.40gb. Speed and accuracy from the same jobs.</a:t>
+              <a:t>20 CT cases from the CVPR validation set, fold='all' checkpoint, H100 MIG 3g.40gb. Speed and accuracy come from the same jobs.</a:t>
             </a:r>
           </a:p>
         </p:txBody>
@@ -6270,7 +7277,7 @@
     <p:bg>
       <p:bgPr>
         <a:solidFill>
-          <a:srgbClr val="FCFCFA"/>
+          <a:srgbClr val="FAF9F6"/>
         </a:solidFill>
         <a:effectLst/>
       </p:bgPr>
@@ -6290,7 +7297,7 @@
         </p:nvSpPr>
         <p:spPr>
           <a:xfrm>
-            <a:off x="822960" y="502920"/>
+            <a:off x="868680" y="502920"/>
             <a:ext cx="8961120" cy="548640"/>
           </a:xfrm>
           <a:prstGeom prst="rect">
@@ -6306,9 +7313,9 @@
           <a:p>
             <a:pPr algn="l"/>
             <a:r>
-              <a:rPr sz="2600" b="1">
-                <a:solidFill>
-                  <a:srgbClr val="1A1F26"/>
+              <a:rPr sz="2700" b="1">
+                <a:solidFill>
+                  <a:srgbClr val="1C2026"/>
                 </a:solidFill>
                 <a:latin typeface="Calibri"/>
               </a:rPr>
@@ -6325,7 +7332,7 @@
         </p:nvSpPr>
         <p:spPr>
           <a:xfrm>
-            <a:off x="10058400" y="621792"/>
+            <a:off x="10058400" y="658368"/>
             <a:ext cx="1280160" cy="365760"/>
           </a:xfrm>
           <a:prstGeom prst="rect">
@@ -6343,7 +7350,7 @@
             <a:r>
               <a:rPr sz="1000" b="0">
                 <a:solidFill>
-                  <a:srgbClr val="8A919B"/>
+                  <a:srgbClr val="8C8F96"/>
                 </a:solidFill>
                 <a:latin typeface="Calibri"/>
               </a:rPr>
@@ -6360,14 +7367,14 @@
         </p:nvSpPr>
         <p:spPr>
           <a:xfrm>
-            <a:off x="822960" y="1143000"/>
-            <a:ext cx="10515600" cy="12700"/>
+            <a:off x="868680" y="1170432"/>
+            <a:ext cx="10469880" cy="12700"/>
           </a:xfrm>
           <a:prstGeom prst="rect">
             <a:avLst/>
           </a:prstGeom>
           <a:solidFill>
-            <a:srgbClr val="DDDAD3"/>
+            <a:srgbClr val="E4E1D9"/>
           </a:solidFill>
           <a:ln>
             <a:noFill/>
@@ -6403,7 +7410,7 @@
         </p:nvSpPr>
         <p:spPr>
           <a:xfrm>
-            <a:off x="822960" y="1554480"/>
+            <a:off x="868680" y="1572768"/>
             <a:ext cx="9144000" cy="457200"/>
           </a:xfrm>
           <a:prstGeom prst="rect">
@@ -6421,7 +7428,7 @@
             <a:r>
               <a:rPr sz="1800" b="0">
                 <a:solidFill>
-                  <a:srgbClr val="1A1F26"/>
+                  <a:srgbClr val="1C2026"/>
                 </a:solidFill>
                 <a:latin typeface="Calibri"/>
               </a:rPr>
@@ -6438,14 +7445,14 @@
         </p:nvSpPr>
         <p:spPr>
           <a:xfrm>
-            <a:off x="822960" y="2286000"/>
-            <a:ext cx="10515600" cy="12700"/>
+            <a:off x="868680" y="2331720"/>
+            <a:ext cx="10469880" cy="12700"/>
           </a:xfrm>
           <a:prstGeom prst="rect">
             <a:avLst/>
           </a:prstGeom>
           <a:solidFill>
-            <a:srgbClr val="DDDAD3"/>
+            <a:srgbClr val="E4E1D9"/>
           </a:solidFill>
           <a:ln>
             <a:noFill/>
@@ -6481,7 +7488,7 @@
         </p:nvSpPr>
         <p:spPr>
           <a:xfrm>
-            <a:off x="822960" y="2651760"/>
+            <a:off x="868680" y="2697480"/>
             <a:ext cx="2926080" cy="822960"/>
           </a:xfrm>
           <a:prstGeom prst="rect">
@@ -6499,7 +7506,7 @@
             <a:r>
               <a:rPr sz="5200" b="1">
                 <a:solidFill>
-                  <a:srgbClr val="1A1F26"/>
+                  <a:srgbClr val="1C2026"/>
                 </a:solidFill>
                 <a:latin typeface="Calibri"/>
               </a:rPr>
@@ -6516,7 +7523,7 @@
         </p:nvSpPr>
         <p:spPr>
           <a:xfrm>
-            <a:off x="822960" y="3520439"/>
+            <a:off x="868680" y="3538728"/>
             <a:ext cx="2926080" cy="457200"/>
           </a:xfrm>
           <a:prstGeom prst="rect">
@@ -6534,7 +7541,7 @@
             <a:r>
               <a:rPr sz="1000" b="0">
                 <a:solidFill>
-                  <a:srgbClr val="8A919B"/>
+                  <a:srgbClr val="8C8F96"/>
                 </a:solidFill>
                 <a:latin typeface="Calibri"/>
               </a:rPr>
@@ -6551,7 +7558,7 @@
         </p:nvSpPr>
         <p:spPr>
           <a:xfrm>
-            <a:off x="4023360" y="2651760"/>
+            <a:off x="4069080" y="2697480"/>
             <a:ext cx="2926080" cy="822960"/>
           </a:xfrm>
           <a:prstGeom prst="rect">
@@ -6569,7 +7576,7 @@
             <a:r>
               <a:rPr sz="5200" b="1">
                 <a:solidFill>
-                  <a:srgbClr val="1A1F26"/>
+                  <a:srgbClr val="1C2026"/>
                 </a:solidFill>
                 <a:latin typeface="Calibri"/>
               </a:rPr>
@@ -6586,7 +7593,7 @@
         </p:nvSpPr>
         <p:spPr>
           <a:xfrm>
-            <a:off x="4023360" y="3520439"/>
+            <a:off x="4069080" y="3538728"/>
             <a:ext cx="2926080" cy="457200"/>
           </a:xfrm>
           <a:prstGeom prst="rect">
@@ -6604,7 +7611,7 @@
             <a:r>
               <a:rPr sz="1000" b="0">
                 <a:solidFill>
-                  <a:srgbClr val="8A919B"/>
+                  <a:srgbClr val="8C8F96"/>
                 </a:solidFill>
                 <a:latin typeface="Calibri"/>
               </a:rPr>
@@ -6621,7 +7628,7 @@
         </p:nvSpPr>
         <p:spPr>
           <a:xfrm>
-            <a:off x="7223760" y="2651760"/>
+            <a:off x="7269480" y="2697480"/>
             <a:ext cx="3657600" cy="822960"/>
           </a:xfrm>
           <a:prstGeom prst="rect">
@@ -6639,7 +7646,7 @@
             <a:r>
               <a:rPr sz="5200" b="1">
                 <a:solidFill>
-                  <a:srgbClr val="B57E1F"/>
+                  <a:srgbClr val="B0761B"/>
                 </a:solidFill>
                 <a:latin typeface="Calibri"/>
               </a:rPr>
@@ -6656,7 +7663,7 @@
         </p:nvSpPr>
         <p:spPr>
           <a:xfrm>
-            <a:off x="7223760" y="3520439"/>
+            <a:off x="7269480" y="3538728"/>
             <a:ext cx="3657600" cy="457200"/>
           </a:xfrm>
           <a:prstGeom prst="rect">
@@ -6674,7 +7681,7 @@
             <a:r>
               <a:rPr sz="1000" b="0">
                 <a:solidFill>
-                  <a:srgbClr val="8A919B"/>
+                  <a:srgbClr val="8C8F96"/>
                 </a:solidFill>
                 <a:latin typeface="Calibri"/>
               </a:rPr>
@@ -6691,14 +7698,14 @@
         </p:nvSpPr>
         <p:spPr>
           <a:xfrm>
-            <a:off x="822960" y="4343400"/>
-            <a:ext cx="10515600" cy="12700"/>
+            <a:off x="868680" y="4389120"/>
+            <a:ext cx="10469880" cy="12700"/>
           </a:xfrm>
           <a:prstGeom prst="rect">
             <a:avLst/>
           </a:prstGeom>
           <a:solidFill>
-            <a:srgbClr val="DDDAD3"/>
+            <a:srgbClr val="E4E1D9"/>
           </a:solidFill>
           <a:ln>
             <a:noFill/>
@@ -6728,14 +7735,57 @@
       </p:sp>
       <p:sp>
         <p:nvSpPr>
-          <p:cNvPr id="14" name="TextBox 13"/>
+          <p:cNvPr id="14" name="Rectangle 13"/>
+          <p:cNvSpPr/>
+          <p:nvPr/>
+        </p:nvSpPr>
+        <p:spPr>
+          <a:xfrm>
+            <a:off x="868680" y="4786884"/>
+            <a:ext cx="64008" cy="64008"/>
+          </a:xfrm>
+          <a:prstGeom prst="rect">
+            <a:avLst/>
+          </a:prstGeom>
+          <a:solidFill>
+            <a:srgbClr val="B0761B"/>
+          </a:solidFill>
+          <a:ln>
+            <a:noFill/>
+          </a:ln>
+        </p:spPr>
+        <p:style>
+          <a:lnRef idx="1">
+            <a:schemeClr val="accent1"/>
+          </a:lnRef>
+          <a:fillRef idx="3">
+            <a:schemeClr val="accent1"/>
+          </a:fillRef>
+          <a:effectRef idx="2">
+            <a:schemeClr val="accent1"/>
+          </a:effectRef>
+          <a:fontRef idx="minor">
+            <a:schemeClr val="lt1"/>
+          </a:fontRef>
+        </p:style>
+        <p:txBody>
+          <a:bodyPr rtlCol="0" anchor="ctr"/>
+          <a:lstStyle/>
+          <a:p>
+            <a:pPr algn="ctr"/>
+          </a:p>
+        </p:txBody>
+      </p:sp>
+      <p:sp>
+        <p:nvSpPr>
+          <p:cNvPr id="15" name="TextBox 14"/>
           <p:cNvSpPr txBox="1"/>
           <p:nvPr/>
         </p:nvSpPr>
         <p:spPr>
           <a:xfrm>
-            <a:off x="822960" y="4663440"/>
-            <a:ext cx="10058400" cy="438912"/>
+            <a:off x="1088136" y="4709160"/>
+            <a:ext cx="10113264" cy="438912"/>
           </a:xfrm>
           <a:prstGeom prst="rect">
             <a:avLst/>
@@ -6752,25 +7802,68 @@
             <a:r>
               <a:rPr sz="1500" b="0">
                 <a:solidFill>
-                  <a:srgbClr val="1A1F26"/>
+                  <a:srgbClr val="1C2026"/>
                 </a:solidFill>
                 <a:latin typeface="Calibri"/>
               </a:rPr>
-              <a:t>—  Batch of 900 validation cases — clearly worth it</a:t>
-            </a:r>
-          </a:p>
-        </p:txBody>
-      </p:sp>
-      <p:sp>
-        <p:nvSpPr>
-          <p:cNvPr id="15" name="TextBox 14"/>
+              <a:t>Batch of 900 validation cases: clearly worth it</a:t>
+            </a:r>
+          </a:p>
+        </p:txBody>
+      </p:sp>
+      <p:sp>
+        <p:nvSpPr>
+          <p:cNvPr id="16" name="Rectangle 15"/>
+          <p:cNvSpPr/>
+          <p:nvPr/>
+        </p:nvSpPr>
+        <p:spPr>
+          <a:xfrm>
+            <a:off x="868680" y="5225796"/>
+            <a:ext cx="64008" cy="64008"/>
+          </a:xfrm>
+          <a:prstGeom prst="rect">
+            <a:avLst/>
+          </a:prstGeom>
+          <a:solidFill>
+            <a:srgbClr val="B0761B"/>
+          </a:solidFill>
+          <a:ln>
+            <a:noFill/>
+          </a:ln>
+        </p:spPr>
+        <p:style>
+          <a:lnRef idx="1">
+            <a:schemeClr val="accent1"/>
+          </a:lnRef>
+          <a:fillRef idx="3">
+            <a:schemeClr val="accent1"/>
+          </a:fillRef>
+          <a:effectRef idx="2">
+            <a:schemeClr val="accent1"/>
+          </a:effectRef>
+          <a:fontRef idx="minor">
+            <a:schemeClr val="lt1"/>
+          </a:fontRef>
+        </p:style>
+        <p:txBody>
+          <a:bodyPr rtlCol="0" anchor="ctr"/>
+          <a:lstStyle/>
+          <a:p>
+            <a:pPr algn="ctr"/>
+          </a:p>
+        </p:txBody>
+      </p:sp>
+      <p:sp>
+        <p:nvSpPr>
+          <p:cNvPr id="17" name="TextBox 16"/>
           <p:cNvSpPr txBox="1"/>
           <p:nvPr/>
         </p:nvSpPr>
         <p:spPr>
           <a:xfrm>
-            <a:off x="822960" y="5102352"/>
-            <a:ext cx="10058400" cy="438912"/>
+            <a:off x="1088136" y="5148072"/>
+            <a:ext cx="10113264" cy="438912"/>
           </a:xfrm>
           <a:prstGeom prst="rect">
             <a:avLst/>
@@ -6787,25 +7880,68 @@
             <a:r>
               <a:rPr sz="1500" b="0">
                 <a:solidFill>
-                  <a:srgbClr val="1A1F26"/>
+                  <a:srgbClr val="1C2026"/>
                 </a:solidFill>
                 <a:latin typeface="Calibri"/>
               </a:rPr>
-              <a:t>—  Radiologist segmenting 3 scans — never recovered</a:t>
-            </a:r>
-          </a:p>
-        </p:txBody>
-      </p:sp>
-      <p:sp>
-        <p:nvSpPr>
-          <p:cNvPr id="16" name="TextBox 15"/>
+              <a:t>Radiologist with 3 scans: never recovered</a:t>
+            </a:r>
+          </a:p>
+        </p:txBody>
+      </p:sp>
+      <p:sp>
+        <p:nvSpPr>
+          <p:cNvPr id="18" name="Rectangle 17"/>
+          <p:cNvSpPr/>
+          <p:nvPr/>
+        </p:nvSpPr>
+        <p:spPr>
+          <a:xfrm>
+            <a:off x="868680" y="5664708"/>
+            <a:ext cx="64008" cy="64008"/>
+          </a:xfrm>
+          <a:prstGeom prst="rect">
+            <a:avLst/>
+          </a:prstGeom>
+          <a:solidFill>
+            <a:srgbClr val="B0761B"/>
+          </a:solidFill>
+          <a:ln>
+            <a:noFill/>
+          </a:ln>
+        </p:spPr>
+        <p:style>
+          <a:lnRef idx="1">
+            <a:schemeClr val="accent1"/>
+          </a:lnRef>
+          <a:fillRef idx="3">
+            <a:schemeClr val="accent1"/>
+          </a:fillRef>
+          <a:effectRef idx="2">
+            <a:schemeClr val="accent1"/>
+          </a:effectRef>
+          <a:fontRef idx="minor">
+            <a:schemeClr val="lt1"/>
+          </a:fontRef>
+        </p:style>
+        <p:txBody>
+          <a:bodyPr rtlCol="0" anchor="ctr"/>
+          <a:lstStyle/>
+          <a:p>
+            <a:pPr algn="ctr"/>
+          </a:p>
+        </p:txBody>
+      </p:sp>
+      <p:sp>
+        <p:nvSpPr>
+          <p:cNvPr id="19" name="TextBox 18"/>
           <p:cNvSpPr txBox="1"/>
           <p:nvPr/>
         </p:nvSpPr>
         <p:spPr>
           <a:xfrm>
-            <a:off x="822960" y="5541264"/>
-            <a:ext cx="10058400" cy="438912"/>
+            <a:off x="1088136" y="5586984"/>
+            <a:ext cx="10113264" cy="438912"/>
           </a:xfrm>
           <a:prstGeom prst="rect">
             <a:avLst/>
@@ -6822,25 +7958,25 @@
             <a:r>
               <a:rPr sz="1500" b="0">
                 <a:solidFill>
-                  <a:srgbClr val="1A1F26"/>
+                  <a:srgbClr val="1C2026"/>
                 </a:solidFill>
                 <a:latin typeface="Calibri"/>
               </a:rPr>
-              <a:t>—  A batch optimization. Shouldn't be sold as anything else.</a:t>
-            </a:r>
-          </a:p>
-        </p:txBody>
-      </p:sp>
-      <p:sp>
-        <p:nvSpPr>
-          <p:cNvPr id="17" name="TextBox 16"/>
+              <a:t>A batch optimization, and it should not be sold as anything else</a:t>
+            </a:r>
+          </a:p>
+        </p:txBody>
+      </p:sp>
+      <p:sp>
+        <p:nvSpPr>
+          <p:cNvPr id="20" name="TextBox 19"/>
           <p:cNvSpPr txBox="1"/>
           <p:nvPr/>
         </p:nvSpPr>
         <p:spPr>
           <a:xfrm>
-            <a:off x="822960" y="6263640"/>
-            <a:ext cx="10515600" cy="365760"/>
+            <a:off x="868680" y="6263640"/>
+            <a:ext cx="10469880" cy="365760"/>
           </a:xfrm>
           <a:prstGeom prst="rect">
             <a:avLst/>
@@ -6857,11 +7993,11 @@
             <a:r>
               <a:rPr sz="900" b="0">
                 <a:solidFill>
-                  <a:srgbClr val="8A919B"/>
+                  <a:srgbClr val="8C8F96"/>
                 </a:solidFill>
                 <a:latin typeface="Calibri"/>
               </a:rPr>
-              <a:t>23.6s measured on node-local /tmp; the shared filesystem is slower, so treat it as a lower bound. ~331 objects at 14.7 obj/case.</a:t>
+              <a:t>23.6s measured on node-local /tmp. The shared filesystem is slower, so treat it as a lower bound. About 331 objects at 14.7 objects per case.</a:t>
             </a:r>
           </a:p>
         </p:txBody>
@@ -6880,7 +8016,7 @@
     <p:bg>
       <p:bgPr>
         <a:solidFill>
-          <a:srgbClr val="FCFCFA"/>
+          <a:srgbClr val="FAF9F6"/>
         </a:solidFill>
         <a:effectLst/>
       </p:bgPr>
@@ -6900,7 +8036,7 @@
         </p:nvSpPr>
         <p:spPr>
           <a:xfrm>
-            <a:off x="822960" y="502920"/>
+            <a:off x="868680" y="502920"/>
             <a:ext cx="8961120" cy="548640"/>
           </a:xfrm>
           <a:prstGeom prst="rect">
@@ -6916,13 +8052,13 @@
           <a:p>
             <a:pPr algn="l"/>
             <a:r>
-              <a:rPr sz="2600" b="1">
-                <a:solidFill>
-                  <a:srgbClr val="1A1F26"/>
+              <a:rPr sz="2700" b="1">
+                <a:solidFill>
+                  <a:srgbClr val="1C2026"/>
                 </a:solidFill>
                 <a:latin typeface="Calibri"/>
               </a:rPr>
-              <a:t>How I checked the numbers</a:t>
+              <a:t>Where both models landed</a:t>
             </a:r>
           </a:p>
         </p:txBody>
@@ -6935,7 +8071,7 @@
         </p:nvSpPr>
         <p:spPr>
           <a:xfrm>
-            <a:off x="10058400" y="621792"/>
+            <a:off x="10058400" y="658368"/>
             <a:ext cx="1280160" cy="365760"/>
           </a:xfrm>
           <a:prstGeom prst="rect">
@@ -6953,7 +8089,7 @@
             <a:r>
               <a:rPr sz="1000" b="0">
                 <a:solidFill>
-                  <a:srgbClr val="8A919B"/>
+                  <a:srgbClr val="8C8F96"/>
                 </a:solidFill>
                 <a:latin typeface="Calibri"/>
               </a:rPr>
@@ -6970,718 +8106,14 @@
         </p:nvSpPr>
         <p:spPr>
           <a:xfrm>
-            <a:off x="822960" y="1143000"/>
-            <a:ext cx="10515600" cy="12700"/>
+            <a:off x="868680" y="1170432"/>
+            <a:ext cx="10469880" cy="12700"/>
           </a:xfrm>
           <a:prstGeom prst="rect">
             <a:avLst/>
           </a:prstGeom>
           <a:solidFill>
-            <a:srgbClr val="DDDAD3"/>
-          </a:solidFill>
-          <a:ln>
-            <a:noFill/>
-          </a:ln>
-        </p:spPr>
-        <p:style>
-          <a:lnRef idx="1">
-            <a:schemeClr val="accent1"/>
-          </a:lnRef>
-          <a:fillRef idx="3">
-            <a:schemeClr val="accent1"/>
-          </a:fillRef>
-          <a:effectRef idx="2">
-            <a:schemeClr val="accent1"/>
-          </a:effectRef>
-          <a:fontRef idx="minor">
-            <a:schemeClr val="lt1"/>
-          </a:fontRef>
-        </p:style>
-        <p:txBody>
-          <a:bodyPr rtlCol="0" anchor="ctr"/>
-          <a:lstStyle/>
-          <a:p>
-            <a:pPr algn="ctr"/>
-          </a:p>
-        </p:txBody>
-      </p:sp>
-      <p:sp>
-        <p:nvSpPr>
-          <p:cNvPr id="5" name="Rectangle 4"/>
-          <p:cNvSpPr/>
-          <p:nvPr/>
-        </p:nvSpPr>
-        <p:spPr>
-          <a:xfrm>
-            <a:off x="822960" y="1645920"/>
-            <a:ext cx="27432" cy="304800"/>
-          </a:xfrm>
-          <a:prstGeom prst="rect">
-            <a:avLst/>
-          </a:prstGeom>
-          <a:solidFill>
-            <a:srgbClr val="B57E1F"/>
-          </a:solidFill>
-          <a:ln>
-            <a:noFill/>
-          </a:ln>
-        </p:spPr>
-        <p:style>
-          <a:lnRef idx="1">
-            <a:schemeClr val="accent1"/>
-          </a:lnRef>
-          <a:fillRef idx="3">
-            <a:schemeClr val="accent1"/>
-          </a:fillRef>
-          <a:effectRef idx="2">
-            <a:schemeClr val="accent1"/>
-          </a:effectRef>
-          <a:fontRef idx="minor">
-            <a:schemeClr val="lt1"/>
-          </a:fontRef>
-        </p:style>
-        <p:txBody>
-          <a:bodyPr rtlCol="0" anchor="ctr"/>
-          <a:lstStyle/>
-          <a:p>
-            <a:pPr algn="ctr"/>
-          </a:p>
-        </p:txBody>
-      </p:sp>
-      <p:sp>
-        <p:nvSpPr>
-          <p:cNvPr id="6" name="TextBox 5"/>
-          <p:cNvSpPr txBox="1"/>
-          <p:nvPr/>
-        </p:nvSpPr>
-        <p:spPr>
-          <a:xfrm>
-            <a:off x="1115568" y="1554480"/>
-            <a:ext cx="2743200" cy="365760"/>
-          </a:xfrm>
-          <a:prstGeom prst="rect">
-            <a:avLst/>
-          </a:prstGeom>
-          <a:noFill/>
-        </p:spPr>
-        <p:txBody>
-          <a:bodyPr wrap="square">
-            <a:spAutoFit/>
-          </a:bodyPr>
-          <a:lstStyle/>
-          <a:p>
-            <a:pPr algn="l"/>
-            <a:r>
-              <a:rPr sz="1400" b="1">
-                <a:solidFill>
-                  <a:srgbClr val="1A1F26"/>
-                </a:solidFill>
-                <a:latin typeface="Calibri"/>
-              </a:rPr>
-              <a:t>Hold precision constant</a:t>
-            </a:r>
-          </a:p>
-        </p:txBody>
-      </p:sp>
-      <p:sp>
-        <p:nvSpPr>
-          <p:cNvPr id="7" name="TextBox 6"/>
-          <p:cNvSpPr txBox="1"/>
-          <p:nvPr/>
-        </p:nvSpPr>
-        <p:spPr>
-          <a:xfrm>
-            <a:off x="3886200" y="1572768"/>
-            <a:ext cx="7406640" cy="731520"/>
-          </a:xfrm>
-          <a:prstGeom prst="rect">
-            <a:avLst/>
-          </a:prstGeom>
-          <a:noFill/>
-        </p:spPr>
-        <p:txBody>
-          <a:bodyPr wrap="square">
-            <a:spAutoFit/>
-          </a:bodyPr>
-          <a:lstStyle/>
-          <a:p>
-            <a:pPr algn="l"/>
-            <a:r>
-              <a:rPr sz="1200" b="0">
-                <a:solidFill>
-                  <a:srgbClr val="8A919B"/>
-                </a:solidFill>
-                <a:latin typeface="Calibri"/>
-              </a:rPr>
-              <a:t>Both arms INT4 — a quantization gain can't pose as an algorithmic one</a:t>
-            </a:r>
-          </a:p>
-        </p:txBody>
-      </p:sp>
-      <p:sp>
-        <p:nvSpPr>
-          <p:cNvPr id="8" name="Rectangle 7"/>
-          <p:cNvSpPr/>
-          <p:nvPr/>
-        </p:nvSpPr>
-        <p:spPr>
-          <a:xfrm>
-            <a:off x="822960" y="2560320"/>
-            <a:ext cx="27432" cy="304800"/>
-          </a:xfrm>
-          <a:prstGeom prst="rect">
-            <a:avLst/>
-          </a:prstGeom>
-          <a:solidFill>
-            <a:srgbClr val="B57E1F"/>
-          </a:solidFill>
-          <a:ln>
-            <a:noFill/>
-          </a:ln>
-        </p:spPr>
-        <p:style>
-          <a:lnRef idx="1">
-            <a:schemeClr val="accent1"/>
-          </a:lnRef>
-          <a:fillRef idx="3">
-            <a:schemeClr val="accent1"/>
-          </a:fillRef>
-          <a:effectRef idx="2">
-            <a:schemeClr val="accent1"/>
-          </a:effectRef>
-          <a:fontRef idx="minor">
-            <a:schemeClr val="lt1"/>
-          </a:fontRef>
-        </p:style>
-        <p:txBody>
-          <a:bodyPr rtlCol="0" anchor="ctr"/>
-          <a:lstStyle/>
-          <a:p>
-            <a:pPr algn="ctr"/>
-          </a:p>
-        </p:txBody>
-      </p:sp>
-      <p:sp>
-        <p:nvSpPr>
-          <p:cNvPr id="9" name="TextBox 8"/>
-          <p:cNvSpPr txBox="1"/>
-          <p:nvPr/>
-        </p:nvSpPr>
-        <p:spPr>
-          <a:xfrm>
-            <a:off x="1115568" y="2468880"/>
-            <a:ext cx="2743200" cy="365760"/>
-          </a:xfrm>
-          <a:prstGeom prst="rect">
-            <a:avLst/>
-          </a:prstGeom>
-          <a:noFill/>
-        </p:spPr>
-        <p:txBody>
-          <a:bodyPr wrap="square">
-            <a:spAutoFit/>
-          </a:bodyPr>
-          <a:lstStyle/>
-          <a:p>
-            <a:pPr algn="l"/>
-            <a:r>
-              <a:rPr sz="1400" b="1">
-                <a:solidFill>
-                  <a:srgbClr val="1A1F26"/>
-                </a:solidFill>
-                <a:latin typeface="Calibri"/>
-              </a:rPr>
-              <a:t>Warm everything first</a:t>
-            </a:r>
-          </a:p>
-        </p:txBody>
-      </p:sp>
-      <p:sp>
-        <p:nvSpPr>
-          <p:cNvPr id="10" name="TextBox 9"/>
-          <p:cNvSpPr txBox="1"/>
-          <p:nvPr/>
-        </p:nvSpPr>
-        <p:spPr>
-          <a:xfrm>
-            <a:off x="3886200" y="2487168"/>
-            <a:ext cx="7406640" cy="731520"/>
-          </a:xfrm>
-          <a:prstGeom prst="rect">
-            <a:avLst/>
-          </a:prstGeom>
-          <a:noFill/>
-        </p:spPr>
-        <p:txBody>
-          <a:bodyPr wrap="square">
-            <a:spAutoFit/>
-          </a:bodyPr>
-          <a:lstStyle/>
-          <a:p>
-            <a:pPr algn="l"/>
-            <a:r>
-              <a:rPr sz="1200" b="0">
-                <a:solidFill>
-                  <a:srgbClr val="8A919B"/>
-                </a:solidFill>
-                <a:latin typeface="Calibri"/>
-              </a:rPr>
-              <a:t>GPU, text backbone, sliding-window path — or arm one eats the start-up cost</a:t>
-            </a:r>
-          </a:p>
-        </p:txBody>
-      </p:sp>
-      <p:sp>
-        <p:nvSpPr>
-          <p:cNvPr id="11" name="Rectangle 10"/>
-          <p:cNvSpPr/>
-          <p:nvPr/>
-        </p:nvSpPr>
-        <p:spPr>
-          <a:xfrm>
-            <a:off x="822960" y="3474720"/>
-            <a:ext cx="27432" cy="304800"/>
-          </a:xfrm>
-          <a:prstGeom prst="rect">
-            <a:avLst/>
-          </a:prstGeom>
-          <a:solidFill>
-            <a:srgbClr val="B57E1F"/>
-          </a:solidFill>
-          <a:ln>
-            <a:noFill/>
-          </a:ln>
-        </p:spPr>
-        <p:style>
-          <a:lnRef idx="1">
-            <a:schemeClr val="accent1"/>
-          </a:lnRef>
-          <a:fillRef idx="3">
-            <a:schemeClr val="accent1"/>
-          </a:fillRef>
-          <a:effectRef idx="2">
-            <a:schemeClr val="accent1"/>
-          </a:effectRef>
-          <a:fontRef idx="minor">
-            <a:schemeClr val="lt1"/>
-          </a:fontRef>
-        </p:style>
-        <p:txBody>
-          <a:bodyPr rtlCol="0" anchor="ctr"/>
-          <a:lstStyle/>
-          <a:p>
-            <a:pPr algn="ctr"/>
-          </a:p>
-        </p:txBody>
-      </p:sp>
-      <p:sp>
-        <p:nvSpPr>
-          <p:cNvPr id="12" name="TextBox 11"/>
-          <p:cNvSpPr txBox="1"/>
-          <p:nvPr/>
-        </p:nvSpPr>
-        <p:spPr>
-          <a:xfrm>
-            <a:off x="1115568" y="3383280"/>
-            <a:ext cx="2743200" cy="365760"/>
-          </a:xfrm>
-          <a:prstGeom prst="rect">
-            <a:avLst/>
-          </a:prstGeom>
-          <a:noFill/>
-        </p:spPr>
-        <p:txBody>
-          <a:bodyPr wrap="square">
-            <a:spAutoFit/>
-          </a:bodyPr>
-          <a:lstStyle/>
-          <a:p>
-            <a:pPr algn="l"/>
-            <a:r>
-              <a:rPr sz="1400" b="1">
-                <a:solidFill>
-                  <a:srgbClr val="1A1F26"/>
-                </a:solidFill>
-                <a:latin typeface="Calibri"/>
-              </a:rPr>
-              <a:t>Prove the cache is empty</a:t>
-            </a:r>
-          </a:p>
-        </p:txBody>
-      </p:sp>
-      <p:sp>
-        <p:nvSpPr>
-          <p:cNvPr id="13" name="TextBox 12"/>
-          <p:cNvSpPr txBox="1"/>
-          <p:nvPr/>
-        </p:nvSpPr>
-        <p:spPr>
-          <a:xfrm>
-            <a:off x="3886200" y="3401568"/>
-            <a:ext cx="7406640" cy="731520"/>
-          </a:xfrm>
-          <a:prstGeom prst="rect">
-            <a:avLst/>
-          </a:prstGeom>
-          <a:noFill/>
-        </p:spPr>
-        <p:txBody>
-          <a:bodyPr wrap="square">
-            <a:spAutoFit/>
-          </a:bodyPr>
-          <a:lstStyle/>
-          <a:p>
-            <a:pPr algn="l"/>
-            <a:r>
-              <a:rPr sz="1200" b="0">
-                <a:solidFill>
-                  <a:srgbClr val="8A919B"/>
-                </a:solidFill>
-                <a:latin typeface="Calibri"/>
-              </a:rPr>
-              <a:t>Asserted cleared before each cold measurement, written after</a:t>
-            </a:r>
-          </a:p>
-        </p:txBody>
-      </p:sp>
-      <p:sp>
-        <p:nvSpPr>
-          <p:cNvPr id="14" name="Rectangle 13"/>
-          <p:cNvSpPr/>
-          <p:nvPr/>
-        </p:nvSpPr>
-        <p:spPr>
-          <a:xfrm>
-            <a:off x="822960" y="4389120"/>
-            <a:ext cx="27432" cy="304800"/>
-          </a:xfrm>
-          <a:prstGeom prst="rect">
-            <a:avLst/>
-          </a:prstGeom>
-          <a:solidFill>
-            <a:srgbClr val="B57E1F"/>
-          </a:solidFill>
-          <a:ln>
-            <a:noFill/>
-          </a:ln>
-        </p:spPr>
-        <p:style>
-          <a:lnRef idx="1">
-            <a:schemeClr val="accent1"/>
-          </a:lnRef>
-          <a:fillRef idx="3">
-            <a:schemeClr val="accent1"/>
-          </a:fillRef>
-          <a:effectRef idx="2">
-            <a:schemeClr val="accent1"/>
-          </a:effectRef>
-          <a:fontRef idx="minor">
-            <a:schemeClr val="lt1"/>
-          </a:fontRef>
-        </p:style>
-        <p:txBody>
-          <a:bodyPr rtlCol="0" anchor="ctr"/>
-          <a:lstStyle/>
-          <a:p>
-            <a:pPr algn="ctr"/>
-          </a:p>
-        </p:txBody>
-      </p:sp>
-      <p:sp>
-        <p:nvSpPr>
-          <p:cNvPr id="15" name="TextBox 14"/>
-          <p:cNvSpPr txBox="1"/>
-          <p:nvPr/>
-        </p:nvSpPr>
-        <p:spPr>
-          <a:xfrm>
-            <a:off x="1115568" y="4297680"/>
-            <a:ext cx="2743200" cy="365760"/>
-          </a:xfrm>
-          <a:prstGeom prst="rect">
-            <a:avLst/>
-          </a:prstGeom>
-          <a:noFill/>
-        </p:spPr>
-        <p:txBody>
-          <a:bodyPr wrap="square">
-            <a:spAutoFit/>
-          </a:bodyPr>
-          <a:lstStyle/>
-          <a:p>
-            <a:pPr algn="l"/>
-            <a:r>
-              <a:rPr sz="1400" b="1">
-                <a:solidFill>
-                  <a:srgbClr val="1A1F26"/>
-                </a:solidFill>
-                <a:latin typeface="Calibri"/>
-              </a:rPr>
-              <a:t>Repeat, quote the range</a:t>
-            </a:r>
-          </a:p>
-        </p:txBody>
-      </p:sp>
-      <p:sp>
-        <p:nvSpPr>
-          <p:cNvPr id="16" name="TextBox 15"/>
-          <p:cNvSpPr txBox="1"/>
-          <p:nvPr/>
-        </p:nvSpPr>
-        <p:spPr>
-          <a:xfrm>
-            <a:off x="3886200" y="4315968"/>
-            <a:ext cx="7406640" cy="731520"/>
-          </a:xfrm>
-          <a:prstGeom prst="rect">
-            <a:avLst/>
-          </a:prstGeom>
-          <a:noFill/>
-        </p:spPr>
-        <p:txBody>
-          <a:bodyPr wrap="square">
-            <a:spAutoFit/>
-          </a:bodyPr>
-          <a:lstStyle/>
-          <a:p>
-            <a:pPr algn="l"/>
-            <a:r>
-              <a:rPr sz="1200" b="0">
-                <a:solidFill>
-                  <a:srgbClr val="8A919B"/>
-                </a:solidFill>
-                <a:latin typeface="Calibri"/>
-              </a:rPr>
-              <a:t>Every headline figure n≥4, never a single run</a:t>
-            </a:r>
-          </a:p>
-        </p:txBody>
-      </p:sp>
-      <p:sp>
-        <p:nvSpPr>
-          <p:cNvPr id="17" name="Rectangle 16"/>
-          <p:cNvSpPr/>
-          <p:nvPr/>
-        </p:nvSpPr>
-        <p:spPr>
-          <a:xfrm>
-            <a:off x="822960" y="5349240"/>
-            <a:ext cx="10515600" cy="12700"/>
-          </a:xfrm>
-          <a:prstGeom prst="rect">
-            <a:avLst/>
-          </a:prstGeom>
-          <a:solidFill>
-            <a:srgbClr val="DDDAD3"/>
-          </a:solidFill>
-          <a:ln>
-            <a:noFill/>
-          </a:ln>
-        </p:spPr>
-        <p:style>
-          <a:lnRef idx="1">
-            <a:schemeClr val="accent1"/>
-          </a:lnRef>
-          <a:fillRef idx="3">
-            <a:schemeClr val="accent1"/>
-          </a:fillRef>
-          <a:effectRef idx="2">
-            <a:schemeClr val="accent1"/>
-          </a:effectRef>
-          <a:fontRef idx="minor">
-            <a:schemeClr val="lt1"/>
-          </a:fontRef>
-        </p:style>
-        <p:txBody>
-          <a:bodyPr rtlCol="0" anchor="ctr"/>
-          <a:lstStyle/>
-          <a:p>
-            <a:pPr algn="ctr"/>
-          </a:p>
-        </p:txBody>
-      </p:sp>
-      <p:sp>
-        <p:nvSpPr>
-          <p:cNvPr id="18" name="TextBox 17"/>
-          <p:cNvSpPr txBox="1"/>
-          <p:nvPr/>
-        </p:nvSpPr>
-        <p:spPr>
-          <a:xfrm>
-            <a:off x="822960" y="5623560"/>
-            <a:ext cx="10058400" cy="411480"/>
-          </a:xfrm>
-          <a:prstGeom prst="rect">
-            <a:avLst/>
-          </a:prstGeom>
-          <a:noFill/>
-        </p:spPr>
-        <p:txBody>
-          <a:bodyPr wrap="square">
-            <a:spAutoFit/>
-          </a:bodyPr>
-          <a:lstStyle/>
-          <a:p>
-            <a:pPr algn="l"/>
-            <a:r>
-              <a:rPr sz="1700" b="1">
-                <a:solidFill>
-                  <a:srgbClr val="1A1F26"/>
-                </a:solidFill>
-                <a:latin typeface="Calibri"/>
-              </a:rPr>
-              <a:t>Two GPUs exposed the largest error.</a:t>
-            </a:r>
-          </a:p>
-        </p:txBody>
-      </p:sp>
-      <p:sp>
-        <p:nvSpPr>
-          <p:cNvPr id="19" name="TextBox 18"/>
-          <p:cNvSpPr txBox="1"/>
-          <p:nvPr/>
-        </p:nvSpPr>
-        <p:spPr>
-          <a:xfrm>
-            <a:off x="822960" y="6263640"/>
-            <a:ext cx="10515600" cy="365760"/>
-          </a:xfrm>
-          <a:prstGeom prst="rect">
-            <a:avLst/>
-          </a:prstGeom>
-          <a:noFill/>
-        </p:spPr>
-        <p:txBody>
-          <a:bodyPr wrap="square">
-            <a:spAutoFit/>
-          </a:bodyPr>
-          <a:lstStyle/>
-          <a:p>
-            <a:pPr algn="l"/>
-            <a:r>
-              <a:rPr sz="900" b="0">
-                <a:solidFill>
-                  <a:srgbClr val="8A919B"/>
-                </a:solidFill>
-                <a:latin typeface="Calibri"/>
-              </a:rPr>
-              <a:t>Identical phases behaving differently on an RTX 4070 SUPER and an H100 revealed the ordering artifact behind the 7.1×.</a:t>
-            </a:r>
-          </a:p>
-        </p:txBody>
-      </p:sp>
-    </p:spTree>
-  </p:cSld>
-  <p:clrMapOvr>
-    <a:masterClrMapping/>
-  </p:clrMapOvr>
-</p:sld>
-</file>
-
-<file path=ppt/slides/slide9.xml><?xml version="1.0" encoding="utf-8"?>
-<p:sld xmlns:a="http://schemas.openxmlformats.org/drawingml/2006/main" xmlns:p="http://schemas.openxmlformats.org/presentationml/2006/main" xmlns:r="http://schemas.openxmlformats.org/officeDocument/2006/relationships">
-  <p:cSld>
-    <p:bg>
-      <p:bgPr>
-        <a:solidFill>
-          <a:srgbClr val="FCFCFA"/>
-        </a:solidFill>
-        <a:effectLst/>
-      </p:bgPr>
-    </p:bg>
-    <p:spTree>
-      <p:nvGrpSpPr>
-        <p:cNvPr id="1" name=""/>
-        <p:cNvGrpSpPr/>
-        <p:nvPr/>
-      </p:nvGrpSpPr>
-      <p:grpSpPr/>
-      <p:sp>
-        <p:nvSpPr>
-          <p:cNvPr id="2" name="TextBox 1"/>
-          <p:cNvSpPr txBox="1"/>
-          <p:nvPr/>
-        </p:nvSpPr>
-        <p:spPr>
-          <a:xfrm>
-            <a:off x="822960" y="502920"/>
-            <a:ext cx="8961120" cy="548640"/>
-          </a:xfrm>
-          <a:prstGeom prst="rect">
-            <a:avLst/>
-          </a:prstGeom>
-          <a:noFill/>
-        </p:spPr>
-        <p:txBody>
-          <a:bodyPr wrap="square">
-            <a:spAutoFit/>
-          </a:bodyPr>
-          <a:lstStyle/>
-          <a:p>
-            <a:pPr algn="l"/>
-            <a:r>
-              <a:rPr sz="2600" b="1">
-                <a:solidFill>
-                  <a:srgbClr val="1A1F26"/>
-                </a:solidFill>
-                <a:latin typeface="Calibri"/>
-              </a:rPr>
-              <a:t>Where both models landed</a:t>
-            </a:r>
-          </a:p>
-        </p:txBody>
-      </p:sp>
-      <p:sp>
-        <p:nvSpPr>
-          <p:cNvPr id="3" name="TextBox 2"/>
-          <p:cNvSpPr txBox="1"/>
-          <p:nvPr/>
-        </p:nvSpPr>
-        <p:spPr>
-          <a:xfrm>
-            <a:off x="10058400" y="621792"/>
-            <a:ext cx="1280160" cy="365760"/>
-          </a:xfrm>
-          <a:prstGeom prst="rect">
-            <a:avLst/>
-          </a:prstGeom>
-          <a:noFill/>
-        </p:spPr>
-        <p:txBody>
-          <a:bodyPr wrap="square">
-            <a:spAutoFit/>
-          </a:bodyPr>
-          <a:lstStyle/>
-          <a:p>
-            <a:pPr algn="r"/>
-            <a:r>
-              <a:rPr sz="1000" b="0">
-                <a:solidFill>
-                  <a:srgbClr val="8A919B"/>
-                </a:solidFill>
-                <a:latin typeface="Calibri"/>
-              </a:rPr>
-              <a:t>09</a:t>
-            </a:r>
-          </a:p>
-        </p:txBody>
-      </p:sp>
-      <p:sp>
-        <p:nvSpPr>
-          <p:cNvPr id="4" name="Rectangle 3"/>
-          <p:cNvSpPr/>
-          <p:nvPr/>
-        </p:nvSpPr>
-        <p:spPr>
-          <a:xfrm>
-            <a:off x="822960" y="1143000"/>
-            <a:ext cx="10515600" cy="12700"/>
-          </a:xfrm>
-          <a:prstGeom prst="rect">
-            <a:avLst/>
-          </a:prstGeom>
-          <a:solidFill>
-            <a:srgbClr val="DDDAD3"/>
+            <a:srgbClr val="E4E1D9"/>
           </a:solidFill>
           <a:ln>
             <a:noFill/>
@@ -7718,8 +8150,8 @@
           <p:nvPr/>
         </p:nvGraphicFramePr>
         <p:xfrm>
-          <a:off x="822960" y="1600200"/>
-          <a:ext cx="10515600" cy="1371600"/>
+          <a:off x="868680" y="1627632"/>
+          <a:ext cx="10469880" cy="1371600"/>
         </p:xfrm>
         <a:graphic>
           <a:graphicData uri="http://schemas.openxmlformats.org/drawingml/2006/table">
@@ -7731,7 +8163,7 @@
                 <a:gridCol w="2377440"/>
                 <a:gridCol w="2743200"/>
                 <a:gridCol w="2377440"/>
-                <a:gridCol w="3017520"/>
+                <a:gridCol w="2971800"/>
               </a:tblGrid>
               <a:tr h="457200">
                 <a:tc>
@@ -7742,7 +8174,7 @@
                       <a:r>
                         <a:rPr sz="1000" b="1">
                           <a:solidFill>
-                            <a:srgbClr val="8A919B"/>
+                            <a:srgbClr val="8C8F96"/>
                           </a:solidFill>
                           <a:latin typeface="Calibri"/>
                         </a:rPr>
@@ -7752,7 +8184,7 @@
                   </a:txBody>
                   <a:tcPr>
                     <a:solidFill>
-                      <a:srgbClr val="FCFCFA"/>
+                      <a:srgbClr val="FAF9F6"/>
                     </a:solidFill>
                   </a:tcPr>
                 </a:tc>
@@ -7764,7 +8196,7 @@
                       <a:r>
                         <a:rPr sz="1000" b="1">
                           <a:solidFill>
-                            <a:srgbClr val="8A919B"/>
+                            <a:srgbClr val="8C8F96"/>
                           </a:solidFill>
                           <a:latin typeface="Calibri"/>
                         </a:rPr>
@@ -7774,7 +8206,7 @@
                   </a:txBody>
                   <a:tcPr>
                     <a:solidFill>
-                      <a:srgbClr val="FCFCFA"/>
+                      <a:srgbClr val="FAF9F6"/>
                     </a:solidFill>
                   </a:tcPr>
                 </a:tc>
@@ -7786,7 +8218,7 @@
                       <a:r>
                         <a:rPr sz="1000" b="1">
                           <a:solidFill>
-                            <a:srgbClr val="8A919B"/>
+                            <a:srgbClr val="8C8F96"/>
                           </a:solidFill>
                           <a:latin typeface="Calibri"/>
                         </a:rPr>
@@ -7796,7 +8228,7 @@
                   </a:txBody>
                   <a:tcPr>
                     <a:solidFill>
-                      <a:srgbClr val="FCFCFA"/>
+                      <a:srgbClr val="FAF9F6"/>
                     </a:solidFill>
                   </a:tcPr>
                 </a:tc>
@@ -7808,7 +8240,7 @@
                       <a:r>
                         <a:rPr sz="1000" b="1">
                           <a:solidFill>
-                            <a:srgbClr val="8A919B"/>
+                            <a:srgbClr val="8C8F96"/>
                           </a:solidFill>
                           <a:latin typeface="Calibri"/>
                         </a:rPr>
@@ -7818,7 +8250,7 @@
                   </a:txBody>
                   <a:tcPr>
                     <a:solidFill>
-                      <a:srgbClr val="FCFCFA"/>
+                      <a:srgbClr val="FAF9F6"/>
                     </a:solidFill>
                   </a:tcPr>
                 </a:tc>
@@ -7832,7 +8264,7 @@
                       <a:r>
                         <a:rPr sz="1100" b="1">
                           <a:solidFill>
-                            <a:srgbClr val="1A1F26"/>
+                            <a:srgbClr val="1C2026"/>
                           </a:solidFill>
                           <a:latin typeface="Calibri"/>
                         </a:rPr>
@@ -7842,7 +8274,7 @@
                   </a:txBody>
                   <a:tcPr>
                     <a:solidFill>
-                      <a:srgbClr val="FFFFFF"/>
+                      <a:srgbClr val="FAF9F6"/>
                     </a:solidFill>
                   </a:tcPr>
                 </a:tc>
@@ -7854,17 +8286,17 @@
                       <a:r>
                         <a:rPr sz="1100" b="0">
                           <a:solidFill>
-                            <a:srgbClr val="1A1F26"/>
+                            <a:srgbClr val="1C2026"/>
                           </a:solidFill>
                           <a:latin typeface="Calibri"/>
                         </a:rPr>
-                        <a:t>2.7×  (2.6–2.8×)</a:t>
+                        <a:t>2.7×  (2.6 to 2.8×)</a:t>
                       </a:r>
                     </a:p>
                   </a:txBody>
                   <a:tcPr>
                     <a:solidFill>
-                      <a:srgbClr val="FFFFFF"/>
+                      <a:srgbClr val="FAF9F6"/>
                     </a:solidFill>
                   </a:tcPr>
                 </a:tc>
@@ -7876,7 +8308,7 @@
                       <a:r>
                         <a:rPr sz="1100" b="0">
                           <a:solidFill>
-                            <a:srgbClr val="1A1F26"/>
+                            <a:srgbClr val="1C2026"/>
                           </a:solidFill>
                           <a:latin typeface="Calibri"/>
                         </a:rPr>
@@ -7886,7 +8318,7 @@
                   </a:txBody>
                   <a:tcPr>
                     <a:solidFill>
-                      <a:srgbClr val="FFFFFF"/>
+                      <a:srgbClr val="FAF9F6"/>
                     </a:solidFill>
                   </a:tcPr>
                 </a:tc>
@@ -7898,7 +8330,7 @@
                       <a:r>
                         <a:rPr sz="1100" b="0">
                           <a:solidFill>
-                            <a:srgbClr val="1A1F26"/>
+                            <a:srgbClr val="1C2026"/>
                           </a:solidFill>
                           <a:latin typeface="Calibri"/>
                         </a:rPr>
@@ -7908,7 +8340,7 @@
                   </a:txBody>
                   <a:tcPr>
                     <a:solidFill>
-                      <a:srgbClr val="FFFFFF"/>
+                      <a:srgbClr val="FAF9F6"/>
                     </a:solidFill>
                   </a:tcPr>
                 </a:tc>
@@ -7922,7 +8354,7 @@
                       <a:r>
                         <a:rPr sz="1100" b="1">
                           <a:solidFill>
-                            <a:srgbClr val="1A1F26"/>
+                            <a:srgbClr val="1C2026"/>
                           </a:solidFill>
                           <a:latin typeface="Calibri"/>
                         </a:rPr>
@@ -7932,7 +8364,7 @@
                   </a:txBody>
                   <a:tcPr>
                     <a:solidFill>
-                      <a:srgbClr val="FCFCFA"/>
+                      <a:srgbClr val="FAF9F6"/>
                     </a:solidFill>
                   </a:tcPr>
                 </a:tc>
@@ -7944,17 +8376,17 @@
                       <a:r>
                         <a:rPr sz="1100" b="0">
                           <a:solidFill>
-                            <a:srgbClr val="1A1F26"/>
+                            <a:srgbClr val="1C2026"/>
                           </a:solidFill>
                           <a:latin typeface="Calibri"/>
                         </a:rPr>
-                        <a:t>1.33×  (1.28–1.39×)</a:t>
+                        <a:t>1.33×  (1.28 to 1.39×)</a:t>
                       </a:r>
                     </a:p>
                   </a:txBody>
                   <a:tcPr>
                     <a:solidFill>
-                      <a:srgbClr val="FCFCFA"/>
+                      <a:srgbClr val="FAF9F6"/>
                     </a:solidFill>
                   </a:tcPr>
                 </a:tc>
@@ -7966,7 +8398,7 @@
                       <a:r>
                         <a:rPr sz="1100" b="0">
                           <a:solidFill>
-                            <a:srgbClr val="1A1F26"/>
+                            <a:srgbClr val="1C2026"/>
                           </a:solidFill>
                           <a:latin typeface="Calibri"/>
                         </a:rPr>
@@ -7976,7 +8408,7 @@
                   </a:txBody>
                   <a:tcPr>
                     <a:solidFill>
-                      <a:srgbClr val="FCFCFA"/>
+                      <a:srgbClr val="FAF9F6"/>
                     </a:solidFill>
                   </a:tcPr>
                 </a:tc>
@@ -7988,7 +8420,7 @@
                       <a:r>
                         <a:rPr sz="1100" b="0">
                           <a:solidFill>
-                            <a:srgbClr val="1A1F26"/>
+                            <a:srgbClr val="1C2026"/>
                           </a:solidFill>
                           <a:latin typeface="Calibri"/>
                         </a:rPr>
@@ -7998,7 +8430,7 @@
                   </a:txBody>
                   <a:tcPr>
                     <a:solidFill>
-                      <a:srgbClr val="FCFCFA"/>
+                      <a:srgbClr val="FAF9F6"/>
                     </a:solidFill>
                   </a:tcPr>
                 </a:tc>
@@ -8015,14 +8447,14 @@
         </p:nvSpPr>
         <p:spPr>
           <a:xfrm>
-            <a:off x="822960" y="3291840"/>
-            <a:ext cx="10515600" cy="12700"/>
+            <a:off x="868680" y="3337560"/>
+            <a:ext cx="10469880" cy="12700"/>
           </a:xfrm>
           <a:prstGeom prst="rect">
             <a:avLst/>
           </a:prstGeom>
           <a:solidFill>
-            <a:srgbClr val="DDDAD3"/>
+            <a:srgbClr val="E4E1D9"/>
           </a:solidFill>
           <a:ln>
             <a:noFill/>
@@ -8058,7 +8490,7 @@
         </p:nvSpPr>
         <p:spPr>
           <a:xfrm>
-            <a:off x="822960" y="3611880"/>
+            <a:off x="868680" y="3611880"/>
             <a:ext cx="4572000" cy="365760"/>
           </a:xfrm>
           <a:prstGeom prst="rect">
@@ -8076,7 +8508,7 @@
             <a:r>
               <a:rPr sz="1400" b="1">
                 <a:solidFill>
-                  <a:srgbClr val="B57E1F"/>
+                  <a:srgbClr val="B0761B"/>
                 </a:solidFill>
                 <a:latin typeface="Calibri"/>
               </a:rPr>
@@ -8087,195 +8519,20 @@
       </p:sp>
       <p:sp>
         <p:nvSpPr>
-          <p:cNvPr id="8" name="TextBox 7"/>
-          <p:cNvSpPr txBox="1"/>
-          <p:nvPr/>
-        </p:nvSpPr>
-        <p:spPr>
-          <a:xfrm>
-            <a:off x="822960" y="4069080"/>
-            <a:ext cx="5394960" cy="384048"/>
-          </a:xfrm>
-          <a:prstGeom prst="rect">
-            <a:avLst/>
-          </a:prstGeom>
-          <a:noFill/>
-        </p:spPr>
-        <p:txBody>
-          <a:bodyPr wrap="square">
-            <a:spAutoFit/>
-          </a:bodyPr>
-          <a:lstStyle/>
-          <a:p>
-            <a:pPr algn="l"/>
-            <a:r>
-              <a:rPr sz="1200" b="0">
-                <a:solidFill>
-                  <a:srgbClr val="8A919B"/>
-                </a:solidFill>
-                <a:latin typeface="Calibri"/>
-              </a:rPr>
-              <a:t>—  INT4 accuracy: one case, not the full set</a:t>
-            </a:r>
-          </a:p>
-        </p:txBody>
-      </p:sp>
-      <p:sp>
-        <p:nvSpPr>
-          <p:cNvPr id="9" name="TextBox 8"/>
-          <p:cNvSpPr txBox="1"/>
-          <p:nvPr/>
-        </p:nvSpPr>
-        <p:spPr>
-          <a:xfrm>
-            <a:off x="822960" y="4453128"/>
-            <a:ext cx="5394960" cy="384048"/>
-          </a:xfrm>
-          <a:prstGeom prst="rect">
-            <a:avLst/>
-          </a:prstGeom>
-          <a:noFill/>
-        </p:spPr>
-        <p:txBody>
-          <a:bodyPr wrap="square">
-            <a:spAutoFit/>
-          </a:bodyPr>
-          <a:lstStyle/>
-          <a:p>
-            <a:pPr algn="l"/>
-            <a:r>
-              <a:rPr sz="1200" b="0">
-                <a:solidFill>
-                  <a:srgbClr val="8A919B"/>
-                </a:solidFill>
-                <a:latin typeface="Calibri"/>
-              </a:rPr>
-              <a:t>—  Compile gain sits near run-to-run spread</a:t>
-            </a:r>
-          </a:p>
-        </p:txBody>
-      </p:sp>
-      <p:sp>
-        <p:nvSpPr>
-          <p:cNvPr id="10" name="TextBox 9"/>
-          <p:cNvSpPr txBox="1"/>
-          <p:nvPr/>
-        </p:nvSpPr>
-        <p:spPr>
-          <a:xfrm>
-            <a:off x="6675120" y="3611880"/>
-            <a:ext cx="4572000" cy="365760"/>
-          </a:xfrm>
-          <a:prstGeom prst="rect">
-            <a:avLst/>
-          </a:prstGeom>
-          <a:noFill/>
-        </p:spPr>
-        <p:txBody>
-          <a:bodyPr wrap="square">
-            <a:spAutoFit/>
-          </a:bodyPr>
-          <a:lstStyle/>
-          <a:p>
-            <a:pPr algn="l"/>
-            <a:r>
-              <a:rPr sz="1400" b="1">
-                <a:solidFill>
-                  <a:srgbClr val="B57E1F"/>
-                </a:solidFill>
-                <a:latin typeface="Calibri"/>
-              </a:rPr>
-              <a:t>Next</a:t>
-            </a:r>
-          </a:p>
-        </p:txBody>
-      </p:sp>
-      <p:sp>
-        <p:nvSpPr>
-          <p:cNvPr id="11" name="TextBox 10"/>
-          <p:cNvSpPr txBox="1"/>
-          <p:nvPr/>
-        </p:nvSpPr>
-        <p:spPr>
-          <a:xfrm>
-            <a:off x="6675120" y="4069080"/>
-            <a:ext cx="4572000" cy="384048"/>
-          </a:xfrm>
-          <a:prstGeom prst="rect">
-            <a:avLst/>
-          </a:prstGeom>
-          <a:noFill/>
-        </p:spPr>
-        <p:txBody>
-          <a:bodyPr wrap="square">
-            <a:spAutoFit/>
-          </a:bodyPr>
-          <a:lstStyle/>
-          <a:p>
-            <a:pPr algn="l"/>
-            <a:r>
-              <a:rPr sz="1200" b="0">
-                <a:solidFill>
-                  <a:srgbClr val="8A919B"/>
-                </a:solidFill>
-                <a:latin typeface="Calibri"/>
-              </a:rPr>
-              <a:t>—  Run INT4 across all 881 validation cases</a:t>
-            </a:r>
-          </a:p>
-        </p:txBody>
-      </p:sp>
-      <p:sp>
-        <p:nvSpPr>
-          <p:cNvPr id="12" name="TextBox 11"/>
-          <p:cNvSpPr txBox="1"/>
-          <p:nvPr/>
-        </p:nvSpPr>
-        <p:spPr>
-          <a:xfrm>
-            <a:off x="6675120" y="4453128"/>
-            <a:ext cx="4572000" cy="384048"/>
-          </a:xfrm>
-          <a:prstGeom prst="rect">
-            <a:avLst/>
-          </a:prstGeom>
-          <a:noFill/>
-        </p:spPr>
-        <p:txBody>
-          <a:bodyPr wrap="square">
-            <a:spAutoFit/>
-          </a:bodyPr>
-          <a:lstStyle/>
-          <a:p>
-            <a:pPr algn="l"/>
-            <a:r>
-              <a:rPr sz="1200" b="0">
-                <a:solidFill>
-                  <a:srgbClr val="8A919B"/>
-                </a:solidFill>
-                <a:latin typeface="Calibri"/>
-              </a:rPr>
-              <a:t>—  Turns a direction into a bound worth acting on</a:t>
-            </a:r>
-          </a:p>
-        </p:txBody>
-      </p:sp>
-      <p:sp>
-        <p:nvSpPr>
-          <p:cNvPr id="13" name="Rectangle 12"/>
+          <p:cNvPr id="8" name="Rectangle 7"/>
           <p:cNvSpPr/>
           <p:nvPr/>
         </p:nvSpPr>
         <p:spPr>
           <a:xfrm>
-            <a:off x="822960" y="5349240"/>
-            <a:ext cx="10515600" cy="12700"/>
+            <a:off x="868680" y="4146804"/>
+            <a:ext cx="64008" cy="64008"/>
           </a:xfrm>
           <a:prstGeom prst="rect">
             <a:avLst/>
           </a:prstGeom>
           <a:solidFill>
-            <a:srgbClr val="DDDAD3"/>
+            <a:srgbClr val="B0761B"/>
           </a:solidFill>
           <a:ln>
             <a:noFill/>
@@ -8305,14 +8562,14 @@
       </p:sp>
       <p:sp>
         <p:nvSpPr>
-          <p:cNvPr id="14" name="TextBox 13"/>
+          <p:cNvPr id="9" name="TextBox 8"/>
           <p:cNvSpPr txBox="1"/>
           <p:nvPr/>
         </p:nvSpPr>
         <p:spPr>
           <a:xfrm>
-            <a:off x="822960" y="5623560"/>
-            <a:ext cx="10515600" cy="457200"/>
+            <a:off x="1088136" y="4069080"/>
+            <a:ext cx="5175504" cy="384048"/>
           </a:xfrm>
           <a:prstGeom prst="rect">
             <a:avLst/>
@@ -8327,9 +8584,356 @@
           <a:p>
             <a:pPr algn="l"/>
             <a:r>
+              <a:rPr sz="1200" b="0">
+                <a:solidFill>
+                  <a:srgbClr val="8C8F96"/>
+                </a:solidFill>
+                <a:latin typeface="Calibri"/>
+              </a:rPr>
+              <a:t>INT4 accuracy rests on one case, not the full set</a:t>
+            </a:r>
+          </a:p>
+        </p:txBody>
+      </p:sp>
+      <p:sp>
+        <p:nvSpPr>
+          <p:cNvPr id="10" name="Rectangle 9"/>
+          <p:cNvSpPr/>
+          <p:nvPr/>
+        </p:nvSpPr>
+        <p:spPr>
+          <a:xfrm>
+            <a:off x="868680" y="4530852"/>
+            <a:ext cx="64008" cy="64008"/>
+          </a:xfrm>
+          <a:prstGeom prst="rect">
+            <a:avLst/>
+          </a:prstGeom>
+          <a:solidFill>
+            <a:srgbClr val="B0761B"/>
+          </a:solidFill>
+          <a:ln>
+            <a:noFill/>
+          </a:ln>
+        </p:spPr>
+        <p:style>
+          <a:lnRef idx="1">
+            <a:schemeClr val="accent1"/>
+          </a:lnRef>
+          <a:fillRef idx="3">
+            <a:schemeClr val="accent1"/>
+          </a:fillRef>
+          <a:effectRef idx="2">
+            <a:schemeClr val="accent1"/>
+          </a:effectRef>
+          <a:fontRef idx="minor">
+            <a:schemeClr val="lt1"/>
+          </a:fontRef>
+        </p:style>
+        <p:txBody>
+          <a:bodyPr rtlCol="0" anchor="ctr"/>
+          <a:lstStyle/>
+          <a:p>
+            <a:pPr algn="ctr"/>
+          </a:p>
+        </p:txBody>
+      </p:sp>
+      <p:sp>
+        <p:nvSpPr>
+          <p:cNvPr id="11" name="TextBox 10"/>
+          <p:cNvSpPr txBox="1"/>
+          <p:nvPr/>
+        </p:nvSpPr>
+        <p:spPr>
+          <a:xfrm>
+            <a:off x="1088136" y="4453128"/>
+            <a:ext cx="5175504" cy="384048"/>
+          </a:xfrm>
+          <a:prstGeom prst="rect">
+            <a:avLst/>
+          </a:prstGeom>
+          <a:noFill/>
+        </p:spPr>
+        <p:txBody>
+          <a:bodyPr wrap="square">
+            <a:spAutoFit/>
+          </a:bodyPr>
+          <a:lstStyle/>
+          <a:p>
+            <a:pPr algn="l"/>
+            <a:r>
+              <a:rPr sz="1200" b="0">
+                <a:solidFill>
+                  <a:srgbClr val="8C8F96"/>
+                </a:solidFill>
+                <a:latin typeface="Calibri"/>
+              </a:rPr>
+              <a:t>Compile gain sits near the run-to-run spread</a:t>
+            </a:r>
+          </a:p>
+        </p:txBody>
+      </p:sp>
+      <p:sp>
+        <p:nvSpPr>
+          <p:cNvPr id="12" name="TextBox 11"/>
+          <p:cNvSpPr txBox="1"/>
+          <p:nvPr/>
+        </p:nvSpPr>
+        <p:spPr>
+          <a:xfrm>
+            <a:off x="6675120" y="3611880"/>
+            <a:ext cx="4572000" cy="365760"/>
+          </a:xfrm>
+          <a:prstGeom prst="rect">
+            <a:avLst/>
+          </a:prstGeom>
+          <a:noFill/>
+        </p:spPr>
+        <p:txBody>
+          <a:bodyPr wrap="square">
+            <a:spAutoFit/>
+          </a:bodyPr>
+          <a:lstStyle/>
+          <a:p>
+            <a:pPr algn="l"/>
+            <a:r>
+              <a:rPr sz="1400" b="1">
+                <a:solidFill>
+                  <a:srgbClr val="B0761B"/>
+                </a:solidFill>
+                <a:latin typeface="Calibri"/>
+              </a:rPr>
+              <a:t>Next</a:t>
+            </a:r>
+          </a:p>
+        </p:txBody>
+      </p:sp>
+      <p:sp>
+        <p:nvSpPr>
+          <p:cNvPr id="13" name="Rectangle 12"/>
+          <p:cNvSpPr/>
+          <p:nvPr/>
+        </p:nvSpPr>
+        <p:spPr>
+          <a:xfrm>
+            <a:off x="6675120" y="4146804"/>
+            <a:ext cx="64008" cy="64008"/>
+          </a:xfrm>
+          <a:prstGeom prst="rect">
+            <a:avLst/>
+          </a:prstGeom>
+          <a:solidFill>
+            <a:srgbClr val="B0761B"/>
+          </a:solidFill>
+          <a:ln>
+            <a:noFill/>
+          </a:ln>
+        </p:spPr>
+        <p:style>
+          <a:lnRef idx="1">
+            <a:schemeClr val="accent1"/>
+          </a:lnRef>
+          <a:fillRef idx="3">
+            <a:schemeClr val="accent1"/>
+          </a:fillRef>
+          <a:effectRef idx="2">
+            <a:schemeClr val="accent1"/>
+          </a:effectRef>
+          <a:fontRef idx="minor">
+            <a:schemeClr val="lt1"/>
+          </a:fontRef>
+        </p:style>
+        <p:txBody>
+          <a:bodyPr rtlCol="0" anchor="ctr"/>
+          <a:lstStyle/>
+          <a:p>
+            <a:pPr algn="ctr"/>
+          </a:p>
+        </p:txBody>
+      </p:sp>
+      <p:sp>
+        <p:nvSpPr>
+          <p:cNvPr id="14" name="TextBox 13"/>
+          <p:cNvSpPr txBox="1"/>
+          <p:nvPr/>
+        </p:nvSpPr>
+        <p:spPr>
+          <a:xfrm>
+            <a:off x="6894576" y="4069080"/>
+            <a:ext cx="4261104" cy="384048"/>
+          </a:xfrm>
+          <a:prstGeom prst="rect">
+            <a:avLst/>
+          </a:prstGeom>
+          <a:noFill/>
+        </p:spPr>
+        <p:txBody>
+          <a:bodyPr wrap="square">
+            <a:spAutoFit/>
+          </a:bodyPr>
+          <a:lstStyle/>
+          <a:p>
+            <a:pPr algn="l"/>
+            <a:r>
+              <a:rPr sz="1200" b="0">
+                <a:solidFill>
+                  <a:srgbClr val="8C8F96"/>
+                </a:solidFill>
+                <a:latin typeface="Calibri"/>
+              </a:rPr>
+              <a:t>Run INT4 across all 881 validation cases</a:t>
+            </a:r>
+          </a:p>
+        </p:txBody>
+      </p:sp>
+      <p:sp>
+        <p:nvSpPr>
+          <p:cNvPr id="15" name="Rectangle 14"/>
+          <p:cNvSpPr/>
+          <p:nvPr/>
+        </p:nvSpPr>
+        <p:spPr>
+          <a:xfrm>
+            <a:off x="6675120" y="4530852"/>
+            <a:ext cx="64008" cy="64008"/>
+          </a:xfrm>
+          <a:prstGeom prst="rect">
+            <a:avLst/>
+          </a:prstGeom>
+          <a:solidFill>
+            <a:srgbClr val="B0761B"/>
+          </a:solidFill>
+          <a:ln>
+            <a:noFill/>
+          </a:ln>
+        </p:spPr>
+        <p:style>
+          <a:lnRef idx="1">
+            <a:schemeClr val="accent1"/>
+          </a:lnRef>
+          <a:fillRef idx="3">
+            <a:schemeClr val="accent1"/>
+          </a:fillRef>
+          <a:effectRef idx="2">
+            <a:schemeClr val="accent1"/>
+          </a:effectRef>
+          <a:fontRef idx="minor">
+            <a:schemeClr val="lt1"/>
+          </a:fontRef>
+        </p:style>
+        <p:txBody>
+          <a:bodyPr rtlCol="0" anchor="ctr"/>
+          <a:lstStyle/>
+          <a:p>
+            <a:pPr algn="ctr"/>
+          </a:p>
+        </p:txBody>
+      </p:sp>
+      <p:sp>
+        <p:nvSpPr>
+          <p:cNvPr id="16" name="TextBox 15"/>
+          <p:cNvSpPr txBox="1"/>
+          <p:nvPr/>
+        </p:nvSpPr>
+        <p:spPr>
+          <a:xfrm>
+            <a:off x="6894576" y="4453128"/>
+            <a:ext cx="4261104" cy="384048"/>
+          </a:xfrm>
+          <a:prstGeom prst="rect">
+            <a:avLst/>
+          </a:prstGeom>
+          <a:noFill/>
+        </p:spPr>
+        <p:txBody>
+          <a:bodyPr wrap="square">
+            <a:spAutoFit/>
+          </a:bodyPr>
+          <a:lstStyle/>
+          <a:p>
+            <a:pPr algn="l"/>
+            <a:r>
+              <a:rPr sz="1200" b="0">
+                <a:solidFill>
+                  <a:srgbClr val="8C8F96"/>
+                </a:solidFill>
+                <a:latin typeface="Calibri"/>
+              </a:rPr>
+              <a:t>Turns a direction into a bound worth acting on</a:t>
+            </a:r>
+          </a:p>
+        </p:txBody>
+      </p:sp>
+      <p:sp>
+        <p:nvSpPr>
+          <p:cNvPr id="17" name="Rectangle 16"/>
+          <p:cNvSpPr/>
+          <p:nvPr/>
+        </p:nvSpPr>
+        <p:spPr>
+          <a:xfrm>
+            <a:off x="868680" y="5394960"/>
+            <a:ext cx="10469880" cy="12700"/>
+          </a:xfrm>
+          <a:prstGeom prst="rect">
+            <a:avLst/>
+          </a:prstGeom>
+          <a:solidFill>
+            <a:srgbClr val="E4E1D9"/>
+          </a:solidFill>
+          <a:ln>
+            <a:noFill/>
+          </a:ln>
+        </p:spPr>
+        <p:style>
+          <a:lnRef idx="1">
+            <a:schemeClr val="accent1"/>
+          </a:lnRef>
+          <a:fillRef idx="3">
+            <a:schemeClr val="accent1"/>
+          </a:fillRef>
+          <a:effectRef idx="2">
+            <a:schemeClr val="accent1"/>
+          </a:effectRef>
+          <a:fontRef idx="minor">
+            <a:schemeClr val="lt1"/>
+          </a:fontRef>
+        </p:style>
+        <p:txBody>
+          <a:bodyPr rtlCol="0" anchor="ctr"/>
+          <a:lstStyle/>
+          <a:p>
+            <a:pPr algn="ctr"/>
+          </a:p>
+        </p:txBody>
+      </p:sp>
+      <p:sp>
+        <p:nvSpPr>
+          <p:cNvPr id="18" name="TextBox 17"/>
+          <p:cNvSpPr txBox="1"/>
+          <p:nvPr/>
+        </p:nvSpPr>
+        <p:spPr>
+          <a:xfrm>
+            <a:off x="868680" y="5669280"/>
+            <a:ext cx="10515600" cy="457200"/>
+          </a:xfrm>
+          <a:prstGeom prst="rect">
+            <a:avLst/>
+          </a:prstGeom>
+          <a:noFill/>
+        </p:spPr>
+        <p:txBody>
+          <a:bodyPr wrap="square">
+            <a:spAutoFit/>
+          </a:bodyPr>
+          <a:lstStyle/>
+          <a:p>
+            <a:pPr algn="l"/>
+            <a:r>
               <a:rPr sz="1700" b="1">
                 <a:solidFill>
-                  <a:srgbClr val="1A1F26"/>
+                  <a:srgbClr val="1C2026"/>
                 </a:solidFill>
                 <a:latin typeface="Calibri"/>
               </a:rPr>

--- a/slides.pptx
+++ b/slides.pptx
@@ -3397,7 +3397,7 @@
                 </a:solidFill>
                 <a:latin typeface="Calibri"/>
               </a:rPr>
-              <a:t>Two models, two prompting styles</a:t>
+              <a:t>Two Models, Two Prompting Styles</a:t>
             </a:r>
           </a:p>
         </p:txBody>
@@ -4222,7 +4222,7 @@
                 </a:solidFill>
                 <a:latin typeface="Calibri"/>
               </a:rPr>
-              <a:t>How the number was measured</a:t>
+              <a:t>How the Number Was Measured</a:t>
             </a:r>
           </a:p>
         </p:txBody>
@@ -4693,7 +4693,7 @@
                 </a:solidFill>
                 <a:latin typeface="Calibri"/>
               </a:rPr>
-              <a:t>What changed each time</a:t>
+              <a:t>What Changed Each Time</a:t>
             </a:r>
           </a:p>
         </p:txBody>
@@ -5179,7 +5179,7 @@
                 </a:solidFill>
                 <a:latin typeface="Calibri"/>
               </a:rPr>
-              <a:t>VoxTell: what made it faster</a:t>
+              <a:t>VoxTell: What Made It Faster</a:t>
             </a:r>
           </a:p>
         </p:txBody>
@@ -5868,7 +5868,7 @@
                 </a:solidFill>
                 <a:latin typeface="Calibri"/>
               </a:rPr>
-              <a:t>VoxTell: accuracy held</a:t>
+              <a:t>VoxTell: Accuracy</a:t>
             </a:r>
           </a:p>
         </p:txBody>
@@ -6615,7 +6615,7 @@
                 </a:solidFill>
                 <a:latin typeface="Calibri"/>
               </a:rPr>
-              <a:t>nnInteractive: compiling the network</a:t>
+              <a:t>nnInteractive: Compiling the Network</a:t>
             </a:r>
           </a:p>
         </p:txBody>
@@ -7319,7 +7319,7 @@
                 </a:solidFill>
                 <a:latin typeface="Calibri"/>
               </a:rPr>
-              <a:t>The speedup is not free at the start</a:t>
+              <a:t>The Speedup Is Not Free at the Start</a:t>
             </a:r>
           </a:p>
         </p:txBody>
@@ -8058,7 +8058,7 @@
                 </a:solidFill>
                 <a:latin typeface="Calibri"/>
               </a:rPr>
-              <a:t>Where both models landed</a:t>
+              <a:t>End Results</a:t>
             </a:r>
           </a:p>
         </p:txBody>

--- a/slides.pptx
+++ b/slides.pptx
@@ -3091,7 +3091,7 @@
     <p:bg>
       <p:bgPr>
         <a:solidFill>
-          <a:srgbClr val="FAF9F6"/>
+          <a:srgbClr val="FDFDFD"/>
         </a:solidFill>
         <a:effectLst/>
       </p:bgPr>
@@ -3111,14 +3111,14 @@
         </p:nvSpPr>
         <p:spPr>
           <a:xfrm>
-            <a:off x="868680" y="1874519"/>
+            <a:off x="868680" y="1417320"/>
             <a:ext cx="1005840" cy="38100"/>
           </a:xfrm>
           <a:prstGeom prst="rect">
             <a:avLst/>
           </a:prstGeom>
           <a:solidFill>
-            <a:srgbClr val="B0761B"/>
+            <a:srgbClr val="A86D18"/>
           </a:solidFill>
           <a:ln>
             <a:noFill/>
@@ -3154,7 +3154,7 @@
         </p:nvSpPr>
         <p:spPr>
           <a:xfrm>
-            <a:off x="868680" y="2148840"/>
+            <a:off x="868680" y="1691640"/>
             <a:ext cx="8229600" cy="365760"/>
           </a:xfrm>
           <a:prstGeom prst="rect">
@@ -3172,7 +3172,7 @@
             <a:r>
               <a:rPr sz="1100" b="0">
                 <a:solidFill>
-                  <a:srgbClr val="B0761B"/>
+                  <a:srgbClr val="A86D18"/>
                 </a:solidFill>
                 <a:latin typeface="Calibri"/>
               </a:rPr>
@@ -3189,7 +3189,7 @@
         </p:nvSpPr>
         <p:spPr>
           <a:xfrm>
-            <a:off x="868680" y="2606040"/>
+            <a:off x="868680" y="2148840"/>
             <a:ext cx="10058400" cy="1737360"/>
           </a:xfrm>
           <a:prstGeom prst="rect">
@@ -3236,7 +3236,7 @@
         </p:nvSpPr>
         <p:spPr>
           <a:xfrm>
-            <a:off x="868680" y="4434840"/>
+            <a:off x="868680" y="3977639"/>
             <a:ext cx="9144000" cy="365760"/>
           </a:xfrm>
           <a:prstGeom prst="rect">
@@ -3265,50 +3265,7 @@
       </p:sp>
       <p:sp>
         <p:nvSpPr>
-          <p:cNvPr id="6" name="Rectangle 5"/>
-          <p:cNvSpPr/>
-          <p:nvPr/>
-        </p:nvSpPr>
-        <p:spPr>
-          <a:xfrm>
-            <a:off x="868680" y="5806440"/>
-            <a:ext cx="10469880" cy="12700"/>
-          </a:xfrm>
-          <a:prstGeom prst="rect">
-            <a:avLst/>
-          </a:prstGeom>
-          <a:solidFill>
-            <a:srgbClr val="E4E1D9"/>
-          </a:solidFill>
-          <a:ln>
-            <a:noFill/>
-          </a:ln>
-        </p:spPr>
-        <p:style>
-          <a:lnRef idx="1">
-            <a:schemeClr val="accent1"/>
-          </a:lnRef>
-          <a:fillRef idx="3">
-            <a:schemeClr val="accent1"/>
-          </a:fillRef>
-          <a:effectRef idx="2">
-            <a:schemeClr val="accent1"/>
-          </a:effectRef>
-          <a:fontRef idx="minor">
-            <a:schemeClr val="lt1"/>
-          </a:fontRef>
-        </p:style>
-        <p:txBody>
-          <a:bodyPr rtlCol="0" anchor="ctr"/>
-          <a:lstStyle/>
-          <a:p>
-            <a:pPr algn="ctr"/>
-          </a:p>
-        </p:txBody>
-      </p:sp>
-      <p:sp>
-        <p:nvSpPr>
-          <p:cNvPr id="7" name="TextBox 6"/>
+          <p:cNvPr id="6" name="TextBox 5"/>
           <p:cNvSpPr txBox="1"/>
           <p:nvPr/>
         </p:nvSpPr>
@@ -3355,7 +3312,7 @@
     <p:bg>
       <p:bgPr>
         <a:solidFill>
-          <a:srgbClr val="FAF9F6"/>
+          <a:srgbClr val="FDFDFD"/>
         </a:solidFill>
         <a:effectLst/>
       </p:bgPr>
@@ -3375,7 +3332,7 @@
         </p:nvSpPr>
         <p:spPr>
           <a:xfrm>
-            <a:off x="868680" y="502920"/>
+            <a:off x="868680" y="548640"/>
             <a:ext cx="8961120" cy="548640"/>
           </a:xfrm>
           <a:prstGeom prst="rect">
@@ -3410,7 +3367,7 @@
         </p:nvSpPr>
         <p:spPr>
           <a:xfrm>
-            <a:off x="10058400" y="658368"/>
+            <a:off x="10058400" y="704088"/>
             <a:ext cx="1280160" cy="365760"/>
           </a:xfrm>
           <a:prstGeom prst="rect">
@@ -3445,14 +3402,14 @@
         </p:nvSpPr>
         <p:spPr>
           <a:xfrm>
-            <a:off x="868680" y="1170432"/>
-            <a:ext cx="10469880" cy="12700"/>
+            <a:off x="868680" y="1207008"/>
+            <a:ext cx="822960" cy="31750"/>
           </a:xfrm>
           <a:prstGeom prst="rect">
             <a:avLst/>
           </a:prstGeom>
           <a:solidFill>
-            <a:srgbClr val="E4E1D9"/>
+            <a:srgbClr val="A86D18"/>
           </a:solidFill>
           <a:ln>
             <a:noFill/>
@@ -3488,7 +3445,7 @@
         </p:nvSpPr>
         <p:spPr>
           <a:xfrm>
-            <a:off x="868680" y="1600200"/>
+            <a:off x="868680" y="1691640"/>
             <a:ext cx="4572000" cy="411480"/>
           </a:xfrm>
           <a:prstGeom prst="rect">
@@ -3506,7 +3463,7 @@
             <a:r>
               <a:rPr sz="2000" b="1">
                 <a:solidFill>
-                  <a:srgbClr val="B0761B"/>
+                  <a:srgbClr val="A86D18"/>
                 </a:solidFill>
                 <a:latin typeface="Calibri"/>
               </a:rPr>
@@ -3523,14 +3480,14 @@
         </p:nvSpPr>
         <p:spPr>
           <a:xfrm>
-            <a:off x="868680" y="2180844"/>
+            <a:off x="868680" y="2272284"/>
             <a:ext cx="64008" cy="64008"/>
           </a:xfrm>
           <a:prstGeom prst="rect">
             <a:avLst/>
           </a:prstGeom>
           <a:solidFill>
-            <a:srgbClr val="B0761B"/>
+            <a:srgbClr val="A86D18"/>
           </a:solidFill>
           <a:ln>
             <a:noFill/>
@@ -3566,7 +3523,7 @@
         </p:nvSpPr>
         <p:spPr>
           <a:xfrm>
-            <a:off x="1088136" y="2103120"/>
+            <a:off x="1088136" y="2194560"/>
             <a:ext cx="4535424" cy="402336"/>
           </a:xfrm>
           <a:prstGeom prst="rect">
@@ -3601,14 +3558,14 @@
         </p:nvSpPr>
         <p:spPr>
           <a:xfrm>
-            <a:off x="868680" y="2583179"/>
+            <a:off x="868680" y="2674620"/>
             <a:ext cx="64008" cy="64008"/>
           </a:xfrm>
           <a:prstGeom prst="rect">
             <a:avLst/>
           </a:prstGeom>
           <a:solidFill>
-            <a:srgbClr val="B0761B"/>
+            <a:srgbClr val="A86D18"/>
           </a:solidFill>
           <a:ln>
             <a:noFill/>
@@ -3644,7 +3601,7 @@
         </p:nvSpPr>
         <p:spPr>
           <a:xfrm>
-            <a:off x="1088136" y="2505456"/>
+            <a:off x="1088136" y="2596896"/>
             <a:ext cx="4535424" cy="402336"/>
           </a:xfrm>
           <a:prstGeom prst="rect">
@@ -3679,14 +3636,14 @@
         </p:nvSpPr>
         <p:spPr>
           <a:xfrm>
-            <a:off x="868680" y="2985515"/>
+            <a:off x="868680" y="3076956"/>
             <a:ext cx="64008" cy="64008"/>
           </a:xfrm>
           <a:prstGeom prst="rect">
             <a:avLst/>
           </a:prstGeom>
           <a:solidFill>
-            <a:srgbClr val="B0761B"/>
+            <a:srgbClr val="A86D18"/>
           </a:solidFill>
           <a:ln>
             <a:noFill/>
@@ -3722,7 +3679,7 @@
         </p:nvSpPr>
         <p:spPr>
           <a:xfrm>
-            <a:off x="1088136" y="2907791"/>
+            <a:off x="1088136" y="2999232"/>
             <a:ext cx="4535424" cy="402336"/>
           </a:xfrm>
           <a:prstGeom prst="rect">
@@ -3757,7 +3714,7 @@
         </p:nvSpPr>
         <p:spPr>
           <a:xfrm>
-            <a:off x="6355080" y="1600200"/>
+            <a:off x="6355080" y="1691640"/>
             <a:ext cx="4572000" cy="411480"/>
           </a:xfrm>
           <a:prstGeom prst="rect">
@@ -3792,14 +3749,14 @@
         </p:nvSpPr>
         <p:spPr>
           <a:xfrm>
-            <a:off x="6355080" y="2180844"/>
+            <a:off x="6355080" y="2272284"/>
             <a:ext cx="64008" cy="64008"/>
           </a:xfrm>
           <a:prstGeom prst="rect">
             <a:avLst/>
           </a:prstGeom>
           <a:solidFill>
-            <a:srgbClr val="B0761B"/>
+            <a:srgbClr val="A86D18"/>
           </a:solidFill>
           <a:ln>
             <a:noFill/>
@@ -3835,7 +3792,7 @@
         </p:nvSpPr>
         <p:spPr>
           <a:xfrm>
-            <a:off x="6574536" y="2103120"/>
+            <a:off x="6574536" y="2194560"/>
             <a:ext cx="4535424" cy="402336"/>
           </a:xfrm>
           <a:prstGeom prst="rect">
@@ -3870,14 +3827,14 @@
         </p:nvSpPr>
         <p:spPr>
           <a:xfrm>
-            <a:off x="6355080" y="2583179"/>
+            <a:off x="6355080" y="2674620"/>
             <a:ext cx="64008" cy="64008"/>
           </a:xfrm>
           <a:prstGeom prst="rect">
             <a:avLst/>
           </a:prstGeom>
           <a:solidFill>
-            <a:srgbClr val="B0761B"/>
+            <a:srgbClr val="A86D18"/>
           </a:solidFill>
           <a:ln>
             <a:noFill/>
@@ -3913,7 +3870,7 @@
         </p:nvSpPr>
         <p:spPr>
           <a:xfrm>
-            <a:off x="6574536" y="2505456"/>
+            <a:off x="6574536" y="2596896"/>
             <a:ext cx="4535424" cy="402336"/>
           </a:xfrm>
           <a:prstGeom prst="rect">
@@ -3948,14 +3905,14 @@
         </p:nvSpPr>
         <p:spPr>
           <a:xfrm>
-            <a:off x="6355080" y="2985515"/>
+            <a:off x="6355080" y="3076956"/>
             <a:ext cx="64008" cy="64008"/>
           </a:xfrm>
           <a:prstGeom prst="rect">
             <a:avLst/>
           </a:prstGeom>
           <a:solidFill>
-            <a:srgbClr val="B0761B"/>
+            <a:srgbClr val="A86D18"/>
           </a:solidFill>
           <a:ln>
             <a:noFill/>
@@ -3991,7 +3948,7 @@
         </p:nvSpPr>
         <p:spPr>
           <a:xfrm>
-            <a:off x="6574536" y="2907791"/>
+            <a:off x="6574536" y="2999232"/>
             <a:ext cx="4535424" cy="402336"/>
           </a:xfrm>
           <a:prstGeom prst="rect">
@@ -4020,44 +3977,36 @@
       </p:sp>
       <p:sp>
         <p:nvSpPr>
-          <p:cNvPr id="19" name="Rectangle 18"/>
-          <p:cNvSpPr/>
-          <p:nvPr/>
-        </p:nvSpPr>
-        <p:spPr>
-          <a:xfrm>
-            <a:off x="868680" y="3840480"/>
-            <a:ext cx="10469880" cy="12700"/>
-          </a:xfrm>
-          <a:prstGeom prst="rect">
-            <a:avLst/>
-          </a:prstGeom>
-          <a:solidFill>
-            <a:srgbClr val="E4E1D9"/>
-          </a:solidFill>
-          <a:ln>
-            <a:noFill/>
-          </a:ln>
-        </p:spPr>
-        <p:style>
-          <a:lnRef idx="1">
-            <a:schemeClr val="accent1"/>
-          </a:lnRef>
-          <a:fillRef idx="3">
-            <a:schemeClr val="accent1"/>
-          </a:fillRef>
-          <a:effectRef idx="2">
-            <a:schemeClr val="accent1"/>
-          </a:effectRef>
-          <a:fontRef idx="minor">
-            <a:schemeClr val="lt1"/>
-          </a:fontRef>
-        </p:style>
-        <p:txBody>
-          <a:bodyPr rtlCol="0" anchor="ctr"/>
-          <a:lstStyle/>
-          <a:p>
-            <a:pPr algn="ctr"/>
+          <p:cNvPr id="19" name="TextBox 18"/>
+          <p:cNvSpPr txBox="1"/>
+          <p:nvPr/>
+        </p:nvSpPr>
+        <p:spPr>
+          <a:xfrm>
+            <a:off x="868680" y="4160520"/>
+            <a:ext cx="9144000" cy="457200"/>
+          </a:xfrm>
+          <a:prstGeom prst="rect">
+            <a:avLst/>
+          </a:prstGeom>
+          <a:noFill/>
+        </p:spPr>
+        <p:txBody>
+          <a:bodyPr wrap="square">
+            <a:spAutoFit/>
+          </a:bodyPr>
+          <a:lstStyle/>
+          <a:p>
+            <a:pPr algn="l"/>
+            <a:r>
+              <a:rPr sz="2100" b="1">
+                <a:solidFill>
+                  <a:srgbClr val="1C2026"/>
+                </a:solidFill>
+                <a:latin typeface="Calibri"/>
+              </a:rPr>
+              <a:t>Both already accurate.</a:t>
+            </a:r>
           </a:p>
         </p:txBody>
       </p:sp>
@@ -4069,7 +4018,7 @@
         </p:nvSpPr>
         <p:spPr>
           <a:xfrm>
-            <a:off x="868680" y="4160520"/>
+            <a:off x="868680" y="4709160"/>
             <a:ext cx="9144000" cy="457200"/>
           </a:xfrm>
           <a:prstGeom prst="rect">
@@ -4085,13 +4034,13 @@
           <a:p>
             <a:pPr algn="l"/>
             <a:r>
-              <a:rPr sz="2100" b="1">
-                <a:solidFill>
-                  <a:srgbClr val="1C2026"/>
-                </a:solidFill>
-                <a:latin typeface="Calibri"/>
-              </a:rPr>
-              <a:t>Both already accurate.</a:t>
+              <a:rPr sz="1700" b="0">
+                <a:solidFill>
+                  <a:srgbClr val="8C8F96"/>
+                </a:solidFill>
+                <a:latin typeface="Calibri"/>
+              </a:rPr>
+              <a:t>Can they be made faster without giving that up?</a:t>
             </a:r>
           </a:p>
         </p:txBody>
@@ -4104,42 +4053,7 @@
         </p:nvSpPr>
         <p:spPr>
           <a:xfrm>
-            <a:off x="868680" y="4709160"/>
-            <a:ext cx="9144000" cy="457200"/>
-          </a:xfrm>
-          <a:prstGeom prst="rect">
-            <a:avLst/>
-          </a:prstGeom>
-          <a:noFill/>
-        </p:spPr>
-        <p:txBody>
-          <a:bodyPr wrap="square">
-            <a:spAutoFit/>
-          </a:bodyPr>
-          <a:lstStyle/>
-          <a:p>
-            <a:pPr algn="l"/>
-            <a:r>
-              <a:rPr sz="1700" b="0">
-                <a:solidFill>
-                  <a:srgbClr val="8C8F96"/>
-                </a:solidFill>
-                <a:latin typeface="Calibri"/>
-              </a:rPr>
-              <a:t>Can they be made faster without giving that up?</a:t>
-            </a:r>
-          </a:p>
-        </p:txBody>
-      </p:sp>
-      <p:sp>
-        <p:nvSpPr>
-          <p:cNvPr id="22" name="TextBox 21"/>
-          <p:cNvSpPr txBox="1"/>
-          <p:nvPr/>
-        </p:nvSpPr>
-        <p:spPr>
-          <a:xfrm>
-            <a:off x="868680" y="6263640"/>
+            <a:off x="868680" y="6309360"/>
             <a:ext cx="10469880" cy="365760"/>
           </a:xfrm>
           <a:prstGeom prst="rect">
@@ -4180,7 +4094,7 @@
     <p:bg>
       <p:bgPr>
         <a:solidFill>
-          <a:srgbClr val="FAF9F6"/>
+          <a:srgbClr val="FDFDFD"/>
         </a:solidFill>
         <a:effectLst/>
       </p:bgPr>
@@ -4200,7 +4114,7 @@
         </p:nvSpPr>
         <p:spPr>
           <a:xfrm>
-            <a:off x="868680" y="502920"/>
+            <a:off x="868680" y="548640"/>
             <a:ext cx="8961120" cy="548640"/>
           </a:xfrm>
           <a:prstGeom prst="rect">
@@ -4235,7 +4149,7 @@
         </p:nvSpPr>
         <p:spPr>
           <a:xfrm>
-            <a:off x="10058400" y="658368"/>
+            <a:off x="10058400" y="704088"/>
             <a:ext cx="1280160" cy="365760"/>
           </a:xfrm>
           <a:prstGeom prst="rect">
@@ -4270,14 +4184,14 @@
         </p:nvSpPr>
         <p:spPr>
           <a:xfrm>
-            <a:off x="868680" y="1170432"/>
-            <a:ext cx="10469880" cy="12700"/>
+            <a:off x="868680" y="1207008"/>
+            <a:ext cx="822960" cy="31750"/>
           </a:xfrm>
           <a:prstGeom prst="rect">
             <a:avLst/>
           </a:prstGeom>
           <a:solidFill>
-            <a:srgbClr val="E4E1D9"/>
+            <a:srgbClr val="A86D18"/>
           </a:solidFill>
           <a:ln>
             <a:noFill/>
@@ -4313,7 +4227,7 @@
         </p:nvSpPr>
         <p:spPr>
           <a:xfrm>
-            <a:off x="868680" y="1481328"/>
+            <a:off x="868680" y="1554480"/>
             <a:ext cx="7315200" cy="320040"/>
           </a:xfrm>
           <a:prstGeom prst="rect">
@@ -4348,7 +4262,7 @@
         </p:nvSpPr>
         <p:spPr>
           <a:xfrm>
-            <a:off x="868680" y="1874519"/>
+            <a:off x="868680" y="1965960"/>
             <a:ext cx="2468880" cy="777240"/>
           </a:xfrm>
           <a:prstGeom prst="rect">
@@ -4383,7 +4297,7 @@
         </p:nvSpPr>
         <p:spPr>
           <a:xfrm>
-            <a:off x="868680" y="2724912"/>
+            <a:off x="868680" y="2816352"/>
             <a:ext cx="2468880" cy="548640"/>
           </a:xfrm>
           <a:prstGeom prst="rect">
@@ -4418,7 +4332,7 @@
         </p:nvSpPr>
         <p:spPr>
           <a:xfrm>
-            <a:off x="3520439" y="1874519"/>
+            <a:off x="3520439" y="1965960"/>
             <a:ext cx="2468880" cy="777240"/>
           </a:xfrm>
           <a:prstGeom prst="rect">
@@ -4453,7 +4367,7 @@
         </p:nvSpPr>
         <p:spPr>
           <a:xfrm>
-            <a:off x="3520439" y="2724912"/>
+            <a:off x="3520439" y="2816352"/>
             <a:ext cx="2468880" cy="548640"/>
           </a:xfrm>
           <a:prstGeom prst="rect">
@@ -4488,7 +4402,7 @@
         </p:nvSpPr>
         <p:spPr>
           <a:xfrm>
-            <a:off x="6172200" y="1874519"/>
+            <a:off x="6172200" y="1965960"/>
             <a:ext cx="2468880" cy="777240"/>
           </a:xfrm>
           <a:prstGeom prst="rect">
@@ -4523,7 +4437,7 @@
         </p:nvSpPr>
         <p:spPr>
           <a:xfrm>
-            <a:off x="6172200" y="2724912"/>
+            <a:off x="6172200" y="2816352"/>
             <a:ext cx="2468880" cy="548640"/>
           </a:xfrm>
           <a:prstGeom prst="rect">
@@ -4558,7 +4472,7 @@
         </p:nvSpPr>
         <p:spPr>
           <a:xfrm>
-            <a:off x="8823959" y="1874519"/>
+            <a:off x="8823959" y="1965960"/>
             <a:ext cx="2468880" cy="777240"/>
           </a:xfrm>
           <a:prstGeom prst="rect">
@@ -4576,7 +4490,7 @@
             <a:r>
               <a:rPr sz="4200" b="1">
                 <a:solidFill>
-                  <a:srgbClr val="B0761B"/>
+                  <a:srgbClr val="A86D18"/>
                 </a:solidFill>
                 <a:latin typeface="Calibri"/>
               </a:rPr>
@@ -4593,7 +4507,7 @@
         </p:nvSpPr>
         <p:spPr>
           <a:xfrm>
-            <a:off x="8823959" y="2724912"/>
+            <a:off x="8823959" y="2816352"/>
             <a:ext cx="2468880" cy="548640"/>
           </a:xfrm>
           <a:prstGeom prst="rect">
@@ -4622,20 +4536,55 @@
       </p:sp>
       <p:sp>
         <p:nvSpPr>
-          <p:cNvPr id="14" name="Rectangle 13"/>
+          <p:cNvPr id="14" name="TextBox 13"/>
+          <p:cNvSpPr txBox="1"/>
+          <p:nvPr/>
+        </p:nvSpPr>
+        <p:spPr>
+          <a:xfrm>
+            <a:off x="868680" y="3703320"/>
+            <a:ext cx="5486400" cy="320040"/>
+          </a:xfrm>
+          <a:prstGeom prst="rect">
+            <a:avLst/>
+          </a:prstGeom>
+          <a:noFill/>
+        </p:spPr>
+        <p:txBody>
+          <a:bodyPr wrap="square">
+            <a:spAutoFit/>
+          </a:bodyPr>
+          <a:lstStyle/>
+          <a:p>
+            <a:pPr algn="l"/>
+            <a:r>
+              <a:rPr sz="1200" b="1">
+                <a:solidFill>
+                  <a:srgbClr val="A86D18"/>
+                </a:solidFill>
+                <a:latin typeface="Calibri"/>
+              </a:rPr>
+              <a:t>What Changed Each Time</a:t>
+            </a:r>
+          </a:p>
+        </p:txBody>
+      </p:sp>
+      <p:sp>
+        <p:nvSpPr>
+          <p:cNvPr id="15" name="Rectangle 14"/>
           <p:cNvSpPr/>
           <p:nvPr/>
         </p:nvSpPr>
         <p:spPr>
           <a:xfrm>
-            <a:off x="868680" y="3429000"/>
-            <a:ext cx="10469880" cy="12700"/>
+            <a:off x="868680" y="4192524"/>
+            <a:ext cx="64008" cy="64008"/>
           </a:xfrm>
           <a:prstGeom prst="rect">
             <a:avLst/>
           </a:prstGeom>
           <a:solidFill>
-            <a:srgbClr val="E4E1D9"/>
+            <a:srgbClr val="A86D18"/>
           </a:solidFill>
           <a:ln>
             <a:noFill/>
@@ -4665,14 +4614,14 @@
       </p:sp>
       <p:sp>
         <p:nvSpPr>
-          <p:cNvPr id="15" name="TextBox 14"/>
+          <p:cNvPr id="16" name="TextBox 15"/>
           <p:cNvSpPr txBox="1"/>
           <p:nvPr/>
         </p:nvSpPr>
         <p:spPr>
           <a:xfrm>
-            <a:off x="868680" y="3657600"/>
-            <a:ext cx="5486400" cy="320040"/>
+            <a:off x="1088136" y="4114800"/>
+            <a:ext cx="10113264" cy="384048"/>
           </a:xfrm>
           <a:prstGeom prst="rect">
             <a:avLst/>
@@ -4687,33 +4636,33 @@
           <a:p>
             <a:pPr algn="l"/>
             <a:r>
-              <a:rPr sz="1200" b="1">
-                <a:solidFill>
-                  <a:srgbClr val="B0761B"/>
-                </a:solidFill>
-                <a:latin typeface="Calibri"/>
-              </a:rPr>
-              <a:t>What Changed Each Time</a:t>
-            </a:r>
-          </a:p>
-        </p:txBody>
-      </p:sp>
-      <p:sp>
-        <p:nvSpPr>
-          <p:cNvPr id="16" name="Rectangle 15"/>
+              <a:rPr sz="1300" b="0">
+                <a:solidFill>
+                  <a:srgbClr val="1C2026"/>
+                </a:solidFill>
+                <a:latin typeface="Calibri"/>
+              </a:rPr>
+              <a:t>Hold precision constant, so quantization cannot pose as algorithmic gain</a:t>
+            </a:r>
+          </a:p>
+        </p:txBody>
+      </p:sp>
+      <p:sp>
+        <p:nvSpPr>
+          <p:cNvPr id="17" name="Rectangle 16"/>
           <p:cNvSpPr/>
           <p:nvPr/>
         </p:nvSpPr>
         <p:spPr>
           <a:xfrm>
-            <a:off x="868680" y="4119372"/>
+            <a:off x="868680" y="4576572"/>
             <a:ext cx="64008" cy="64008"/>
           </a:xfrm>
           <a:prstGeom prst="rect">
             <a:avLst/>
           </a:prstGeom>
           <a:solidFill>
-            <a:srgbClr val="B0761B"/>
+            <a:srgbClr val="A86D18"/>
           </a:solidFill>
           <a:ln>
             <a:noFill/>
@@ -4743,13 +4692,13 @@
       </p:sp>
       <p:sp>
         <p:nvSpPr>
-          <p:cNvPr id="17" name="TextBox 16"/>
+          <p:cNvPr id="18" name="TextBox 17"/>
           <p:cNvSpPr txBox="1"/>
           <p:nvPr/>
         </p:nvSpPr>
         <p:spPr>
           <a:xfrm>
-            <a:off x="1088136" y="4041648"/>
+            <a:off x="1088136" y="4498848"/>
             <a:ext cx="10113264" cy="384048"/>
           </a:xfrm>
           <a:prstGeom prst="rect">
@@ -4771,27 +4720,27 @@
                 </a:solidFill>
                 <a:latin typeface="Calibri"/>
               </a:rPr>
-              <a:t>Hold precision constant, so quantization cannot pose as algorithmic gain</a:t>
-            </a:r>
-          </a:p>
-        </p:txBody>
-      </p:sp>
-      <p:sp>
-        <p:nvSpPr>
-          <p:cNvPr id="18" name="Rectangle 17"/>
+              <a:t>Warm the GPU, text backbone and sliding-window path before timing</a:t>
+            </a:r>
+          </a:p>
+        </p:txBody>
+      </p:sp>
+      <p:sp>
+        <p:nvSpPr>
+          <p:cNvPr id="19" name="Rectangle 18"/>
           <p:cNvSpPr/>
           <p:nvPr/>
         </p:nvSpPr>
         <p:spPr>
           <a:xfrm>
-            <a:off x="868680" y="4503420"/>
+            <a:off x="868680" y="4960620"/>
             <a:ext cx="64008" cy="64008"/>
           </a:xfrm>
           <a:prstGeom prst="rect">
             <a:avLst/>
           </a:prstGeom>
           <a:solidFill>
-            <a:srgbClr val="B0761B"/>
+            <a:srgbClr val="A86D18"/>
           </a:solidFill>
           <a:ln>
             <a:noFill/>
@@ -4821,13 +4770,13 @@
       </p:sp>
       <p:sp>
         <p:nvSpPr>
-          <p:cNvPr id="19" name="TextBox 18"/>
+          <p:cNvPr id="20" name="TextBox 19"/>
           <p:cNvSpPr txBox="1"/>
           <p:nvPr/>
         </p:nvSpPr>
         <p:spPr>
           <a:xfrm>
-            <a:off x="1088136" y="4425696"/>
+            <a:off x="1088136" y="4882896"/>
             <a:ext cx="10113264" cy="384048"/>
           </a:xfrm>
           <a:prstGeom prst="rect">
@@ -4849,27 +4798,27 @@
                 </a:solidFill>
                 <a:latin typeface="Calibri"/>
               </a:rPr>
-              <a:t>Warm the GPU, text backbone and sliding-window path before timing</a:t>
-            </a:r>
-          </a:p>
-        </p:txBody>
-      </p:sp>
-      <p:sp>
-        <p:nvSpPr>
-          <p:cNvPr id="20" name="Rectangle 19"/>
+              <a:t>Assert the embedding cache is empty before every cold measurement</a:t>
+            </a:r>
+          </a:p>
+        </p:txBody>
+      </p:sp>
+      <p:sp>
+        <p:nvSpPr>
+          <p:cNvPr id="21" name="Rectangle 20"/>
           <p:cNvSpPr/>
           <p:nvPr/>
         </p:nvSpPr>
         <p:spPr>
           <a:xfrm>
-            <a:off x="868680" y="4887468"/>
+            <a:off x="868680" y="5344668"/>
             <a:ext cx="64008" cy="64008"/>
           </a:xfrm>
           <a:prstGeom prst="rect">
             <a:avLst/>
           </a:prstGeom>
           <a:solidFill>
-            <a:srgbClr val="B0761B"/>
+            <a:srgbClr val="A86D18"/>
           </a:solidFill>
           <a:ln>
             <a:noFill/>
@@ -4899,13 +4848,13 @@
       </p:sp>
       <p:sp>
         <p:nvSpPr>
-          <p:cNvPr id="21" name="TextBox 20"/>
+          <p:cNvPr id="22" name="TextBox 21"/>
           <p:cNvSpPr txBox="1"/>
           <p:nvPr/>
         </p:nvSpPr>
         <p:spPr>
           <a:xfrm>
-            <a:off x="1088136" y="4809744"/>
+            <a:off x="1088136" y="5266944"/>
             <a:ext cx="10113264" cy="384048"/>
           </a:xfrm>
           <a:prstGeom prst="rect">
@@ -4927,51 +4876,8 @@
                 </a:solidFill>
                 <a:latin typeface="Calibri"/>
               </a:rPr>
-              <a:t>Assert the embedding cache is empty before every cold measurement</a:t>
-            </a:r>
-          </a:p>
-        </p:txBody>
-      </p:sp>
-      <p:sp>
-        <p:nvSpPr>
-          <p:cNvPr id="22" name="Rectangle 21"/>
-          <p:cNvSpPr/>
-          <p:nvPr/>
-        </p:nvSpPr>
-        <p:spPr>
-          <a:xfrm>
-            <a:off x="868680" y="5271516"/>
-            <a:ext cx="64008" cy="64008"/>
-          </a:xfrm>
-          <a:prstGeom prst="rect">
-            <a:avLst/>
-          </a:prstGeom>
-          <a:solidFill>
-            <a:srgbClr val="B0761B"/>
-          </a:solidFill>
-          <a:ln>
-            <a:noFill/>
-          </a:ln>
-        </p:spPr>
-        <p:style>
-          <a:lnRef idx="1">
-            <a:schemeClr val="accent1"/>
-          </a:lnRef>
-          <a:fillRef idx="3">
-            <a:schemeClr val="accent1"/>
-          </a:fillRef>
-          <a:effectRef idx="2">
-            <a:schemeClr val="accent1"/>
-          </a:effectRef>
-          <a:fontRef idx="minor">
-            <a:schemeClr val="lt1"/>
-          </a:fontRef>
-        </p:style>
-        <p:txBody>
-          <a:bodyPr rtlCol="0" anchor="ctr"/>
-          <a:lstStyle/>
-          <a:p>
-            <a:pPr algn="ctr"/>
+              <a:t>Repeat to n≥4 and quote the range, never a single run</a:t>
+            </a:r>
           </a:p>
         </p:txBody>
       </p:sp>
@@ -4983,8 +4889,8 @@
         </p:nvSpPr>
         <p:spPr>
           <a:xfrm>
-            <a:off x="1088136" y="5193792"/>
-            <a:ext cx="10113264" cy="384048"/>
+            <a:off x="868680" y="5806440"/>
+            <a:ext cx="10058400" cy="365760"/>
           </a:xfrm>
           <a:prstGeom prst="rect">
             <a:avLst/>
@@ -4999,104 +4905,26 @@
           <a:p>
             <a:pPr algn="l"/>
             <a:r>
-              <a:rPr sz="1300" b="0">
+              <a:rPr sz="1500" b="1">
                 <a:solidFill>
                   <a:srgbClr val="1C2026"/>
                 </a:solidFill>
                 <a:latin typeface="Calibri"/>
               </a:rPr>
-              <a:t>Repeat to n≥4 and quote the range, never a single run</a:t>
-            </a:r>
-          </a:p>
-        </p:txBody>
-      </p:sp>
-      <p:sp>
-        <p:nvSpPr>
-          <p:cNvPr id="24" name="Rectangle 23"/>
-          <p:cNvSpPr/>
-          <p:nvPr/>
-        </p:nvSpPr>
-        <p:spPr>
-          <a:xfrm>
-            <a:off x="868680" y="5715000"/>
-            <a:ext cx="10469880" cy="12700"/>
-          </a:xfrm>
-          <a:prstGeom prst="rect">
-            <a:avLst/>
-          </a:prstGeom>
-          <a:solidFill>
-            <a:srgbClr val="E4E1D9"/>
-          </a:solidFill>
-          <a:ln>
-            <a:noFill/>
-          </a:ln>
-        </p:spPr>
-        <p:style>
-          <a:lnRef idx="1">
-            <a:schemeClr val="accent1"/>
-          </a:lnRef>
-          <a:fillRef idx="3">
-            <a:schemeClr val="accent1"/>
-          </a:fillRef>
-          <a:effectRef idx="2">
-            <a:schemeClr val="accent1"/>
-          </a:effectRef>
-          <a:fontRef idx="minor">
-            <a:schemeClr val="lt1"/>
-          </a:fontRef>
-        </p:style>
-        <p:txBody>
-          <a:bodyPr rtlCol="0" anchor="ctr"/>
-          <a:lstStyle/>
-          <a:p>
-            <a:pPr algn="ctr"/>
-          </a:p>
-        </p:txBody>
-      </p:sp>
-      <p:sp>
-        <p:nvSpPr>
-          <p:cNvPr id="25" name="TextBox 24"/>
+              <a:t>No correction changed the code. Only how it was measured.</a:t>
+            </a:r>
+          </a:p>
+        </p:txBody>
+      </p:sp>
+      <p:sp>
+        <p:nvSpPr>
+          <p:cNvPr id="24" name="TextBox 23"/>
           <p:cNvSpPr txBox="1"/>
           <p:nvPr/>
         </p:nvSpPr>
         <p:spPr>
           <a:xfrm>
-            <a:off x="868680" y="5897880"/>
-            <a:ext cx="10058400" cy="365760"/>
-          </a:xfrm>
-          <a:prstGeom prst="rect">
-            <a:avLst/>
-          </a:prstGeom>
-          <a:noFill/>
-        </p:spPr>
-        <p:txBody>
-          <a:bodyPr wrap="square">
-            <a:spAutoFit/>
-          </a:bodyPr>
-          <a:lstStyle/>
-          <a:p>
-            <a:pPr algn="l"/>
-            <a:r>
-              <a:rPr sz="1500" b="1">
-                <a:solidFill>
-                  <a:srgbClr val="1C2026"/>
-                </a:solidFill>
-                <a:latin typeface="Calibri"/>
-              </a:rPr>
-              <a:t>No correction changed the code. Only how it was measured.</a:t>
-            </a:r>
-          </a:p>
-        </p:txBody>
-      </p:sp>
-      <p:sp>
-        <p:nvSpPr>
-          <p:cNvPr id="26" name="TextBox 25"/>
-          <p:cNvSpPr txBox="1"/>
-          <p:nvPr/>
-        </p:nvSpPr>
-        <p:spPr>
-          <a:xfrm>
-            <a:off x="868680" y="6263640"/>
+            <a:off x="868680" y="6309360"/>
             <a:ext cx="10469880" cy="365760"/>
           </a:xfrm>
           <a:prstGeom prst="rect">
@@ -5137,7 +4965,7 @@
     <p:bg>
       <p:bgPr>
         <a:solidFill>
-          <a:srgbClr val="FAF9F6"/>
+          <a:srgbClr val="FDFDFD"/>
         </a:solidFill>
         <a:effectLst/>
       </p:bgPr>
@@ -5157,7 +4985,7 @@
         </p:nvSpPr>
         <p:spPr>
           <a:xfrm>
-            <a:off x="868680" y="502920"/>
+            <a:off x="868680" y="548640"/>
             <a:ext cx="8961120" cy="548640"/>
           </a:xfrm>
           <a:prstGeom prst="rect">
@@ -5192,7 +5020,7 @@
         </p:nvSpPr>
         <p:spPr>
           <a:xfrm>
-            <a:off x="10058400" y="658368"/>
+            <a:off x="10058400" y="704088"/>
             <a:ext cx="1280160" cy="365760"/>
           </a:xfrm>
           <a:prstGeom prst="rect">
@@ -5227,14 +5055,14 @@
         </p:nvSpPr>
         <p:spPr>
           <a:xfrm>
-            <a:off x="868680" y="1170432"/>
-            <a:ext cx="10469880" cy="12700"/>
+            <a:off x="868680" y="1207008"/>
+            <a:ext cx="822960" cy="31750"/>
           </a:xfrm>
           <a:prstGeom prst="rect">
             <a:avLst/>
           </a:prstGeom>
           <a:solidFill>
-            <a:srgbClr val="E4E1D9"/>
+            <a:srgbClr val="A86D18"/>
           </a:solidFill>
           <a:ln>
             <a:noFill/>
@@ -5271,7 +5099,7 @@
           <p:nvPr/>
         </p:nvGraphicFramePr>
         <p:xfrm>
-          <a:off x="868680" y="1536192"/>
+          <a:off x="868680" y="1600200"/>
           <a:ext cx="10469880" cy="2103120"/>
         </p:xfrm>
         <a:graphic>
@@ -5304,7 +5132,7 @@
                   </a:txBody>
                   <a:tcPr>
                     <a:solidFill>
-                      <a:srgbClr val="FAF9F6"/>
+                      <a:srgbClr val="FDFDFD"/>
                     </a:solidFill>
                   </a:tcPr>
                 </a:tc>
@@ -5326,7 +5154,7 @@
                   </a:txBody>
                   <a:tcPr>
                     <a:solidFill>
-                      <a:srgbClr val="FAF9F6"/>
+                      <a:srgbClr val="FDFDFD"/>
                     </a:solidFill>
                   </a:tcPr>
                 </a:tc>
@@ -5348,7 +5176,7 @@
                   </a:txBody>
                   <a:tcPr>
                     <a:solidFill>
-                      <a:srgbClr val="FAF9F6"/>
+                      <a:srgbClr val="FDFDFD"/>
                     </a:solidFill>
                   </a:tcPr>
                 </a:tc>
@@ -5372,7 +5200,7 @@
                   </a:txBody>
                   <a:tcPr>
                     <a:solidFill>
-                      <a:srgbClr val="FAF9F6"/>
+                      <a:srgbClr val="FDFDFD"/>
                     </a:solidFill>
                   </a:tcPr>
                 </a:tc>
@@ -5394,7 +5222,7 @@
                   </a:txBody>
                   <a:tcPr>
                     <a:solidFill>
-                      <a:srgbClr val="FAF9F6"/>
+                      <a:srgbClr val="FDFDFD"/>
                     </a:solidFill>
                   </a:tcPr>
                 </a:tc>
@@ -5416,7 +5244,7 @@
                   </a:txBody>
                   <a:tcPr>
                     <a:solidFill>
-                      <a:srgbClr val="FAF9F6"/>
+                      <a:srgbClr val="FDFDFD"/>
                     </a:solidFill>
                   </a:tcPr>
                 </a:tc>
@@ -5440,7 +5268,7 @@
                   </a:txBody>
                   <a:tcPr>
                     <a:solidFill>
-                      <a:srgbClr val="FAF9F6"/>
+                      <a:srgbClr val="FDFDFD"/>
                     </a:solidFill>
                   </a:tcPr>
                 </a:tc>
@@ -5462,7 +5290,7 @@
                   </a:txBody>
                   <a:tcPr>
                     <a:solidFill>
-                      <a:srgbClr val="FAF9F6"/>
+                      <a:srgbClr val="FDFDFD"/>
                     </a:solidFill>
                   </a:tcPr>
                 </a:tc>
@@ -5484,7 +5312,7 @@
                   </a:txBody>
                   <a:tcPr>
                     <a:solidFill>
-                      <a:srgbClr val="FAF9F6"/>
+                      <a:srgbClr val="FDFDFD"/>
                     </a:solidFill>
                   </a:tcPr>
                 </a:tc>
@@ -5508,7 +5336,7 @@
                   </a:txBody>
                   <a:tcPr>
                     <a:solidFill>
-                      <a:srgbClr val="FAF9F6"/>
+                      <a:srgbClr val="FDFDFD"/>
                     </a:solidFill>
                   </a:tcPr>
                 </a:tc>
@@ -5530,7 +5358,7 @@
                   </a:txBody>
                   <a:tcPr>
                     <a:solidFill>
-                      <a:srgbClr val="FAF9F6"/>
+                      <a:srgbClr val="FDFDFD"/>
                     </a:solidFill>
                   </a:tcPr>
                 </a:tc>
@@ -5552,7 +5380,7 @@
                   </a:txBody>
                   <a:tcPr>
                     <a:solidFill>
-                      <a:srgbClr val="FAF9F6"/>
+                      <a:srgbClr val="FDFDFD"/>
                     </a:solidFill>
                   </a:tcPr>
                 </a:tc>
@@ -5576,7 +5404,7 @@
                   </a:txBody>
                   <a:tcPr>
                     <a:solidFill>
-                      <a:srgbClr val="FAF9F6"/>
+                      <a:srgbClr val="FDFDFD"/>
                     </a:solidFill>
                   </a:tcPr>
                 </a:tc>
@@ -5598,7 +5426,7 @@
                   </a:txBody>
                   <a:tcPr>
                     <a:solidFill>
-                      <a:srgbClr val="FAF9F6"/>
+                      <a:srgbClr val="FDFDFD"/>
                     </a:solidFill>
                   </a:tcPr>
                 </a:tc>
@@ -5620,7 +5448,7 @@
                   </a:txBody>
                   <a:tcPr>
                     <a:solidFill>
-                      <a:srgbClr val="FAF9F6"/>
+                      <a:srgbClr val="FDFDFD"/>
                     </a:solidFill>
                   </a:tcPr>
                 </a:tc>
@@ -5631,44 +5459,36 @@
       </p:graphicFrame>
       <p:sp>
         <p:nvSpPr>
-          <p:cNvPr id="6" name="Rectangle 5"/>
-          <p:cNvSpPr/>
-          <p:nvPr/>
-        </p:nvSpPr>
-        <p:spPr>
-          <a:xfrm>
-            <a:off x="868680" y="3950208"/>
-            <a:ext cx="10469880" cy="12700"/>
-          </a:xfrm>
-          <a:prstGeom prst="rect">
-            <a:avLst/>
-          </a:prstGeom>
-          <a:solidFill>
-            <a:srgbClr val="E4E1D9"/>
-          </a:solidFill>
-          <a:ln>
-            <a:noFill/>
-          </a:ln>
-        </p:spPr>
-        <p:style>
-          <a:lnRef idx="1">
-            <a:schemeClr val="accent1"/>
-          </a:lnRef>
-          <a:fillRef idx="3">
-            <a:schemeClr val="accent1"/>
-          </a:fillRef>
-          <a:effectRef idx="2">
-            <a:schemeClr val="accent1"/>
-          </a:effectRef>
-          <a:fontRef idx="minor">
-            <a:schemeClr val="lt1"/>
-          </a:fontRef>
-        </p:style>
-        <p:txBody>
-          <a:bodyPr rtlCol="0" anchor="ctr"/>
-          <a:lstStyle/>
-          <a:p>
-            <a:pPr algn="ctr"/>
+          <p:cNvPr id="6" name="TextBox 5"/>
+          <p:cNvSpPr txBox="1"/>
+          <p:nvPr/>
+        </p:nvSpPr>
+        <p:spPr>
+          <a:xfrm>
+            <a:off x="868680" y="4160520"/>
+            <a:ext cx="5486400" cy="731520"/>
+          </a:xfrm>
+          <a:prstGeom prst="rect">
+            <a:avLst/>
+          </a:prstGeom>
+          <a:noFill/>
+        </p:spPr>
+        <p:txBody>
+          <a:bodyPr wrap="square">
+            <a:spAutoFit/>
+          </a:bodyPr>
+          <a:lstStyle/>
+          <a:p>
+            <a:pPr algn="l"/>
+            <a:r>
+              <a:rPr sz="4600" b="1">
+                <a:solidFill>
+                  <a:srgbClr val="A86D18"/>
+                </a:solidFill>
+                <a:latin typeface="Calibri"/>
+              </a:rPr>
+              <a:t>2.7× mean</a:t>
+            </a:r>
           </a:p>
         </p:txBody>
       </p:sp>
@@ -5680,8 +5500,8 @@
         </p:nvSpPr>
         <p:spPr>
           <a:xfrm>
-            <a:off x="868680" y="4251960"/>
-            <a:ext cx="5486400" cy="822960"/>
+            <a:off x="868680" y="4910328"/>
+            <a:ext cx="5486400" cy="457200"/>
           </a:xfrm>
           <a:prstGeom prst="rect">
             <a:avLst/>
@@ -5696,13 +5516,13 @@
           <a:p>
             <a:pPr algn="l"/>
             <a:r>
-              <a:rPr sz="5200" b="1">
-                <a:solidFill>
-                  <a:srgbClr val="B0761B"/>
-                </a:solidFill>
-                <a:latin typeface="Calibri"/>
-              </a:rPr>
-              <a:t>2.7×</a:t>
+              <a:rPr sz="1000" b="0">
+                <a:solidFill>
+                  <a:srgbClr val="8C8F96"/>
+                </a:solidFill>
+                <a:latin typeface="Calibri"/>
+              </a:rPr>
+              <a:t>abdominal CT, H100 MIG  ·  2.6 to 2.8× across 4 runs</a:t>
             </a:r>
           </a:p>
         </p:txBody>
@@ -5715,8 +5535,8 @@
         </p:nvSpPr>
         <p:spPr>
           <a:xfrm>
-            <a:off x="868680" y="5093208"/>
-            <a:ext cx="5486400" cy="457200"/>
+            <a:off x="6949440" y="4297680"/>
+            <a:ext cx="4572000" cy="548640"/>
           </a:xfrm>
           <a:prstGeom prst="rect">
             <a:avLst/>
@@ -5731,13 +5551,13 @@
           <a:p>
             <a:pPr algn="l"/>
             <a:r>
-              <a:rPr sz="1000" b="0">
+              <a:rPr sz="2000" b="0">
                 <a:solidFill>
                   <a:srgbClr val="8C8F96"/>
                 </a:solidFill>
                 <a:latin typeface="Calibri"/>
               </a:rPr>
-              <a:t>abdominal CT, H100 MIG  ·  2.6 to 2.8× over 4 runs</a:t>
+              <a:t>One run: 3.27s → 1.28s</a:t>
             </a:r>
           </a:p>
         </p:txBody>
@@ -5750,42 +5570,7 @@
         </p:nvSpPr>
         <p:spPr>
           <a:xfrm>
-            <a:off x="6812280" y="4389120"/>
-            <a:ext cx="4572000" cy="640080"/>
-          </a:xfrm>
-          <a:prstGeom prst="rect">
-            <a:avLst/>
-          </a:prstGeom>
-          <a:noFill/>
-        </p:spPr>
-        <p:txBody>
-          <a:bodyPr wrap="square">
-            <a:spAutoFit/>
-          </a:bodyPr>
-          <a:lstStyle/>
-          <a:p>
-            <a:pPr algn="l"/>
-            <a:r>
-              <a:rPr sz="2600" b="0">
-                <a:solidFill>
-                  <a:srgbClr val="8C8F96"/>
-                </a:solidFill>
-                <a:latin typeface="Calibri"/>
-              </a:rPr>
-              <a:t>3.27s → 1.28s</a:t>
-            </a:r>
-          </a:p>
-        </p:txBody>
-      </p:sp>
-      <p:sp>
-        <p:nvSpPr>
-          <p:cNvPr id="10" name="TextBox 9"/>
-          <p:cNvSpPr txBox="1"/>
-          <p:nvPr/>
-        </p:nvSpPr>
-        <p:spPr>
-          <a:xfrm>
-            <a:off x="868680" y="6263640"/>
+            <a:off x="868680" y="6309360"/>
             <a:ext cx="10469880" cy="365760"/>
           </a:xfrm>
           <a:prstGeom prst="rect">
@@ -5826,7 +5611,7 @@
     <p:bg>
       <p:bgPr>
         <a:solidFill>
-          <a:srgbClr val="FAF9F6"/>
+          <a:srgbClr val="FDFDFD"/>
         </a:solidFill>
         <a:effectLst/>
       </p:bgPr>
@@ -5846,7 +5631,7 @@
         </p:nvSpPr>
         <p:spPr>
           <a:xfrm>
-            <a:off x="868680" y="502920"/>
+            <a:off x="868680" y="548640"/>
             <a:ext cx="8961120" cy="548640"/>
           </a:xfrm>
           <a:prstGeom prst="rect">
@@ -5881,7 +5666,7 @@
         </p:nvSpPr>
         <p:spPr>
           <a:xfrm>
-            <a:off x="10058400" y="658368"/>
+            <a:off x="10058400" y="704088"/>
             <a:ext cx="1280160" cy="365760"/>
           </a:xfrm>
           <a:prstGeom prst="rect">
@@ -5916,14 +5701,14 @@
         </p:nvSpPr>
         <p:spPr>
           <a:xfrm>
-            <a:off x="868680" y="1170432"/>
-            <a:ext cx="10469880" cy="12700"/>
+            <a:off x="868680" y="1207008"/>
+            <a:ext cx="822960" cy="31750"/>
           </a:xfrm>
           <a:prstGeom prst="rect">
             <a:avLst/>
           </a:prstGeom>
           <a:solidFill>
-            <a:srgbClr val="E4E1D9"/>
+            <a:srgbClr val="A86D18"/>
           </a:solidFill>
           <a:ln>
             <a:noFill/>
@@ -5960,7 +5745,7 @@
         <p:spPr>
           <a:xfrm>
             <a:off x="868680" y="1737360"/>
-            <a:ext cx="5029200" cy="822960"/>
+            <a:ext cx="5029200" cy="731520"/>
           </a:xfrm>
           <a:prstGeom prst="rect">
             <a:avLst/>
@@ -5975,7 +5760,7 @@
           <a:p>
             <a:pPr algn="l"/>
             <a:r>
-              <a:rPr sz="5400" b="1">
+              <a:rPr sz="5000" b="1">
                 <a:solidFill>
                   <a:srgbClr val="1C2026"/>
                 </a:solidFill>
@@ -5994,7 +5779,7 @@
         </p:nvSpPr>
         <p:spPr>
           <a:xfrm>
-            <a:off x="868680" y="2578608"/>
+            <a:off x="868680" y="2487168"/>
             <a:ext cx="5029200" cy="457200"/>
           </a:xfrm>
           <a:prstGeom prst="rect">
@@ -6029,7 +5814,7 @@
         </p:nvSpPr>
         <p:spPr>
           <a:xfrm>
-            <a:off x="868680" y="3200400"/>
+            <a:off x="868680" y="3063240"/>
             <a:ext cx="5029200" cy="365760"/>
           </a:xfrm>
           <a:prstGeom prst="rect">
@@ -6064,14 +5849,14 @@
         </p:nvSpPr>
         <p:spPr>
           <a:xfrm>
-            <a:off x="6355080" y="1737360"/>
-            <a:ext cx="32004" cy="965200"/>
+            <a:off x="868680" y="3735324"/>
+            <a:ext cx="64008" cy="64008"/>
           </a:xfrm>
           <a:prstGeom prst="rect">
             <a:avLst/>
           </a:prstGeom>
           <a:solidFill>
-            <a:srgbClr val="B0761B"/>
+            <a:srgbClr val="A86D18"/>
           </a:solidFill>
           <a:ln>
             <a:noFill/>
@@ -6107,8 +5892,8 @@
         </p:nvSpPr>
         <p:spPr>
           <a:xfrm>
-            <a:off x="6675120" y="1737360"/>
-            <a:ext cx="4389120" cy="365760"/>
+            <a:off x="1088136" y="3657600"/>
+            <a:ext cx="4718304" cy="384048"/>
           </a:xfrm>
           <a:prstGeom prst="rect">
             <a:avLst/>
@@ -6123,13 +5908,13 @@
           <a:p>
             <a:pPr algn="l"/>
             <a:r>
-              <a:rPr sz="1500" b="1">
+              <a:rPr sz="1200" b="0">
                 <a:solidFill>
                   <a:srgbClr val="1C2026"/>
                 </a:solidFill>
                 <a:latin typeface="Calibri"/>
               </a:rPr>
-              <a:t>One caveat, stated plainly</a:t>
+              <a:t>Speed optimizations cost no accuracy</a:t>
             </a:r>
           </a:p>
         </p:txBody>
@@ -6142,14 +5927,14 @@
         </p:nvSpPr>
         <p:spPr>
           <a:xfrm>
-            <a:off x="6675120" y="2290572"/>
+            <a:off x="868680" y="4119372"/>
             <a:ext cx="64008" cy="64008"/>
           </a:xfrm>
           <a:prstGeom prst="rect">
             <a:avLst/>
           </a:prstGeom>
           <a:solidFill>
-            <a:srgbClr val="B0761B"/>
+            <a:srgbClr val="A86D18"/>
           </a:solidFill>
           <a:ln>
             <a:noFill/>
@@ -6185,8 +5970,8 @@
         </p:nvSpPr>
         <p:spPr>
           <a:xfrm>
-            <a:off x="6894576" y="2212848"/>
-            <a:ext cx="4261104" cy="365760"/>
+            <a:off x="1088136" y="4041648"/>
+            <a:ext cx="4718304" cy="384048"/>
           </a:xfrm>
           <a:prstGeom prst="rect">
             <a:avLst/>
@@ -6207,7 +5992,7 @@
                 </a:solidFill>
                 <a:latin typeface="Calibri"/>
               </a:rPr>
-              <a:t>INT4 quantization is on by default</a:t>
+              <a:t>Measured against expert annotation</a:t>
             </a:r>
           </a:p>
         </p:txBody>
@@ -6220,14 +6005,14 @@
         </p:nvSpPr>
         <p:spPr>
           <a:xfrm>
-            <a:off x="6675120" y="2656332"/>
+            <a:off x="868680" y="4503420"/>
             <a:ext cx="64008" cy="64008"/>
           </a:xfrm>
           <a:prstGeom prst="rect">
             <a:avLst/>
           </a:prstGeom>
           <a:solidFill>
-            <a:srgbClr val="B0761B"/>
+            <a:srgbClr val="A86D18"/>
           </a:solidFill>
           <a:ln>
             <a:noFill/>
@@ -6263,8 +6048,8 @@
         </p:nvSpPr>
         <p:spPr>
           <a:xfrm>
-            <a:off x="6894576" y="2578608"/>
-            <a:ext cx="4261104" cy="365760"/>
+            <a:off x="1088136" y="4425696"/>
+            <a:ext cx="4718304" cy="384048"/>
           </a:xfrm>
           <a:prstGeom prst="rect">
             <a:avLst/>
@@ -6285,27 +6070,62 @@
                 </a:solidFill>
                 <a:latin typeface="Calibri"/>
               </a:rPr>
-              <a:t>0.97 agreement with full precision</a:t>
-            </a:r>
-          </a:p>
-        </p:txBody>
-      </p:sp>
-      <p:sp>
-        <p:nvSpPr>
-          <p:cNvPr id="14" name="Rectangle 13"/>
+              <a:t>Same checkpoint and fold on both arms</a:t>
+            </a:r>
+          </a:p>
+        </p:txBody>
+      </p:sp>
+      <p:sp>
+        <p:nvSpPr>
+          <p:cNvPr id="14" name="TextBox 13"/>
+          <p:cNvSpPr txBox="1"/>
+          <p:nvPr/>
+        </p:nvSpPr>
+        <p:spPr>
+          <a:xfrm>
+            <a:off x="6400800" y="1737360"/>
+            <a:ext cx="4389120" cy="365760"/>
+          </a:xfrm>
+          <a:prstGeom prst="rect">
+            <a:avLst/>
+          </a:prstGeom>
+          <a:noFill/>
+        </p:spPr>
+        <p:txBody>
+          <a:bodyPr wrap="square">
+            <a:spAutoFit/>
+          </a:bodyPr>
+          <a:lstStyle/>
+          <a:p>
+            <a:pPr algn="l"/>
+            <a:r>
+              <a:rPr sz="1500" b="1">
+                <a:solidFill>
+                  <a:srgbClr val="A86D18"/>
+                </a:solidFill>
+                <a:latin typeface="Calibri"/>
+              </a:rPr>
+              <a:t>One caveat, stated plainly</a:t>
+            </a:r>
+          </a:p>
+        </p:txBody>
+      </p:sp>
+      <p:sp>
+        <p:nvSpPr>
+          <p:cNvPr id="15" name="Rectangle 14"/>
           <p:cNvSpPr/>
           <p:nvPr/>
         </p:nvSpPr>
         <p:spPr>
           <a:xfrm>
-            <a:off x="6675120" y="3022091"/>
+            <a:off x="6400800" y="2318004"/>
             <a:ext cx="64008" cy="64008"/>
           </a:xfrm>
           <a:prstGeom prst="rect">
             <a:avLst/>
           </a:prstGeom>
           <a:solidFill>
-            <a:srgbClr val="B0761B"/>
+            <a:srgbClr val="A86D18"/>
           </a:solidFill>
           <a:ln>
             <a:noFill/>
@@ -6335,14 +6155,14 @@
       </p:sp>
       <p:sp>
         <p:nvSpPr>
-          <p:cNvPr id="15" name="TextBox 14"/>
+          <p:cNvPr id="16" name="TextBox 15"/>
           <p:cNvSpPr txBox="1"/>
           <p:nvPr/>
         </p:nvSpPr>
         <p:spPr>
           <a:xfrm>
-            <a:off x="6894576" y="2944368"/>
-            <a:ext cx="4261104" cy="365760"/>
+            <a:off x="6620256" y="2240280"/>
+            <a:ext cx="4535424" cy="384048"/>
           </a:xfrm>
           <a:prstGeom prst="rect">
             <a:avLst/>
@@ -6363,27 +6183,27 @@
                 </a:solidFill>
                 <a:latin typeface="Calibri"/>
               </a:rPr>
-              <a:t>Segments 5.5% fewer voxels</a:t>
-            </a:r>
-          </a:p>
-        </p:txBody>
-      </p:sp>
-      <p:sp>
-        <p:nvSpPr>
-          <p:cNvPr id="16" name="Rectangle 15"/>
+              <a:t>INT4 quantization is on by default</a:t>
+            </a:r>
+          </a:p>
+        </p:txBody>
+      </p:sp>
+      <p:sp>
+        <p:nvSpPr>
+          <p:cNvPr id="17" name="Rectangle 16"/>
           <p:cNvSpPr/>
           <p:nvPr/>
         </p:nvSpPr>
         <p:spPr>
           <a:xfrm>
-            <a:off x="6675120" y="3387852"/>
+            <a:off x="6400800" y="2702052"/>
             <a:ext cx="64008" cy="64008"/>
           </a:xfrm>
           <a:prstGeom prst="rect">
             <a:avLst/>
           </a:prstGeom>
           <a:solidFill>
-            <a:srgbClr val="B0761B"/>
+            <a:srgbClr val="A86D18"/>
           </a:solidFill>
           <a:ln>
             <a:noFill/>
@@ -6413,14 +6233,14 @@
       </p:sp>
       <p:sp>
         <p:nvSpPr>
-          <p:cNvPr id="17" name="TextBox 16"/>
+          <p:cNvPr id="18" name="TextBox 17"/>
           <p:cNvSpPr txBox="1"/>
           <p:nvPr/>
         </p:nvSpPr>
         <p:spPr>
           <a:xfrm>
-            <a:off x="6894576" y="3310128"/>
-            <a:ext cx="4261104" cy="365760"/>
+            <a:off x="6620256" y="2624328"/>
+            <a:ext cx="4535424" cy="384048"/>
           </a:xfrm>
           <a:prstGeom prst="rect">
             <a:avLst/>
@@ -6441,27 +6261,27 @@
                 </a:solidFill>
                 <a:latin typeface="Calibri"/>
               </a:rPr>
-              <a:t>One-sided, so bias rather than noise</a:t>
-            </a:r>
-          </a:p>
-        </p:txBody>
-      </p:sp>
-      <p:sp>
-        <p:nvSpPr>
-          <p:cNvPr id="18" name="Rectangle 17"/>
+              <a:t>0.97 agreement with full precision</a:t>
+            </a:r>
+          </a:p>
+        </p:txBody>
+      </p:sp>
+      <p:sp>
+        <p:nvSpPr>
+          <p:cNvPr id="19" name="Rectangle 18"/>
           <p:cNvSpPr/>
           <p:nvPr/>
         </p:nvSpPr>
         <p:spPr>
           <a:xfrm>
-            <a:off x="6675120" y="3753611"/>
+            <a:off x="6400800" y="3086100"/>
             <a:ext cx="64008" cy="64008"/>
           </a:xfrm>
           <a:prstGeom prst="rect">
             <a:avLst/>
           </a:prstGeom>
           <a:solidFill>
-            <a:srgbClr val="B0761B"/>
+            <a:srgbClr val="A86D18"/>
           </a:solidFill>
           <a:ln>
             <a:noFill/>
@@ -6491,14 +6311,14 @@
       </p:sp>
       <p:sp>
         <p:nvSpPr>
-          <p:cNvPr id="19" name="TextBox 18"/>
+          <p:cNvPr id="20" name="TextBox 19"/>
           <p:cNvSpPr txBox="1"/>
           <p:nvPr/>
         </p:nvSpPr>
         <p:spPr>
           <a:xfrm>
-            <a:off x="6894576" y="3675887"/>
-            <a:ext cx="4261104" cy="365760"/>
+            <a:off x="6620256" y="3008376"/>
+            <a:ext cx="4535424" cy="384048"/>
           </a:xfrm>
           <a:prstGeom prst="rect">
             <a:avLst/>
@@ -6519,20 +6339,176 @@
                 </a:solidFill>
                 <a:latin typeface="Calibri"/>
               </a:rPr>
-              <a:t>Not measured across the validation set</a:t>
-            </a:r>
-          </a:p>
-        </p:txBody>
-      </p:sp>
-      <p:sp>
-        <p:nvSpPr>
-          <p:cNvPr id="20" name="TextBox 19"/>
+              <a:t>Segments 5.5% fewer voxels</a:t>
+            </a:r>
+          </a:p>
+        </p:txBody>
+      </p:sp>
+      <p:sp>
+        <p:nvSpPr>
+          <p:cNvPr id="21" name="Rectangle 20"/>
+          <p:cNvSpPr/>
+          <p:nvPr/>
+        </p:nvSpPr>
+        <p:spPr>
+          <a:xfrm>
+            <a:off x="6400800" y="3470148"/>
+            <a:ext cx="64008" cy="64008"/>
+          </a:xfrm>
+          <a:prstGeom prst="rect">
+            <a:avLst/>
+          </a:prstGeom>
+          <a:solidFill>
+            <a:srgbClr val="A86D18"/>
+          </a:solidFill>
+          <a:ln>
+            <a:noFill/>
+          </a:ln>
+        </p:spPr>
+        <p:style>
+          <a:lnRef idx="1">
+            <a:schemeClr val="accent1"/>
+          </a:lnRef>
+          <a:fillRef idx="3">
+            <a:schemeClr val="accent1"/>
+          </a:fillRef>
+          <a:effectRef idx="2">
+            <a:schemeClr val="accent1"/>
+          </a:effectRef>
+          <a:fontRef idx="minor">
+            <a:schemeClr val="lt1"/>
+          </a:fontRef>
+        </p:style>
+        <p:txBody>
+          <a:bodyPr rtlCol="0" anchor="ctr"/>
+          <a:lstStyle/>
+          <a:p>
+            <a:pPr algn="ctr"/>
+          </a:p>
+        </p:txBody>
+      </p:sp>
+      <p:sp>
+        <p:nvSpPr>
+          <p:cNvPr id="22" name="TextBox 21"/>
           <p:cNvSpPr txBox="1"/>
           <p:nvPr/>
         </p:nvSpPr>
         <p:spPr>
           <a:xfrm>
-            <a:off x="868680" y="6263640"/>
+            <a:off x="6620256" y="3392424"/>
+            <a:ext cx="4535424" cy="384048"/>
+          </a:xfrm>
+          <a:prstGeom prst="rect">
+            <a:avLst/>
+          </a:prstGeom>
+          <a:noFill/>
+        </p:spPr>
+        <p:txBody>
+          <a:bodyPr wrap="square">
+            <a:spAutoFit/>
+          </a:bodyPr>
+          <a:lstStyle/>
+          <a:p>
+            <a:pPr algn="l"/>
+            <a:r>
+              <a:rPr sz="1200" b="0">
+                <a:solidFill>
+                  <a:srgbClr val="1C2026"/>
+                </a:solidFill>
+                <a:latin typeface="Calibri"/>
+              </a:rPr>
+              <a:t>One-sided, so bias rather than noise</a:t>
+            </a:r>
+          </a:p>
+        </p:txBody>
+      </p:sp>
+      <p:sp>
+        <p:nvSpPr>
+          <p:cNvPr id="23" name="Rectangle 22"/>
+          <p:cNvSpPr/>
+          <p:nvPr/>
+        </p:nvSpPr>
+        <p:spPr>
+          <a:xfrm>
+            <a:off x="6400800" y="3854196"/>
+            <a:ext cx="64008" cy="64008"/>
+          </a:xfrm>
+          <a:prstGeom prst="rect">
+            <a:avLst/>
+          </a:prstGeom>
+          <a:solidFill>
+            <a:srgbClr val="A86D18"/>
+          </a:solidFill>
+          <a:ln>
+            <a:noFill/>
+          </a:ln>
+        </p:spPr>
+        <p:style>
+          <a:lnRef idx="1">
+            <a:schemeClr val="accent1"/>
+          </a:lnRef>
+          <a:fillRef idx="3">
+            <a:schemeClr val="accent1"/>
+          </a:fillRef>
+          <a:effectRef idx="2">
+            <a:schemeClr val="accent1"/>
+          </a:effectRef>
+          <a:fontRef idx="minor">
+            <a:schemeClr val="lt1"/>
+          </a:fontRef>
+        </p:style>
+        <p:txBody>
+          <a:bodyPr rtlCol="0" anchor="ctr"/>
+          <a:lstStyle/>
+          <a:p>
+            <a:pPr algn="ctr"/>
+          </a:p>
+        </p:txBody>
+      </p:sp>
+      <p:sp>
+        <p:nvSpPr>
+          <p:cNvPr id="24" name="TextBox 23"/>
+          <p:cNvSpPr txBox="1"/>
+          <p:nvPr/>
+        </p:nvSpPr>
+        <p:spPr>
+          <a:xfrm>
+            <a:off x="6620256" y="3776472"/>
+            <a:ext cx="4535424" cy="384048"/>
+          </a:xfrm>
+          <a:prstGeom prst="rect">
+            <a:avLst/>
+          </a:prstGeom>
+          <a:noFill/>
+        </p:spPr>
+        <p:txBody>
+          <a:bodyPr wrap="square">
+            <a:spAutoFit/>
+          </a:bodyPr>
+          <a:lstStyle/>
+          <a:p>
+            <a:pPr algn="l"/>
+            <a:r>
+              <a:rPr sz="1200" b="0">
+                <a:solidFill>
+                  <a:srgbClr val="1C2026"/>
+                </a:solidFill>
+                <a:latin typeface="Calibri"/>
+              </a:rPr>
+              <a:t>Measured on one case, not the full set</a:t>
+            </a:r>
+          </a:p>
+        </p:txBody>
+      </p:sp>
+      <p:sp>
+        <p:nvSpPr>
+          <p:cNvPr id="25" name="TextBox 24"/>
+          <p:cNvSpPr txBox="1"/>
+          <p:nvPr/>
+        </p:nvSpPr>
+        <p:spPr>
+          <a:xfrm>
+            <a:off x="868680" y="6309360"/>
             <a:ext cx="10469880" cy="365760"/>
           </a:xfrm>
           <a:prstGeom prst="rect">
@@ -6573,7 +6549,7 @@
     <p:bg>
       <p:bgPr>
         <a:solidFill>
-          <a:srgbClr val="FAF9F6"/>
+          <a:srgbClr val="FDFDFD"/>
         </a:solidFill>
         <a:effectLst/>
       </p:bgPr>
@@ -6593,7 +6569,7 @@
         </p:nvSpPr>
         <p:spPr>
           <a:xfrm>
-            <a:off x="868680" y="502920"/>
+            <a:off x="868680" y="548640"/>
             <a:ext cx="8961120" cy="548640"/>
           </a:xfrm>
           <a:prstGeom prst="rect">
@@ -6628,7 +6604,7 @@
         </p:nvSpPr>
         <p:spPr>
           <a:xfrm>
-            <a:off x="10058400" y="658368"/>
+            <a:off x="10058400" y="704088"/>
             <a:ext cx="1280160" cy="365760"/>
           </a:xfrm>
           <a:prstGeom prst="rect">
@@ -6663,14 +6639,14 @@
         </p:nvSpPr>
         <p:spPr>
           <a:xfrm>
-            <a:off x="868680" y="1170432"/>
-            <a:ext cx="10469880" cy="12700"/>
+            <a:off x="868680" y="1207008"/>
+            <a:ext cx="822960" cy="31750"/>
           </a:xfrm>
           <a:prstGeom prst="rect">
             <a:avLst/>
           </a:prstGeom>
           <a:solidFill>
-            <a:srgbClr val="E4E1D9"/>
+            <a:srgbClr val="A86D18"/>
           </a:solidFill>
           <a:ln>
             <a:noFill/>
@@ -6706,7 +6682,7 @@
         </p:nvSpPr>
         <p:spPr>
           <a:xfrm>
-            <a:off x="868680" y="1536192"/>
+            <a:off x="868680" y="1600200"/>
             <a:ext cx="8229600" cy="365760"/>
           </a:xfrm>
           <a:prstGeom prst="rect">
@@ -6724,7 +6700,7 @@
             <a:r>
               <a:rPr sz="1500" b="0">
                 <a:solidFill>
-                  <a:srgbClr val="B0761B"/>
+                  <a:srgbClr val="A86D18"/>
                 </a:solidFill>
                 <a:latin typeface="Calibri"/>
               </a:rPr>
@@ -6741,14 +6717,14 @@
         </p:nvSpPr>
         <p:spPr>
           <a:xfrm>
-            <a:off x="868680" y="2089404"/>
+            <a:off x="868680" y="2180844"/>
             <a:ext cx="64008" cy="64008"/>
           </a:xfrm>
           <a:prstGeom prst="rect">
             <a:avLst/>
           </a:prstGeom>
           <a:solidFill>
-            <a:srgbClr val="B0761B"/>
+            <a:srgbClr val="A86D18"/>
           </a:solidFill>
           <a:ln>
             <a:noFill/>
@@ -6784,7 +6760,7 @@
         </p:nvSpPr>
         <p:spPr>
           <a:xfrm>
-            <a:off x="1088136" y="2011680"/>
+            <a:off x="1088136" y="2103120"/>
             <a:ext cx="8010144" cy="402336"/>
           </a:xfrm>
           <a:prstGeom prst="rect">
@@ -6819,14 +6795,14 @@
         </p:nvSpPr>
         <p:spPr>
           <a:xfrm>
-            <a:off x="868680" y="2491740"/>
+            <a:off x="868680" y="2583179"/>
             <a:ext cx="64008" cy="64008"/>
           </a:xfrm>
           <a:prstGeom prst="rect">
             <a:avLst/>
           </a:prstGeom>
           <a:solidFill>
-            <a:srgbClr val="B0761B"/>
+            <a:srgbClr val="A86D18"/>
           </a:solidFill>
           <a:ln>
             <a:noFill/>
@@ -6862,7 +6838,7 @@
         </p:nvSpPr>
         <p:spPr>
           <a:xfrm>
-            <a:off x="1088136" y="2414016"/>
+            <a:off x="1088136" y="2505456"/>
             <a:ext cx="8010144" cy="402336"/>
           </a:xfrm>
           <a:prstGeom prst="rect">
@@ -6884,27 +6860,97 @@
                 </a:solidFill>
                 <a:latin typeface="Calibri"/>
               </a:rPr>
-              <a:t>Fuses kernels, cuts per-call dispatch overhead</a:t>
-            </a:r>
-          </a:p>
-        </p:txBody>
-      </p:sp>
-      <p:sp>
-        <p:nvSpPr>
-          <p:cNvPr id="10" name="Rectangle 9"/>
+              <a:t>Fuses kernels and cuts per-call dispatch overhead</a:t>
+            </a:r>
+          </a:p>
+        </p:txBody>
+      </p:sp>
+      <p:sp>
+        <p:nvSpPr>
+          <p:cNvPr id="10" name="TextBox 9"/>
+          <p:cNvSpPr txBox="1"/>
+          <p:nvPr/>
+        </p:nvSpPr>
+        <p:spPr>
+          <a:xfrm>
+            <a:off x="868680" y="3108960"/>
+            <a:ext cx="4572000" cy="731520"/>
+          </a:xfrm>
+          <a:prstGeom prst="rect">
+            <a:avLst/>
+          </a:prstGeom>
+          <a:noFill/>
+        </p:spPr>
+        <p:txBody>
+          <a:bodyPr wrap="square">
+            <a:spAutoFit/>
+          </a:bodyPr>
+          <a:lstStyle/>
+          <a:p>
+            <a:pPr algn="l"/>
+            <a:r>
+              <a:rPr sz="4600" b="1">
+                <a:solidFill>
+                  <a:srgbClr val="A86D18"/>
+                </a:solidFill>
+                <a:latin typeface="Calibri"/>
+              </a:rPr>
+              <a:t>1.33×</a:t>
+            </a:r>
+          </a:p>
+        </p:txBody>
+      </p:sp>
+      <p:sp>
+        <p:nvSpPr>
+          <p:cNvPr id="11" name="TextBox 10"/>
+          <p:cNvSpPr txBox="1"/>
+          <p:nvPr/>
+        </p:nvSpPr>
+        <p:spPr>
+          <a:xfrm>
+            <a:off x="868680" y="3858768"/>
+            <a:ext cx="4572000" cy="457200"/>
+          </a:xfrm>
+          <a:prstGeom prst="rect">
+            <a:avLst/>
+          </a:prstGeom>
+          <a:noFill/>
+        </p:spPr>
+        <p:txBody>
+          <a:bodyPr wrap="square">
+            <a:spAutoFit/>
+          </a:bodyPr>
+          <a:lstStyle/>
+          <a:p>
+            <a:pPr algn="l"/>
+            <a:r>
+              <a:rPr sz="1000" b="0">
+                <a:solidFill>
+                  <a:srgbClr val="8C8F96"/>
+                </a:solidFill>
+                <a:latin typeface="Calibri"/>
+              </a:rPr>
+              <a:t>per object, mean of 4 runs</a:t>
+            </a:r>
+          </a:p>
+        </p:txBody>
+      </p:sp>
+      <p:sp>
+        <p:nvSpPr>
+          <p:cNvPr id="12" name="Rectangle 11"/>
           <p:cNvSpPr/>
           <p:nvPr/>
         </p:nvSpPr>
         <p:spPr>
           <a:xfrm>
-            <a:off x="868680" y="2880360"/>
-            <a:ext cx="10469880" cy="12700"/>
+            <a:off x="868680" y="4512564"/>
+            <a:ext cx="64008" cy="64008"/>
           </a:xfrm>
           <a:prstGeom prst="rect">
             <a:avLst/>
           </a:prstGeom>
           <a:solidFill>
-            <a:srgbClr val="E4E1D9"/>
+            <a:srgbClr val="A86D18"/>
           </a:solidFill>
           <a:ln>
             <a:noFill/>
@@ -6934,14 +6980,14 @@
       </p:sp>
       <p:sp>
         <p:nvSpPr>
-          <p:cNvPr id="11" name="TextBox 10"/>
+          <p:cNvPr id="13" name="TextBox 12"/>
           <p:cNvSpPr txBox="1"/>
           <p:nvPr/>
         </p:nvSpPr>
         <p:spPr>
           <a:xfrm>
-            <a:off x="868680" y="3246120"/>
-            <a:ext cx="4572000" cy="822960"/>
+            <a:off x="1088136" y="4434840"/>
+            <a:ext cx="4901183" cy="384048"/>
           </a:xfrm>
           <a:prstGeom prst="rect">
             <a:avLst/>
@@ -6956,138 +7002,33 @@
           <a:p>
             <a:pPr algn="l"/>
             <a:r>
-              <a:rPr sz="5200" b="1">
-                <a:solidFill>
-                  <a:srgbClr val="B0761B"/>
-                </a:solidFill>
-                <a:latin typeface="Calibri"/>
-              </a:rPr>
-              <a:t>1.33×</a:t>
-            </a:r>
-          </a:p>
-        </p:txBody>
-      </p:sp>
-      <p:sp>
-        <p:nvSpPr>
-          <p:cNvPr id="12" name="TextBox 11"/>
-          <p:cNvSpPr txBox="1"/>
-          <p:nvPr/>
-        </p:nvSpPr>
-        <p:spPr>
-          <a:xfrm>
-            <a:off x="868680" y="4087368"/>
-            <a:ext cx="4572000" cy="457200"/>
-          </a:xfrm>
-          <a:prstGeom prst="rect">
-            <a:avLst/>
-          </a:prstGeom>
-          <a:noFill/>
-        </p:spPr>
-        <p:txBody>
-          <a:bodyPr wrap="square">
-            <a:spAutoFit/>
-          </a:bodyPr>
-          <a:lstStyle/>
-          <a:p>
-            <a:pPr algn="l"/>
-            <a:r>
-              <a:rPr sz="1000" b="0">
-                <a:solidFill>
-                  <a:srgbClr val="8C8F96"/>
-                </a:solidFill>
-                <a:latin typeface="Calibri"/>
-              </a:rPr>
-              <a:t>per object  ·  1.28 to 1.39× over 4 runs</a:t>
-            </a:r>
-          </a:p>
-        </p:txBody>
-      </p:sp>
-      <p:sp>
-        <p:nvSpPr>
-          <p:cNvPr id="13" name="TextBox 12"/>
-          <p:cNvSpPr txBox="1"/>
-          <p:nvPr/>
-        </p:nvSpPr>
-        <p:spPr>
-          <a:xfrm>
-            <a:off x="6355080" y="3246120"/>
-            <a:ext cx="4572000" cy="822960"/>
-          </a:xfrm>
-          <a:prstGeom prst="rect">
-            <a:avLst/>
-          </a:prstGeom>
-          <a:noFill/>
-        </p:spPr>
-        <p:txBody>
-          <a:bodyPr wrap="square">
-            <a:spAutoFit/>
-          </a:bodyPr>
-          <a:lstStyle/>
-          <a:p>
-            <a:pPr algn="l"/>
-            <a:r>
-              <a:rPr sz="5200" b="1">
+              <a:rPr sz="1200" b="0">
                 <a:solidFill>
                   <a:srgbClr val="1C2026"/>
                 </a:solidFill>
                 <a:latin typeface="Calibri"/>
               </a:rPr>
-              <a:t>+0.0002</a:t>
-            </a:r>
-          </a:p>
-        </p:txBody>
-      </p:sp>
-      <p:sp>
-        <p:nvSpPr>
-          <p:cNvPr id="14" name="TextBox 13"/>
-          <p:cNvSpPr txBox="1"/>
-          <p:nvPr/>
-        </p:nvSpPr>
-        <p:spPr>
-          <a:xfrm>
-            <a:off x="6355080" y="4087368"/>
-            <a:ext cx="4572000" cy="457200"/>
-          </a:xfrm>
-          <a:prstGeom prst="rect">
-            <a:avLst/>
-          </a:prstGeom>
-          <a:noFill/>
-        </p:spPr>
-        <p:txBody>
-          <a:bodyPr wrap="square">
-            <a:spAutoFit/>
-          </a:bodyPr>
-          <a:lstStyle/>
-          <a:p>
-            <a:pPr algn="l"/>
-            <a:r>
-              <a:rPr sz="1000" b="0">
-                <a:solidFill>
-                  <a:srgbClr val="8C8F96"/>
-                </a:solidFill>
-                <a:latin typeface="Calibri"/>
-              </a:rPr>
-              <a:t>mean DSC  ·  294 objects</a:t>
-            </a:r>
-          </a:p>
-        </p:txBody>
-      </p:sp>
-      <p:sp>
-        <p:nvSpPr>
-          <p:cNvPr id="15" name="Rectangle 14"/>
+              <a:t>0.288s → 0.215s per object</a:t>
+            </a:r>
+          </a:p>
+        </p:txBody>
+      </p:sp>
+      <p:sp>
+        <p:nvSpPr>
+          <p:cNvPr id="14" name="Rectangle 13"/>
           <p:cNvSpPr/>
           <p:nvPr/>
         </p:nvSpPr>
         <p:spPr>
           <a:xfrm>
-            <a:off x="868680" y="5152644"/>
+            <a:off x="868680" y="4896612"/>
             <a:ext cx="64008" cy="64008"/>
           </a:xfrm>
           <a:prstGeom prst="rect">
             <a:avLst/>
           </a:prstGeom>
           <a:solidFill>
-            <a:srgbClr val="B0761B"/>
+            <a:srgbClr val="A86D18"/>
           </a:solidFill>
           <a:ln>
             <a:noFill/>
@@ -7117,14 +7058,49 @@
       </p:sp>
       <p:sp>
         <p:nvSpPr>
+          <p:cNvPr id="15" name="TextBox 14"/>
+          <p:cNvSpPr txBox="1"/>
+          <p:nvPr/>
+        </p:nvSpPr>
+        <p:spPr>
+          <a:xfrm>
+            <a:off x="1088136" y="4818888"/>
+            <a:ext cx="4901183" cy="384048"/>
+          </a:xfrm>
+          <a:prstGeom prst="rect">
+            <a:avLst/>
+          </a:prstGeom>
+          <a:noFill/>
+        </p:spPr>
+        <p:txBody>
+          <a:bodyPr wrap="square">
+            <a:spAutoFit/>
+          </a:bodyPr>
+          <a:lstStyle/>
+          <a:p>
+            <a:pPr algn="l"/>
+            <a:r>
+              <a:rPr sz="1200" b="0">
+                <a:solidFill>
+                  <a:srgbClr val="1C2026"/>
+                </a:solidFill>
+                <a:latin typeface="Calibri"/>
+              </a:rPr>
+              <a:t>Range 1.28 to 1.39×, so a 33% gain against an 8% spread</a:t>
+            </a:r>
+          </a:p>
+        </p:txBody>
+      </p:sp>
+      <p:sp>
+        <p:nvSpPr>
           <p:cNvPr id="16" name="TextBox 15"/>
           <p:cNvSpPr txBox="1"/>
           <p:nvPr/>
         </p:nvSpPr>
         <p:spPr>
           <a:xfrm>
-            <a:off x="1088136" y="5074920"/>
-            <a:ext cx="7095744" cy="365760"/>
+            <a:off x="6400800" y="3108960"/>
+            <a:ext cx="4572000" cy="731520"/>
           </a:xfrm>
           <a:prstGeom prst="rect">
             <a:avLst/>
@@ -7139,33 +7115,68 @@
           <a:p>
             <a:pPr algn="l"/>
             <a:r>
-              <a:rPr sz="1400" b="0">
+              <a:rPr sz="4600" b="1">
                 <a:solidFill>
                   <a:srgbClr val="1C2026"/>
                 </a:solidFill>
                 <a:latin typeface="Calibri"/>
               </a:rPr>
-              <a:t>0.288s → 0.215s per object</a:t>
-            </a:r>
-          </a:p>
-        </p:txBody>
-      </p:sp>
-      <p:sp>
-        <p:nvSpPr>
-          <p:cNvPr id="17" name="Rectangle 16"/>
+              <a:t>+0.0002</a:t>
+            </a:r>
+          </a:p>
+        </p:txBody>
+      </p:sp>
+      <p:sp>
+        <p:nvSpPr>
+          <p:cNvPr id="17" name="TextBox 16"/>
+          <p:cNvSpPr txBox="1"/>
+          <p:nvPr/>
+        </p:nvSpPr>
+        <p:spPr>
+          <a:xfrm>
+            <a:off x="6400800" y="3858768"/>
+            <a:ext cx="4572000" cy="457200"/>
+          </a:xfrm>
+          <a:prstGeom prst="rect">
+            <a:avLst/>
+          </a:prstGeom>
+          <a:noFill/>
+        </p:spPr>
+        <p:txBody>
+          <a:bodyPr wrap="square">
+            <a:spAutoFit/>
+          </a:bodyPr>
+          <a:lstStyle/>
+          <a:p>
+            <a:pPr algn="l"/>
+            <a:r>
+              <a:rPr sz="1000" b="0">
+                <a:solidFill>
+                  <a:srgbClr val="8C8F96"/>
+                </a:solidFill>
+                <a:latin typeface="Calibri"/>
+              </a:rPr>
+              <a:t>mean DSC change  ·  294 objects</a:t>
+            </a:r>
+          </a:p>
+        </p:txBody>
+      </p:sp>
+      <p:sp>
+        <p:nvSpPr>
+          <p:cNvPr id="18" name="Rectangle 17"/>
           <p:cNvSpPr/>
           <p:nvPr/>
         </p:nvSpPr>
         <p:spPr>
           <a:xfrm>
-            <a:off x="868680" y="5518404"/>
+            <a:off x="6400800" y="4512564"/>
             <a:ext cx="64008" cy="64008"/>
           </a:xfrm>
           <a:prstGeom prst="rect">
             <a:avLst/>
           </a:prstGeom>
           <a:solidFill>
-            <a:srgbClr val="B0761B"/>
+            <a:srgbClr val="A86D18"/>
           </a:solidFill>
           <a:ln>
             <a:noFill/>
@@ -7195,14 +7206,14 @@
       </p:sp>
       <p:sp>
         <p:nvSpPr>
-          <p:cNvPr id="18" name="TextBox 17"/>
+          <p:cNvPr id="19" name="TextBox 18"/>
           <p:cNvSpPr txBox="1"/>
           <p:nvPr/>
         </p:nvSpPr>
         <p:spPr>
           <a:xfrm>
-            <a:off x="1088136" y="5440680"/>
-            <a:ext cx="7095744" cy="365760"/>
+            <a:off x="6620256" y="4434840"/>
+            <a:ext cx="4535424" cy="384048"/>
           </a:xfrm>
           <a:prstGeom prst="rect">
             <a:avLst/>
@@ -7217,7 +7228,7 @@
           <a:p>
             <a:pPr algn="l"/>
             <a:r>
-              <a:rPr sz="1400" b="0">
+              <a:rPr sz="1200" b="0">
                 <a:solidFill>
                   <a:srgbClr val="1C2026"/>
                 </a:solidFill>
@@ -7230,14 +7241,57 @@
       </p:sp>
       <p:sp>
         <p:nvSpPr>
-          <p:cNvPr id="19" name="TextBox 18"/>
+          <p:cNvPr id="20" name="Rectangle 19"/>
+          <p:cNvSpPr/>
+          <p:nvPr/>
+        </p:nvSpPr>
+        <p:spPr>
+          <a:xfrm>
+            <a:off x="6400800" y="4896612"/>
+            <a:ext cx="64008" cy="64008"/>
+          </a:xfrm>
+          <a:prstGeom prst="rect">
+            <a:avLst/>
+          </a:prstGeom>
+          <a:solidFill>
+            <a:srgbClr val="A86D18"/>
+          </a:solidFill>
+          <a:ln>
+            <a:noFill/>
+          </a:ln>
+        </p:spPr>
+        <p:style>
+          <a:lnRef idx="1">
+            <a:schemeClr val="accent1"/>
+          </a:lnRef>
+          <a:fillRef idx="3">
+            <a:schemeClr val="accent1"/>
+          </a:fillRef>
+          <a:effectRef idx="2">
+            <a:schemeClr val="accent1"/>
+          </a:effectRef>
+          <a:fontRef idx="minor">
+            <a:schemeClr val="lt1"/>
+          </a:fontRef>
+        </p:style>
+        <p:txBody>
+          <a:bodyPr rtlCol="0" anchor="ctr"/>
+          <a:lstStyle/>
+          <a:p>
+            <a:pPr algn="ctr"/>
+          </a:p>
+        </p:txBody>
+      </p:sp>
+      <p:sp>
+        <p:nvSpPr>
+          <p:cNvPr id="21" name="TextBox 20"/>
           <p:cNvSpPr txBox="1"/>
           <p:nvPr/>
         </p:nvSpPr>
         <p:spPr>
           <a:xfrm>
-            <a:off x="868680" y="6263640"/>
-            <a:ext cx="10469880" cy="365760"/>
+            <a:off x="6620256" y="4818888"/>
+            <a:ext cx="4535424" cy="384048"/>
           </a:xfrm>
           <a:prstGeom prst="rect">
             <a:avLst/>
@@ -7252,13 +7306,83 @@
           <a:p>
             <a:pPr algn="l"/>
             <a:r>
+              <a:rPr sz="1200" b="0">
+                <a:solidFill>
+                  <a:srgbClr val="1C2026"/>
+                </a:solidFill>
+                <a:latin typeface="Calibri"/>
+              </a:rPr>
+              <a:t>Speed and accuracy from the same jobs</a:t>
+            </a:r>
+          </a:p>
+        </p:txBody>
+      </p:sp>
+      <p:sp>
+        <p:nvSpPr>
+          <p:cNvPr id="22" name="TextBox 21"/>
+          <p:cNvSpPr txBox="1"/>
+          <p:nvPr/>
+        </p:nvSpPr>
+        <p:spPr>
+          <a:xfrm>
+            <a:off x="868680" y="5440680"/>
+            <a:ext cx="10424160" cy="457200"/>
+          </a:xfrm>
+          <a:prstGeom prst="rect">
+            <a:avLst/>
+          </a:prstGeom>
+          <a:noFill/>
+        </p:spPr>
+        <p:txBody>
+          <a:bodyPr wrap="square">
+            <a:spAutoFit/>
+          </a:bodyPr>
+          <a:lstStyle/>
+          <a:p>
+            <a:pPr algn="l"/>
+            <a:r>
+              <a:rPr sz="1300" b="0">
+                <a:solidFill>
+                  <a:srgbClr val="1C2026"/>
+                </a:solidFill>
+                <a:latin typeface="Calibri"/>
+              </a:rPr>
+              <a:t>CPU time held at 6:18 to 6:33 across runs while walltime fell, which is what a GPU-bound workload looks like.</a:t>
+            </a:r>
+          </a:p>
+        </p:txBody>
+      </p:sp>
+      <p:sp>
+        <p:nvSpPr>
+          <p:cNvPr id="23" name="TextBox 22"/>
+          <p:cNvSpPr txBox="1"/>
+          <p:nvPr/>
+        </p:nvSpPr>
+        <p:spPr>
+          <a:xfrm>
+            <a:off x="868680" y="6309360"/>
+            <a:ext cx="10469880" cy="365760"/>
+          </a:xfrm>
+          <a:prstGeom prst="rect">
+            <a:avLst/>
+          </a:prstGeom>
+          <a:noFill/>
+        </p:spPr>
+        <p:txBody>
+          <a:bodyPr wrap="square">
+            <a:spAutoFit/>
+          </a:bodyPr>
+          <a:lstStyle/>
+          <a:p>
+            <a:pPr algn="l"/>
+            <a:r>
               <a:rPr sz="900" b="0">
                 <a:solidFill>
                   <a:srgbClr val="8C8F96"/>
                 </a:solidFill>
                 <a:latin typeface="Calibri"/>
               </a:rPr>
-              <a:t>20 CT cases from the CVPR validation set, fold='all' checkpoint, H100 MIG 3g.40gb. Speed and accuracy come from the same jobs.</a:t>
+              <a:t>20 CT cases from the CVPR validation set, fold='all' checkpoint, H100 MIG 3g.40gb. CPU efficiency 13 to 20% of 8 cores; allocation since reduced to 2.</a:t>
             </a:r>
           </a:p>
         </p:txBody>
@@ -7277,7 +7401,7 @@
     <p:bg>
       <p:bgPr>
         <a:solidFill>
-          <a:srgbClr val="FAF9F6"/>
+          <a:srgbClr val="FDFDFD"/>
         </a:solidFill>
         <a:effectLst/>
       </p:bgPr>
@@ -7297,7 +7421,7 @@
         </p:nvSpPr>
         <p:spPr>
           <a:xfrm>
-            <a:off x="868680" y="502920"/>
+            <a:off x="868680" y="548640"/>
             <a:ext cx="8961120" cy="548640"/>
           </a:xfrm>
           <a:prstGeom prst="rect">
@@ -7332,7 +7456,7 @@
         </p:nvSpPr>
         <p:spPr>
           <a:xfrm>
-            <a:off x="10058400" y="658368"/>
+            <a:off x="10058400" y="704088"/>
             <a:ext cx="1280160" cy="365760"/>
           </a:xfrm>
           <a:prstGeom prst="rect">
@@ -7367,14 +7491,14 @@
         </p:nvSpPr>
         <p:spPr>
           <a:xfrm>
-            <a:off x="868680" y="1170432"/>
-            <a:ext cx="10469880" cy="12700"/>
+            <a:off x="868680" y="1207008"/>
+            <a:ext cx="822960" cy="31750"/>
           </a:xfrm>
           <a:prstGeom prst="rect">
             <a:avLst/>
           </a:prstGeom>
           <a:solidFill>
-            <a:srgbClr val="E4E1D9"/>
+            <a:srgbClr val="A86D18"/>
           </a:solidFill>
           <a:ln>
             <a:noFill/>
@@ -7410,7 +7534,7 @@
         </p:nvSpPr>
         <p:spPr>
           <a:xfrm>
-            <a:off x="868680" y="1572768"/>
+            <a:off x="868680" y="1645920"/>
             <a:ext cx="9144000" cy="457200"/>
           </a:xfrm>
           <a:prstGeom prst="rect">
@@ -7439,20 +7563,230 @@
       </p:sp>
       <p:sp>
         <p:nvSpPr>
-          <p:cNvPr id="6" name="Rectangle 5"/>
+          <p:cNvPr id="6" name="TextBox 5"/>
+          <p:cNvSpPr txBox="1"/>
+          <p:nvPr/>
+        </p:nvSpPr>
+        <p:spPr>
+          <a:xfrm>
+            <a:off x="868680" y="2377440"/>
+            <a:ext cx="3108960" cy="731520"/>
+          </a:xfrm>
+          <a:prstGeom prst="rect">
+            <a:avLst/>
+          </a:prstGeom>
+          <a:noFill/>
+        </p:spPr>
+        <p:txBody>
+          <a:bodyPr wrap="square">
+            <a:spAutoFit/>
+          </a:bodyPr>
+          <a:lstStyle/>
+          <a:p>
+            <a:pPr algn="l"/>
+            <a:r>
+              <a:rPr sz="4600" b="1">
+                <a:solidFill>
+                  <a:srgbClr val="1C2026"/>
+                </a:solidFill>
+                <a:latin typeface="Calibri"/>
+              </a:rPr>
+              <a:t>23.6s</a:t>
+            </a:r>
+          </a:p>
+        </p:txBody>
+      </p:sp>
+      <p:sp>
+        <p:nvSpPr>
+          <p:cNvPr id="7" name="TextBox 6"/>
+          <p:cNvSpPr txBox="1"/>
+          <p:nvPr/>
+        </p:nvSpPr>
+        <p:spPr>
+          <a:xfrm>
+            <a:off x="868680" y="3127248"/>
+            <a:ext cx="3108960" cy="457200"/>
+          </a:xfrm>
+          <a:prstGeom prst="rect">
+            <a:avLst/>
+          </a:prstGeom>
+          <a:noFill/>
+        </p:spPr>
+        <p:txBody>
+          <a:bodyPr wrap="square">
+            <a:spAutoFit/>
+          </a:bodyPr>
+          <a:lstStyle/>
+          <a:p>
+            <a:pPr algn="l"/>
+            <a:r>
+              <a:rPr sz="1000" b="0">
+                <a:solidFill>
+                  <a:srgbClr val="8C8F96"/>
+                </a:solidFill>
+                <a:latin typeface="Calibri"/>
+              </a:rPr>
+              <a:t>one-time compile</a:t>
+            </a:r>
+          </a:p>
+        </p:txBody>
+      </p:sp>
+      <p:sp>
+        <p:nvSpPr>
+          <p:cNvPr id="8" name="TextBox 7"/>
+          <p:cNvSpPr txBox="1"/>
+          <p:nvPr/>
+        </p:nvSpPr>
+        <p:spPr>
+          <a:xfrm>
+            <a:off x="4251960" y="2377440"/>
+            <a:ext cx="3108960" cy="731520"/>
+          </a:xfrm>
+          <a:prstGeom prst="rect">
+            <a:avLst/>
+          </a:prstGeom>
+          <a:noFill/>
+        </p:spPr>
+        <p:txBody>
+          <a:bodyPr wrap="square">
+            <a:spAutoFit/>
+          </a:bodyPr>
+          <a:lstStyle/>
+          <a:p>
+            <a:pPr algn="l"/>
+            <a:r>
+              <a:rPr sz="4600" b="1">
+                <a:solidFill>
+                  <a:srgbClr val="1C2026"/>
+                </a:solidFill>
+                <a:latin typeface="Calibri"/>
+              </a:rPr>
+              <a:t>0.071s</a:t>
+            </a:r>
+          </a:p>
+        </p:txBody>
+      </p:sp>
+      <p:sp>
+        <p:nvSpPr>
+          <p:cNvPr id="9" name="TextBox 8"/>
+          <p:cNvSpPr txBox="1"/>
+          <p:nvPr/>
+        </p:nvSpPr>
+        <p:spPr>
+          <a:xfrm>
+            <a:off x="4251960" y="3127248"/>
+            <a:ext cx="3108960" cy="457200"/>
+          </a:xfrm>
+          <a:prstGeom prst="rect">
+            <a:avLst/>
+          </a:prstGeom>
+          <a:noFill/>
+        </p:spPr>
+        <p:txBody>
+          <a:bodyPr wrap="square">
+            <a:spAutoFit/>
+          </a:bodyPr>
+          <a:lstStyle/>
+          <a:p>
+            <a:pPr algn="l"/>
+            <a:r>
+              <a:rPr sz="1000" b="0">
+                <a:solidFill>
+                  <a:srgbClr val="8C8F96"/>
+                </a:solidFill>
+                <a:latin typeface="Calibri"/>
+              </a:rPr>
+              <a:t>saved per object</a:t>
+            </a:r>
+          </a:p>
+        </p:txBody>
+      </p:sp>
+      <p:sp>
+        <p:nvSpPr>
+          <p:cNvPr id="10" name="TextBox 9"/>
+          <p:cNvSpPr txBox="1"/>
+          <p:nvPr/>
+        </p:nvSpPr>
+        <p:spPr>
+          <a:xfrm>
+            <a:off x="7635240" y="2377440"/>
+            <a:ext cx="3108960" cy="731520"/>
+          </a:xfrm>
+          <a:prstGeom prst="rect">
+            <a:avLst/>
+          </a:prstGeom>
+          <a:noFill/>
+        </p:spPr>
+        <p:txBody>
+          <a:bodyPr wrap="square">
+            <a:spAutoFit/>
+          </a:bodyPr>
+          <a:lstStyle/>
+          <a:p>
+            <a:pPr algn="l"/>
+            <a:r>
+              <a:rPr sz="4600" b="1">
+                <a:solidFill>
+                  <a:srgbClr val="A86D18"/>
+                </a:solidFill>
+                <a:latin typeface="Calibri"/>
+              </a:rPr>
+              <a:t>~22 cases</a:t>
+            </a:r>
+          </a:p>
+        </p:txBody>
+      </p:sp>
+      <p:sp>
+        <p:nvSpPr>
+          <p:cNvPr id="11" name="TextBox 10"/>
+          <p:cNvSpPr txBox="1"/>
+          <p:nvPr/>
+        </p:nvSpPr>
+        <p:spPr>
+          <a:xfrm>
+            <a:off x="7635240" y="3127248"/>
+            <a:ext cx="3108960" cy="457200"/>
+          </a:xfrm>
+          <a:prstGeom prst="rect">
+            <a:avLst/>
+          </a:prstGeom>
+          <a:noFill/>
+        </p:spPr>
+        <p:txBody>
+          <a:bodyPr wrap="square">
+            <a:spAutoFit/>
+          </a:bodyPr>
+          <a:lstStyle/>
+          <a:p>
+            <a:pPr algn="l"/>
+            <a:r>
+              <a:rPr sz="1000" b="0">
+                <a:solidFill>
+                  <a:srgbClr val="8C8F96"/>
+                </a:solidFill>
+                <a:latin typeface="Calibri"/>
+              </a:rPr>
+              <a:t>to break even</a:t>
+            </a:r>
+          </a:p>
+        </p:txBody>
+      </p:sp>
+      <p:sp>
+        <p:nvSpPr>
+          <p:cNvPr id="12" name="Rectangle 11"/>
           <p:cNvSpPr/>
           <p:nvPr/>
         </p:nvSpPr>
         <p:spPr>
           <a:xfrm>
-            <a:off x="868680" y="2331720"/>
-            <a:ext cx="10469880" cy="12700"/>
+            <a:off x="868680" y="4192524"/>
+            <a:ext cx="64008" cy="64008"/>
           </a:xfrm>
           <a:prstGeom prst="rect">
             <a:avLst/>
           </a:prstGeom>
           <a:solidFill>
-            <a:srgbClr val="E4E1D9"/>
+            <a:srgbClr val="A86D18"/>
           </a:solidFill>
           <a:ln>
             <a:noFill/>
@@ -7482,14 +7816,14 @@
       </p:sp>
       <p:sp>
         <p:nvSpPr>
-          <p:cNvPr id="7" name="TextBox 6"/>
+          <p:cNvPr id="13" name="TextBox 12"/>
           <p:cNvSpPr txBox="1"/>
           <p:nvPr/>
         </p:nvSpPr>
         <p:spPr>
           <a:xfrm>
-            <a:off x="868680" y="2697480"/>
-            <a:ext cx="2926080" cy="822960"/>
+            <a:off x="1088136" y="4114800"/>
+            <a:ext cx="10113264" cy="438912"/>
           </a:xfrm>
           <a:prstGeom prst="rect">
             <a:avLst/>
@@ -7504,208 +7838,33 @@
           <a:p>
             <a:pPr algn="l"/>
             <a:r>
-              <a:rPr sz="5200" b="1">
+              <a:rPr sz="1500" b="0">
                 <a:solidFill>
                   <a:srgbClr val="1C2026"/>
                 </a:solidFill>
                 <a:latin typeface="Calibri"/>
               </a:rPr>
-              <a:t>23.6s</a:t>
-            </a:r>
-          </a:p>
-        </p:txBody>
-      </p:sp>
-      <p:sp>
-        <p:nvSpPr>
-          <p:cNvPr id="8" name="TextBox 7"/>
-          <p:cNvSpPr txBox="1"/>
-          <p:nvPr/>
-        </p:nvSpPr>
-        <p:spPr>
-          <a:xfrm>
-            <a:off x="868680" y="3538728"/>
-            <a:ext cx="2926080" cy="457200"/>
-          </a:xfrm>
-          <a:prstGeom prst="rect">
-            <a:avLst/>
-          </a:prstGeom>
-          <a:noFill/>
-        </p:spPr>
-        <p:txBody>
-          <a:bodyPr wrap="square">
-            <a:spAutoFit/>
-          </a:bodyPr>
-          <a:lstStyle/>
-          <a:p>
-            <a:pPr algn="l"/>
-            <a:r>
-              <a:rPr sz="1000" b="0">
-                <a:solidFill>
-                  <a:srgbClr val="8C8F96"/>
-                </a:solidFill>
-                <a:latin typeface="Calibri"/>
-              </a:rPr>
-              <a:t>one-time compile</a:t>
-            </a:r>
-          </a:p>
-        </p:txBody>
-      </p:sp>
-      <p:sp>
-        <p:nvSpPr>
-          <p:cNvPr id="9" name="TextBox 8"/>
-          <p:cNvSpPr txBox="1"/>
-          <p:nvPr/>
-        </p:nvSpPr>
-        <p:spPr>
-          <a:xfrm>
-            <a:off x="4069080" y="2697480"/>
-            <a:ext cx="2926080" cy="822960"/>
-          </a:xfrm>
-          <a:prstGeom prst="rect">
-            <a:avLst/>
-          </a:prstGeom>
-          <a:noFill/>
-        </p:spPr>
-        <p:txBody>
-          <a:bodyPr wrap="square">
-            <a:spAutoFit/>
-          </a:bodyPr>
-          <a:lstStyle/>
-          <a:p>
-            <a:pPr algn="l"/>
-            <a:r>
-              <a:rPr sz="5200" b="1">
-                <a:solidFill>
-                  <a:srgbClr val="1C2026"/>
-                </a:solidFill>
-                <a:latin typeface="Calibri"/>
-              </a:rPr>
-              <a:t>0.071s</a:t>
-            </a:r>
-          </a:p>
-        </p:txBody>
-      </p:sp>
-      <p:sp>
-        <p:nvSpPr>
-          <p:cNvPr id="10" name="TextBox 9"/>
-          <p:cNvSpPr txBox="1"/>
-          <p:nvPr/>
-        </p:nvSpPr>
-        <p:spPr>
-          <a:xfrm>
-            <a:off x="4069080" y="3538728"/>
-            <a:ext cx="2926080" cy="457200"/>
-          </a:xfrm>
-          <a:prstGeom prst="rect">
-            <a:avLst/>
-          </a:prstGeom>
-          <a:noFill/>
-        </p:spPr>
-        <p:txBody>
-          <a:bodyPr wrap="square">
-            <a:spAutoFit/>
-          </a:bodyPr>
-          <a:lstStyle/>
-          <a:p>
-            <a:pPr algn="l"/>
-            <a:r>
-              <a:rPr sz="1000" b="0">
-                <a:solidFill>
-                  <a:srgbClr val="8C8F96"/>
-                </a:solidFill>
-                <a:latin typeface="Calibri"/>
-              </a:rPr>
-              <a:t>saved per object</a:t>
-            </a:r>
-          </a:p>
-        </p:txBody>
-      </p:sp>
-      <p:sp>
-        <p:nvSpPr>
-          <p:cNvPr id="11" name="TextBox 10"/>
-          <p:cNvSpPr txBox="1"/>
-          <p:nvPr/>
-        </p:nvSpPr>
-        <p:spPr>
-          <a:xfrm>
-            <a:off x="7269480" y="2697480"/>
-            <a:ext cx="3657600" cy="822960"/>
-          </a:xfrm>
-          <a:prstGeom prst="rect">
-            <a:avLst/>
-          </a:prstGeom>
-          <a:noFill/>
-        </p:spPr>
-        <p:txBody>
-          <a:bodyPr wrap="square">
-            <a:spAutoFit/>
-          </a:bodyPr>
-          <a:lstStyle/>
-          <a:p>
-            <a:pPr algn="l"/>
-            <a:r>
-              <a:rPr sz="5200" b="1">
-                <a:solidFill>
-                  <a:srgbClr val="B0761B"/>
-                </a:solidFill>
-                <a:latin typeface="Calibri"/>
-              </a:rPr>
-              <a:t>~22 cases</a:t>
-            </a:r>
-          </a:p>
-        </p:txBody>
-      </p:sp>
-      <p:sp>
-        <p:nvSpPr>
-          <p:cNvPr id="12" name="TextBox 11"/>
-          <p:cNvSpPr txBox="1"/>
-          <p:nvPr/>
-        </p:nvSpPr>
-        <p:spPr>
-          <a:xfrm>
-            <a:off x="7269480" y="3538728"/>
-            <a:ext cx="3657600" cy="457200"/>
-          </a:xfrm>
-          <a:prstGeom prst="rect">
-            <a:avLst/>
-          </a:prstGeom>
-          <a:noFill/>
-        </p:spPr>
-        <p:txBody>
-          <a:bodyPr wrap="square">
-            <a:spAutoFit/>
-          </a:bodyPr>
-          <a:lstStyle/>
-          <a:p>
-            <a:pPr algn="l"/>
-            <a:r>
-              <a:rPr sz="1000" b="0">
-                <a:solidFill>
-                  <a:srgbClr val="8C8F96"/>
-                </a:solidFill>
-                <a:latin typeface="Calibri"/>
-              </a:rPr>
-              <a:t>to break even</a:t>
-            </a:r>
-          </a:p>
-        </p:txBody>
-      </p:sp>
-      <p:sp>
-        <p:nvSpPr>
-          <p:cNvPr id="13" name="Rectangle 12"/>
+              <a:t>Batch of 881 validation cases: clearly worth it</a:t>
+            </a:r>
+          </a:p>
+        </p:txBody>
+      </p:sp>
+      <p:sp>
+        <p:nvSpPr>
+          <p:cNvPr id="14" name="Rectangle 13"/>
           <p:cNvSpPr/>
           <p:nvPr/>
         </p:nvSpPr>
         <p:spPr>
           <a:xfrm>
-            <a:off x="868680" y="4389120"/>
-            <a:ext cx="10469880" cy="12700"/>
+            <a:off x="868680" y="4631436"/>
+            <a:ext cx="64008" cy="64008"/>
           </a:xfrm>
           <a:prstGeom prst="rect">
             <a:avLst/>
           </a:prstGeom>
           <a:solidFill>
-            <a:srgbClr val="E4E1D9"/>
+            <a:srgbClr val="A86D18"/>
           </a:solidFill>
           <a:ln>
             <a:noFill/>
@@ -7735,20 +7894,55 @@
       </p:sp>
       <p:sp>
         <p:nvSpPr>
-          <p:cNvPr id="14" name="Rectangle 13"/>
+          <p:cNvPr id="15" name="TextBox 14"/>
+          <p:cNvSpPr txBox="1"/>
+          <p:nvPr/>
+        </p:nvSpPr>
+        <p:spPr>
+          <a:xfrm>
+            <a:off x="1088136" y="4553712"/>
+            <a:ext cx="10113264" cy="438912"/>
+          </a:xfrm>
+          <a:prstGeom prst="rect">
+            <a:avLst/>
+          </a:prstGeom>
+          <a:noFill/>
+        </p:spPr>
+        <p:txBody>
+          <a:bodyPr wrap="square">
+            <a:spAutoFit/>
+          </a:bodyPr>
+          <a:lstStyle/>
+          <a:p>
+            <a:pPr algn="l"/>
+            <a:r>
+              <a:rPr sz="1500" b="0">
+                <a:solidFill>
+                  <a:srgbClr val="1C2026"/>
+                </a:solidFill>
+                <a:latin typeface="Calibri"/>
+              </a:rPr>
+              <a:t>Radiologist with 3 scans: never recovered</a:t>
+            </a:r>
+          </a:p>
+        </p:txBody>
+      </p:sp>
+      <p:sp>
+        <p:nvSpPr>
+          <p:cNvPr id="16" name="Rectangle 15"/>
           <p:cNvSpPr/>
           <p:nvPr/>
         </p:nvSpPr>
         <p:spPr>
           <a:xfrm>
-            <a:off x="868680" y="4786884"/>
+            <a:off x="868680" y="5070348"/>
             <a:ext cx="64008" cy="64008"/>
           </a:xfrm>
           <a:prstGeom prst="rect">
             <a:avLst/>
           </a:prstGeom>
           <a:solidFill>
-            <a:srgbClr val="B0761B"/>
+            <a:srgbClr val="A86D18"/>
           </a:solidFill>
           <a:ln>
             <a:noFill/>
@@ -7778,13 +7972,13 @@
       </p:sp>
       <p:sp>
         <p:nvSpPr>
-          <p:cNvPr id="15" name="TextBox 14"/>
+          <p:cNvPr id="17" name="TextBox 16"/>
           <p:cNvSpPr txBox="1"/>
           <p:nvPr/>
         </p:nvSpPr>
         <p:spPr>
           <a:xfrm>
-            <a:off x="1088136" y="4709160"/>
+            <a:off x="1088136" y="4992624"/>
             <a:ext cx="10113264" cy="438912"/>
           </a:xfrm>
           <a:prstGeom prst="rect">
@@ -7806,176 +8000,20 @@
                 </a:solidFill>
                 <a:latin typeface="Calibri"/>
               </a:rPr>
-              <a:t>Batch of 900 validation cases: clearly worth it</a:t>
-            </a:r>
-          </a:p>
-        </p:txBody>
-      </p:sp>
-      <p:sp>
-        <p:nvSpPr>
-          <p:cNvPr id="16" name="Rectangle 15"/>
-          <p:cNvSpPr/>
-          <p:nvPr/>
-        </p:nvSpPr>
-        <p:spPr>
-          <a:xfrm>
-            <a:off x="868680" y="5225796"/>
-            <a:ext cx="64008" cy="64008"/>
-          </a:xfrm>
-          <a:prstGeom prst="rect">
-            <a:avLst/>
-          </a:prstGeom>
-          <a:solidFill>
-            <a:srgbClr val="B0761B"/>
-          </a:solidFill>
-          <a:ln>
-            <a:noFill/>
-          </a:ln>
-        </p:spPr>
-        <p:style>
-          <a:lnRef idx="1">
-            <a:schemeClr val="accent1"/>
-          </a:lnRef>
-          <a:fillRef idx="3">
-            <a:schemeClr val="accent1"/>
-          </a:fillRef>
-          <a:effectRef idx="2">
-            <a:schemeClr val="accent1"/>
-          </a:effectRef>
-          <a:fontRef idx="minor">
-            <a:schemeClr val="lt1"/>
-          </a:fontRef>
-        </p:style>
-        <p:txBody>
-          <a:bodyPr rtlCol="0" anchor="ctr"/>
-          <a:lstStyle/>
-          <a:p>
-            <a:pPr algn="ctr"/>
-          </a:p>
-        </p:txBody>
-      </p:sp>
-      <p:sp>
-        <p:nvSpPr>
-          <p:cNvPr id="17" name="TextBox 16"/>
+              <a:t>A batch optimization, and it should not be sold as anything else</a:t>
+            </a:r>
+          </a:p>
+        </p:txBody>
+      </p:sp>
+      <p:sp>
+        <p:nvSpPr>
+          <p:cNvPr id="18" name="TextBox 17"/>
           <p:cNvSpPr txBox="1"/>
           <p:nvPr/>
         </p:nvSpPr>
         <p:spPr>
           <a:xfrm>
-            <a:off x="1088136" y="5148072"/>
-            <a:ext cx="10113264" cy="438912"/>
-          </a:xfrm>
-          <a:prstGeom prst="rect">
-            <a:avLst/>
-          </a:prstGeom>
-          <a:noFill/>
-        </p:spPr>
-        <p:txBody>
-          <a:bodyPr wrap="square">
-            <a:spAutoFit/>
-          </a:bodyPr>
-          <a:lstStyle/>
-          <a:p>
-            <a:pPr algn="l"/>
-            <a:r>
-              <a:rPr sz="1500" b="0">
-                <a:solidFill>
-                  <a:srgbClr val="1C2026"/>
-                </a:solidFill>
-                <a:latin typeface="Calibri"/>
-              </a:rPr>
-              <a:t>Radiologist with 3 scans: never recovered</a:t>
-            </a:r>
-          </a:p>
-        </p:txBody>
-      </p:sp>
-      <p:sp>
-        <p:nvSpPr>
-          <p:cNvPr id="18" name="Rectangle 17"/>
-          <p:cNvSpPr/>
-          <p:nvPr/>
-        </p:nvSpPr>
-        <p:spPr>
-          <a:xfrm>
-            <a:off x="868680" y="5664708"/>
-            <a:ext cx="64008" cy="64008"/>
-          </a:xfrm>
-          <a:prstGeom prst="rect">
-            <a:avLst/>
-          </a:prstGeom>
-          <a:solidFill>
-            <a:srgbClr val="B0761B"/>
-          </a:solidFill>
-          <a:ln>
-            <a:noFill/>
-          </a:ln>
-        </p:spPr>
-        <p:style>
-          <a:lnRef idx="1">
-            <a:schemeClr val="accent1"/>
-          </a:lnRef>
-          <a:fillRef idx="3">
-            <a:schemeClr val="accent1"/>
-          </a:fillRef>
-          <a:effectRef idx="2">
-            <a:schemeClr val="accent1"/>
-          </a:effectRef>
-          <a:fontRef idx="minor">
-            <a:schemeClr val="lt1"/>
-          </a:fontRef>
-        </p:style>
-        <p:txBody>
-          <a:bodyPr rtlCol="0" anchor="ctr"/>
-          <a:lstStyle/>
-          <a:p>
-            <a:pPr algn="ctr"/>
-          </a:p>
-        </p:txBody>
-      </p:sp>
-      <p:sp>
-        <p:nvSpPr>
-          <p:cNvPr id="19" name="TextBox 18"/>
-          <p:cNvSpPr txBox="1"/>
-          <p:nvPr/>
-        </p:nvSpPr>
-        <p:spPr>
-          <a:xfrm>
-            <a:off x="1088136" y="5586984"/>
-            <a:ext cx="10113264" cy="438912"/>
-          </a:xfrm>
-          <a:prstGeom prst="rect">
-            <a:avLst/>
-          </a:prstGeom>
-          <a:noFill/>
-        </p:spPr>
-        <p:txBody>
-          <a:bodyPr wrap="square">
-            <a:spAutoFit/>
-          </a:bodyPr>
-          <a:lstStyle/>
-          <a:p>
-            <a:pPr algn="l"/>
-            <a:r>
-              <a:rPr sz="1500" b="0">
-                <a:solidFill>
-                  <a:srgbClr val="1C2026"/>
-                </a:solidFill>
-                <a:latin typeface="Calibri"/>
-              </a:rPr>
-              <a:t>A batch optimization, and it should not be sold as anything else</a:t>
-            </a:r>
-          </a:p>
-        </p:txBody>
-      </p:sp>
-      <p:sp>
-        <p:nvSpPr>
-          <p:cNvPr id="20" name="TextBox 19"/>
-          <p:cNvSpPr txBox="1"/>
-          <p:nvPr/>
-        </p:nvSpPr>
-        <p:spPr>
-          <a:xfrm>
-            <a:off x="868680" y="6263640"/>
+            <a:off x="868680" y="6309360"/>
             <a:ext cx="10469880" cy="365760"/>
           </a:xfrm>
           <a:prstGeom prst="rect">
@@ -8016,7 +8054,7 @@
     <p:bg>
       <p:bgPr>
         <a:solidFill>
-          <a:srgbClr val="FAF9F6"/>
+          <a:srgbClr val="FDFDFD"/>
         </a:solidFill>
         <a:effectLst/>
       </p:bgPr>
@@ -8036,7 +8074,7 @@
         </p:nvSpPr>
         <p:spPr>
           <a:xfrm>
-            <a:off x="868680" y="502920"/>
+            <a:off x="868680" y="548640"/>
             <a:ext cx="8961120" cy="548640"/>
           </a:xfrm>
           <a:prstGeom prst="rect">
@@ -8071,7 +8109,7 @@
         </p:nvSpPr>
         <p:spPr>
           <a:xfrm>
-            <a:off x="10058400" y="658368"/>
+            <a:off x="10058400" y="704088"/>
             <a:ext cx="1280160" cy="365760"/>
           </a:xfrm>
           <a:prstGeom prst="rect">
@@ -8106,14 +8144,14 @@
         </p:nvSpPr>
         <p:spPr>
           <a:xfrm>
-            <a:off x="868680" y="1170432"/>
-            <a:ext cx="10469880" cy="12700"/>
+            <a:off x="868680" y="1207008"/>
+            <a:ext cx="822960" cy="31750"/>
           </a:xfrm>
           <a:prstGeom prst="rect">
             <a:avLst/>
           </a:prstGeom>
           <a:solidFill>
-            <a:srgbClr val="E4E1D9"/>
+            <a:srgbClr val="A86D18"/>
           </a:solidFill>
           <a:ln>
             <a:noFill/>
@@ -8150,7 +8188,7 @@
           <p:nvPr/>
         </p:nvGraphicFramePr>
         <p:xfrm>
-          <a:off x="868680" y="1627632"/>
+          <a:off x="868680" y="1691640"/>
           <a:ext cx="10469880" cy="1371600"/>
         </p:xfrm>
         <a:graphic>
@@ -8184,7 +8222,7 @@
                   </a:txBody>
                   <a:tcPr>
                     <a:solidFill>
-                      <a:srgbClr val="FAF9F6"/>
+                      <a:srgbClr val="FDFDFD"/>
                     </a:solidFill>
                   </a:tcPr>
                 </a:tc>
@@ -8206,7 +8244,7 @@
                   </a:txBody>
                   <a:tcPr>
                     <a:solidFill>
-                      <a:srgbClr val="FAF9F6"/>
+                      <a:srgbClr val="FDFDFD"/>
                     </a:solidFill>
                   </a:tcPr>
                 </a:tc>
@@ -8228,7 +8266,7 @@
                   </a:txBody>
                   <a:tcPr>
                     <a:solidFill>
-                      <a:srgbClr val="FAF9F6"/>
+                      <a:srgbClr val="FDFDFD"/>
                     </a:solidFill>
                   </a:tcPr>
                 </a:tc>
@@ -8250,7 +8288,7 @@
                   </a:txBody>
                   <a:tcPr>
                     <a:solidFill>
-                      <a:srgbClr val="FAF9F6"/>
+                      <a:srgbClr val="FDFDFD"/>
                     </a:solidFill>
                   </a:tcPr>
                 </a:tc>
@@ -8274,7 +8312,7 @@
                   </a:txBody>
                   <a:tcPr>
                     <a:solidFill>
-                      <a:srgbClr val="FAF9F6"/>
+                      <a:srgbClr val="FDFDFD"/>
                     </a:solidFill>
                   </a:tcPr>
                 </a:tc>
@@ -8296,7 +8334,7 @@
                   </a:txBody>
                   <a:tcPr>
                     <a:solidFill>
-                      <a:srgbClr val="FAF9F6"/>
+                      <a:srgbClr val="FDFDFD"/>
                     </a:solidFill>
                   </a:tcPr>
                 </a:tc>
@@ -8318,7 +8356,7 @@
                   </a:txBody>
                   <a:tcPr>
                     <a:solidFill>
-                      <a:srgbClr val="FAF9F6"/>
+                      <a:srgbClr val="FDFDFD"/>
                     </a:solidFill>
                   </a:tcPr>
                 </a:tc>
@@ -8340,7 +8378,7 @@
                   </a:txBody>
                   <a:tcPr>
                     <a:solidFill>
-                      <a:srgbClr val="FAF9F6"/>
+                      <a:srgbClr val="FDFDFD"/>
                     </a:solidFill>
                   </a:tcPr>
                 </a:tc>
@@ -8364,7 +8402,7 @@
                   </a:txBody>
                   <a:tcPr>
                     <a:solidFill>
-                      <a:srgbClr val="FAF9F6"/>
+                      <a:srgbClr val="FDFDFD"/>
                     </a:solidFill>
                   </a:tcPr>
                 </a:tc>
@@ -8386,7 +8424,7 @@
                   </a:txBody>
                   <a:tcPr>
                     <a:solidFill>
-                      <a:srgbClr val="FAF9F6"/>
+                      <a:srgbClr val="FDFDFD"/>
                     </a:solidFill>
                   </a:tcPr>
                 </a:tc>
@@ -8408,7 +8446,7 @@
                   </a:txBody>
                   <a:tcPr>
                     <a:solidFill>
-                      <a:srgbClr val="FAF9F6"/>
+                      <a:srgbClr val="FDFDFD"/>
                     </a:solidFill>
                   </a:tcPr>
                 </a:tc>
@@ -8430,7 +8468,7 @@
                   </a:txBody>
                   <a:tcPr>
                     <a:solidFill>
-                      <a:srgbClr val="FAF9F6"/>
+                      <a:srgbClr val="FDFDFD"/>
                     </a:solidFill>
                   </a:tcPr>
                 </a:tc>
@@ -8441,20 +8479,55 @@
       </p:graphicFrame>
       <p:sp>
         <p:nvSpPr>
-          <p:cNvPr id="6" name="Rectangle 5"/>
+          <p:cNvPr id="6" name="TextBox 5"/>
+          <p:cNvSpPr txBox="1"/>
+          <p:nvPr/>
+        </p:nvSpPr>
+        <p:spPr>
+          <a:xfrm>
+            <a:off x="868680" y="3566160"/>
+            <a:ext cx="4572000" cy="365760"/>
+          </a:xfrm>
+          <a:prstGeom prst="rect">
+            <a:avLst/>
+          </a:prstGeom>
+          <a:noFill/>
+        </p:spPr>
+        <p:txBody>
+          <a:bodyPr wrap="square">
+            <a:spAutoFit/>
+          </a:bodyPr>
+          <a:lstStyle/>
+          <a:p>
+            <a:pPr algn="l"/>
+            <a:r>
+              <a:rPr sz="1400" b="1">
+                <a:solidFill>
+                  <a:srgbClr val="A86D18"/>
+                </a:solidFill>
+                <a:latin typeface="Calibri"/>
+              </a:rPr>
+              <a:t>Still Open</a:t>
+            </a:r>
+          </a:p>
+        </p:txBody>
+      </p:sp>
+      <p:sp>
+        <p:nvSpPr>
+          <p:cNvPr id="7" name="Rectangle 6"/>
           <p:cNvSpPr/>
           <p:nvPr/>
         </p:nvSpPr>
         <p:spPr>
           <a:xfrm>
-            <a:off x="868680" y="3337560"/>
-            <a:ext cx="10469880" cy="12700"/>
+            <a:off x="868680" y="4101084"/>
+            <a:ext cx="64008" cy="64008"/>
           </a:xfrm>
           <a:prstGeom prst="rect">
             <a:avLst/>
           </a:prstGeom>
           <a:solidFill>
-            <a:srgbClr val="E4E1D9"/>
+            <a:srgbClr val="A86D18"/>
           </a:solidFill>
           <a:ln>
             <a:noFill/>
@@ -8484,14 +8557,14 @@
       </p:sp>
       <p:sp>
         <p:nvSpPr>
-          <p:cNvPr id="7" name="TextBox 6"/>
+          <p:cNvPr id="8" name="TextBox 7"/>
           <p:cNvSpPr txBox="1"/>
           <p:nvPr/>
         </p:nvSpPr>
         <p:spPr>
           <a:xfrm>
-            <a:off x="868680" y="3611880"/>
-            <a:ext cx="4572000" cy="365760"/>
+            <a:off x="1088136" y="4023360"/>
+            <a:ext cx="5175504" cy="384048"/>
           </a:xfrm>
           <a:prstGeom prst="rect">
             <a:avLst/>
@@ -8506,33 +8579,33 @@
           <a:p>
             <a:pPr algn="l"/>
             <a:r>
-              <a:rPr sz="1400" b="1">
-                <a:solidFill>
-                  <a:srgbClr val="B0761B"/>
-                </a:solidFill>
-                <a:latin typeface="Calibri"/>
-              </a:rPr>
-              <a:t>Still open</a:t>
-            </a:r>
-          </a:p>
-        </p:txBody>
-      </p:sp>
-      <p:sp>
-        <p:nvSpPr>
-          <p:cNvPr id="8" name="Rectangle 7"/>
+              <a:rPr sz="1200" b="0">
+                <a:solidFill>
+                  <a:srgbClr val="8C8F96"/>
+                </a:solidFill>
+                <a:latin typeface="Calibri"/>
+              </a:rPr>
+              <a:t>INT4 under-segments by 5.5% on one case</a:t>
+            </a:r>
+          </a:p>
+        </p:txBody>
+      </p:sp>
+      <p:sp>
+        <p:nvSpPr>
+          <p:cNvPr id="9" name="Rectangle 8"/>
           <p:cNvSpPr/>
           <p:nvPr/>
         </p:nvSpPr>
         <p:spPr>
           <a:xfrm>
-            <a:off x="868680" y="4146804"/>
+            <a:off x="868680" y="4485132"/>
             <a:ext cx="64008" cy="64008"/>
           </a:xfrm>
           <a:prstGeom prst="rect">
             <a:avLst/>
           </a:prstGeom>
           <a:solidFill>
-            <a:srgbClr val="B0761B"/>
+            <a:srgbClr val="A86D18"/>
           </a:solidFill>
           <a:ln>
             <a:noFill/>
@@ -8562,13 +8635,13 @@
       </p:sp>
       <p:sp>
         <p:nvSpPr>
-          <p:cNvPr id="9" name="TextBox 8"/>
+          <p:cNvPr id="10" name="TextBox 9"/>
           <p:cNvSpPr txBox="1"/>
           <p:nvPr/>
         </p:nvSpPr>
         <p:spPr>
           <a:xfrm>
-            <a:off x="1088136" y="4069080"/>
+            <a:off x="1088136" y="4407408"/>
             <a:ext cx="5175504" cy="384048"/>
           </a:xfrm>
           <a:prstGeom prst="rect">
@@ -8590,27 +8663,62 @@
                 </a:solidFill>
                 <a:latin typeface="Calibri"/>
               </a:rPr>
-              <a:t>INT4 accuracy rests on one case, not the full set</a:t>
-            </a:r>
-          </a:p>
-        </p:txBody>
-      </p:sp>
-      <p:sp>
-        <p:nvSpPr>
-          <p:cNvPr id="10" name="Rectangle 9"/>
+              <a:t>Not yet measured across the validation set</a:t>
+            </a:r>
+          </a:p>
+        </p:txBody>
+      </p:sp>
+      <p:sp>
+        <p:nvSpPr>
+          <p:cNvPr id="11" name="TextBox 10"/>
+          <p:cNvSpPr txBox="1"/>
+          <p:nvPr/>
+        </p:nvSpPr>
+        <p:spPr>
+          <a:xfrm>
+            <a:off x="6400800" y="3566160"/>
+            <a:ext cx="4572000" cy="365760"/>
+          </a:xfrm>
+          <a:prstGeom prst="rect">
+            <a:avLst/>
+          </a:prstGeom>
+          <a:noFill/>
+        </p:spPr>
+        <p:txBody>
+          <a:bodyPr wrap="square">
+            <a:spAutoFit/>
+          </a:bodyPr>
+          <a:lstStyle/>
+          <a:p>
+            <a:pPr algn="l"/>
+            <a:r>
+              <a:rPr sz="1400" b="1">
+                <a:solidFill>
+                  <a:srgbClr val="A86D18"/>
+                </a:solidFill>
+                <a:latin typeface="Calibri"/>
+              </a:rPr>
+              <a:t>Next</a:t>
+            </a:r>
+          </a:p>
+        </p:txBody>
+      </p:sp>
+      <p:sp>
+        <p:nvSpPr>
+          <p:cNvPr id="12" name="Rectangle 11"/>
           <p:cNvSpPr/>
           <p:nvPr/>
         </p:nvSpPr>
         <p:spPr>
           <a:xfrm>
-            <a:off x="868680" y="4530852"/>
+            <a:off x="6400800" y="4101084"/>
             <a:ext cx="64008" cy="64008"/>
           </a:xfrm>
           <a:prstGeom prst="rect">
             <a:avLst/>
           </a:prstGeom>
           <a:solidFill>
-            <a:srgbClr val="B0761B"/>
+            <a:srgbClr val="A86D18"/>
           </a:solidFill>
           <a:ln>
             <a:noFill/>
@@ -8640,14 +8748,14 @@
       </p:sp>
       <p:sp>
         <p:nvSpPr>
-          <p:cNvPr id="11" name="TextBox 10"/>
+          <p:cNvPr id="13" name="TextBox 12"/>
           <p:cNvSpPr txBox="1"/>
           <p:nvPr/>
         </p:nvSpPr>
         <p:spPr>
           <a:xfrm>
-            <a:off x="1088136" y="4453128"/>
-            <a:ext cx="5175504" cy="384048"/>
+            <a:off x="6620256" y="4023360"/>
+            <a:ext cx="4535424" cy="384048"/>
           </a:xfrm>
           <a:prstGeom prst="rect">
             <a:avLst/>
@@ -8668,62 +8776,27 @@
                 </a:solidFill>
                 <a:latin typeface="Calibri"/>
               </a:rPr>
-              <a:t>Compile gain sits near the run-to-run spread</a:t>
-            </a:r>
-          </a:p>
-        </p:txBody>
-      </p:sp>
-      <p:sp>
-        <p:nvSpPr>
-          <p:cNvPr id="12" name="TextBox 11"/>
-          <p:cNvSpPr txBox="1"/>
-          <p:nvPr/>
-        </p:nvSpPr>
-        <p:spPr>
-          <a:xfrm>
-            <a:off x="6675120" y="3611880"/>
-            <a:ext cx="4572000" cy="365760"/>
-          </a:xfrm>
-          <a:prstGeom prst="rect">
-            <a:avLst/>
-          </a:prstGeom>
-          <a:noFill/>
-        </p:spPr>
-        <p:txBody>
-          <a:bodyPr wrap="square">
-            <a:spAutoFit/>
-          </a:bodyPr>
-          <a:lstStyle/>
-          <a:p>
-            <a:pPr algn="l"/>
-            <a:r>
-              <a:rPr sz="1400" b="1">
-                <a:solidFill>
-                  <a:srgbClr val="B0761B"/>
-                </a:solidFill>
-                <a:latin typeface="Calibri"/>
-              </a:rPr>
-              <a:t>Next</a:t>
-            </a:r>
-          </a:p>
-        </p:txBody>
-      </p:sp>
-      <p:sp>
-        <p:nvSpPr>
-          <p:cNvPr id="13" name="Rectangle 12"/>
+              <a:t>Run INT4 against all 881 validation cases</a:t>
+            </a:r>
+          </a:p>
+        </p:txBody>
+      </p:sp>
+      <p:sp>
+        <p:nvSpPr>
+          <p:cNvPr id="14" name="Rectangle 13"/>
           <p:cNvSpPr/>
           <p:nvPr/>
         </p:nvSpPr>
         <p:spPr>
           <a:xfrm>
-            <a:off x="6675120" y="4146804"/>
+            <a:off x="6400800" y="4485132"/>
             <a:ext cx="64008" cy="64008"/>
           </a:xfrm>
           <a:prstGeom prst="rect">
             <a:avLst/>
           </a:prstGeom>
           <a:solidFill>
-            <a:srgbClr val="B0761B"/>
+            <a:srgbClr val="A86D18"/>
           </a:solidFill>
           <a:ln>
             <a:noFill/>
@@ -8753,14 +8826,14 @@
       </p:sp>
       <p:sp>
         <p:nvSpPr>
-          <p:cNvPr id="14" name="TextBox 13"/>
+          <p:cNvPr id="15" name="TextBox 14"/>
           <p:cNvSpPr txBox="1"/>
           <p:nvPr/>
         </p:nvSpPr>
         <p:spPr>
           <a:xfrm>
-            <a:off x="6894576" y="4069080"/>
-            <a:ext cx="4261104" cy="384048"/>
+            <a:off x="6620256" y="4407408"/>
+            <a:ext cx="4535424" cy="384048"/>
           </a:xfrm>
           <a:prstGeom prst="rect">
             <a:avLst/>
@@ -8781,51 +8854,8 @@
                 </a:solidFill>
                 <a:latin typeface="Calibri"/>
               </a:rPr>
-              <a:t>Run INT4 across all 881 validation cases</a:t>
-            </a:r>
-          </a:p>
-        </p:txBody>
-      </p:sp>
-      <p:sp>
-        <p:nvSpPr>
-          <p:cNvPr id="15" name="Rectangle 14"/>
-          <p:cNvSpPr/>
-          <p:nvPr/>
-        </p:nvSpPr>
-        <p:spPr>
-          <a:xfrm>
-            <a:off x="6675120" y="4530852"/>
-            <a:ext cx="64008" cy="64008"/>
-          </a:xfrm>
-          <a:prstGeom prst="rect">
-            <a:avLst/>
-          </a:prstGeom>
-          <a:solidFill>
-            <a:srgbClr val="B0761B"/>
-          </a:solidFill>
-          <a:ln>
-            <a:noFill/>
-          </a:ln>
-        </p:spPr>
-        <p:style>
-          <a:lnRef idx="1">
-            <a:schemeClr val="accent1"/>
-          </a:lnRef>
-          <a:fillRef idx="3">
-            <a:schemeClr val="accent1"/>
-          </a:fillRef>
-          <a:effectRef idx="2">
-            <a:schemeClr val="accent1"/>
-          </a:effectRef>
-          <a:fontRef idx="minor">
-            <a:schemeClr val="lt1"/>
-          </a:fontRef>
-        </p:style>
-        <p:txBody>
-          <a:bodyPr rtlCol="0" anchor="ctr"/>
-          <a:lstStyle/>
-          <a:p>
-            <a:pPr algn="ctr"/>
+              <a:t>Turns a direction into a bound worth acting on</a:t>
+            </a:r>
           </a:p>
         </p:txBody>
       </p:sp>
@@ -8837,85 +8867,7 @@
         </p:nvSpPr>
         <p:spPr>
           <a:xfrm>
-            <a:off x="6894576" y="4453128"/>
-            <a:ext cx="4261104" cy="384048"/>
-          </a:xfrm>
-          <a:prstGeom prst="rect">
-            <a:avLst/>
-          </a:prstGeom>
-          <a:noFill/>
-        </p:spPr>
-        <p:txBody>
-          <a:bodyPr wrap="square">
-            <a:spAutoFit/>
-          </a:bodyPr>
-          <a:lstStyle/>
-          <a:p>
-            <a:pPr algn="l"/>
-            <a:r>
-              <a:rPr sz="1200" b="0">
-                <a:solidFill>
-                  <a:srgbClr val="8C8F96"/>
-                </a:solidFill>
-                <a:latin typeface="Calibri"/>
-              </a:rPr>
-              <a:t>Turns a direction into a bound worth acting on</a:t>
-            </a:r>
-          </a:p>
-        </p:txBody>
-      </p:sp>
-      <p:sp>
-        <p:nvSpPr>
-          <p:cNvPr id="17" name="Rectangle 16"/>
-          <p:cNvSpPr/>
-          <p:nvPr/>
-        </p:nvSpPr>
-        <p:spPr>
-          <a:xfrm>
-            <a:off x="868680" y="5394960"/>
-            <a:ext cx="10469880" cy="12700"/>
-          </a:xfrm>
-          <a:prstGeom prst="rect">
-            <a:avLst/>
-          </a:prstGeom>
-          <a:solidFill>
-            <a:srgbClr val="E4E1D9"/>
-          </a:solidFill>
-          <a:ln>
-            <a:noFill/>
-          </a:ln>
-        </p:spPr>
-        <p:style>
-          <a:lnRef idx="1">
-            <a:schemeClr val="accent1"/>
-          </a:lnRef>
-          <a:fillRef idx="3">
-            <a:schemeClr val="accent1"/>
-          </a:fillRef>
-          <a:effectRef idx="2">
-            <a:schemeClr val="accent1"/>
-          </a:effectRef>
-          <a:fontRef idx="minor">
-            <a:schemeClr val="lt1"/>
-          </a:fontRef>
-        </p:style>
-        <p:txBody>
-          <a:bodyPr rtlCol="0" anchor="ctr"/>
-          <a:lstStyle/>
-          <a:p>
-            <a:pPr algn="ctr"/>
-          </a:p>
-        </p:txBody>
-      </p:sp>
-      <p:sp>
-        <p:nvSpPr>
-          <p:cNvPr id="18" name="TextBox 17"/>
-          <p:cNvSpPr txBox="1"/>
-          <p:nvPr/>
-        </p:nvSpPr>
-        <p:spPr>
-          <a:xfrm>
-            <a:off x="868680" y="5669280"/>
+            <a:off x="868680" y="5212080"/>
             <a:ext cx="10515600" cy="457200"/>
           </a:xfrm>
           <a:prstGeom prst="rect">

--- a/slides.pptx
+++ b/slides.pptx
@@ -5801,7 +5801,7 @@
                 </a:solidFill>
                 <a:latin typeface="Calibri"/>
               </a:rPr>
-              <a:t>mean DSC change  ·  0.8090 → 0.8093</a:t>
+              <a:t>tile_step 0.5 → 0.75  ·  0.8090 → 0.8093</a:t>
             </a:r>
           </a:p>
         </p:txBody>
@@ -5914,7 +5914,7 @@
                 </a:solidFill>
                 <a:latin typeface="Calibri"/>
               </a:rPr>
-              <a:t>Speed optimizations cost no accuracy</a:t>
+              <a:t>Measured against expert annotation</a:t>
             </a:r>
           </a:p>
         </p:txBody>
@@ -5992,7 +5992,7 @@
                 </a:solidFill>
                 <a:latin typeface="Calibri"/>
               </a:rPr>
-              <a:t>Measured against expert annotation</a:t>
+              <a:t>Same checkpoint on both arms</a:t>
             </a:r>
           </a:p>
         </p:txBody>
@@ -6070,7 +6070,7 @@
                 </a:solidFill>
                 <a:latin typeface="Calibri"/>
               </a:rPr>
-              <a:t>Same checkpoint and fold on both arms</a:t>
+              <a:t>No pass/fail threshold applied</a:t>
             </a:r>
           </a:p>
         </p:txBody>
@@ -7382,7 +7382,7 @@
                 </a:solidFill>
                 <a:latin typeface="Calibri"/>
               </a:rPr>
-              <a:t>20 CT cases from the CVPR validation set, fold='all' checkpoint, H100 MIG 3g.40gb. CPU efficiency 13 to 20% of 8 cores; allocation since reduced to 2.</a:t>
+              <a:t>20 CT cases from the CVPR validation set, fold='all' checkpoint, H100 MIG 3g.40gb. CPU efficiency 13 to 20% of the 8 cores requested.</a:t>
             </a:r>
           </a:p>
         </p:txBody>
@@ -8372,7 +8372,7 @@
                           </a:solidFill>
                           <a:latin typeface="Calibri"/>
                         </a:rPr>
-                        <a:t>4 runs, abdominal CT</a:t>
+                        <a:t>4 speed runs · 65 objects for DSC</a:t>
                       </a:r>
                     </a:p>
                   </a:txBody>
@@ -8585,7 +8585,7 @@
                 </a:solidFill>
                 <a:latin typeface="Calibri"/>
               </a:rPr>
-              <a:t>INT4 under-segments by 5.5% on one case</a:t>
+              <a:t>Speedup measured on a single CT volume</a:t>
             </a:r>
           </a:p>
         </p:txBody>
@@ -8663,7 +8663,7 @@
                 </a:solidFill>
                 <a:latin typeface="Calibri"/>
               </a:rPr>
-              <a:t>Not yet measured across the validation set</a:t>
+              <a:t>INT4 under-segments 5.5%, on one case only</a:t>
             </a:r>
           </a:p>
         </p:txBody>
@@ -8776,7 +8776,7 @@
                 </a:solidFill>
                 <a:latin typeface="Calibri"/>
               </a:rPr>
-              <a:t>Run INT4 against all 881 validation cases</a:t>
+              <a:t>Repeat across more CT volumes and prompt types</a:t>
             </a:r>
           </a:p>
         </p:txBody>
@@ -8854,7 +8854,7 @@
                 </a:solidFill>
                 <a:latin typeface="Calibri"/>
               </a:rPr>
-              <a:t>Turns a direction into a bound worth acting on</a:t>
+              <a:t>Run INT4 against all 881 validation cases</a:t>
             </a:r>
           </a:p>
         </p:txBody>
